--- a/2026_Б_ПІ_ПЗПІ-23-7_Шейко_А_О.pptx
+++ b/2026_Б_ПІ_ПЗПІ-23-7_Шейко_А_О.pptx
@@ -11,13 +11,15 @@
     <p:sldId id="259" r:id="rId5"/>
     <p:sldId id="260" r:id="rId6"/>
     <p:sldId id="261" r:id="rId7"/>
-    <p:sldId id="262" r:id="rId8"/>
-    <p:sldId id="263" r:id="rId9"/>
-    <p:sldId id="264" r:id="rId10"/>
-    <p:sldId id="266" r:id="rId11"/>
-    <p:sldId id="267" r:id="rId12"/>
-    <p:sldId id="268" r:id="rId13"/>
-    <p:sldId id="269" r:id="rId14"/>
+    <p:sldId id="272" r:id="rId8"/>
+    <p:sldId id="262" r:id="rId9"/>
+    <p:sldId id="271" r:id="rId10"/>
+    <p:sldId id="263" r:id="rId11"/>
+    <p:sldId id="264" r:id="rId12"/>
+    <p:sldId id="266" r:id="rId13"/>
+    <p:sldId id="267" r:id="rId14"/>
+    <p:sldId id="268" r:id="rId15"/>
+    <p:sldId id="269" r:id="rId16"/>
   </p:sldIdLst>
   <p:sldSz cx="12192000" cy="6858000"/>
   <p:notesSz cx="6858000" cy="9144000"/>
@@ -294,7 +296,7 @@
           <a:p>
             <a:fld id="{48A87A34-81AB-432B-8DAE-1953F412C126}" type="datetimeFigureOut">
               <a:rPr lang="en-US" dirty="0"/>
-              <a:t>6/3/2026</a:t>
+              <a:t>6/7/2026</a:t>
             </a:fld>
             <a:endParaRPr lang="en-US" dirty="0"/>
           </a:p>
@@ -556,7 +558,7 @@
           <a:p>
             <a:fld id="{48A87A34-81AB-432B-8DAE-1953F412C126}" type="datetimeFigureOut">
               <a:rPr lang="en-US" dirty="0"/>
-              <a:t>6/3/2026</a:t>
+              <a:t>6/7/2026</a:t>
             </a:fld>
             <a:endParaRPr lang="en-US" dirty="0"/>
           </a:p>
@@ -783,7 +785,7 @@
             <a:fld id="{48A87A34-81AB-432B-8DAE-1953F412C126}" type="datetimeFigureOut">
               <a:rPr lang="en-US" dirty="0"/>
               <a:pPr/>
-              <a:t>6/3/2026</a:t>
+              <a:t>6/7/2026</a:t>
             </a:fld>
             <a:endParaRPr lang="en-US" dirty="0"/>
           </a:p>
@@ -1089,7 +1091,7 @@
             <a:fld id="{48A87A34-81AB-432B-8DAE-1953F412C126}" type="datetimeFigureOut">
               <a:rPr lang="en-US" dirty="0"/>
               <a:pPr/>
-              <a:t>6/3/2026</a:t>
+              <a:t>6/7/2026</a:t>
             </a:fld>
             <a:endParaRPr lang="en-US" dirty="0"/>
           </a:p>
@@ -1558,7 +1560,7 @@
             <a:fld id="{48A87A34-81AB-432B-8DAE-1953F412C126}" type="datetimeFigureOut">
               <a:rPr lang="en-US" dirty="0"/>
               <a:pPr/>
-              <a:t>6/3/2026</a:t>
+              <a:t>6/7/2026</a:t>
             </a:fld>
             <a:endParaRPr lang="en-US" dirty="0"/>
           </a:p>
@@ -2100,7 +2102,7 @@
           <a:p>
             <a:fld id="{48A87A34-81AB-432B-8DAE-1953F412C126}" type="datetimeFigureOut">
               <a:rPr lang="en-US" dirty="0"/>
-              <a:t>6/3/2026</a:t>
+              <a:t>6/7/2026</a:t>
             </a:fld>
             <a:endParaRPr lang="en-US" dirty="0"/>
           </a:p>
@@ -2869,7 +2871,7 @@
           <a:p>
             <a:fld id="{48A87A34-81AB-432B-8DAE-1953F412C126}" type="datetimeFigureOut">
               <a:rPr lang="en-US" dirty="0"/>
-              <a:t>6/3/2026</a:t>
+              <a:t>6/7/2026</a:t>
             </a:fld>
             <a:endParaRPr lang="en-US" dirty="0"/>
           </a:p>
@@ -3039,7 +3041,7 @@
           <a:p>
             <a:fld id="{48A87A34-81AB-432B-8DAE-1953F412C126}" type="datetimeFigureOut">
               <a:rPr lang="en-US" dirty="0"/>
-              <a:t>6/3/2026</a:t>
+              <a:t>6/7/2026</a:t>
             </a:fld>
             <a:endParaRPr lang="en-US" dirty="0"/>
           </a:p>
@@ -3258,7 +3260,7 @@
             <a:fld id="{48A87A34-81AB-432B-8DAE-1953F412C126}" type="datetimeFigureOut">
               <a:rPr lang="en-US" dirty="0"/>
               <a:pPr/>
-              <a:t>6/3/2026</a:t>
+              <a:t>6/7/2026</a:t>
             </a:fld>
             <a:endParaRPr lang="en-US" dirty="0"/>
           </a:p>
@@ -3433,7 +3435,7 @@
           <a:p>
             <a:fld id="{48A87A34-81AB-432B-8DAE-1953F412C126}" type="datetimeFigureOut">
               <a:rPr lang="en-US" dirty="0"/>
-              <a:t>6/3/2026</a:t>
+              <a:t>6/7/2026</a:t>
             </a:fld>
             <a:endParaRPr lang="en-US" dirty="0"/>
           </a:p>
@@ -3718,7 +3720,7 @@
             <a:fld id="{48A87A34-81AB-432B-8DAE-1953F412C126}" type="datetimeFigureOut">
               <a:rPr lang="en-US" dirty="0"/>
               <a:pPr/>
-              <a:t>6/3/2026</a:t>
+              <a:t>6/7/2026</a:t>
             </a:fld>
             <a:endParaRPr lang="en-US" dirty="0"/>
           </a:p>
@@ -3955,7 +3957,7 @@
           <a:p>
             <a:fld id="{48A87A34-81AB-432B-8DAE-1953F412C126}" type="datetimeFigureOut">
               <a:rPr lang="en-US" dirty="0"/>
-              <a:t>6/3/2026</a:t>
+              <a:t>6/7/2026</a:t>
             </a:fld>
             <a:endParaRPr lang="en-US" dirty="0"/>
           </a:p>
@@ -4329,7 +4331,7 @@
           <a:p>
             <a:fld id="{48A87A34-81AB-432B-8DAE-1953F412C126}" type="datetimeFigureOut">
               <a:rPr lang="en-US" dirty="0"/>
-              <a:t>6/3/2026</a:t>
+              <a:t>6/7/2026</a:t>
             </a:fld>
             <a:endParaRPr lang="en-US" dirty="0"/>
           </a:p>
@@ -4442,7 +4444,7 @@
           <a:p>
             <a:fld id="{48A87A34-81AB-432B-8DAE-1953F412C126}" type="datetimeFigureOut">
               <a:rPr lang="en-US" dirty="0"/>
-              <a:t>6/3/2026</a:t>
+              <a:t>6/7/2026</a:t>
             </a:fld>
             <a:endParaRPr lang="en-US" dirty="0"/>
           </a:p>
@@ -4532,7 +4534,7 @@
           <a:p>
             <a:fld id="{48A87A34-81AB-432B-8DAE-1953F412C126}" type="datetimeFigureOut">
               <a:rPr lang="en-US" dirty="0"/>
-              <a:t>6/3/2026</a:t>
+              <a:t>6/7/2026</a:t>
             </a:fld>
             <a:endParaRPr lang="en-US" dirty="0"/>
           </a:p>
@@ -4776,7 +4778,7 @@
           <a:p>
             <a:fld id="{48A87A34-81AB-432B-8DAE-1953F412C126}" type="datetimeFigureOut">
               <a:rPr lang="en-US" dirty="0"/>
-              <a:t>6/3/2026</a:t>
+              <a:t>6/7/2026</a:t>
             </a:fld>
             <a:endParaRPr lang="en-US" dirty="0"/>
           </a:p>
@@ -5028,7 +5030,7 @@
           <a:p>
             <a:fld id="{48A87A34-81AB-432B-8DAE-1953F412C126}" type="datetimeFigureOut">
               <a:rPr lang="en-US" dirty="0"/>
-              <a:t>6/3/2026</a:t>
+              <a:t>6/7/2026</a:t>
             </a:fld>
             <a:endParaRPr lang="en-US" dirty="0"/>
           </a:p>
@@ -5267,7 +5269,7 @@
             <a:fld id="{48A87A34-81AB-432B-8DAE-1953F412C126}" type="datetimeFigureOut">
               <a:rPr lang="en-US" dirty="0"/>
               <a:pPr/>
-              <a:t>6/3/2026</a:t>
+              <a:t>6/7/2026</a:t>
             </a:fld>
             <a:endParaRPr lang="en-US" dirty="0"/>
           </a:p>
@@ -5932,6 +5934,2321 @@
         <p:cNvPr id="1" name="">
           <a:extLst>
             <a:ext uri="{FF2B5EF4-FFF2-40B4-BE49-F238E27FC236}">
+              <a16:creationId xmlns:a16="http://schemas.microsoft.com/office/drawing/2014/main" id="{B593B2C4-84DB-C667-3B9A-2D528814E53C}"/>
+            </a:ext>
+          </a:extLst>
+        </p:cNvPr>
+        <p:cNvGrpSpPr/>
+        <p:nvPr/>
+      </p:nvGrpSpPr>
+      <p:grpSpPr>
+        <a:xfrm>
+          <a:off x="0" y="0"/>
+          <a:ext cx="0" cy="0"/>
+          <a:chOff x="0" y="0"/>
+          <a:chExt cx="0" cy="0"/>
+        </a:xfrm>
+      </p:grpSpPr>
+      <p:sp>
+        <p:nvSpPr>
+          <p:cNvPr id="4" name="TextBox 3">
+            <a:extLst>
+              <a:ext uri="{FF2B5EF4-FFF2-40B4-BE49-F238E27FC236}">
+                <a16:creationId xmlns:a16="http://schemas.microsoft.com/office/drawing/2014/main" id="{DC5D4D88-9018-CE4D-3502-E95621537AC8}"/>
+              </a:ext>
+            </a:extLst>
+          </p:cNvPr>
+          <p:cNvSpPr txBox="1"/>
+          <p:nvPr/>
+        </p:nvSpPr>
+        <p:spPr>
+          <a:xfrm>
+            <a:off x="4690006" y="160172"/>
+            <a:ext cx="2811988" cy="523220"/>
+          </a:xfrm>
+          <a:prstGeom prst="rect">
+            <a:avLst/>
+          </a:prstGeom>
+          <a:noFill/>
+        </p:spPr>
+        <p:txBody>
+          <a:bodyPr wrap="none" rtlCol="0">
+            <a:spAutoFit/>
+          </a:bodyPr>
+          <a:lstStyle/>
+          <a:p>
+            <a:r>
+              <a:rPr lang="ru-RU" sz="2800" dirty="0" err="1">
+                <a:latin typeface="Times New Roman" panose="02020603050405020304" pitchFamily="18" charset="0"/>
+                <a:cs typeface="Times New Roman" panose="02020603050405020304" pitchFamily="18" charset="0"/>
+              </a:rPr>
+              <a:t>Процес</a:t>
+            </a:r>
+            <a:r>
+              <a:rPr lang="ru-RU" sz="2800" dirty="0">
+                <a:latin typeface="Times New Roman" panose="02020603050405020304" pitchFamily="18" charset="0"/>
+                <a:cs typeface="Times New Roman" panose="02020603050405020304" pitchFamily="18" charset="0"/>
+              </a:rPr>
+              <a:t> </a:t>
+            </a:r>
+            <a:r>
+              <a:rPr lang="ru-RU" sz="2800" dirty="0" err="1">
+                <a:latin typeface="Times New Roman" panose="02020603050405020304" pitchFamily="18" charset="0"/>
+                <a:cs typeface="Times New Roman" panose="02020603050405020304" pitchFamily="18" charset="0"/>
+              </a:rPr>
+              <a:t>розробки</a:t>
+            </a:r>
+            <a:endParaRPr lang="ru-RU" sz="2800" dirty="0">
+              <a:latin typeface="Times New Roman" panose="02020603050405020304" pitchFamily="18" charset="0"/>
+              <a:cs typeface="Times New Roman" panose="02020603050405020304" pitchFamily="18" charset="0"/>
+            </a:endParaRPr>
+          </a:p>
+        </p:txBody>
+      </p:sp>
+      <p:sp>
+        <p:nvSpPr>
+          <p:cNvPr id="6" name="TextBox 5">
+            <a:extLst>
+              <a:ext uri="{FF2B5EF4-FFF2-40B4-BE49-F238E27FC236}">
+                <a16:creationId xmlns:a16="http://schemas.microsoft.com/office/drawing/2014/main" id="{9B9BE9FD-B0D9-FA87-CD99-869C34B2419E}"/>
+              </a:ext>
+            </a:extLst>
+          </p:cNvPr>
+          <p:cNvSpPr txBox="1"/>
+          <p:nvPr/>
+        </p:nvSpPr>
+        <p:spPr>
+          <a:xfrm>
+            <a:off x="952993" y="795646"/>
+            <a:ext cx="10286011" cy="3293209"/>
+          </a:xfrm>
+          <a:prstGeom prst="rect">
+            <a:avLst/>
+          </a:prstGeom>
+          <a:noFill/>
+        </p:spPr>
+        <p:txBody>
+          <a:bodyPr wrap="square" rtlCol="0">
+            <a:spAutoFit/>
+          </a:bodyPr>
+          <a:lstStyle/>
+          <a:p>
+            <a:pPr algn="ctr"/>
+            <a:r>
+              <a:rPr lang="ru-RU" sz="2400" dirty="0">
+                <a:latin typeface="Times New Roman" panose="02020603050405020304" pitchFamily="18" charset="0"/>
+                <a:cs typeface="Times New Roman" panose="02020603050405020304" pitchFamily="18" charset="0"/>
+              </a:rPr>
+              <a:t>ЕТАПИ РОЗРОБКИ:</a:t>
+            </a:r>
+          </a:p>
+          <a:p>
+            <a:pPr algn="just"/>
+            <a:r>
+              <a:rPr lang="ru-RU" sz="2400" dirty="0">
+                <a:latin typeface="Times New Roman" panose="02020603050405020304" pitchFamily="18" charset="0"/>
+                <a:cs typeface="Times New Roman" panose="02020603050405020304" pitchFamily="18" charset="0"/>
+              </a:rPr>
+              <a:t>	</a:t>
+            </a:r>
+            <a:r>
+              <a:rPr lang="ru-RU" sz="2000" dirty="0" err="1">
+                <a:latin typeface="Times New Roman" panose="02020603050405020304" pitchFamily="18" charset="0"/>
+                <a:cs typeface="Times New Roman" panose="02020603050405020304" pitchFamily="18" charset="0"/>
+              </a:rPr>
+              <a:t>Етап</a:t>
+            </a:r>
+            <a:r>
+              <a:rPr lang="ru-RU" sz="2000" dirty="0">
+                <a:latin typeface="Times New Roman" panose="02020603050405020304" pitchFamily="18" charset="0"/>
+                <a:cs typeface="Times New Roman" panose="02020603050405020304" pitchFamily="18" charset="0"/>
+              </a:rPr>
+              <a:t> 1 - </a:t>
+            </a:r>
+            <a:r>
+              <a:rPr lang="ru-RU" sz="2000" dirty="0" err="1">
+                <a:latin typeface="Times New Roman" panose="02020603050405020304" pitchFamily="18" charset="0"/>
+                <a:cs typeface="Times New Roman" panose="02020603050405020304" pitchFamily="18" charset="0"/>
+              </a:rPr>
+              <a:t>Аналіз</a:t>
+            </a:r>
+            <a:r>
+              <a:rPr lang="ru-RU" sz="2000" dirty="0">
+                <a:latin typeface="Times New Roman" panose="02020603050405020304" pitchFamily="18" charset="0"/>
+                <a:cs typeface="Times New Roman" panose="02020603050405020304" pitchFamily="18" charset="0"/>
+              </a:rPr>
+              <a:t> </a:t>
+            </a:r>
+            <a:r>
+              <a:rPr lang="ru-RU" sz="2000" dirty="0" err="1">
+                <a:latin typeface="Times New Roman" panose="02020603050405020304" pitchFamily="18" charset="0"/>
+                <a:cs typeface="Times New Roman" panose="02020603050405020304" pitchFamily="18" charset="0"/>
+              </a:rPr>
+              <a:t>вимог</a:t>
+            </a:r>
+            <a:r>
+              <a:rPr lang="ru-RU" sz="2000" dirty="0">
+                <a:latin typeface="Times New Roman" panose="02020603050405020304" pitchFamily="18" charset="0"/>
+                <a:cs typeface="Times New Roman" panose="02020603050405020304" pitchFamily="18" charset="0"/>
+              </a:rPr>
+              <a:t>, </a:t>
+            </a:r>
+            <a:r>
+              <a:rPr lang="ru-RU" sz="2000" dirty="0" err="1">
+                <a:latin typeface="Times New Roman" panose="02020603050405020304" pitchFamily="18" charset="0"/>
+                <a:cs typeface="Times New Roman" panose="02020603050405020304" pitchFamily="18" charset="0"/>
+              </a:rPr>
+              <a:t>вивчення</a:t>
+            </a:r>
+            <a:r>
+              <a:rPr lang="ru-RU" sz="2000" dirty="0">
+                <a:latin typeface="Times New Roman" panose="02020603050405020304" pitchFamily="18" charset="0"/>
+                <a:cs typeface="Times New Roman" panose="02020603050405020304" pitchFamily="18" charset="0"/>
+              </a:rPr>
+              <a:t> потреб </a:t>
+            </a:r>
+            <a:r>
+              <a:rPr lang="ru-RU" sz="2000" dirty="0" err="1">
+                <a:latin typeface="Times New Roman" panose="02020603050405020304" pitchFamily="18" charset="0"/>
+                <a:cs typeface="Times New Roman" panose="02020603050405020304" pitchFamily="18" charset="0"/>
+              </a:rPr>
+              <a:t>цільової</a:t>
+            </a:r>
+            <a:r>
+              <a:rPr lang="ru-RU" sz="2000" dirty="0">
+                <a:latin typeface="Times New Roman" panose="02020603050405020304" pitchFamily="18" charset="0"/>
+                <a:cs typeface="Times New Roman" panose="02020603050405020304" pitchFamily="18" charset="0"/>
+              </a:rPr>
+              <a:t> </a:t>
+            </a:r>
+            <a:r>
+              <a:rPr lang="ru-RU" sz="2000" dirty="0" err="1">
+                <a:latin typeface="Times New Roman" panose="02020603050405020304" pitchFamily="18" charset="0"/>
+                <a:cs typeface="Times New Roman" panose="02020603050405020304" pitchFamily="18" charset="0"/>
+              </a:rPr>
+              <a:t>аудиторії</a:t>
+            </a:r>
+            <a:r>
+              <a:rPr lang="ru-RU" sz="2000" dirty="0">
+                <a:latin typeface="Times New Roman" panose="02020603050405020304" pitchFamily="18" charset="0"/>
+                <a:cs typeface="Times New Roman" panose="02020603050405020304" pitchFamily="18" charset="0"/>
+              </a:rPr>
+              <a:t>, </a:t>
+            </a:r>
+            <a:r>
+              <a:rPr lang="ru-RU" sz="2000" dirty="0" err="1">
+                <a:latin typeface="Times New Roman" panose="02020603050405020304" pitchFamily="18" charset="0"/>
+                <a:cs typeface="Times New Roman" panose="02020603050405020304" pitchFamily="18" charset="0"/>
+              </a:rPr>
+              <a:t>аналіз</a:t>
+            </a:r>
+            <a:r>
+              <a:rPr lang="ru-RU" sz="2000" dirty="0">
+                <a:latin typeface="Times New Roman" panose="02020603050405020304" pitchFamily="18" charset="0"/>
+                <a:cs typeface="Times New Roman" panose="02020603050405020304" pitchFamily="18" charset="0"/>
+              </a:rPr>
+              <a:t> </a:t>
+            </a:r>
+            <a:r>
+              <a:rPr lang="ru-RU" sz="2000" dirty="0" err="1">
+                <a:latin typeface="Times New Roman" panose="02020603050405020304" pitchFamily="18" charset="0"/>
+                <a:cs typeface="Times New Roman" panose="02020603050405020304" pitchFamily="18" charset="0"/>
+              </a:rPr>
+              <a:t>ічнуючих</a:t>
+            </a:r>
+            <a:r>
+              <a:rPr lang="ru-RU" sz="2000" dirty="0">
+                <a:latin typeface="Times New Roman" panose="02020603050405020304" pitchFamily="18" charset="0"/>
+                <a:cs typeface="Times New Roman" panose="02020603050405020304" pitchFamily="18" charset="0"/>
+              </a:rPr>
+              <a:t> </a:t>
+            </a:r>
+            <a:r>
+              <a:rPr lang="ru-RU" sz="2000" dirty="0" err="1">
+                <a:latin typeface="Times New Roman" panose="02020603050405020304" pitchFamily="18" charset="0"/>
+                <a:cs typeface="Times New Roman" panose="02020603050405020304" pitchFamily="18" charset="0"/>
+              </a:rPr>
+              <a:t>аналогів</a:t>
+            </a:r>
+            <a:r>
+              <a:rPr lang="ru-RU" sz="2000" dirty="0">
+                <a:latin typeface="Times New Roman" panose="02020603050405020304" pitchFamily="18" charset="0"/>
+                <a:cs typeface="Times New Roman" panose="02020603050405020304" pitchFamily="18" charset="0"/>
+              </a:rPr>
+              <a:t> та </a:t>
+            </a:r>
+            <a:r>
+              <a:rPr lang="ru-RU" sz="2000" dirty="0" err="1">
+                <a:latin typeface="Times New Roman" panose="02020603050405020304" pitchFamily="18" charset="0"/>
+                <a:cs typeface="Times New Roman" panose="02020603050405020304" pitchFamily="18" charset="0"/>
+              </a:rPr>
+              <a:t>формування</a:t>
+            </a:r>
+            <a:r>
+              <a:rPr lang="ru-RU" sz="2000" dirty="0">
+                <a:latin typeface="Times New Roman" panose="02020603050405020304" pitchFamily="18" charset="0"/>
+                <a:cs typeface="Times New Roman" panose="02020603050405020304" pitchFamily="18" charset="0"/>
+              </a:rPr>
+              <a:t> </a:t>
+            </a:r>
+            <a:r>
+              <a:rPr lang="ru-RU" sz="2000" dirty="0" err="1">
+                <a:latin typeface="Times New Roman" panose="02020603050405020304" pitchFamily="18" charset="0"/>
+                <a:cs typeface="Times New Roman" panose="02020603050405020304" pitchFamily="18" charset="0"/>
+              </a:rPr>
+              <a:t>функціональні</a:t>
+            </a:r>
+            <a:r>
+              <a:rPr lang="ru-RU" sz="2000" dirty="0">
+                <a:latin typeface="Times New Roman" panose="02020603050405020304" pitchFamily="18" charset="0"/>
+                <a:cs typeface="Times New Roman" panose="02020603050405020304" pitchFamily="18" charset="0"/>
+              </a:rPr>
+              <a:t> та </a:t>
+            </a:r>
+            <a:r>
+              <a:rPr lang="ru-RU" sz="2000" dirty="0" err="1">
+                <a:latin typeface="Times New Roman" panose="02020603050405020304" pitchFamily="18" charset="0"/>
+                <a:cs typeface="Times New Roman" panose="02020603050405020304" pitchFamily="18" charset="0"/>
+              </a:rPr>
+              <a:t>нефункціональні</a:t>
+            </a:r>
+            <a:r>
+              <a:rPr lang="ru-RU" sz="2000" dirty="0">
+                <a:latin typeface="Times New Roman" panose="02020603050405020304" pitchFamily="18" charset="0"/>
+                <a:cs typeface="Times New Roman" panose="02020603050405020304" pitchFamily="18" charset="0"/>
+              </a:rPr>
+              <a:t> </a:t>
+            </a:r>
+            <a:r>
+              <a:rPr lang="ru-RU" sz="2000" dirty="0" err="1">
+                <a:latin typeface="Times New Roman" panose="02020603050405020304" pitchFamily="18" charset="0"/>
+                <a:cs typeface="Times New Roman" panose="02020603050405020304" pitchFamily="18" charset="0"/>
+              </a:rPr>
+              <a:t>вимоги</a:t>
+            </a:r>
+            <a:endParaRPr lang="ru-RU" sz="2000" dirty="0">
+              <a:latin typeface="Times New Roman" panose="02020603050405020304" pitchFamily="18" charset="0"/>
+              <a:cs typeface="Times New Roman" panose="02020603050405020304" pitchFamily="18" charset="0"/>
+            </a:endParaRPr>
+          </a:p>
+          <a:p>
+            <a:pPr algn="just"/>
+            <a:r>
+              <a:rPr lang="ru-RU" sz="2000" dirty="0">
+                <a:latin typeface="Times New Roman" panose="02020603050405020304" pitchFamily="18" charset="0"/>
+                <a:cs typeface="Times New Roman" panose="02020603050405020304" pitchFamily="18" charset="0"/>
+              </a:rPr>
+              <a:t>	</a:t>
+            </a:r>
+            <a:r>
+              <a:rPr lang="ru-RU" sz="2000" dirty="0" err="1">
+                <a:latin typeface="Times New Roman" panose="02020603050405020304" pitchFamily="18" charset="0"/>
+                <a:cs typeface="Times New Roman" panose="02020603050405020304" pitchFamily="18" charset="0"/>
+              </a:rPr>
+              <a:t>Етап</a:t>
+            </a:r>
+            <a:r>
+              <a:rPr lang="ru-RU" sz="2000" dirty="0">
+                <a:latin typeface="Times New Roman" panose="02020603050405020304" pitchFamily="18" charset="0"/>
+                <a:cs typeface="Times New Roman" panose="02020603050405020304" pitchFamily="18" charset="0"/>
+              </a:rPr>
+              <a:t> 2 – </a:t>
+            </a:r>
+            <a:r>
+              <a:rPr lang="ru-RU" sz="2000" dirty="0" err="1">
+                <a:latin typeface="Times New Roman" panose="02020603050405020304" pitchFamily="18" charset="0"/>
+                <a:cs typeface="Times New Roman" panose="02020603050405020304" pitchFamily="18" charset="0"/>
+              </a:rPr>
+              <a:t>Проетування</a:t>
+            </a:r>
+            <a:r>
+              <a:rPr lang="ru-RU" sz="2000" dirty="0">
+                <a:latin typeface="Times New Roman" panose="02020603050405020304" pitchFamily="18" charset="0"/>
+                <a:cs typeface="Times New Roman" panose="02020603050405020304" pitchFamily="18" charset="0"/>
+              </a:rPr>
+              <a:t>, створено UML-</a:t>
+            </a:r>
+            <a:r>
+              <a:rPr lang="ru-RU" sz="2000" dirty="0" err="1">
+                <a:latin typeface="Times New Roman" panose="02020603050405020304" pitchFamily="18" charset="0"/>
+                <a:cs typeface="Times New Roman" panose="02020603050405020304" pitchFamily="18" charset="0"/>
+              </a:rPr>
+              <a:t>діаграми</a:t>
+            </a:r>
+            <a:r>
+              <a:rPr lang="ru-RU" sz="2000" dirty="0">
+                <a:latin typeface="Times New Roman" panose="02020603050405020304" pitchFamily="18" charset="0"/>
+                <a:cs typeface="Times New Roman" panose="02020603050405020304" pitchFamily="18" charset="0"/>
+              </a:rPr>
+              <a:t>, </a:t>
+            </a:r>
+            <a:r>
+              <a:rPr lang="ru-RU" sz="2000" dirty="0" err="1">
+                <a:latin typeface="Times New Roman" panose="02020603050405020304" pitchFamily="18" charset="0"/>
+                <a:cs typeface="Times New Roman" panose="02020603050405020304" pitchFamily="18" charset="0"/>
+              </a:rPr>
+              <a:t>спроєктовано</a:t>
+            </a:r>
+            <a:r>
+              <a:rPr lang="ru-RU" sz="2000" dirty="0">
+                <a:latin typeface="Times New Roman" panose="02020603050405020304" pitchFamily="18" charset="0"/>
+                <a:cs typeface="Times New Roman" panose="02020603050405020304" pitchFamily="18" charset="0"/>
+              </a:rPr>
+              <a:t> структуру </a:t>
+            </a:r>
+            <a:r>
+              <a:rPr lang="ru-RU" sz="2000" dirty="0" err="1">
+                <a:latin typeface="Times New Roman" panose="02020603050405020304" pitchFamily="18" charset="0"/>
+                <a:cs typeface="Times New Roman" panose="02020603050405020304" pitchFamily="18" charset="0"/>
+              </a:rPr>
+              <a:t>бази</a:t>
+            </a:r>
+            <a:r>
+              <a:rPr lang="ru-RU" sz="2000" dirty="0">
+                <a:latin typeface="Times New Roman" panose="02020603050405020304" pitchFamily="18" charset="0"/>
+                <a:cs typeface="Times New Roman" panose="02020603050405020304" pitchFamily="18" charset="0"/>
+              </a:rPr>
+              <a:t> </a:t>
+            </a:r>
+            <a:r>
+              <a:rPr lang="ru-RU" sz="2000" dirty="0" err="1">
+                <a:latin typeface="Times New Roman" panose="02020603050405020304" pitchFamily="18" charset="0"/>
+                <a:cs typeface="Times New Roman" panose="02020603050405020304" pitchFamily="18" charset="0"/>
+              </a:rPr>
+              <a:t>даних</a:t>
+            </a:r>
+            <a:r>
+              <a:rPr lang="ru-RU" sz="2000" dirty="0">
+                <a:latin typeface="Times New Roman" panose="02020603050405020304" pitchFamily="18" charset="0"/>
+                <a:cs typeface="Times New Roman" panose="02020603050405020304" pitchFamily="18" charset="0"/>
+              </a:rPr>
+              <a:t> (ER-</a:t>
+            </a:r>
+            <a:r>
+              <a:rPr lang="ru-RU" sz="2000" dirty="0" err="1">
+                <a:latin typeface="Times New Roman" panose="02020603050405020304" pitchFamily="18" charset="0"/>
+                <a:cs typeface="Times New Roman" panose="02020603050405020304" pitchFamily="18" charset="0"/>
+              </a:rPr>
+              <a:t>діаграма</a:t>
+            </a:r>
+            <a:r>
+              <a:rPr lang="ru-RU" sz="2000" dirty="0">
+                <a:latin typeface="Times New Roman" panose="02020603050405020304" pitchFamily="18" charset="0"/>
+                <a:cs typeface="Times New Roman" panose="02020603050405020304" pitchFamily="18" charset="0"/>
+              </a:rPr>
+              <a:t>), </a:t>
+            </a:r>
+            <a:r>
+              <a:rPr lang="ru-RU" sz="2000" dirty="0" err="1">
+                <a:latin typeface="Times New Roman" panose="02020603050405020304" pitchFamily="18" charset="0"/>
+                <a:cs typeface="Times New Roman" panose="02020603050405020304" pitchFamily="18" charset="0"/>
+              </a:rPr>
+              <a:t>розроблено</a:t>
+            </a:r>
+            <a:r>
+              <a:rPr lang="ru-RU" sz="2000" dirty="0">
+                <a:latin typeface="Times New Roman" panose="02020603050405020304" pitchFamily="18" charset="0"/>
+                <a:cs typeface="Times New Roman" panose="02020603050405020304" pitchFamily="18" charset="0"/>
+              </a:rPr>
+              <a:t> API -</a:t>
+            </a:r>
+            <a:r>
+              <a:rPr lang="ru-RU" sz="2000" dirty="0" err="1">
+                <a:latin typeface="Times New Roman" panose="02020603050405020304" pitchFamily="18" charset="0"/>
+                <a:cs typeface="Times New Roman" panose="02020603050405020304" pitchFamily="18" charset="0"/>
+              </a:rPr>
+              <a:t>ендпоінти</a:t>
+            </a:r>
+            <a:r>
+              <a:rPr lang="ru-RU" sz="2000" dirty="0">
+                <a:latin typeface="Times New Roman" panose="02020603050405020304" pitchFamily="18" charset="0"/>
+                <a:cs typeface="Times New Roman" panose="02020603050405020304" pitchFamily="18" charset="0"/>
+              </a:rPr>
+              <a:t> та </a:t>
+            </a:r>
+            <a:r>
+              <a:rPr lang="ru-RU" sz="2000" dirty="0" err="1">
+                <a:latin typeface="Times New Roman" panose="02020603050405020304" pitchFamily="18" charset="0"/>
+                <a:cs typeface="Times New Roman" panose="02020603050405020304" pitchFamily="18" charset="0"/>
+              </a:rPr>
+              <a:t>макети</a:t>
+            </a:r>
+            <a:r>
+              <a:rPr lang="ru-RU" sz="2000" dirty="0">
+                <a:latin typeface="Times New Roman" panose="02020603050405020304" pitchFamily="18" charset="0"/>
+                <a:cs typeface="Times New Roman" panose="02020603050405020304" pitchFamily="18" charset="0"/>
+              </a:rPr>
+              <a:t> UI/UX дизайну </a:t>
+            </a:r>
+          </a:p>
+          <a:p>
+            <a:pPr algn="just"/>
+            <a:r>
+              <a:rPr lang="ru-RU" sz="2000" dirty="0">
+                <a:latin typeface="Times New Roman" panose="02020603050405020304" pitchFamily="18" charset="0"/>
+                <a:cs typeface="Times New Roman" panose="02020603050405020304" pitchFamily="18" charset="0"/>
+              </a:rPr>
+              <a:t>	</a:t>
+            </a:r>
+            <a:r>
+              <a:rPr lang="ru-RU" sz="2000" dirty="0" err="1">
+                <a:latin typeface="Times New Roman" panose="02020603050405020304" pitchFamily="18" charset="0"/>
+                <a:cs typeface="Times New Roman" panose="02020603050405020304" pitchFamily="18" charset="0"/>
+              </a:rPr>
+              <a:t>Етап</a:t>
+            </a:r>
+            <a:r>
+              <a:rPr lang="ru-RU" sz="2000" dirty="0">
+                <a:latin typeface="Times New Roman" panose="02020603050405020304" pitchFamily="18" charset="0"/>
+                <a:cs typeface="Times New Roman" panose="02020603050405020304" pitchFamily="18" charset="0"/>
+              </a:rPr>
+              <a:t> 3 - </a:t>
+            </a:r>
+            <a:r>
+              <a:rPr lang="ru-RU" sz="2000" dirty="0" err="1">
+                <a:latin typeface="Times New Roman" panose="02020603050405020304" pitchFamily="18" charset="0"/>
+                <a:cs typeface="Times New Roman" panose="02020603050405020304" pitchFamily="18" charset="0"/>
+              </a:rPr>
+              <a:t>Програмна</a:t>
+            </a:r>
+            <a:r>
+              <a:rPr lang="ru-RU" sz="2000" dirty="0">
+                <a:latin typeface="Times New Roman" panose="02020603050405020304" pitchFamily="18" charset="0"/>
+                <a:cs typeface="Times New Roman" panose="02020603050405020304" pitchFamily="18" charset="0"/>
+              </a:rPr>
+              <a:t> </a:t>
+            </a:r>
+            <a:r>
+              <a:rPr lang="ru-RU" sz="2000" dirty="0" err="1">
+                <a:latin typeface="Times New Roman" panose="02020603050405020304" pitchFamily="18" charset="0"/>
+                <a:cs typeface="Times New Roman" panose="02020603050405020304" pitchFamily="18" charset="0"/>
+              </a:rPr>
+              <a:t>реалізація</a:t>
+            </a:r>
+            <a:r>
+              <a:rPr lang="ru-RU" sz="2000" dirty="0">
+                <a:latin typeface="Times New Roman" panose="02020603050405020304" pitchFamily="18" charset="0"/>
+                <a:cs typeface="Times New Roman" panose="02020603050405020304" pitchFamily="18" charset="0"/>
+              </a:rPr>
+              <a:t>, </a:t>
+            </a:r>
+            <a:r>
+              <a:rPr lang="ru-RU" sz="2000" dirty="0" err="1">
+                <a:latin typeface="Times New Roman" panose="02020603050405020304" pitchFamily="18" charset="0"/>
+                <a:cs typeface="Times New Roman" panose="02020603050405020304" pitchFamily="18" charset="0"/>
+              </a:rPr>
+              <a:t>ключові</a:t>
+            </a:r>
+            <a:r>
+              <a:rPr lang="ru-RU" sz="2000" dirty="0">
+                <a:latin typeface="Times New Roman" panose="02020603050405020304" pitchFamily="18" charset="0"/>
+                <a:cs typeface="Times New Roman" panose="02020603050405020304" pitchFamily="18" charset="0"/>
+              </a:rPr>
+              <a:t> </a:t>
+            </a:r>
+            <a:r>
+              <a:rPr lang="ru-RU" sz="2000" dirty="0" err="1">
+                <a:latin typeface="Times New Roman" panose="02020603050405020304" pitchFamily="18" charset="0"/>
+                <a:cs typeface="Times New Roman" panose="02020603050405020304" pitchFamily="18" charset="0"/>
+              </a:rPr>
+              <a:t>файли</a:t>
+            </a:r>
+            <a:r>
+              <a:rPr lang="ru-RU" sz="2000" dirty="0">
+                <a:latin typeface="Times New Roman" panose="02020603050405020304" pitchFamily="18" charset="0"/>
+                <a:cs typeface="Times New Roman" panose="02020603050405020304" pitchFamily="18" charset="0"/>
+              </a:rPr>
+              <a:t> </a:t>
+            </a:r>
+            <a:r>
+              <a:rPr lang="ru-RU" sz="2000" dirty="0" err="1">
+                <a:latin typeface="Times New Roman" panose="02020603050405020304" pitchFamily="18" charset="0"/>
+                <a:cs typeface="Times New Roman" panose="02020603050405020304" pitchFamily="18" charset="0"/>
+              </a:rPr>
+              <a:t>проєкту</a:t>
+            </a:r>
+            <a:r>
+              <a:rPr lang="ru-RU" sz="2000" dirty="0">
+                <a:latin typeface="Times New Roman" panose="02020603050405020304" pitchFamily="18" charset="0"/>
+                <a:cs typeface="Times New Roman" panose="02020603050405020304" pitchFamily="18" charset="0"/>
+              </a:rPr>
+              <a:t>: main.py – точка входу </a:t>
+            </a:r>
+            <a:r>
+              <a:rPr lang="ru-RU" sz="2000" dirty="0" err="1">
+                <a:latin typeface="Times New Roman" panose="02020603050405020304" pitchFamily="18" charset="0"/>
+                <a:cs typeface="Times New Roman" panose="02020603050405020304" pitchFamily="18" charset="0"/>
+              </a:rPr>
+              <a:t>FastAPI</a:t>
+            </a:r>
+            <a:r>
+              <a:rPr lang="ru-RU" sz="2000" dirty="0">
+                <a:latin typeface="Times New Roman" panose="02020603050405020304" pitchFamily="18" charset="0"/>
+                <a:cs typeface="Times New Roman" panose="02020603050405020304" pitchFamily="18" charset="0"/>
+              </a:rPr>
+              <a:t>, auth.py – </a:t>
+            </a:r>
+            <a:r>
+              <a:rPr lang="ru-RU" sz="2000" dirty="0" err="1">
+                <a:latin typeface="Times New Roman" panose="02020603050405020304" pitchFamily="18" charset="0"/>
+                <a:cs typeface="Times New Roman" panose="02020603050405020304" pitchFamily="18" charset="0"/>
+              </a:rPr>
+              <a:t>реєстрація</a:t>
+            </a:r>
+            <a:r>
+              <a:rPr lang="ru-RU" sz="2000" dirty="0">
+                <a:latin typeface="Times New Roman" panose="02020603050405020304" pitchFamily="18" charset="0"/>
+                <a:cs typeface="Times New Roman" panose="02020603050405020304" pitchFamily="18" charset="0"/>
+              </a:rPr>
+              <a:t> та </a:t>
+            </a:r>
+            <a:r>
+              <a:rPr lang="ru-RU" sz="2000" dirty="0" err="1">
+                <a:latin typeface="Times New Roman" panose="02020603050405020304" pitchFamily="18" charset="0"/>
+                <a:cs typeface="Times New Roman" panose="02020603050405020304" pitchFamily="18" charset="0"/>
+              </a:rPr>
+              <a:t>вхід</a:t>
+            </a:r>
+            <a:r>
+              <a:rPr lang="ru-RU" sz="2000" dirty="0">
+                <a:latin typeface="Times New Roman" panose="02020603050405020304" pitchFamily="18" charset="0"/>
+                <a:cs typeface="Times New Roman" panose="02020603050405020304" pitchFamily="18" charset="0"/>
+              </a:rPr>
+              <a:t>, analysis.py – AI -</a:t>
+            </a:r>
+            <a:r>
+              <a:rPr lang="ru-RU" sz="2000" dirty="0" err="1">
+                <a:latin typeface="Times New Roman" panose="02020603050405020304" pitchFamily="18" charset="0"/>
+                <a:cs typeface="Times New Roman" panose="02020603050405020304" pitchFamily="18" charset="0"/>
+              </a:rPr>
+              <a:t>аналіз</a:t>
+            </a:r>
+            <a:r>
+              <a:rPr lang="ru-RU" sz="2000" dirty="0">
+                <a:latin typeface="Times New Roman" panose="02020603050405020304" pitchFamily="18" charset="0"/>
+                <a:cs typeface="Times New Roman" panose="02020603050405020304" pitchFamily="18" charset="0"/>
+              </a:rPr>
+              <a:t> фото, ai_analyzer.py – </a:t>
+            </a:r>
+            <a:r>
+              <a:rPr lang="ru-RU" sz="2000" dirty="0" err="1">
+                <a:latin typeface="Times New Roman" panose="02020603050405020304" pitchFamily="18" charset="0"/>
+                <a:cs typeface="Times New Roman" panose="02020603050405020304" pitchFamily="18" charset="0"/>
+              </a:rPr>
+              <a:t>логіка</a:t>
+            </a:r>
+            <a:r>
+              <a:rPr lang="ru-RU" sz="2000" dirty="0">
+                <a:latin typeface="Times New Roman" panose="02020603050405020304" pitchFamily="18" charset="0"/>
+                <a:cs typeface="Times New Roman" panose="02020603050405020304" pitchFamily="18" charset="0"/>
+              </a:rPr>
+              <a:t> </a:t>
+            </a:r>
+            <a:r>
+              <a:rPr lang="ru-RU" sz="2000" dirty="0" err="1">
+                <a:latin typeface="Times New Roman" panose="02020603050405020304" pitchFamily="18" charset="0"/>
+                <a:cs typeface="Times New Roman" panose="02020603050405020304" pitchFamily="18" charset="0"/>
+              </a:rPr>
+              <a:t>OpenCV</a:t>
+            </a:r>
+            <a:r>
+              <a:rPr lang="ru-RU" sz="2000" dirty="0">
+                <a:latin typeface="Times New Roman" panose="02020603050405020304" pitchFamily="18" charset="0"/>
+                <a:cs typeface="Times New Roman" panose="02020603050405020304" pitchFamily="18" charset="0"/>
+              </a:rPr>
+              <a:t>, tracker.py – </a:t>
+            </a:r>
+            <a:r>
+              <a:rPr lang="ru-RU" sz="2000" dirty="0" err="1">
+                <a:latin typeface="Times New Roman" panose="02020603050405020304" pitchFamily="18" charset="0"/>
+                <a:cs typeface="Times New Roman" panose="02020603050405020304" pitchFamily="18" charset="0"/>
+              </a:rPr>
+              <a:t>плани</a:t>
+            </a:r>
+            <a:r>
+              <a:rPr lang="ru-RU" sz="2000" dirty="0">
+                <a:latin typeface="Times New Roman" panose="02020603050405020304" pitchFamily="18" charset="0"/>
+                <a:cs typeface="Times New Roman" panose="02020603050405020304" pitchFamily="18" charset="0"/>
+              </a:rPr>
+              <a:t> догляду та </a:t>
+            </a:r>
+            <a:r>
+              <a:rPr lang="ru-RU" sz="2000" dirty="0" err="1">
+                <a:latin typeface="Times New Roman" panose="02020603050405020304" pitchFamily="18" charset="0"/>
+                <a:cs typeface="Times New Roman" panose="02020603050405020304" pitchFamily="18" charset="0"/>
+              </a:rPr>
+              <a:t>прогрес</a:t>
+            </a:r>
+            <a:r>
+              <a:rPr lang="ru-RU" sz="2000" dirty="0">
+                <a:latin typeface="Times New Roman" panose="02020603050405020304" pitchFamily="18" charset="0"/>
+                <a:cs typeface="Times New Roman" panose="02020603050405020304" pitchFamily="18" charset="0"/>
+              </a:rPr>
+              <a:t>, models.py – </a:t>
+            </a:r>
+            <a:r>
+              <a:rPr lang="ru-RU" sz="2000" dirty="0" err="1">
+                <a:latin typeface="Times New Roman" panose="02020603050405020304" pitchFamily="18" charset="0"/>
+                <a:cs typeface="Times New Roman" panose="02020603050405020304" pitchFamily="18" charset="0"/>
+              </a:rPr>
+              <a:t>моделі</a:t>
+            </a:r>
+            <a:r>
+              <a:rPr lang="ru-RU" sz="2000" dirty="0">
+                <a:latin typeface="Times New Roman" panose="02020603050405020304" pitchFamily="18" charset="0"/>
+                <a:cs typeface="Times New Roman" panose="02020603050405020304" pitchFamily="18" charset="0"/>
+              </a:rPr>
+              <a:t> </a:t>
+            </a:r>
+            <a:r>
+              <a:rPr lang="ru-RU" sz="2000" dirty="0" err="1">
+                <a:latin typeface="Times New Roman" panose="02020603050405020304" pitchFamily="18" charset="0"/>
+                <a:cs typeface="Times New Roman" panose="02020603050405020304" pitchFamily="18" charset="0"/>
+              </a:rPr>
+              <a:t>SQLAlchemy</a:t>
+            </a:r>
+            <a:r>
+              <a:rPr lang="ru-RU" sz="2000" dirty="0">
+                <a:latin typeface="Times New Roman" panose="02020603050405020304" pitchFamily="18" charset="0"/>
+                <a:cs typeface="Times New Roman" panose="02020603050405020304" pitchFamily="18" charset="0"/>
+              </a:rPr>
+              <a:t> для </a:t>
+            </a:r>
+            <a:r>
+              <a:rPr lang="ru-RU" sz="2000" dirty="0" err="1">
+                <a:latin typeface="Times New Roman" panose="02020603050405020304" pitchFamily="18" charset="0"/>
+                <a:cs typeface="Times New Roman" panose="02020603050405020304" pitchFamily="18" charset="0"/>
+              </a:rPr>
+              <a:t>бази</a:t>
+            </a:r>
+            <a:r>
+              <a:rPr lang="ru-RU" sz="2000" dirty="0">
+                <a:latin typeface="Times New Roman" panose="02020603050405020304" pitchFamily="18" charset="0"/>
+                <a:cs typeface="Times New Roman" panose="02020603050405020304" pitchFamily="18" charset="0"/>
+              </a:rPr>
+              <a:t> </a:t>
+            </a:r>
+            <a:r>
+              <a:rPr lang="ru-RU" sz="2000" dirty="0" err="1">
+                <a:latin typeface="Times New Roman" panose="02020603050405020304" pitchFamily="18" charset="0"/>
+                <a:cs typeface="Times New Roman" panose="02020603050405020304" pitchFamily="18" charset="0"/>
+              </a:rPr>
+              <a:t>даних</a:t>
+            </a:r>
+            <a:r>
+              <a:rPr lang="ru-RU" sz="2000" dirty="0">
+                <a:latin typeface="Times New Roman" panose="02020603050405020304" pitchFamily="18" charset="0"/>
+                <a:cs typeface="Times New Roman" panose="02020603050405020304" pitchFamily="18" charset="0"/>
+              </a:rPr>
+              <a:t>.</a:t>
+            </a:r>
+          </a:p>
+          <a:p>
+            <a:pPr algn="just"/>
+            <a:r>
+              <a:rPr lang="ru-RU" sz="2000" dirty="0">
+                <a:latin typeface="Times New Roman" panose="02020603050405020304" pitchFamily="18" charset="0"/>
+                <a:cs typeface="Times New Roman" panose="02020603050405020304" pitchFamily="18" charset="0"/>
+              </a:rPr>
+              <a:t>	</a:t>
+            </a:r>
+            <a:r>
+              <a:rPr lang="ru-RU" sz="2000" dirty="0" err="1">
+                <a:latin typeface="Times New Roman" panose="02020603050405020304" pitchFamily="18" charset="0"/>
+                <a:cs typeface="Times New Roman" panose="02020603050405020304" pitchFamily="18" charset="0"/>
+              </a:rPr>
+              <a:t>Етап</a:t>
+            </a:r>
+            <a:r>
+              <a:rPr lang="ru-RU" sz="2000" dirty="0">
+                <a:latin typeface="Times New Roman" panose="02020603050405020304" pitchFamily="18" charset="0"/>
+                <a:cs typeface="Times New Roman" panose="02020603050405020304" pitchFamily="18" charset="0"/>
+              </a:rPr>
+              <a:t> 4 – </a:t>
+            </a:r>
+            <a:r>
+              <a:rPr lang="ru-RU" sz="2000" dirty="0" err="1">
+                <a:latin typeface="Times New Roman" panose="02020603050405020304" pitchFamily="18" charset="0"/>
+                <a:cs typeface="Times New Roman" panose="02020603050405020304" pitchFamily="18" charset="0"/>
+              </a:rPr>
+              <a:t>Тестування</a:t>
+            </a:r>
+            <a:r>
+              <a:rPr lang="ru-RU" sz="2000" dirty="0">
+                <a:latin typeface="Times New Roman" panose="02020603050405020304" pitchFamily="18" charset="0"/>
+                <a:cs typeface="Times New Roman" panose="02020603050405020304" pitchFamily="18" charset="0"/>
+              </a:rPr>
+              <a:t>, проведено </a:t>
+            </a:r>
+            <a:r>
+              <a:rPr lang="ru-RU" sz="2000" dirty="0" err="1">
+                <a:latin typeface="Times New Roman" panose="02020603050405020304" pitchFamily="18" charset="0"/>
+                <a:cs typeface="Times New Roman" panose="02020603050405020304" pitchFamily="18" charset="0"/>
+              </a:rPr>
+              <a:t>функціональне</a:t>
+            </a:r>
+            <a:r>
+              <a:rPr lang="ru-RU" sz="2000" dirty="0">
+                <a:latin typeface="Times New Roman" panose="02020603050405020304" pitchFamily="18" charset="0"/>
+                <a:cs typeface="Times New Roman" panose="02020603050405020304" pitchFamily="18" charset="0"/>
+              </a:rPr>
+              <a:t>, </a:t>
+            </a:r>
+            <a:r>
+              <a:rPr lang="ru-RU" sz="2000" dirty="0" err="1">
+                <a:latin typeface="Times New Roman" panose="02020603050405020304" pitchFamily="18" charset="0"/>
+                <a:cs typeface="Times New Roman" panose="02020603050405020304" pitchFamily="18" charset="0"/>
+              </a:rPr>
+              <a:t>інтеграційне</a:t>
+            </a:r>
+            <a:r>
+              <a:rPr lang="ru-RU" sz="2000" dirty="0">
+                <a:latin typeface="Times New Roman" panose="02020603050405020304" pitchFamily="18" charset="0"/>
+                <a:cs typeface="Times New Roman" panose="02020603050405020304" pitchFamily="18" charset="0"/>
+              </a:rPr>
+              <a:t> та UI-</a:t>
+            </a:r>
+            <a:r>
+              <a:rPr lang="ru-RU" sz="2000" dirty="0" err="1">
+                <a:latin typeface="Times New Roman" panose="02020603050405020304" pitchFamily="18" charset="0"/>
+                <a:cs typeface="Times New Roman" panose="02020603050405020304" pitchFamily="18" charset="0"/>
+              </a:rPr>
+              <a:t>тестування</a:t>
+            </a:r>
+            <a:r>
+              <a:rPr lang="ru-RU" sz="2000" dirty="0">
+                <a:latin typeface="Times New Roman" panose="02020603050405020304" pitchFamily="18" charset="0"/>
+                <a:cs typeface="Times New Roman" panose="02020603050405020304" pitchFamily="18" charset="0"/>
+              </a:rPr>
+              <a:t>, </a:t>
+            </a:r>
+            <a:r>
+              <a:rPr lang="ru-RU" sz="2000" dirty="0" err="1">
+                <a:latin typeface="Times New Roman" panose="02020603050405020304" pitchFamily="18" charset="0"/>
+                <a:cs typeface="Times New Roman" panose="02020603050405020304" pitchFamily="18" charset="0"/>
+              </a:rPr>
+              <a:t>виявлено</a:t>
+            </a:r>
+            <a:r>
+              <a:rPr lang="ru-RU" sz="2000" dirty="0">
+                <a:latin typeface="Times New Roman" panose="02020603050405020304" pitchFamily="18" charset="0"/>
+                <a:cs typeface="Times New Roman" panose="02020603050405020304" pitchFamily="18" charset="0"/>
+              </a:rPr>
+              <a:t> та </a:t>
+            </a:r>
+            <a:r>
+              <a:rPr lang="ru-RU" sz="2000" dirty="0" err="1">
+                <a:latin typeface="Times New Roman" panose="02020603050405020304" pitchFamily="18" charset="0"/>
+                <a:cs typeface="Times New Roman" panose="02020603050405020304" pitchFamily="18" charset="0"/>
+              </a:rPr>
+              <a:t>усунено</a:t>
+            </a:r>
+            <a:r>
+              <a:rPr lang="ru-RU" sz="2000" dirty="0">
+                <a:latin typeface="Times New Roman" panose="02020603050405020304" pitchFamily="18" charset="0"/>
+                <a:cs typeface="Times New Roman" panose="02020603050405020304" pitchFamily="18" charset="0"/>
+              </a:rPr>
+              <a:t> </a:t>
+            </a:r>
+            <a:r>
+              <a:rPr lang="ru-RU" sz="2000" dirty="0" err="1">
+                <a:latin typeface="Times New Roman" panose="02020603050405020304" pitchFamily="18" charset="0"/>
+                <a:cs typeface="Times New Roman" panose="02020603050405020304" pitchFamily="18" charset="0"/>
+              </a:rPr>
+              <a:t>критичні</a:t>
+            </a:r>
+            <a:r>
+              <a:rPr lang="ru-RU" sz="2000" dirty="0">
+                <a:latin typeface="Times New Roman" panose="02020603050405020304" pitchFamily="18" charset="0"/>
+                <a:cs typeface="Times New Roman" panose="02020603050405020304" pitchFamily="18" charset="0"/>
+              </a:rPr>
+              <a:t> </a:t>
+            </a:r>
+            <a:r>
+              <a:rPr lang="ru-RU" sz="2000" dirty="0" err="1">
+                <a:latin typeface="Times New Roman" panose="02020603050405020304" pitchFamily="18" charset="0"/>
+                <a:cs typeface="Times New Roman" panose="02020603050405020304" pitchFamily="18" charset="0"/>
+              </a:rPr>
+              <a:t>помилки</a:t>
+            </a:r>
+            <a:endParaRPr lang="ru-RU" sz="2000" dirty="0">
+              <a:latin typeface="Times New Roman" panose="02020603050405020304" pitchFamily="18" charset="0"/>
+              <a:cs typeface="Times New Roman" panose="02020603050405020304" pitchFamily="18" charset="0"/>
+            </a:endParaRPr>
+          </a:p>
+        </p:txBody>
+      </p:sp>
+      <p:sp>
+        <p:nvSpPr>
+          <p:cNvPr id="3" name="TextBox 2">
+            <a:extLst>
+              <a:ext uri="{FF2B5EF4-FFF2-40B4-BE49-F238E27FC236}">
+                <a16:creationId xmlns:a16="http://schemas.microsoft.com/office/drawing/2014/main" id="{A38BE315-F4E4-03F7-CF70-0EFC6729F15B}"/>
+              </a:ext>
+            </a:extLst>
+          </p:cNvPr>
+          <p:cNvSpPr txBox="1"/>
+          <p:nvPr/>
+        </p:nvSpPr>
+        <p:spPr>
+          <a:xfrm>
+            <a:off x="1233052" y="4431138"/>
+            <a:ext cx="9725891" cy="1631216"/>
+          </a:xfrm>
+          <a:prstGeom prst="rect">
+            <a:avLst/>
+          </a:prstGeom>
+          <a:noFill/>
+        </p:spPr>
+        <p:txBody>
+          <a:bodyPr wrap="square" rtlCol="0">
+            <a:spAutoFit/>
+          </a:bodyPr>
+          <a:lstStyle/>
+          <a:p>
+            <a:r>
+              <a:rPr lang="ru-RU" sz="2000" dirty="0" err="1">
+                <a:latin typeface="Times New Roman" panose="02020603050405020304" pitchFamily="18" charset="0"/>
+                <a:cs typeface="Times New Roman" panose="02020603050405020304" pitchFamily="18" charset="0"/>
+              </a:rPr>
+              <a:t>Інтсрументи</a:t>
+            </a:r>
+            <a:r>
+              <a:rPr lang="ru-RU" sz="2000" dirty="0">
+                <a:latin typeface="Times New Roman" panose="02020603050405020304" pitchFamily="18" charset="0"/>
+                <a:cs typeface="Times New Roman" panose="02020603050405020304" pitchFamily="18" charset="0"/>
+              </a:rPr>
+              <a:t>:</a:t>
+            </a:r>
+          </a:p>
+          <a:p>
+            <a:r>
+              <a:rPr lang="ru-RU" sz="2000" dirty="0">
+                <a:latin typeface="Times New Roman" panose="02020603050405020304" pitchFamily="18" charset="0"/>
+                <a:cs typeface="Times New Roman" panose="02020603050405020304" pitchFamily="18" charset="0"/>
+              </a:rPr>
+              <a:t>💻 </a:t>
+            </a:r>
+            <a:r>
+              <a:rPr lang="ru-RU" sz="2000" dirty="0" err="1">
+                <a:latin typeface="Times New Roman" panose="02020603050405020304" pitchFamily="18" charset="0"/>
+                <a:cs typeface="Times New Roman" panose="02020603050405020304" pitchFamily="18" charset="0"/>
+              </a:rPr>
+              <a:t>PyCharm</a:t>
+            </a:r>
+            <a:r>
+              <a:rPr lang="ru-RU" sz="2000" dirty="0">
+                <a:latin typeface="Times New Roman" panose="02020603050405020304" pitchFamily="18" charset="0"/>
+                <a:cs typeface="Times New Roman" panose="02020603050405020304" pitchFamily="18" charset="0"/>
+              </a:rPr>
+              <a:t> → </a:t>
+            </a:r>
+            <a:r>
+              <a:rPr lang="ru-RU" sz="2000" dirty="0" err="1">
+                <a:latin typeface="Times New Roman" panose="02020603050405020304" pitchFamily="18" charset="0"/>
+                <a:cs typeface="Times New Roman" panose="02020603050405020304" pitchFamily="18" charset="0"/>
+              </a:rPr>
+              <a:t>Інтегроване</a:t>
+            </a:r>
+            <a:r>
+              <a:rPr lang="ru-RU" sz="2000" dirty="0">
+                <a:latin typeface="Times New Roman" panose="02020603050405020304" pitchFamily="18" charset="0"/>
+                <a:cs typeface="Times New Roman" panose="02020603050405020304" pitchFamily="18" charset="0"/>
+              </a:rPr>
+              <a:t> </a:t>
+            </a:r>
+            <a:r>
+              <a:rPr lang="ru-RU" sz="2000" dirty="0" err="1">
+                <a:latin typeface="Times New Roman" panose="02020603050405020304" pitchFamily="18" charset="0"/>
+                <a:cs typeface="Times New Roman" panose="02020603050405020304" pitchFamily="18" charset="0"/>
+              </a:rPr>
+              <a:t>середовище</a:t>
+            </a:r>
+            <a:r>
+              <a:rPr lang="ru-RU" sz="2000" dirty="0">
+                <a:latin typeface="Times New Roman" panose="02020603050405020304" pitchFamily="18" charset="0"/>
+                <a:cs typeface="Times New Roman" panose="02020603050405020304" pitchFamily="18" charset="0"/>
+              </a:rPr>
+              <a:t> </a:t>
+            </a:r>
+            <a:r>
+              <a:rPr lang="ru-RU" sz="2000" dirty="0" err="1">
+                <a:latin typeface="Times New Roman" panose="02020603050405020304" pitchFamily="18" charset="0"/>
+                <a:cs typeface="Times New Roman" panose="02020603050405020304" pitchFamily="18" charset="0"/>
+              </a:rPr>
+              <a:t>розробки</a:t>
+            </a:r>
+            <a:endParaRPr lang="ru-RU" sz="2000" dirty="0">
+              <a:latin typeface="Times New Roman" panose="02020603050405020304" pitchFamily="18" charset="0"/>
+              <a:cs typeface="Times New Roman" panose="02020603050405020304" pitchFamily="18" charset="0"/>
+            </a:endParaRPr>
+          </a:p>
+          <a:p>
+            <a:r>
+              <a:rPr lang="ru-RU" sz="2000" dirty="0">
+                <a:latin typeface="Times New Roman" panose="02020603050405020304" pitchFamily="18" charset="0"/>
+                <a:cs typeface="Times New Roman" panose="02020603050405020304" pitchFamily="18" charset="0"/>
+              </a:rPr>
+              <a:t>🐙 </a:t>
+            </a:r>
+            <a:r>
+              <a:rPr lang="ru-RU" sz="2000" dirty="0" err="1">
+                <a:latin typeface="Times New Roman" panose="02020603050405020304" pitchFamily="18" charset="0"/>
+                <a:cs typeface="Times New Roman" panose="02020603050405020304" pitchFamily="18" charset="0"/>
+              </a:rPr>
+              <a:t>Git</a:t>
+            </a:r>
+            <a:r>
+              <a:rPr lang="ru-RU" sz="2000" dirty="0">
+                <a:latin typeface="Times New Roman" panose="02020603050405020304" pitchFamily="18" charset="0"/>
+                <a:cs typeface="Times New Roman" panose="02020603050405020304" pitchFamily="18" charset="0"/>
+              </a:rPr>
+              <a:t> → Контроль </a:t>
+            </a:r>
+            <a:r>
+              <a:rPr lang="ru-RU" sz="2000" dirty="0" err="1">
+                <a:latin typeface="Times New Roman" panose="02020603050405020304" pitchFamily="18" charset="0"/>
+                <a:cs typeface="Times New Roman" panose="02020603050405020304" pitchFamily="18" charset="0"/>
+              </a:rPr>
+              <a:t>версій</a:t>
+            </a:r>
+            <a:endParaRPr lang="ru-RU" sz="2000" dirty="0">
+              <a:latin typeface="Times New Roman" panose="02020603050405020304" pitchFamily="18" charset="0"/>
+              <a:cs typeface="Times New Roman" panose="02020603050405020304" pitchFamily="18" charset="0"/>
+            </a:endParaRPr>
+          </a:p>
+          <a:p>
+            <a:r>
+              <a:rPr lang="ru-RU" sz="2000" dirty="0">
+                <a:latin typeface="Times New Roman" panose="02020603050405020304" pitchFamily="18" charset="0"/>
+                <a:cs typeface="Times New Roman" panose="02020603050405020304" pitchFamily="18" charset="0"/>
+              </a:rPr>
+              <a:t>🗄️ DB </a:t>
+            </a:r>
+            <a:r>
+              <a:rPr lang="ru-RU" sz="2000" dirty="0" err="1">
+                <a:latin typeface="Times New Roman" panose="02020603050405020304" pitchFamily="18" charset="0"/>
+                <a:cs typeface="Times New Roman" panose="02020603050405020304" pitchFamily="18" charset="0"/>
+              </a:rPr>
+              <a:t>Browser</a:t>
+            </a:r>
+            <a:r>
+              <a:rPr lang="ru-RU" sz="2000" dirty="0">
+                <a:latin typeface="Times New Roman" panose="02020603050405020304" pitchFamily="18" charset="0"/>
+                <a:cs typeface="Times New Roman" panose="02020603050405020304" pitchFamily="18" charset="0"/>
+              </a:rPr>
+              <a:t> → </a:t>
+            </a:r>
+            <a:r>
+              <a:rPr lang="ru-RU" sz="2000" dirty="0" err="1">
+                <a:latin typeface="Times New Roman" panose="02020603050405020304" pitchFamily="18" charset="0"/>
+                <a:cs typeface="Times New Roman" panose="02020603050405020304" pitchFamily="18" charset="0"/>
+              </a:rPr>
+              <a:t>Візуальний</a:t>
+            </a:r>
+            <a:r>
+              <a:rPr lang="ru-RU" sz="2000" dirty="0">
+                <a:latin typeface="Times New Roman" panose="02020603050405020304" pitchFamily="18" charset="0"/>
+                <a:cs typeface="Times New Roman" panose="02020603050405020304" pitchFamily="18" charset="0"/>
+              </a:rPr>
+              <a:t> перегляд </a:t>
+            </a:r>
+            <a:r>
+              <a:rPr lang="ru-RU" sz="2000" dirty="0" err="1">
+                <a:latin typeface="Times New Roman" panose="02020603050405020304" pitchFamily="18" charset="0"/>
+                <a:cs typeface="Times New Roman" panose="02020603050405020304" pitchFamily="18" charset="0"/>
+              </a:rPr>
+              <a:t>SQLite</a:t>
+            </a:r>
+            <a:endParaRPr lang="ru-RU" sz="2000" dirty="0">
+              <a:latin typeface="Times New Roman" panose="02020603050405020304" pitchFamily="18" charset="0"/>
+              <a:cs typeface="Times New Roman" panose="02020603050405020304" pitchFamily="18" charset="0"/>
+            </a:endParaRPr>
+          </a:p>
+          <a:p>
+            <a:r>
+              <a:rPr lang="ru-RU" sz="2000" dirty="0">
+                <a:latin typeface="Times New Roman" panose="02020603050405020304" pitchFamily="18" charset="0"/>
+                <a:cs typeface="Times New Roman" panose="02020603050405020304" pitchFamily="18" charset="0"/>
+              </a:rPr>
+              <a:t>🌐 </a:t>
+            </a:r>
+            <a:r>
+              <a:rPr lang="ru-RU" sz="2000" dirty="0" err="1">
+                <a:latin typeface="Times New Roman" panose="02020603050405020304" pitchFamily="18" charset="0"/>
+                <a:cs typeface="Times New Roman" panose="02020603050405020304" pitchFamily="18" charset="0"/>
+              </a:rPr>
+              <a:t>Chrome</a:t>
+            </a:r>
+            <a:r>
+              <a:rPr lang="ru-RU" sz="2000" dirty="0">
+                <a:latin typeface="Times New Roman" panose="02020603050405020304" pitchFamily="18" charset="0"/>
+                <a:cs typeface="Times New Roman" panose="02020603050405020304" pitchFamily="18" charset="0"/>
+              </a:rPr>
+              <a:t> </a:t>
+            </a:r>
+            <a:r>
+              <a:rPr lang="ru-RU" sz="2000" dirty="0" err="1">
+                <a:latin typeface="Times New Roman" panose="02020603050405020304" pitchFamily="18" charset="0"/>
+                <a:cs typeface="Times New Roman" panose="02020603050405020304" pitchFamily="18" charset="0"/>
+              </a:rPr>
+              <a:t>DevTools</a:t>
+            </a:r>
+            <a:r>
+              <a:rPr lang="ru-RU" sz="2000" dirty="0">
+                <a:latin typeface="Times New Roman" panose="02020603050405020304" pitchFamily="18" charset="0"/>
+                <a:cs typeface="Times New Roman" panose="02020603050405020304" pitchFamily="18" charset="0"/>
+              </a:rPr>
+              <a:t> → </a:t>
+            </a:r>
+            <a:r>
+              <a:rPr lang="ru-RU" sz="2000" dirty="0" err="1">
+                <a:latin typeface="Times New Roman" panose="02020603050405020304" pitchFamily="18" charset="0"/>
+                <a:cs typeface="Times New Roman" panose="02020603050405020304" pitchFamily="18" charset="0"/>
+              </a:rPr>
+              <a:t>Налагодження</a:t>
+            </a:r>
+            <a:r>
+              <a:rPr lang="ru-RU" sz="2000" dirty="0">
+                <a:latin typeface="Times New Roman" panose="02020603050405020304" pitchFamily="18" charset="0"/>
+                <a:cs typeface="Times New Roman" panose="02020603050405020304" pitchFamily="18" charset="0"/>
+              </a:rPr>
+              <a:t> веб -</a:t>
+            </a:r>
+            <a:r>
+              <a:rPr lang="ru-RU" sz="2000" dirty="0" err="1">
+                <a:latin typeface="Times New Roman" panose="02020603050405020304" pitchFamily="18" charset="0"/>
+                <a:cs typeface="Times New Roman" panose="02020603050405020304" pitchFamily="18" charset="0"/>
+              </a:rPr>
+              <a:t>інтерфейсу</a:t>
+            </a:r>
+            <a:endParaRPr lang="ru-RU" sz="2000" dirty="0">
+              <a:latin typeface="Times New Roman" panose="02020603050405020304" pitchFamily="18" charset="0"/>
+              <a:cs typeface="Times New Roman" panose="02020603050405020304" pitchFamily="18" charset="0"/>
+            </a:endParaRPr>
+          </a:p>
+        </p:txBody>
+      </p:sp>
+    </p:spTree>
+    <p:extLst>
+      <p:ext uri="{BB962C8B-B14F-4D97-AF65-F5344CB8AC3E}">
+        <p14:creationId xmlns:p14="http://schemas.microsoft.com/office/powerpoint/2010/main" val="917507758"/>
+      </p:ext>
+    </p:extLst>
+  </p:cSld>
+  <p:clrMapOvr>
+    <a:masterClrMapping/>
+  </p:clrMapOvr>
+</p:sld>
+</file>
+
+<file path=ppt/slides/slide11.xml><?xml version="1.0" encoding="utf-8"?>
+<p:sld xmlns:a="http://schemas.openxmlformats.org/drawingml/2006/main" xmlns:r="http://schemas.openxmlformats.org/officeDocument/2006/relationships" xmlns:p="http://schemas.openxmlformats.org/presentationml/2006/main">
+  <p:cSld>
+    <p:spTree>
+      <p:nvGrpSpPr>
+        <p:cNvPr id="1" name="">
+          <a:extLst>
+            <a:ext uri="{FF2B5EF4-FFF2-40B4-BE49-F238E27FC236}">
+              <a16:creationId xmlns:a16="http://schemas.microsoft.com/office/drawing/2014/main" id="{820A5157-E155-E1E0-90FF-28E971A00365}"/>
+            </a:ext>
+          </a:extLst>
+        </p:cNvPr>
+        <p:cNvGrpSpPr/>
+        <p:nvPr/>
+      </p:nvGrpSpPr>
+      <p:grpSpPr>
+        <a:xfrm>
+          <a:off x="0" y="0"/>
+          <a:ext cx="0" cy="0"/>
+          <a:chOff x="0" y="0"/>
+          <a:chExt cx="0" cy="0"/>
+        </a:xfrm>
+      </p:grpSpPr>
+      <p:sp>
+        <p:nvSpPr>
+          <p:cNvPr id="4" name="TextBox 3">
+            <a:extLst>
+              <a:ext uri="{FF2B5EF4-FFF2-40B4-BE49-F238E27FC236}">
+                <a16:creationId xmlns:a16="http://schemas.microsoft.com/office/drawing/2014/main" id="{9DE3A7E0-C4A8-FFBE-0AF9-9C812B2BDB34}"/>
+              </a:ext>
+            </a:extLst>
+          </p:cNvPr>
+          <p:cNvSpPr txBox="1"/>
+          <p:nvPr/>
+        </p:nvSpPr>
+        <p:spPr>
+          <a:xfrm>
+            <a:off x="4774965" y="350177"/>
+            <a:ext cx="2642070" cy="523220"/>
+          </a:xfrm>
+          <a:prstGeom prst="rect">
+            <a:avLst/>
+          </a:prstGeom>
+          <a:noFill/>
+        </p:spPr>
+        <p:txBody>
+          <a:bodyPr wrap="none" rtlCol="0">
+            <a:spAutoFit/>
+          </a:bodyPr>
+          <a:lstStyle/>
+          <a:p>
+            <a:r>
+              <a:rPr lang="ru-RU" sz="2800" dirty="0">
+                <a:latin typeface="Times New Roman" panose="02020603050405020304" pitchFamily="18" charset="0"/>
+                <a:cs typeface="Times New Roman" panose="02020603050405020304" pitchFamily="18" charset="0"/>
+              </a:rPr>
+              <a:t>Дизайн </a:t>
+            </a:r>
+            <a:r>
+              <a:rPr lang="ru-RU" sz="2800" dirty="0" err="1">
+                <a:latin typeface="Times New Roman" panose="02020603050405020304" pitchFamily="18" charset="0"/>
+                <a:cs typeface="Times New Roman" panose="02020603050405020304" pitchFamily="18" charset="0"/>
+              </a:rPr>
+              <a:t>системи</a:t>
+            </a:r>
+            <a:endParaRPr lang="ru-RU" sz="2800" dirty="0">
+              <a:latin typeface="Times New Roman" panose="02020603050405020304" pitchFamily="18" charset="0"/>
+              <a:cs typeface="Times New Roman" panose="02020603050405020304" pitchFamily="18" charset="0"/>
+            </a:endParaRPr>
+          </a:p>
+        </p:txBody>
+      </p:sp>
+      <p:sp>
+        <p:nvSpPr>
+          <p:cNvPr id="6" name="TextBox 5">
+            <a:extLst>
+              <a:ext uri="{FF2B5EF4-FFF2-40B4-BE49-F238E27FC236}">
+                <a16:creationId xmlns:a16="http://schemas.microsoft.com/office/drawing/2014/main" id="{952F756D-65E0-6D98-7710-0563B7834C97}"/>
+              </a:ext>
+            </a:extLst>
+          </p:cNvPr>
+          <p:cNvSpPr txBox="1"/>
+          <p:nvPr/>
+        </p:nvSpPr>
+        <p:spPr>
+          <a:xfrm>
+            <a:off x="1081450" y="917912"/>
+            <a:ext cx="10029099" cy="5632311"/>
+          </a:xfrm>
+          <a:prstGeom prst="rect">
+            <a:avLst/>
+          </a:prstGeom>
+          <a:noFill/>
+        </p:spPr>
+        <p:txBody>
+          <a:bodyPr wrap="square" rtlCol="0">
+            <a:spAutoFit/>
+          </a:bodyPr>
+          <a:lstStyle/>
+          <a:p>
+            <a:pPr marL="342900" indent="-342900" algn="just">
+              <a:buFont typeface="Arial" panose="020B0604020202020204" pitchFamily="34" charset="0"/>
+              <a:buChar char="•"/>
+            </a:pPr>
+            <a:r>
+              <a:rPr lang="ru-RU" sz="2000" dirty="0" err="1">
+                <a:latin typeface="Times New Roman" panose="02020603050405020304" pitchFamily="18" charset="0"/>
+                <a:cs typeface="Times New Roman" panose="02020603050405020304" pitchFamily="18" charset="0"/>
+              </a:rPr>
+              <a:t>Користувацький</a:t>
+            </a:r>
+            <a:r>
+              <a:rPr lang="ru-RU" sz="2000" dirty="0">
+                <a:latin typeface="Times New Roman" panose="02020603050405020304" pitchFamily="18" charset="0"/>
+                <a:cs typeface="Times New Roman" panose="02020603050405020304" pitchFamily="18" charset="0"/>
+              </a:rPr>
+              <a:t> </a:t>
+            </a:r>
+            <a:r>
+              <a:rPr lang="ru-RU" sz="2000" dirty="0" err="1">
+                <a:latin typeface="Times New Roman" panose="02020603050405020304" pitchFamily="18" charset="0"/>
+                <a:cs typeface="Times New Roman" panose="02020603050405020304" pitchFamily="18" charset="0"/>
+              </a:rPr>
+              <a:t>досвід</a:t>
+            </a:r>
+            <a:r>
+              <a:rPr lang="ru-RU" sz="2000" dirty="0">
+                <a:latin typeface="Times New Roman" panose="02020603050405020304" pitchFamily="18" charset="0"/>
+                <a:cs typeface="Times New Roman" panose="02020603050405020304" pitchFamily="18" charset="0"/>
+              </a:rPr>
+              <a:t> (</a:t>
+            </a:r>
+            <a:r>
+              <a:rPr lang="en-US" sz="2000" dirty="0">
+                <a:latin typeface="Times New Roman" panose="02020603050405020304" pitchFamily="18" charset="0"/>
+                <a:cs typeface="Times New Roman" panose="02020603050405020304" pitchFamily="18" charset="0"/>
+              </a:rPr>
+              <a:t>UX</a:t>
+            </a:r>
+            <a:r>
+              <a:rPr lang="ru-RU" sz="2000" dirty="0">
+                <a:latin typeface="Times New Roman" panose="02020603050405020304" pitchFamily="18" charset="0"/>
+                <a:cs typeface="Times New Roman" panose="02020603050405020304" pitchFamily="18" charset="0"/>
+              </a:rPr>
+              <a:t>): </a:t>
+            </a:r>
+            <a:r>
+              <a:rPr lang="ru-RU" sz="2000" dirty="0" err="1">
+                <a:latin typeface="Times New Roman" panose="02020603050405020304" pitchFamily="18" charset="0"/>
+                <a:cs typeface="Times New Roman" panose="02020603050405020304" pitchFamily="18" charset="0"/>
+              </a:rPr>
+              <a:t>зручна</a:t>
+            </a:r>
+            <a:r>
+              <a:rPr lang="ru-RU" sz="2000" dirty="0">
+                <a:latin typeface="Times New Roman" panose="02020603050405020304" pitchFamily="18" charset="0"/>
+                <a:cs typeface="Times New Roman" panose="02020603050405020304" pitchFamily="18" charset="0"/>
+              </a:rPr>
+              <a:t> </a:t>
+            </a:r>
+            <a:r>
+              <a:rPr lang="ru-RU" sz="2000" dirty="0" err="1">
+                <a:latin typeface="Times New Roman" panose="02020603050405020304" pitchFamily="18" charset="0"/>
+                <a:cs typeface="Times New Roman" panose="02020603050405020304" pitchFamily="18" charset="0"/>
+              </a:rPr>
+              <a:t>навігація</a:t>
+            </a:r>
+            <a:r>
+              <a:rPr lang="ru-RU" sz="2000" dirty="0">
+                <a:latin typeface="Times New Roman" panose="02020603050405020304" pitchFamily="18" charset="0"/>
+                <a:cs typeface="Times New Roman" panose="02020603050405020304" pitchFamily="18" charset="0"/>
+              </a:rPr>
+              <a:t>, </a:t>
+            </a:r>
+            <a:r>
+              <a:rPr lang="ru-RU" sz="2000" dirty="0" err="1">
+                <a:latin typeface="Times New Roman" panose="02020603050405020304" pitchFamily="18" charset="0"/>
+                <a:cs typeface="Times New Roman" panose="02020603050405020304" pitchFamily="18" charset="0"/>
+              </a:rPr>
+              <a:t>швидкі</a:t>
+            </a:r>
+            <a:r>
+              <a:rPr lang="ru-RU" sz="2000" dirty="0">
+                <a:latin typeface="Times New Roman" panose="02020603050405020304" pitchFamily="18" charset="0"/>
+                <a:cs typeface="Times New Roman" panose="02020603050405020304" pitchFamily="18" charset="0"/>
+              </a:rPr>
+              <a:t> переходи, </a:t>
+            </a:r>
+            <a:r>
+              <a:rPr lang="ru-RU" sz="2000" dirty="0" err="1">
+                <a:latin typeface="Times New Roman" panose="02020603050405020304" pitchFamily="18" charset="0"/>
+                <a:cs typeface="Times New Roman" panose="02020603050405020304" pitchFamily="18" charset="0"/>
+              </a:rPr>
+              <a:t>інтуїтивний</a:t>
+            </a:r>
+            <a:r>
+              <a:rPr lang="ru-RU" sz="2000" dirty="0">
+                <a:latin typeface="Times New Roman" panose="02020603050405020304" pitchFamily="18" charset="0"/>
+                <a:cs typeface="Times New Roman" panose="02020603050405020304" pitchFamily="18" charset="0"/>
+              </a:rPr>
+              <a:t> дизайн</a:t>
+            </a:r>
+          </a:p>
+          <a:p>
+            <a:pPr marL="342900" indent="-342900" algn="just">
+              <a:buFont typeface="Arial" panose="020B0604020202020204" pitchFamily="34" charset="0"/>
+              <a:buChar char="•"/>
+            </a:pPr>
+            <a:r>
+              <a:rPr lang="ru-RU" sz="2000" dirty="0" err="1">
+                <a:latin typeface="Times New Roman" panose="02020603050405020304" pitchFamily="18" charset="0"/>
+                <a:cs typeface="Times New Roman" panose="02020603050405020304" pitchFamily="18" charset="0"/>
+              </a:rPr>
+              <a:t>Візуальний</a:t>
+            </a:r>
+            <a:r>
+              <a:rPr lang="ru-RU" sz="2000" dirty="0">
+                <a:latin typeface="Times New Roman" panose="02020603050405020304" pitchFamily="18" charset="0"/>
+                <a:cs typeface="Times New Roman" panose="02020603050405020304" pitchFamily="18" charset="0"/>
+              </a:rPr>
+              <a:t> стиль (</a:t>
+            </a:r>
+            <a:r>
+              <a:rPr lang="en-US" sz="2000" dirty="0">
+                <a:latin typeface="Times New Roman" panose="02020603050405020304" pitchFamily="18" charset="0"/>
+                <a:cs typeface="Times New Roman" panose="02020603050405020304" pitchFamily="18" charset="0"/>
+              </a:rPr>
+              <a:t>UI</a:t>
+            </a:r>
+            <a:r>
+              <a:rPr lang="ru-RU" sz="2000" dirty="0">
+                <a:latin typeface="Times New Roman" panose="02020603050405020304" pitchFamily="18" charset="0"/>
+                <a:cs typeface="Times New Roman" panose="02020603050405020304" pitchFamily="18" charset="0"/>
+              </a:rPr>
+              <a:t>): </a:t>
+            </a:r>
+            <a:r>
+              <a:rPr lang="ru-RU" sz="2000" dirty="0" err="1">
+                <a:latin typeface="Times New Roman" panose="02020603050405020304" pitchFamily="18" charset="0"/>
+                <a:cs typeface="Times New Roman" panose="02020603050405020304" pitchFamily="18" charset="0"/>
+              </a:rPr>
+              <a:t>естетичний</a:t>
+            </a:r>
+            <a:r>
+              <a:rPr lang="ru-RU" sz="2000" dirty="0">
+                <a:latin typeface="Times New Roman" panose="02020603050405020304" pitchFamily="18" charset="0"/>
+                <a:cs typeface="Times New Roman" panose="02020603050405020304" pitchFamily="18" charset="0"/>
+              </a:rPr>
+              <a:t>, </a:t>
+            </a:r>
+            <a:r>
+              <a:rPr lang="ru-RU" sz="2000" dirty="0" err="1">
+                <a:latin typeface="Times New Roman" panose="02020603050405020304" pitchFamily="18" charset="0"/>
+                <a:cs typeface="Times New Roman" panose="02020603050405020304" pitchFamily="18" charset="0"/>
+              </a:rPr>
+              <a:t>мінімалістичний</a:t>
+            </a:r>
+            <a:r>
+              <a:rPr lang="ru-RU" sz="2000" dirty="0">
+                <a:latin typeface="Times New Roman" panose="02020603050405020304" pitchFamily="18" charset="0"/>
+                <a:cs typeface="Times New Roman" panose="02020603050405020304" pitchFamily="18" charset="0"/>
+              </a:rPr>
+              <a:t> </a:t>
+            </a:r>
+            <a:r>
+              <a:rPr lang="ru-RU" sz="2000" dirty="0" err="1">
+                <a:latin typeface="Times New Roman" panose="02020603050405020304" pitchFamily="18" charset="0"/>
+                <a:cs typeface="Times New Roman" panose="02020603050405020304" pitchFamily="18" charset="0"/>
+              </a:rPr>
+              <a:t>сучаснийт</a:t>
+            </a:r>
+            <a:r>
+              <a:rPr lang="ru-RU" sz="2000" dirty="0">
+                <a:latin typeface="Times New Roman" panose="02020603050405020304" pitchFamily="18" charset="0"/>
+                <a:cs typeface="Times New Roman" panose="02020603050405020304" pitchFamily="18" charset="0"/>
+              </a:rPr>
+              <a:t>, </a:t>
+            </a:r>
+            <a:r>
+              <a:rPr lang="ru-RU" sz="2000" dirty="0" err="1">
+                <a:latin typeface="Times New Roman" panose="02020603050405020304" pitchFamily="18" charset="0"/>
+                <a:cs typeface="Times New Roman" panose="02020603050405020304" pitchFamily="18" charset="0"/>
+              </a:rPr>
+              <a:t>кольорова</a:t>
+            </a:r>
+            <a:r>
+              <a:rPr lang="ru-RU" sz="2000" dirty="0">
+                <a:latin typeface="Times New Roman" panose="02020603050405020304" pitchFamily="18" charset="0"/>
+                <a:cs typeface="Times New Roman" panose="02020603050405020304" pitchFamily="18" charset="0"/>
+              </a:rPr>
+              <a:t> схема </a:t>
+            </a:r>
+            <a:r>
+              <a:rPr lang="ru-RU" sz="2000" dirty="0" err="1">
+                <a:latin typeface="Times New Roman" panose="02020603050405020304" pitchFamily="18" charset="0"/>
+                <a:cs typeface="Times New Roman" panose="02020603050405020304" pitchFamily="18" charset="0"/>
+              </a:rPr>
+              <a:t>побудована</a:t>
+            </a:r>
+            <a:r>
+              <a:rPr lang="ru-RU" sz="2000" dirty="0">
+                <a:latin typeface="Times New Roman" panose="02020603050405020304" pitchFamily="18" charset="0"/>
+                <a:cs typeface="Times New Roman" panose="02020603050405020304" pitchFamily="18" charset="0"/>
+              </a:rPr>
+              <a:t> на </a:t>
+            </a:r>
+            <a:r>
+              <a:rPr lang="ru-RU" sz="2000" dirty="0" err="1">
+                <a:latin typeface="Times New Roman" panose="02020603050405020304" pitchFamily="18" charset="0"/>
+                <a:cs typeface="Times New Roman" panose="02020603050405020304" pitchFamily="18" charset="0"/>
+              </a:rPr>
+              <a:t>фіолетово-синьому</a:t>
+            </a:r>
+            <a:r>
+              <a:rPr lang="ru-RU" sz="2000" dirty="0">
+                <a:latin typeface="Times New Roman" panose="02020603050405020304" pitchFamily="18" charset="0"/>
+                <a:cs typeface="Times New Roman" panose="02020603050405020304" pitchFamily="18" charset="0"/>
+              </a:rPr>
+              <a:t> </a:t>
+            </a:r>
+            <a:r>
+              <a:rPr lang="ru-RU" sz="2000" dirty="0" err="1">
+                <a:latin typeface="Times New Roman" panose="02020603050405020304" pitchFamily="18" charset="0"/>
+                <a:cs typeface="Times New Roman" panose="02020603050405020304" pitchFamily="18" charset="0"/>
+              </a:rPr>
+              <a:t>градієнті</a:t>
+            </a:r>
+            <a:r>
+              <a:rPr lang="ru-RU" sz="2000" dirty="0">
+                <a:latin typeface="Times New Roman" panose="02020603050405020304" pitchFamily="18" charset="0"/>
+                <a:cs typeface="Times New Roman" panose="02020603050405020304" pitchFamily="18" charset="0"/>
+              </a:rPr>
+              <a:t> – </a:t>
+            </a:r>
+            <a:r>
+              <a:rPr lang="ru-RU" sz="2000" dirty="0" err="1">
+                <a:latin typeface="Times New Roman" panose="02020603050405020304" pitchFamily="18" charset="0"/>
+                <a:cs typeface="Times New Roman" panose="02020603050405020304" pitchFamily="18" charset="0"/>
+              </a:rPr>
+              <a:t>від</a:t>
+            </a:r>
+            <a:r>
+              <a:rPr lang="ru-RU" sz="2000" dirty="0">
+                <a:latin typeface="Times New Roman" panose="02020603050405020304" pitchFamily="18" charset="0"/>
+                <a:cs typeface="Times New Roman" panose="02020603050405020304" pitchFamily="18" charset="0"/>
+              </a:rPr>
+              <a:t> </a:t>
+            </a:r>
+            <a:r>
+              <a:rPr lang="ru-RU" sz="2000" dirty="0" err="1">
+                <a:latin typeface="Times New Roman" panose="02020603050405020304" pitchFamily="18" charset="0"/>
+                <a:cs typeface="Times New Roman" panose="02020603050405020304" pitchFamily="18" charset="0"/>
+              </a:rPr>
+              <a:t>кольору</a:t>
+            </a:r>
+            <a:r>
+              <a:rPr lang="ru-RU" sz="2000" dirty="0">
+                <a:latin typeface="Times New Roman" panose="02020603050405020304" pitchFamily="18" charset="0"/>
+                <a:cs typeface="Times New Roman" panose="02020603050405020304" pitchFamily="18" charset="0"/>
+              </a:rPr>
+              <a:t> #667eea до #764ba2. </a:t>
+            </a:r>
+            <a:r>
+              <a:rPr lang="ru-RU" sz="2000" dirty="0" err="1">
+                <a:latin typeface="Times New Roman" panose="02020603050405020304" pitchFamily="18" charset="0"/>
+                <a:cs typeface="Times New Roman" panose="02020603050405020304" pitchFamily="18" charset="0"/>
+              </a:rPr>
+              <a:t>Ці</a:t>
+            </a:r>
+            <a:r>
+              <a:rPr lang="ru-RU" sz="2000" dirty="0">
+                <a:latin typeface="Times New Roman" panose="02020603050405020304" pitchFamily="18" charset="0"/>
+                <a:cs typeface="Times New Roman" panose="02020603050405020304" pitchFamily="18" charset="0"/>
+              </a:rPr>
+              <a:t> </a:t>
+            </a:r>
+            <a:r>
+              <a:rPr lang="ru-RU" sz="2000" dirty="0" err="1">
+                <a:latin typeface="Times New Roman" panose="02020603050405020304" pitchFamily="18" charset="0"/>
+                <a:cs typeface="Times New Roman" panose="02020603050405020304" pitchFamily="18" charset="0"/>
+              </a:rPr>
+              <a:t>кольори</a:t>
+            </a:r>
+            <a:r>
+              <a:rPr lang="ru-RU" sz="2000" dirty="0">
+                <a:latin typeface="Times New Roman" panose="02020603050405020304" pitchFamily="18" charset="0"/>
+                <a:cs typeface="Times New Roman" panose="02020603050405020304" pitchFamily="18" charset="0"/>
+              </a:rPr>
+              <a:t> </a:t>
+            </a:r>
+            <a:r>
+              <a:rPr lang="ru-RU" sz="2000" dirty="0" err="1">
+                <a:latin typeface="Times New Roman" panose="02020603050405020304" pitchFamily="18" charset="0"/>
+                <a:cs typeface="Times New Roman" panose="02020603050405020304" pitchFamily="18" charset="0"/>
+              </a:rPr>
+              <a:t>асоціюються</a:t>
+            </a:r>
+            <a:r>
+              <a:rPr lang="ru-RU" sz="2000" dirty="0">
+                <a:latin typeface="Times New Roman" panose="02020603050405020304" pitchFamily="18" charset="0"/>
+                <a:cs typeface="Times New Roman" panose="02020603050405020304" pitchFamily="18" charset="0"/>
+              </a:rPr>
+              <a:t> з </a:t>
+            </a:r>
+            <a:r>
+              <a:rPr lang="ru-RU" sz="2000" dirty="0" err="1">
+                <a:latin typeface="Times New Roman" panose="02020603050405020304" pitchFamily="18" charset="0"/>
+                <a:cs typeface="Times New Roman" panose="02020603050405020304" pitchFamily="18" charset="0"/>
+              </a:rPr>
+              <a:t>технологічністю</a:t>
+            </a:r>
+            <a:r>
+              <a:rPr lang="ru-RU" sz="2000" dirty="0">
+                <a:latin typeface="Times New Roman" panose="02020603050405020304" pitchFamily="18" charset="0"/>
+                <a:cs typeface="Times New Roman" panose="02020603050405020304" pitchFamily="18" charset="0"/>
+              </a:rPr>
+              <a:t>, </a:t>
+            </a:r>
+            <a:r>
+              <a:rPr lang="ru-RU" sz="2000" dirty="0" err="1">
+                <a:latin typeface="Times New Roman" panose="02020603050405020304" pitchFamily="18" charset="0"/>
+                <a:cs typeface="Times New Roman" panose="02020603050405020304" pitchFamily="18" charset="0"/>
+              </a:rPr>
+              <a:t>спокоєм</a:t>
+            </a:r>
+            <a:r>
+              <a:rPr lang="ru-RU" sz="2000" dirty="0">
+                <a:latin typeface="Times New Roman" panose="02020603050405020304" pitchFamily="18" charset="0"/>
+                <a:cs typeface="Times New Roman" panose="02020603050405020304" pitchFamily="18" charset="0"/>
+              </a:rPr>
+              <a:t> та </a:t>
+            </a:r>
+            <a:r>
+              <a:rPr lang="ru-RU" sz="2000" dirty="0" err="1">
+                <a:latin typeface="Times New Roman" panose="02020603050405020304" pitchFamily="18" charset="0"/>
+                <a:cs typeface="Times New Roman" panose="02020603050405020304" pitchFamily="18" charset="0"/>
+              </a:rPr>
+              <a:t>елегантністю</a:t>
+            </a:r>
+            <a:r>
+              <a:rPr lang="ru-RU" sz="2000" dirty="0">
+                <a:latin typeface="Times New Roman" panose="02020603050405020304" pitchFamily="18" charset="0"/>
+                <a:cs typeface="Times New Roman" panose="02020603050405020304" pitchFamily="18" charset="0"/>
+              </a:rPr>
+              <a:t>, а </a:t>
+            </a:r>
+            <a:r>
+              <a:rPr lang="ru-RU" sz="2000" dirty="0" err="1">
+                <a:latin typeface="Times New Roman" panose="02020603050405020304" pitchFamily="18" charset="0"/>
+                <a:cs typeface="Times New Roman" panose="02020603050405020304" pitchFamily="18" charset="0"/>
+              </a:rPr>
+              <a:t>білий</a:t>
+            </a:r>
+            <a:r>
+              <a:rPr lang="ru-RU" sz="2000" dirty="0">
+                <a:latin typeface="Times New Roman" panose="02020603050405020304" pitchFamily="18" charset="0"/>
+                <a:cs typeface="Times New Roman" panose="02020603050405020304" pitchFamily="18" charset="0"/>
+              </a:rPr>
+              <a:t> фон </a:t>
+            </a:r>
+            <a:r>
+              <a:rPr lang="ru-RU" sz="2000" dirty="0" err="1">
+                <a:latin typeface="Times New Roman" panose="02020603050405020304" pitchFamily="18" charset="0"/>
+                <a:cs typeface="Times New Roman" panose="02020603050405020304" pitchFamily="18" charset="0"/>
+              </a:rPr>
+              <a:t>карток</a:t>
+            </a:r>
+            <a:r>
+              <a:rPr lang="ru-RU" sz="2000" dirty="0">
+                <a:latin typeface="Times New Roman" panose="02020603050405020304" pitchFamily="18" charset="0"/>
+                <a:cs typeface="Times New Roman" panose="02020603050405020304" pitchFamily="18" charset="0"/>
+              </a:rPr>
+              <a:t> </a:t>
+            </a:r>
+            <a:r>
+              <a:rPr lang="ru-RU" sz="2000" dirty="0" err="1">
+                <a:latin typeface="Times New Roman" panose="02020603050405020304" pitchFamily="18" charset="0"/>
+                <a:cs typeface="Times New Roman" panose="02020603050405020304" pitchFamily="18" charset="0"/>
+              </a:rPr>
+              <a:t>забезпечує</a:t>
+            </a:r>
+            <a:r>
+              <a:rPr lang="ru-RU" sz="2000" dirty="0">
+                <a:latin typeface="Times New Roman" panose="02020603050405020304" pitchFamily="18" charset="0"/>
+                <a:cs typeface="Times New Roman" panose="02020603050405020304" pitchFamily="18" charset="0"/>
+              </a:rPr>
+              <a:t> </a:t>
+            </a:r>
+            <a:r>
+              <a:rPr lang="ru-RU" sz="2000" dirty="0" err="1">
+                <a:latin typeface="Times New Roman" panose="02020603050405020304" pitchFamily="18" charset="0"/>
+                <a:cs typeface="Times New Roman" panose="02020603050405020304" pitchFamily="18" charset="0"/>
+              </a:rPr>
+              <a:t>контрастність</a:t>
+            </a:r>
+            <a:r>
+              <a:rPr lang="ru-RU" sz="2000" dirty="0">
+                <a:latin typeface="Times New Roman" panose="02020603050405020304" pitchFamily="18" charset="0"/>
+                <a:cs typeface="Times New Roman" panose="02020603050405020304" pitchFamily="18" charset="0"/>
+              </a:rPr>
+              <a:t> та </a:t>
+            </a:r>
+            <a:r>
+              <a:rPr lang="ru-RU" sz="2000" dirty="0" err="1">
+                <a:latin typeface="Times New Roman" panose="02020603050405020304" pitchFamily="18" charset="0"/>
+                <a:cs typeface="Times New Roman" panose="02020603050405020304" pitchFamily="18" charset="0"/>
+              </a:rPr>
+              <a:t>читабельність</a:t>
+            </a:r>
+            <a:r>
+              <a:rPr lang="ru-RU" sz="2000" dirty="0">
+                <a:latin typeface="Times New Roman" panose="02020603050405020304" pitchFamily="18" charset="0"/>
+                <a:cs typeface="Times New Roman" panose="02020603050405020304" pitchFamily="18" charset="0"/>
+              </a:rPr>
+              <a:t> тексту</a:t>
+            </a:r>
+          </a:p>
+          <a:p>
+            <a:pPr marL="342900" indent="-342900" algn="just">
+              <a:buFont typeface="Arial" panose="020B0604020202020204" pitchFamily="34" charset="0"/>
+              <a:buChar char="•"/>
+            </a:pPr>
+            <a:r>
+              <a:rPr lang="ru-RU" sz="2000" dirty="0" err="1">
+                <a:latin typeface="Times New Roman" panose="02020603050405020304" pitchFamily="18" charset="0"/>
+                <a:cs typeface="Times New Roman" panose="02020603050405020304" pitchFamily="18" charset="0"/>
+              </a:rPr>
+              <a:t>Адаптивність</a:t>
+            </a:r>
+            <a:r>
+              <a:rPr lang="ru-RU" sz="2000" dirty="0">
+                <a:latin typeface="Times New Roman" panose="02020603050405020304" pitchFamily="18" charset="0"/>
+                <a:cs typeface="Times New Roman" panose="02020603050405020304" pitchFamily="18" charset="0"/>
+              </a:rPr>
+              <a:t>: </a:t>
+            </a:r>
+            <a:r>
+              <a:rPr lang="ru-RU" sz="2000" dirty="0" err="1">
+                <a:latin typeface="Times New Roman" panose="02020603050405020304" pitchFamily="18" charset="0"/>
+                <a:cs typeface="Times New Roman" panose="02020603050405020304" pitchFamily="18" charset="0"/>
+              </a:rPr>
+              <a:t>всі</a:t>
+            </a:r>
+            <a:r>
+              <a:rPr lang="ru-RU" sz="2000" dirty="0">
+                <a:latin typeface="Times New Roman" panose="02020603050405020304" pitchFamily="18" charset="0"/>
+                <a:cs typeface="Times New Roman" panose="02020603050405020304" pitchFamily="18" charset="0"/>
+              </a:rPr>
+              <a:t> </a:t>
+            </a:r>
+            <a:r>
+              <a:rPr lang="ru-RU" sz="2000" dirty="0" err="1">
+                <a:latin typeface="Times New Roman" panose="02020603050405020304" pitchFamily="18" charset="0"/>
+                <a:cs typeface="Times New Roman" panose="02020603050405020304" pitchFamily="18" charset="0"/>
+              </a:rPr>
+              <a:t>елементи</a:t>
+            </a:r>
+            <a:r>
+              <a:rPr lang="ru-RU" sz="2000" dirty="0">
+                <a:latin typeface="Times New Roman" panose="02020603050405020304" pitchFamily="18" charset="0"/>
+                <a:cs typeface="Times New Roman" panose="02020603050405020304" pitchFamily="18" charset="0"/>
+              </a:rPr>
+              <a:t> </a:t>
+            </a:r>
+            <a:r>
+              <a:rPr lang="ru-RU" sz="2000" dirty="0" err="1">
+                <a:latin typeface="Times New Roman" panose="02020603050405020304" pitchFamily="18" charset="0"/>
+                <a:cs typeface="Times New Roman" panose="02020603050405020304" pitchFamily="18" charset="0"/>
+              </a:rPr>
+              <a:t>коректно</a:t>
+            </a:r>
+            <a:r>
+              <a:rPr lang="ru-RU" sz="2000" dirty="0">
+                <a:latin typeface="Times New Roman" panose="02020603050405020304" pitchFamily="18" charset="0"/>
+                <a:cs typeface="Times New Roman" panose="02020603050405020304" pitchFamily="18" charset="0"/>
+              </a:rPr>
+              <a:t> </a:t>
+            </a:r>
+            <a:r>
+              <a:rPr lang="ru-RU" sz="2000" dirty="0" err="1">
+                <a:latin typeface="Times New Roman" panose="02020603050405020304" pitchFamily="18" charset="0"/>
+                <a:cs typeface="Times New Roman" panose="02020603050405020304" pitchFamily="18" charset="0"/>
+              </a:rPr>
+              <a:t>масштабуються</a:t>
+            </a:r>
+            <a:r>
+              <a:rPr lang="ru-RU" sz="2000" dirty="0">
+                <a:latin typeface="Times New Roman" panose="02020603050405020304" pitchFamily="18" charset="0"/>
+                <a:cs typeface="Times New Roman" panose="02020603050405020304" pitchFamily="18" charset="0"/>
+              </a:rPr>
+              <a:t> при </a:t>
+            </a:r>
+            <a:r>
+              <a:rPr lang="ru-RU" sz="2000" dirty="0" err="1">
+                <a:latin typeface="Times New Roman" panose="02020603050405020304" pitchFamily="18" charset="0"/>
+                <a:cs typeface="Times New Roman" panose="02020603050405020304" pitchFamily="18" charset="0"/>
+              </a:rPr>
+              <a:t>зміні</a:t>
+            </a:r>
+            <a:r>
+              <a:rPr lang="ru-RU" sz="2000" dirty="0">
+                <a:latin typeface="Times New Roman" panose="02020603050405020304" pitchFamily="18" charset="0"/>
+                <a:cs typeface="Times New Roman" panose="02020603050405020304" pitchFamily="18" charset="0"/>
+              </a:rPr>
+              <a:t> </a:t>
+            </a:r>
+            <a:r>
+              <a:rPr lang="ru-RU" sz="2000" dirty="0" err="1">
+                <a:latin typeface="Times New Roman" panose="02020603050405020304" pitchFamily="18" charset="0"/>
+                <a:cs typeface="Times New Roman" panose="02020603050405020304" pitchFamily="18" charset="0"/>
+              </a:rPr>
+              <a:t>розміру</a:t>
+            </a:r>
+            <a:r>
+              <a:rPr lang="ru-RU" sz="2000" dirty="0">
+                <a:latin typeface="Times New Roman" panose="02020603050405020304" pitchFamily="18" charset="0"/>
+                <a:cs typeface="Times New Roman" panose="02020603050405020304" pitchFamily="18" charset="0"/>
+              </a:rPr>
+              <a:t> </a:t>
+            </a:r>
+            <a:r>
+              <a:rPr lang="ru-RU" sz="2000" dirty="0" err="1">
+                <a:latin typeface="Times New Roman" panose="02020603050405020304" pitchFamily="18" charset="0"/>
+                <a:cs typeface="Times New Roman" panose="02020603050405020304" pitchFamily="18" charset="0"/>
+              </a:rPr>
+              <a:t>вікна</a:t>
+            </a:r>
+            <a:r>
+              <a:rPr lang="ru-RU" sz="2000" dirty="0">
+                <a:latin typeface="Times New Roman" panose="02020603050405020304" pitchFamily="18" charset="0"/>
+                <a:cs typeface="Times New Roman" panose="02020603050405020304" pitchFamily="18" charset="0"/>
+              </a:rPr>
+              <a:t> </a:t>
+            </a:r>
+            <a:r>
+              <a:rPr lang="ru-RU" sz="2000" dirty="0" err="1">
+                <a:latin typeface="Times New Roman" panose="02020603050405020304" pitchFamily="18" charset="0"/>
+                <a:cs typeface="Times New Roman" panose="02020603050405020304" pitchFamily="18" charset="0"/>
+              </a:rPr>
+              <a:t>або</a:t>
+            </a:r>
+            <a:r>
+              <a:rPr lang="ru-RU" sz="2000" dirty="0">
+                <a:latin typeface="Times New Roman" panose="02020603050405020304" pitchFamily="18" charset="0"/>
+                <a:cs typeface="Times New Roman" panose="02020603050405020304" pitchFamily="18" charset="0"/>
+              </a:rPr>
+              <a:t> при </a:t>
+            </a:r>
+            <a:r>
+              <a:rPr lang="ru-RU" sz="2000" dirty="0" err="1">
+                <a:latin typeface="Times New Roman" panose="02020603050405020304" pitchFamily="18" charset="0"/>
+                <a:cs typeface="Times New Roman" panose="02020603050405020304" pitchFamily="18" charset="0"/>
+              </a:rPr>
+              <a:t>перегляді</a:t>
+            </a:r>
+            <a:r>
+              <a:rPr lang="ru-RU" sz="2000" dirty="0">
+                <a:latin typeface="Times New Roman" panose="02020603050405020304" pitchFamily="18" charset="0"/>
+                <a:cs typeface="Times New Roman" panose="02020603050405020304" pitchFamily="18" charset="0"/>
+              </a:rPr>
+              <a:t> з </a:t>
+            </a:r>
+            <a:r>
+              <a:rPr lang="ru-RU" sz="2000" dirty="0" err="1">
+                <a:latin typeface="Times New Roman" panose="02020603050405020304" pitchFamily="18" charset="0"/>
+                <a:cs typeface="Times New Roman" panose="02020603050405020304" pitchFamily="18" charset="0"/>
+              </a:rPr>
+              <a:t>мобільного</a:t>
+            </a:r>
+            <a:r>
+              <a:rPr lang="ru-RU" sz="2000" dirty="0">
+                <a:latin typeface="Times New Roman" panose="02020603050405020304" pitchFamily="18" charset="0"/>
+                <a:cs typeface="Times New Roman" panose="02020603050405020304" pitchFamily="18" charset="0"/>
+              </a:rPr>
+              <a:t> пристрою. Для </a:t>
+            </a:r>
+            <a:r>
+              <a:rPr lang="ru-RU" sz="2000" dirty="0" err="1">
+                <a:latin typeface="Times New Roman" panose="02020603050405020304" pitchFamily="18" charset="0"/>
+                <a:cs typeface="Times New Roman" panose="02020603050405020304" pitchFamily="18" charset="0"/>
+              </a:rPr>
+              <a:t>цього</a:t>
+            </a:r>
+            <a:r>
+              <a:rPr lang="ru-RU" sz="2000" dirty="0">
+                <a:latin typeface="Times New Roman" panose="02020603050405020304" pitchFamily="18" charset="0"/>
+                <a:cs typeface="Times New Roman" panose="02020603050405020304" pitchFamily="18" charset="0"/>
+              </a:rPr>
+              <a:t> </a:t>
+            </a:r>
+            <a:r>
+              <a:rPr lang="ru-RU" sz="2000" dirty="0" err="1">
+                <a:latin typeface="Times New Roman" panose="02020603050405020304" pitchFamily="18" charset="0"/>
+                <a:cs typeface="Times New Roman" panose="02020603050405020304" pitchFamily="18" charset="0"/>
+              </a:rPr>
+              <a:t>використовуються</a:t>
+            </a:r>
+            <a:r>
+              <a:rPr lang="ru-RU" sz="2000" dirty="0">
+                <a:latin typeface="Times New Roman" panose="02020603050405020304" pitchFamily="18" charset="0"/>
+                <a:cs typeface="Times New Roman" panose="02020603050405020304" pitchFamily="18" charset="0"/>
+              </a:rPr>
+              <a:t> </a:t>
+            </a:r>
+            <a:r>
+              <a:rPr lang="ru-RU" sz="2000" dirty="0" err="1">
+                <a:latin typeface="Times New Roman" panose="02020603050405020304" pitchFamily="18" charset="0"/>
+                <a:cs typeface="Times New Roman" panose="02020603050405020304" pitchFamily="18" charset="0"/>
+              </a:rPr>
+              <a:t>медіа-запити</a:t>
+            </a:r>
+            <a:r>
+              <a:rPr lang="ru-RU" sz="2000" dirty="0">
+                <a:latin typeface="Times New Roman" panose="02020603050405020304" pitchFamily="18" charset="0"/>
+                <a:cs typeface="Times New Roman" panose="02020603050405020304" pitchFamily="18" charset="0"/>
+              </a:rPr>
+              <a:t> у CSS</a:t>
+            </a:r>
+          </a:p>
+          <a:p>
+            <a:pPr marL="342900" indent="-342900" algn="just">
+              <a:buFont typeface="Arial" panose="020B0604020202020204" pitchFamily="34" charset="0"/>
+              <a:buChar char="•"/>
+            </a:pPr>
+            <a:r>
+              <a:rPr lang="ru-RU" sz="2000" dirty="0" err="1">
+                <a:latin typeface="Times New Roman" panose="02020603050405020304" pitchFamily="18" charset="0"/>
+                <a:cs typeface="Times New Roman" panose="02020603050405020304" pitchFamily="18" charset="0"/>
+              </a:rPr>
+              <a:t>Швидкодія</a:t>
+            </a:r>
+            <a:r>
+              <a:rPr lang="ru-RU" sz="2000" dirty="0">
+                <a:latin typeface="Times New Roman" panose="02020603050405020304" pitchFamily="18" charset="0"/>
+                <a:cs typeface="Times New Roman" panose="02020603050405020304" pitchFamily="18" charset="0"/>
+              </a:rPr>
+              <a:t>: </a:t>
+            </a:r>
+            <a:r>
+              <a:rPr lang="ru-RU" sz="2000" dirty="0" err="1">
+                <a:latin typeface="Times New Roman" panose="02020603050405020304" pitchFamily="18" charset="0"/>
+                <a:cs typeface="Times New Roman" panose="02020603050405020304" pitchFamily="18" charset="0"/>
+              </a:rPr>
+              <a:t>кешування</a:t>
+            </a:r>
+            <a:r>
+              <a:rPr lang="ru-RU" sz="2000" dirty="0">
+                <a:latin typeface="Times New Roman" panose="02020603050405020304" pitchFamily="18" charset="0"/>
+                <a:cs typeface="Times New Roman" panose="02020603050405020304" pitchFamily="18" charset="0"/>
+              </a:rPr>
+              <a:t>, </a:t>
+            </a:r>
+            <a:r>
+              <a:rPr lang="ru-RU" sz="2000" dirty="0" err="1">
+                <a:latin typeface="Times New Roman" panose="02020603050405020304" pitchFamily="18" charset="0"/>
+                <a:cs typeface="Times New Roman" panose="02020603050405020304" pitchFamily="18" charset="0"/>
+              </a:rPr>
+              <a:t>оптимізація</a:t>
+            </a:r>
+            <a:r>
+              <a:rPr lang="ru-RU" sz="2000" dirty="0">
+                <a:latin typeface="Times New Roman" panose="02020603050405020304" pitchFamily="18" charset="0"/>
+                <a:cs typeface="Times New Roman" panose="02020603050405020304" pitchFamily="18" charset="0"/>
+              </a:rPr>
+              <a:t> </a:t>
+            </a:r>
+            <a:r>
+              <a:rPr lang="ru-RU" sz="2000" dirty="0" err="1">
+                <a:latin typeface="Times New Roman" panose="02020603050405020304" pitchFamily="18" charset="0"/>
+                <a:cs typeface="Times New Roman" panose="02020603050405020304" pitchFamily="18" charset="0"/>
+              </a:rPr>
+              <a:t>завантаження</a:t>
+            </a:r>
+            <a:endParaRPr lang="ru-RU" sz="2000" dirty="0">
+              <a:latin typeface="Times New Roman" panose="02020603050405020304" pitchFamily="18" charset="0"/>
+              <a:cs typeface="Times New Roman" panose="02020603050405020304" pitchFamily="18" charset="0"/>
+            </a:endParaRPr>
+          </a:p>
+          <a:p>
+            <a:pPr marL="342900" indent="-342900" algn="just">
+              <a:buFont typeface="Arial" panose="020B0604020202020204" pitchFamily="34" charset="0"/>
+              <a:buChar char="•"/>
+            </a:pPr>
+            <a:r>
+              <a:rPr lang="ru-RU" sz="2000" dirty="0" err="1">
+                <a:latin typeface="Times New Roman" panose="02020603050405020304" pitchFamily="18" charset="0"/>
+                <a:cs typeface="Times New Roman" panose="02020603050405020304" pitchFamily="18" charset="0"/>
+              </a:rPr>
+              <a:t>Типогрфіка</a:t>
+            </a:r>
+            <a:r>
+              <a:rPr lang="ru-RU" sz="2000" dirty="0">
+                <a:latin typeface="Times New Roman" panose="02020603050405020304" pitchFamily="18" charset="0"/>
+                <a:cs typeface="Times New Roman" panose="02020603050405020304" pitchFamily="18" charset="0"/>
+              </a:rPr>
+              <a:t>: </a:t>
+            </a:r>
+            <a:r>
+              <a:rPr lang="ru-RU" sz="2000" dirty="0" err="1">
+                <a:latin typeface="Times New Roman" panose="02020603050405020304" pitchFamily="18" charset="0"/>
+                <a:cs typeface="Times New Roman" panose="02020603050405020304" pitchFamily="18" charset="0"/>
+              </a:rPr>
+              <a:t>основним</a:t>
+            </a:r>
+            <a:r>
+              <a:rPr lang="ru-RU" sz="2000" dirty="0">
+                <a:latin typeface="Times New Roman" panose="02020603050405020304" pitchFamily="18" charset="0"/>
+                <a:cs typeface="Times New Roman" panose="02020603050405020304" pitchFamily="18" charset="0"/>
+              </a:rPr>
+              <a:t> шрифтом </a:t>
+            </a:r>
+            <a:r>
+              <a:rPr lang="ru-RU" sz="2000" dirty="0" err="1">
+                <a:latin typeface="Times New Roman" panose="02020603050405020304" pitchFamily="18" charset="0"/>
+                <a:cs typeface="Times New Roman" panose="02020603050405020304" pitchFamily="18" charset="0"/>
+              </a:rPr>
+              <a:t>обрано</a:t>
+            </a:r>
+            <a:r>
+              <a:rPr lang="ru-RU" sz="2000" dirty="0">
+                <a:latin typeface="Times New Roman" panose="02020603050405020304" pitchFamily="18" charset="0"/>
+                <a:cs typeface="Times New Roman" panose="02020603050405020304" pitchFamily="18" charset="0"/>
+              </a:rPr>
+              <a:t> «</a:t>
+            </a:r>
+            <a:r>
+              <a:rPr lang="ru-RU" sz="2000" dirty="0" err="1">
+                <a:latin typeface="Times New Roman" panose="02020603050405020304" pitchFamily="18" charset="0"/>
+                <a:cs typeface="Times New Roman" panose="02020603050405020304" pitchFamily="18" charset="0"/>
+              </a:rPr>
+              <a:t>Segoe</a:t>
+            </a:r>
+            <a:r>
+              <a:rPr lang="ru-RU" sz="2000" dirty="0">
+                <a:latin typeface="Times New Roman" panose="02020603050405020304" pitchFamily="18" charset="0"/>
+                <a:cs typeface="Times New Roman" panose="02020603050405020304" pitchFamily="18" charset="0"/>
+              </a:rPr>
+              <a:t> UI» – </a:t>
+            </a:r>
+            <a:r>
+              <a:rPr lang="ru-RU" sz="2000" dirty="0" err="1">
+                <a:latin typeface="Times New Roman" panose="02020603050405020304" pitchFamily="18" charset="0"/>
+                <a:cs typeface="Times New Roman" panose="02020603050405020304" pitchFamily="18" charset="0"/>
+              </a:rPr>
+              <a:t>це</a:t>
+            </a:r>
+            <a:r>
+              <a:rPr lang="ru-RU" sz="2000" dirty="0">
+                <a:latin typeface="Times New Roman" panose="02020603050405020304" pitchFamily="18" charset="0"/>
+                <a:cs typeface="Times New Roman" panose="02020603050405020304" pitchFamily="18" charset="0"/>
+              </a:rPr>
+              <a:t> </a:t>
+            </a:r>
+            <a:r>
+              <a:rPr lang="ru-RU" sz="2000" dirty="0" err="1">
+                <a:latin typeface="Times New Roman" panose="02020603050405020304" pitchFamily="18" charset="0"/>
+                <a:cs typeface="Times New Roman" panose="02020603050405020304" pitchFamily="18" charset="0"/>
+              </a:rPr>
+              <a:t>системний</a:t>
+            </a:r>
+            <a:r>
+              <a:rPr lang="ru-RU" sz="2000" dirty="0">
+                <a:latin typeface="Times New Roman" panose="02020603050405020304" pitchFamily="18" charset="0"/>
+                <a:cs typeface="Times New Roman" panose="02020603050405020304" pitchFamily="18" charset="0"/>
+              </a:rPr>
+              <a:t> шрифт, </a:t>
+            </a:r>
+            <a:r>
+              <a:rPr lang="ru-RU" sz="2000" dirty="0" err="1">
+                <a:latin typeface="Times New Roman" panose="02020603050405020304" pitchFamily="18" charset="0"/>
+                <a:cs typeface="Times New Roman" panose="02020603050405020304" pitchFamily="18" charset="0"/>
+              </a:rPr>
+              <a:t>який</a:t>
+            </a:r>
+            <a:r>
+              <a:rPr lang="ru-RU" sz="2000" dirty="0">
+                <a:latin typeface="Times New Roman" panose="02020603050405020304" pitchFamily="18" charset="0"/>
+                <a:cs typeface="Times New Roman" panose="02020603050405020304" pitchFamily="18" charset="0"/>
+              </a:rPr>
+              <a:t> </a:t>
+            </a:r>
+            <a:r>
+              <a:rPr lang="ru-RU" sz="2000" dirty="0" err="1">
+                <a:latin typeface="Times New Roman" panose="02020603050405020304" pitchFamily="18" charset="0"/>
+                <a:cs typeface="Times New Roman" panose="02020603050405020304" pitchFamily="18" charset="0"/>
+              </a:rPr>
+              <a:t>гарантовано</a:t>
+            </a:r>
+            <a:r>
+              <a:rPr lang="ru-RU" sz="2000" dirty="0">
+                <a:latin typeface="Times New Roman" panose="02020603050405020304" pitchFamily="18" charset="0"/>
+                <a:cs typeface="Times New Roman" panose="02020603050405020304" pitchFamily="18" charset="0"/>
+              </a:rPr>
+              <a:t> є на </a:t>
+            </a:r>
+            <a:r>
+              <a:rPr lang="ru-RU" sz="2000" dirty="0" err="1">
+                <a:latin typeface="Times New Roman" panose="02020603050405020304" pitchFamily="18" charset="0"/>
+                <a:cs typeface="Times New Roman" panose="02020603050405020304" pitchFamily="18" charset="0"/>
+              </a:rPr>
+              <a:t>всіх</a:t>
+            </a:r>
+            <a:r>
+              <a:rPr lang="ru-RU" sz="2000" dirty="0">
+                <a:latin typeface="Times New Roman" panose="02020603050405020304" pitchFamily="18" charset="0"/>
+                <a:cs typeface="Times New Roman" panose="02020603050405020304" pitchFamily="18" charset="0"/>
+              </a:rPr>
+              <a:t> пристроях, </a:t>
+            </a:r>
+            <a:r>
+              <a:rPr lang="ru-RU" sz="2000" dirty="0" err="1">
+                <a:latin typeface="Times New Roman" panose="02020603050405020304" pitchFamily="18" charset="0"/>
+                <a:cs typeface="Times New Roman" panose="02020603050405020304" pitchFamily="18" charset="0"/>
+              </a:rPr>
+              <a:t>що</a:t>
+            </a:r>
+            <a:r>
+              <a:rPr lang="ru-RU" sz="2000" dirty="0">
+                <a:latin typeface="Times New Roman" panose="02020603050405020304" pitchFamily="18" charset="0"/>
+                <a:cs typeface="Times New Roman" panose="02020603050405020304" pitchFamily="18" charset="0"/>
+              </a:rPr>
+              <a:t> </a:t>
+            </a:r>
+            <a:r>
+              <a:rPr lang="ru-RU" sz="2000" dirty="0" err="1">
+                <a:latin typeface="Times New Roman" panose="02020603050405020304" pitchFamily="18" charset="0"/>
+                <a:cs typeface="Times New Roman" panose="02020603050405020304" pitchFamily="18" charset="0"/>
+              </a:rPr>
+              <a:t>забезпечує</a:t>
+            </a:r>
+            <a:r>
+              <a:rPr lang="ru-RU" sz="2000" dirty="0">
+                <a:latin typeface="Times New Roman" panose="02020603050405020304" pitchFamily="18" charset="0"/>
+                <a:cs typeface="Times New Roman" panose="02020603050405020304" pitchFamily="18" charset="0"/>
+              </a:rPr>
+              <a:t> </a:t>
+            </a:r>
+            <a:r>
+              <a:rPr lang="ru-RU" sz="2000" dirty="0" err="1">
+                <a:latin typeface="Times New Roman" panose="02020603050405020304" pitchFamily="18" charset="0"/>
+                <a:cs typeface="Times New Roman" panose="02020603050405020304" pitchFamily="18" charset="0"/>
+              </a:rPr>
+              <a:t>швидке</a:t>
+            </a:r>
+            <a:r>
+              <a:rPr lang="ru-RU" sz="2000" dirty="0">
+                <a:latin typeface="Times New Roman" panose="02020603050405020304" pitchFamily="18" charset="0"/>
+                <a:cs typeface="Times New Roman" panose="02020603050405020304" pitchFamily="18" charset="0"/>
+              </a:rPr>
+              <a:t> </a:t>
+            </a:r>
+            <a:r>
+              <a:rPr lang="ru-RU" sz="2000" dirty="0" err="1">
+                <a:latin typeface="Times New Roman" panose="02020603050405020304" pitchFamily="18" charset="0"/>
+                <a:cs typeface="Times New Roman" panose="02020603050405020304" pitchFamily="18" charset="0"/>
+              </a:rPr>
+              <a:t>завантаження</a:t>
+            </a:r>
+            <a:r>
+              <a:rPr lang="ru-RU" sz="2000" dirty="0">
+                <a:latin typeface="Times New Roman" panose="02020603050405020304" pitchFamily="18" charset="0"/>
+                <a:cs typeface="Times New Roman" panose="02020603050405020304" pitchFamily="18" charset="0"/>
+              </a:rPr>
+              <a:t> та </a:t>
+            </a:r>
+            <a:r>
+              <a:rPr lang="ru-RU" sz="2000" dirty="0" err="1">
+                <a:latin typeface="Times New Roman" panose="02020603050405020304" pitchFamily="18" charset="0"/>
+                <a:cs typeface="Times New Roman" panose="02020603050405020304" pitchFamily="18" charset="0"/>
+              </a:rPr>
+              <a:t>коректне</a:t>
+            </a:r>
+            <a:r>
+              <a:rPr lang="ru-RU" sz="2000" dirty="0">
+                <a:latin typeface="Times New Roman" panose="02020603050405020304" pitchFamily="18" charset="0"/>
+                <a:cs typeface="Times New Roman" panose="02020603050405020304" pitchFamily="18" charset="0"/>
+              </a:rPr>
+              <a:t> </a:t>
+            </a:r>
+            <a:r>
+              <a:rPr lang="ru-RU" sz="2000" dirty="0" err="1">
+                <a:latin typeface="Times New Roman" panose="02020603050405020304" pitchFamily="18" charset="0"/>
+                <a:cs typeface="Times New Roman" panose="02020603050405020304" pitchFamily="18" charset="0"/>
+              </a:rPr>
+              <a:t>відображення</a:t>
+            </a:r>
+            <a:r>
+              <a:rPr lang="ru-RU" sz="2000" dirty="0">
+                <a:latin typeface="Times New Roman" panose="02020603050405020304" pitchFamily="18" charset="0"/>
+                <a:cs typeface="Times New Roman" panose="02020603050405020304" pitchFamily="18" charset="0"/>
+              </a:rPr>
+              <a:t>, </a:t>
+            </a:r>
+            <a:r>
+              <a:rPr lang="ru-RU" sz="2000" dirty="0" err="1">
+                <a:latin typeface="Times New Roman" panose="02020603050405020304" pitchFamily="18" charset="0"/>
+                <a:cs typeface="Times New Roman" panose="02020603050405020304" pitchFamily="18" charset="0"/>
+              </a:rPr>
+              <a:t>розміри</a:t>
+            </a:r>
+            <a:r>
+              <a:rPr lang="ru-RU" sz="2000" dirty="0">
+                <a:latin typeface="Times New Roman" panose="02020603050405020304" pitchFamily="18" charset="0"/>
+                <a:cs typeface="Times New Roman" panose="02020603050405020304" pitchFamily="18" charset="0"/>
+              </a:rPr>
+              <a:t>: текст 14px, заголовки 24 - 32px</a:t>
+            </a:r>
+          </a:p>
+          <a:p>
+            <a:pPr algn="just"/>
+            <a:r>
+              <a:rPr lang="ru-RU" sz="2000" dirty="0" err="1">
+                <a:latin typeface="Times New Roman" panose="02020603050405020304" pitchFamily="18" charset="0"/>
+                <a:cs typeface="Times New Roman" panose="02020603050405020304" pitchFamily="18" charset="0"/>
+              </a:rPr>
+              <a:t>Основні</a:t>
+            </a:r>
+            <a:r>
+              <a:rPr lang="ru-RU" sz="2000" dirty="0">
+                <a:latin typeface="Times New Roman" panose="02020603050405020304" pitchFamily="18" charset="0"/>
+                <a:cs typeface="Times New Roman" panose="02020603050405020304" pitchFamily="18" charset="0"/>
+              </a:rPr>
+              <a:t> </a:t>
+            </a:r>
+            <a:r>
+              <a:rPr lang="ru-RU" sz="2000" dirty="0" err="1">
+                <a:latin typeface="Times New Roman" panose="02020603050405020304" pitchFamily="18" charset="0"/>
+                <a:cs typeface="Times New Roman" panose="02020603050405020304" pitchFamily="18" charset="0"/>
+              </a:rPr>
+              <a:t>елементи</a:t>
+            </a:r>
+            <a:r>
+              <a:rPr lang="ru-RU" sz="2000" dirty="0">
+                <a:latin typeface="Times New Roman" panose="02020603050405020304" pitchFamily="18" charset="0"/>
+                <a:cs typeface="Times New Roman" panose="02020603050405020304" pitchFamily="18" charset="0"/>
+              </a:rPr>
+              <a:t> </a:t>
+            </a:r>
+            <a:r>
+              <a:rPr lang="ru-RU" sz="2000" dirty="0" err="1">
+                <a:latin typeface="Times New Roman" panose="02020603050405020304" pitchFamily="18" charset="0"/>
+                <a:cs typeface="Times New Roman" panose="02020603050405020304" pitchFamily="18" charset="0"/>
+              </a:rPr>
+              <a:t>інтерфейсу</a:t>
+            </a:r>
+            <a:r>
+              <a:rPr lang="ru-RU" sz="2000" dirty="0">
+                <a:latin typeface="Times New Roman" panose="02020603050405020304" pitchFamily="18" charset="0"/>
+                <a:cs typeface="Times New Roman" panose="02020603050405020304" pitchFamily="18" charset="0"/>
+              </a:rPr>
+              <a:t>:</a:t>
+            </a:r>
+          </a:p>
+          <a:p>
+            <a:pPr marL="342900" indent="-342900" algn="just">
+              <a:buFont typeface="Arial" panose="020B0604020202020204" pitchFamily="34" charset="0"/>
+              <a:buChar char="•"/>
+            </a:pPr>
+            <a:r>
+              <a:rPr lang="ru-RU" sz="2000" dirty="0">
+                <a:latin typeface="Times New Roman" panose="02020603050405020304" pitchFamily="18" charset="0"/>
+                <a:cs typeface="Times New Roman" panose="02020603050405020304" pitchFamily="18" charset="0"/>
+              </a:rPr>
+              <a:t>Лого</a:t>
+            </a:r>
+          </a:p>
+          <a:p>
+            <a:pPr marL="342900" indent="-342900" algn="just">
+              <a:buFont typeface="Arial" panose="020B0604020202020204" pitchFamily="34" charset="0"/>
+              <a:buChar char="•"/>
+            </a:pPr>
+            <a:r>
+              <a:rPr lang="ru-RU" sz="2000" dirty="0">
+                <a:latin typeface="Times New Roman" panose="02020603050405020304" pitchFamily="18" charset="0"/>
+                <a:cs typeface="Times New Roman" panose="02020603050405020304" pitchFamily="18" charset="0"/>
+              </a:rPr>
+              <a:t>Головна</a:t>
+            </a:r>
+          </a:p>
+          <a:p>
+            <a:pPr marL="342900" indent="-342900" algn="just">
+              <a:buFont typeface="Arial" panose="020B0604020202020204" pitchFamily="34" charset="0"/>
+              <a:buChar char="•"/>
+            </a:pPr>
+            <a:r>
+              <a:rPr lang="ru-RU" sz="2000" dirty="0" err="1">
+                <a:latin typeface="Times New Roman" panose="02020603050405020304" pitchFamily="18" charset="0"/>
+                <a:cs typeface="Times New Roman" panose="02020603050405020304" pitchFamily="18" charset="0"/>
+              </a:rPr>
+              <a:t>Кабінет</a:t>
+            </a:r>
+            <a:endParaRPr lang="ru-RU" sz="2000" dirty="0">
+              <a:latin typeface="Times New Roman" panose="02020603050405020304" pitchFamily="18" charset="0"/>
+              <a:cs typeface="Times New Roman" panose="02020603050405020304" pitchFamily="18" charset="0"/>
+            </a:endParaRPr>
+          </a:p>
+          <a:p>
+            <a:pPr marL="342900" indent="-342900" algn="just">
+              <a:buFont typeface="Arial" panose="020B0604020202020204" pitchFamily="34" charset="0"/>
+              <a:buChar char="•"/>
+            </a:pPr>
+            <a:r>
+              <a:rPr lang="ru-RU" sz="2000" dirty="0">
+                <a:latin typeface="Times New Roman" panose="02020603050405020304" pitchFamily="18" charset="0"/>
+                <a:cs typeface="Times New Roman" panose="02020603050405020304" pitchFamily="18" charset="0"/>
+              </a:rPr>
+              <a:t>АІ -</a:t>
+            </a:r>
+            <a:r>
+              <a:rPr lang="ru-RU" sz="2000" dirty="0" err="1">
+                <a:latin typeface="Times New Roman" panose="02020603050405020304" pitchFamily="18" charset="0"/>
+                <a:cs typeface="Times New Roman" panose="02020603050405020304" pitchFamily="18" charset="0"/>
+              </a:rPr>
+              <a:t>аналіз</a:t>
+            </a:r>
+            <a:endParaRPr lang="ru-RU" sz="2000" dirty="0">
+              <a:latin typeface="Times New Roman" panose="02020603050405020304" pitchFamily="18" charset="0"/>
+              <a:cs typeface="Times New Roman" panose="02020603050405020304" pitchFamily="18" charset="0"/>
+            </a:endParaRPr>
+          </a:p>
+          <a:p>
+            <a:pPr marL="342900" indent="-342900" algn="just">
+              <a:buFont typeface="Arial" panose="020B0604020202020204" pitchFamily="34" charset="0"/>
+              <a:buChar char="•"/>
+            </a:pPr>
+            <a:r>
+              <a:rPr lang="ru-RU" sz="2000" dirty="0" err="1">
+                <a:latin typeface="Times New Roman" panose="02020603050405020304" pitchFamily="18" charset="0"/>
+                <a:cs typeface="Times New Roman" panose="02020603050405020304" pitchFamily="18" charset="0"/>
+              </a:rPr>
+              <a:t>Плани</a:t>
+            </a:r>
+            <a:endParaRPr lang="ru-RU" sz="2000" dirty="0">
+              <a:latin typeface="Times New Roman" panose="02020603050405020304" pitchFamily="18" charset="0"/>
+              <a:cs typeface="Times New Roman" panose="02020603050405020304" pitchFamily="18" charset="0"/>
+            </a:endParaRPr>
+          </a:p>
+          <a:p>
+            <a:pPr marL="342900" indent="-342900" algn="just">
+              <a:buFont typeface="Arial" panose="020B0604020202020204" pitchFamily="34" charset="0"/>
+              <a:buChar char="•"/>
+            </a:pPr>
+            <a:r>
+              <a:rPr lang="ru-RU" sz="2000" dirty="0" err="1">
+                <a:latin typeface="Times New Roman" panose="02020603050405020304" pitchFamily="18" charset="0"/>
+                <a:cs typeface="Times New Roman" panose="02020603050405020304" pitchFamily="18" charset="0"/>
+              </a:rPr>
+              <a:t>Прогрес</a:t>
+            </a:r>
+            <a:endParaRPr lang="ru-RU" sz="2000" dirty="0">
+              <a:latin typeface="Times New Roman" panose="02020603050405020304" pitchFamily="18" charset="0"/>
+              <a:cs typeface="Times New Roman" panose="02020603050405020304" pitchFamily="18" charset="0"/>
+            </a:endParaRPr>
+          </a:p>
+        </p:txBody>
+      </p:sp>
+      <p:pic>
+        <p:nvPicPr>
+          <p:cNvPr id="3" name="Рисунок 2">
+            <a:extLst>
+              <a:ext uri="{FF2B5EF4-FFF2-40B4-BE49-F238E27FC236}">
+                <a16:creationId xmlns:a16="http://schemas.microsoft.com/office/drawing/2014/main" id="{13FB9F27-E3F3-9857-4A9B-EF7372BB5C1F}"/>
+              </a:ext>
+            </a:extLst>
+          </p:cNvPr>
+          <p:cNvPicPr>
+            <a:picLocks noChangeAspect="1"/>
+          </p:cNvPicPr>
+          <p:nvPr/>
+        </p:nvPicPr>
+        <p:blipFill>
+          <a:blip r:embed="rId2"/>
+          <a:stretch>
+            <a:fillRect/>
+          </a:stretch>
+        </p:blipFill>
+        <p:spPr>
+          <a:xfrm>
+            <a:off x="7185320" y="4514455"/>
+            <a:ext cx="3925229" cy="1993368"/>
+          </a:xfrm>
+          <a:prstGeom prst="rect">
+            <a:avLst/>
+          </a:prstGeom>
+        </p:spPr>
+      </p:pic>
+    </p:spTree>
+    <p:extLst>
+      <p:ext uri="{BB962C8B-B14F-4D97-AF65-F5344CB8AC3E}">
+        <p14:creationId xmlns:p14="http://schemas.microsoft.com/office/powerpoint/2010/main" val="3391578935"/>
+      </p:ext>
+    </p:extLst>
+  </p:cSld>
+  <p:clrMapOvr>
+    <a:masterClrMapping/>
+  </p:clrMapOvr>
+</p:sld>
+</file>
+
+<file path=ppt/slides/slide12.xml><?xml version="1.0" encoding="utf-8"?>
+<p:sld xmlns:a="http://schemas.openxmlformats.org/drawingml/2006/main" xmlns:r="http://schemas.openxmlformats.org/officeDocument/2006/relationships" xmlns:p="http://schemas.openxmlformats.org/presentationml/2006/main">
+  <p:cSld>
+    <p:spTree>
+      <p:nvGrpSpPr>
+        <p:cNvPr id="1" name="">
+          <a:extLst>
+            <a:ext uri="{FF2B5EF4-FFF2-40B4-BE49-F238E27FC236}">
               <a16:creationId xmlns:a16="http://schemas.microsoft.com/office/drawing/2014/main" id="{E9015EDE-8320-3119-DBFC-90D23BD7150C}"/>
             </a:ext>
           </a:extLst>
@@ -6970,7 +9287,7 @@
 </p:sld>
 </file>
 
-<file path=ppt/slides/slide11.xml><?xml version="1.0" encoding="utf-8"?>
+<file path=ppt/slides/slide13.xml><?xml version="1.0" encoding="utf-8"?>
 <p:sld xmlns:a="http://schemas.openxmlformats.org/drawingml/2006/main" xmlns:r="http://schemas.openxmlformats.org/officeDocument/2006/relationships" xmlns:p="http://schemas.openxmlformats.org/presentationml/2006/main">
   <p:cSld>
     <p:spTree>
@@ -7422,7 +9739,7 @@
 </p:sld>
 </file>
 
-<file path=ppt/slides/slide12.xml><?xml version="1.0" encoding="utf-8"?>
+<file path=ppt/slides/slide14.xml><?xml version="1.0" encoding="utf-8"?>
 <p:sld xmlns:a="http://schemas.openxmlformats.org/drawingml/2006/main" xmlns:r="http://schemas.openxmlformats.org/officeDocument/2006/relationships" xmlns:p="http://schemas.openxmlformats.org/presentationml/2006/main">
   <p:cSld>
     <p:spTree>
@@ -7515,6 +9832,7 @@
           </a:bodyPr>
           <a:lstStyle/>
           <a:p>
+            <a:pPr algn="just"/>
             <a:r>
               <a:rPr lang="ru-RU" sz="2000" dirty="0">
                 <a:latin typeface="Times New Roman" panose="02020603050405020304" pitchFamily="18" charset="0"/>
@@ -7594,6 +9912,7 @@
             </a:r>
           </a:p>
           <a:p>
+            <a:pPr algn="just"/>
             <a:r>
               <a:rPr lang="ru-RU" sz="2000" dirty="0">
                 <a:latin typeface="Times New Roman" panose="02020603050405020304" pitchFamily="18" charset="0"/>
@@ -7687,6 +10006,7 @@
             </a:r>
           </a:p>
           <a:p>
+            <a:pPr algn="just"/>
             <a:r>
               <a:rPr lang="ru-RU" sz="2000" dirty="0">
                 <a:latin typeface="Times New Roman" panose="02020603050405020304" pitchFamily="18" charset="0"/>
@@ -7850,6 +10170,7 @@
             </a:r>
           </a:p>
           <a:p>
+            <a:pPr algn="just"/>
             <a:r>
               <a:rPr lang="ru-RU" sz="2000" dirty="0">
                 <a:latin typeface="Times New Roman" panose="02020603050405020304" pitchFamily="18" charset="0"/>
@@ -7957,6 +10278,7 @@
             </a:r>
           </a:p>
           <a:p>
+            <a:pPr algn="just"/>
             <a:r>
               <a:rPr lang="ru-RU" sz="2000" dirty="0">
                 <a:latin typeface="Times New Roman" panose="02020603050405020304" pitchFamily="18" charset="0"/>
@@ -8078,6 +10400,7 @@
             </a:r>
           </a:p>
           <a:p>
+            <a:pPr algn="just"/>
             <a:r>
               <a:rPr lang="ru-RU" sz="2000" dirty="0">
                 <a:latin typeface="Times New Roman" panose="02020603050405020304" pitchFamily="18" charset="0"/>
@@ -8227,12 +10550,14 @@
             </a:r>
           </a:p>
           <a:p>
+            <a:pPr algn="just"/>
             <a:endParaRPr lang="ru-RU" sz="2000" dirty="0">
               <a:latin typeface="Times New Roman" panose="02020603050405020304" pitchFamily="18" charset="0"/>
               <a:cs typeface="Times New Roman" panose="02020603050405020304" pitchFamily="18" charset="0"/>
             </a:endParaRPr>
           </a:p>
           <a:p>
+            <a:pPr algn="just"/>
             <a:r>
               <a:rPr lang="ru-RU" sz="2000" dirty="0">
                 <a:latin typeface="Times New Roman" panose="02020603050405020304" pitchFamily="18" charset="0"/>
@@ -8634,12 +10959,14 @@
             </a:r>
           </a:p>
           <a:p>
+            <a:pPr algn="just"/>
             <a:endParaRPr lang="ru-RU" sz="2000" dirty="0">
               <a:latin typeface="Times New Roman" panose="02020603050405020304" pitchFamily="18" charset="0"/>
               <a:cs typeface="Times New Roman" panose="02020603050405020304" pitchFamily="18" charset="0"/>
             </a:endParaRPr>
           </a:p>
           <a:p>
+            <a:pPr algn="just"/>
             <a:r>
               <a:rPr lang="ru-RU" sz="2000" dirty="0">
                 <a:latin typeface="Times New Roman" panose="02020603050405020304" pitchFamily="18" charset="0"/>
@@ -8901,7 +11228,7 @@
 </p:sld>
 </file>
 
-<file path=ppt/slides/slide13.xml><?xml version="1.0" encoding="utf-8"?>
+<file path=ppt/slides/slide15.xml><?xml version="1.0" encoding="utf-8"?>
 <p:sld xmlns:a="http://schemas.openxmlformats.org/drawingml/2006/main" xmlns:r="http://schemas.openxmlformats.org/officeDocument/2006/relationships" xmlns:p="http://schemas.openxmlformats.org/presentationml/2006/main">
   <p:cSld>
     <p:spTree>
@@ -9110,7 +11437,7 @@
           </a:bodyPr>
           <a:lstStyle/>
           <a:p>
-            <a:pPr latinLnBrk="1"/>
+            <a:pPr algn="just" latinLnBrk="1"/>
             <a:r>
               <a:rPr lang="ru-RU" sz="2000" dirty="0">
                 <a:latin typeface="Times New Roman" panose="02020603050405020304" pitchFamily="18" charset="0"/>
@@ -9345,7 +11672,7 @@
           </a:bodyPr>
           <a:lstStyle/>
           <a:p>
-            <a:pPr marL="285750" indent="-285750" latinLnBrk="1">
+            <a:pPr marL="285750" indent="-285750" algn="just" latinLnBrk="1">
               <a:buFont typeface="Arial" panose="020B0604020202020204" pitchFamily="34" charset="0"/>
               <a:buChar char="•"/>
             </a:pPr>
@@ -9421,7 +11748,7 @@
             </a:r>
           </a:p>
           <a:p>
-            <a:pPr marL="285750" indent="-285750" latinLnBrk="1">
+            <a:pPr marL="285750" indent="-285750" algn="just" latinLnBrk="1">
               <a:buFont typeface="Arial" panose="020B0604020202020204" pitchFamily="34" charset="0"/>
               <a:buChar char="•"/>
             </a:pPr>
@@ -9483,7 +11810,7 @@
             </a:r>
           </a:p>
           <a:p>
-            <a:pPr marL="285750" indent="-285750" latinLnBrk="1">
+            <a:pPr marL="285750" indent="-285750" algn="just" latinLnBrk="1">
               <a:buFont typeface="Arial" panose="020B0604020202020204" pitchFamily="34" charset="0"/>
               <a:buChar char="•"/>
             </a:pPr>
@@ -9531,7 +11858,7 @@
             </a:r>
           </a:p>
           <a:p>
-            <a:pPr marL="285750" indent="-285750" latinLnBrk="1">
+            <a:pPr marL="285750" indent="-285750" algn="just" latinLnBrk="1">
               <a:buFont typeface="Arial" panose="020B0604020202020204" pitchFamily="34" charset="0"/>
               <a:buChar char="•"/>
             </a:pPr>
@@ -9677,7 +12004,7 @@
             </a:r>
           </a:p>
           <a:p>
-            <a:pPr marL="285750" indent="-285750" latinLnBrk="1">
+            <a:pPr marL="285750" indent="-285750" algn="just" latinLnBrk="1">
               <a:buFont typeface="Arial" panose="020B0604020202020204" pitchFamily="34" charset="0"/>
               <a:buChar char="•"/>
             </a:pPr>
@@ -9834,14 +12161,14 @@
             </a:endParaRPr>
           </a:p>
           <a:p>
-            <a:pPr latinLnBrk="1"/>
+            <a:pPr algn="just" latinLnBrk="1"/>
             <a:endParaRPr lang="ru-RU" sz="2000" dirty="0">
               <a:latin typeface="Times New Roman" panose="02020603050405020304" pitchFamily="18" charset="0"/>
               <a:cs typeface="Times New Roman" panose="02020603050405020304" pitchFamily="18" charset="0"/>
             </a:endParaRPr>
           </a:p>
           <a:p>
-            <a:pPr latinLnBrk="1"/>
+            <a:pPr algn="just" latinLnBrk="1"/>
             <a:r>
               <a:rPr lang="ru-RU" sz="2000" dirty="0">
                 <a:latin typeface="Times New Roman" panose="02020603050405020304" pitchFamily="18" charset="0"/>
@@ -9893,14 +12220,14 @@
             </a:r>
           </a:p>
           <a:p>
-            <a:pPr latinLnBrk="1"/>
+            <a:pPr algn="just" latinLnBrk="1"/>
             <a:endParaRPr lang="ru-RU" sz="2000" dirty="0">
               <a:latin typeface="Times New Roman" panose="02020603050405020304" pitchFamily="18" charset="0"/>
               <a:cs typeface="Times New Roman" panose="02020603050405020304" pitchFamily="18" charset="0"/>
             </a:endParaRPr>
           </a:p>
           <a:p>
-            <a:pPr latinLnBrk="1"/>
+            <a:pPr algn="just" latinLnBrk="1"/>
             <a:r>
               <a:rPr lang="ru-RU" sz="2000" dirty="0">
                 <a:latin typeface="Times New Roman" panose="02020603050405020304" pitchFamily="18" charset="0"/>
@@ -10042,7 +12369,7 @@
           </a:bodyPr>
           <a:lstStyle/>
           <a:p>
-            <a:pPr latinLnBrk="1"/>
+            <a:pPr algn="just" latinLnBrk="1"/>
             <a:r>
               <a:rPr lang="ru-RU" sz="2000" dirty="0">
                 <a:latin typeface="Times New Roman" panose="02020603050405020304" pitchFamily="18" charset="0"/>
@@ -10444,7 +12771,7 @@
             </a:r>
           </a:p>
           <a:p>
-            <a:pPr latinLnBrk="1"/>
+            <a:pPr algn="just" latinLnBrk="1"/>
             <a:r>
               <a:rPr lang="ru-RU" sz="2000" dirty="0">
                 <a:latin typeface="Times New Roman" panose="02020603050405020304" pitchFamily="18" charset="0"/>
@@ -10454,7 +12781,7 @@
             </a:r>
           </a:p>
           <a:p>
-            <a:pPr latinLnBrk="1"/>
+            <a:pPr algn="just" latinLnBrk="1"/>
             <a:r>
               <a:rPr lang="ru-RU" sz="2000" dirty="0">
                 <a:latin typeface="Times New Roman" panose="02020603050405020304" pitchFamily="18" charset="0"/>
@@ -10464,7 +12791,7 @@
             </a:r>
           </a:p>
           <a:p>
-            <a:pPr latinLnBrk="1"/>
+            <a:pPr algn="just" latinLnBrk="1"/>
             <a:r>
               <a:rPr lang="ru-RU" sz="2000" dirty="0">
                 <a:latin typeface="Times New Roman" panose="02020603050405020304" pitchFamily="18" charset="0"/>
@@ -10544,7 +12871,7 @@
             </a:r>
           </a:p>
           <a:p>
-            <a:pPr latinLnBrk="1"/>
+            <a:pPr algn="just" latinLnBrk="1"/>
             <a:r>
               <a:rPr lang="ru-RU" sz="2000" dirty="0">
                 <a:latin typeface="Times New Roman" panose="02020603050405020304" pitchFamily="18" charset="0"/>
@@ -10596,14 +12923,14 @@
             </a:r>
           </a:p>
           <a:p>
-            <a:pPr latinLnBrk="1"/>
+            <a:pPr algn="just" latinLnBrk="1"/>
             <a:endParaRPr lang="ru-RU" sz="2000" dirty="0">
               <a:latin typeface="Times New Roman" panose="02020603050405020304" pitchFamily="18" charset="0"/>
               <a:cs typeface="Times New Roman" panose="02020603050405020304" pitchFamily="18" charset="0"/>
             </a:endParaRPr>
           </a:p>
           <a:p>
-            <a:pPr latinLnBrk="1"/>
+            <a:pPr algn="just" latinLnBrk="1"/>
             <a:r>
               <a:rPr lang="ru-RU" sz="2000" dirty="0">
                 <a:latin typeface="Times New Roman" panose="02020603050405020304" pitchFamily="18" charset="0"/>
@@ -10830,14 +13157,14 @@
             </a:r>
           </a:p>
           <a:p>
-            <a:pPr latinLnBrk="1"/>
+            <a:pPr algn="just" latinLnBrk="1"/>
             <a:endParaRPr lang="ru-RU" sz="2000" dirty="0">
               <a:latin typeface="Times New Roman" panose="02020603050405020304" pitchFamily="18" charset="0"/>
               <a:cs typeface="Times New Roman" panose="02020603050405020304" pitchFamily="18" charset="0"/>
             </a:endParaRPr>
           </a:p>
           <a:p>
-            <a:pPr latinLnBrk="1"/>
+            <a:pPr algn="just" latinLnBrk="1"/>
             <a:r>
               <a:rPr lang="ru-RU" sz="2000" dirty="0">
                 <a:latin typeface="Times New Roman" panose="02020603050405020304" pitchFamily="18" charset="0"/>
@@ -11001,14 +13328,14 @@
             </a:r>
           </a:p>
           <a:p>
-            <a:pPr latinLnBrk="1"/>
+            <a:pPr algn="just" latinLnBrk="1"/>
             <a:endParaRPr lang="ru-RU" sz="2000" dirty="0">
               <a:latin typeface="Times New Roman" panose="02020603050405020304" pitchFamily="18" charset="0"/>
               <a:cs typeface="Times New Roman" panose="02020603050405020304" pitchFamily="18" charset="0"/>
             </a:endParaRPr>
           </a:p>
           <a:p>
-            <a:pPr latinLnBrk="1"/>
+            <a:pPr algn="just" latinLnBrk="1"/>
             <a:endParaRPr lang="ru-RU" sz="2000" dirty="0">
               <a:latin typeface="Times New Roman" panose="02020603050405020304" pitchFamily="18" charset="0"/>
               <a:cs typeface="Times New Roman" panose="02020603050405020304" pitchFamily="18" charset="0"/>
@@ -11080,6 +13407,7 @@
           </a:bodyPr>
           <a:lstStyle/>
           <a:p>
+            <a:pPr algn="just"/>
             <a:r>
               <a:rPr lang="ru-RU" sz="2800" dirty="0" err="1">
                 <a:latin typeface="Times New Roman" panose="02020603050405020304" pitchFamily="18" charset="0"/>
@@ -11181,6 +13509,7 @@
           </a:bodyPr>
           <a:lstStyle/>
           <a:p>
+            <a:pPr algn="just"/>
             <a:r>
               <a:rPr lang="ru-RU" sz="2000" dirty="0" err="1">
                 <a:latin typeface="Times New Roman" panose="02020603050405020304" pitchFamily="18" charset="0"/>
@@ -11239,7 +13568,7 @@
             </a:r>
           </a:p>
           <a:p>
-            <a:pPr marL="285750" indent="-285750">
+            <a:pPr marL="285750" indent="-285750" algn="just">
               <a:buFont typeface="Arial" panose="020B0604020202020204" pitchFamily="34" charset="0"/>
               <a:buChar char="•"/>
             </a:pPr>
@@ -11298,7 +13627,7 @@
             </a:endParaRPr>
           </a:p>
           <a:p>
-            <a:pPr marL="285750" indent="-285750">
+            <a:pPr marL="285750" indent="-285750" algn="just">
               <a:buFont typeface="Arial" panose="020B0604020202020204" pitchFamily="34" charset="0"/>
               <a:buChar char="•"/>
             </a:pPr>
@@ -11385,7 +13714,7 @@
             </a:endParaRPr>
           </a:p>
           <a:p>
-            <a:pPr marL="285750" indent="-285750">
+            <a:pPr marL="285750" indent="-285750" algn="just">
               <a:buFont typeface="Arial" panose="020B0604020202020204" pitchFamily="34" charset="0"/>
               <a:buChar char="•"/>
             </a:pPr>
@@ -11430,7 +13759,7 @@
             </a:endParaRPr>
           </a:p>
           <a:p>
-            <a:pPr marL="285750" indent="-285750">
+            <a:pPr marL="285750" indent="-285750" algn="just">
               <a:buFont typeface="Arial" panose="020B0604020202020204" pitchFamily="34" charset="0"/>
               <a:buChar char="•"/>
             </a:pPr>
@@ -11475,6 +13804,7 @@
             </a:endParaRPr>
           </a:p>
           <a:p>
+            <a:pPr algn="just"/>
             <a:r>
               <a:rPr lang="ru-RU" sz="2000" dirty="0" err="1">
                 <a:latin typeface="Times New Roman" panose="02020603050405020304" pitchFamily="18" charset="0"/>
@@ -11799,6 +14129,7 @@
             </a:r>
           </a:p>
           <a:p>
+            <a:pPr algn="just"/>
             <a:endParaRPr lang="ru-RU" sz="2400" dirty="0">
               <a:latin typeface="Times New Roman" panose="02020603050405020304" pitchFamily="18" charset="0"/>
               <a:cs typeface="Times New Roman" panose="02020603050405020304" pitchFamily="18" charset="0"/>
@@ -12524,6 +14855,7 @@
           </a:bodyPr>
           <a:lstStyle/>
           <a:p>
+            <a:pPr algn="just"/>
             <a:r>
               <a:rPr lang="ru-RU" sz="2800" dirty="0">
                 <a:latin typeface="Times New Roman" panose="02020603050405020304" pitchFamily="18" charset="0"/>
@@ -12601,6 +14933,7 @@
           </a:bodyPr>
           <a:lstStyle/>
           <a:p>
+            <a:pPr algn="just"/>
             <a:r>
               <a:rPr lang="ru-RU" sz="2000" dirty="0">
                 <a:latin typeface="Times New Roman" panose="02020603050405020304" pitchFamily="18" charset="0"/>
@@ -12750,7 +15083,7 @@
             </a:r>
           </a:p>
           <a:p>
-            <a:pPr marL="342900" indent="-342900">
+            <a:pPr marL="342900" indent="-342900" algn="just">
               <a:buFont typeface="+mj-lt"/>
               <a:buAutoNum type="arabicPeriod"/>
             </a:pPr>
@@ -12837,7 +15170,7 @@
             </a:endParaRPr>
           </a:p>
           <a:p>
-            <a:pPr marL="342900" indent="-342900">
+            <a:pPr marL="342900" indent="-342900" algn="just">
               <a:buFont typeface="+mj-lt"/>
               <a:buAutoNum type="arabicPeriod"/>
             </a:pPr>
@@ -12896,7 +15229,7 @@
             </a:endParaRPr>
           </a:p>
           <a:p>
-            <a:pPr marL="342900" indent="-342900">
+            <a:pPr marL="342900" indent="-342900" algn="just">
               <a:buFont typeface="+mj-lt"/>
               <a:buAutoNum type="arabicPeriod"/>
             </a:pPr>
@@ -12969,7 +15302,7 @@
             </a:endParaRPr>
           </a:p>
           <a:p>
-            <a:pPr marL="342900" indent="-342900">
+            <a:pPr marL="342900" indent="-342900" algn="just">
               <a:buFont typeface="+mj-lt"/>
               <a:buAutoNum type="arabicPeriod"/>
             </a:pPr>
@@ -13070,7 +15403,7 @@
             </a:endParaRPr>
           </a:p>
           <a:p>
-            <a:pPr marL="342900" indent="-342900">
+            <a:pPr marL="342900" indent="-342900" algn="just">
               <a:buFont typeface="+mj-lt"/>
               <a:buAutoNum type="arabicPeriod"/>
             </a:pPr>
@@ -13160,7 +15493,7 @@
             </a:r>
           </a:p>
           <a:p>
-            <a:pPr marL="342900" indent="-342900">
+            <a:pPr marL="342900" indent="-342900" algn="just">
               <a:buFont typeface="+mj-lt"/>
               <a:buAutoNum type="arabicPeriod"/>
             </a:pPr>
@@ -13275,7 +15608,7 @@
             </a:endParaRPr>
           </a:p>
           <a:p>
-            <a:pPr marL="342900" indent="-342900">
+            <a:pPr marL="342900" indent="-342900" algn="just">
               <a:buFont typeface="+mj-lt"/>
               <a:buAutoNum type="arabicPeriod"/>
             </a:pPr>
@@ -13285,6 +15618,7 @@
             </a:endParaRPr>
           </a:p>
           <a:p>
+            <a:pPr algn="just"/>
             <a:r>
               <a:rPr lang="ru-RU" sz="2000" dirty="0">
                 <a:latin typeface="Times New Roman" panose="02020603050405020304" pitchFamily="18" charset="0"/>
@@ -13322,6 +15656,7 @@
             </a:r>
           </a:p>
           <a:p>
+            <a:pPr algn="just"/>
             <a:r>
               <a:rPr lang="ru-RU" sz="2000" dirty="0">
                 <a:latin typeface="Times New Roman" panose="02020603050405020304" pitchFamily="18" charset="0"/>
@@ -13443,6 +15778,7 @@
             </a:r>
           </a:p>
           <a:p>
+            <a:pPr algn="just"/>
             <a:r>
               <a:rPr lang="ru-RU" sz="2000" dirty="0">
                 <a:latin typeface="Times New Roman" panose="02020603050405020304" pitchFamily="18" charset="0"/>
@@ -13477,6 +15813,7 @@
             </a:endParaRPr>
           </a:p>
           <a:p>
+            <a:pPr algn="just"/>
             <a:r>
               <a:rPr lang="ru-RU" sz="2000" dirty="0">
                 <a:latin typeface="Times New Roman" panose="02020603050405020304" pitchFamily="18" charset="0"/>
@@ -13497,6 +15834,7 @@
             </a:endParaRPr>
           </a:p>
           <a:p>
+            <a:pPr algn="just"/>
             <a:r>
               <a:rPr lang="ru-RU" sz="2000" dirty="0">
                 <a:latin typeface="Times New Roman" panose="02020603050405020304" pitchFamily="18" charset="0"/>
@@ -13582,6 +15920,7 @@
           </a:bodyPr>
           <a:lstStyle/>
           <a:p>
+            <a:pPr algn="just"/>
             <a:r>
               <a:rPr lang="ru-RU" sz="2800" dirty="0" err="1">
                 <a:latin typeface="Times New Roman" panose="02020603050405020304" pitchFamily="18" charset="0"/>
@@ -13652,6 +15991,7 @@
           </a:bodyPr>
           <a:lstStyle/>
           <a:p>
+            <a:pPr algn="just"/>
             <a:r>
               <a:rPr lang="uk-UA" sz="2000" dirty="0">
                 <a:latin typeface="Times New Roman" panose="02020603050405020304" pitchFamily="18" charset="0"/>
@@ -13696,6 +16036,7 @@
             </a:r>
           </a:p>
           <a:p>
+            <a:pPr algn="just"/>
             <a:r>
               <a:rPr lang="ru-RU" sz="2000" dirty="0">
                 <a:latin typeface="Times New Roman" panose="02020603050405020304" pitchFamily="18" charset="0"/>
@@ -13856,6 +16197,7 @@
             </a:endParaRPr>
           </a:p>
           <a:p>
+            <a:pPr algn="just"/>
             <a:r>
               <a:rPr lang="ru-RU" sz="2000" dirty="0">
                 <a:latin typeface="Times New Roman" panose="02020603050405020304" pitchFamily="18" charset="0"/>
@@ -13963,6 +16305,7 @@
             </a:r>
           </a:p>
           <a:p>
+            <a:pPr algn="just"/>
             <a:r>
               <a:rPr lang="ru-RU" sz="2000" dirty="0">
                 <a:latin typeface="Times New Roman" panose="02020603050405020304" pitchFamily="18" charset="0"/>
@@ -14011,12 +16354,14 @@
             </a:endParaRPr>
           </a:p>
           <a:p>
+            <a:pPr algn="just"/>
             <a:endParaRPr lang="ru-RU" sz="2000" dirty="0">
               <a:latin typeface="Times New Roman" panose="02020603050405020304" pitchFamily="18" charset="0"/>
               <a:cs typeface="Times New Roman" panose="02020603050405020304" pitchFamily="18" charset="0"/>
             </a:endParaRPr>
           </a:p>
           <a:p>
+            <a:pPr algn="just"/>
             <a:r>
               <a:rPr lang="uk-UA" sz="2000" dirty="0">
                 <a:latin typeface="Times New Roman" panose="02020603050405020304" pitchFamily="18" charset="0"/>
@@ -14061,6 +16406,7 @@
             </a:r>
           </a:p>
           <a:p>
+            <a:pPr algn="just"/>
             <a:r>
               <a:rPr lang="ru-RU" sz="2000" dirty="0">
                 <a:latin typeface="Times New Roman" panose="02020603050405020304" pitchFamily="18" charset="0"/>
@@ -14081,6 +16427,7 @@
             </a:endParaRPr>
           </a:p>
           <a:p>
+            <a:pPr algn="just"/>
             <a:r>
               <a:rPr lang="ru-RU" sz="2000" dirty="0">
                 <a:latin typeface="Times New Roman" panose="02020603050405020304" pitchFamily="18" charset="0"/>
@@ -14132,6 +16479,7 @@
             </a:r>
           </a:p>
           <a:p>
+            <a:pPr algn="just"/>
             <a:r>
               <a:rPr lang="ru-RU" sz="2000" dirty="0">
                 <a:latin typeface="Times New Roman" panose="02020603050405020304" pitchFamily="18" charset="0"/>
@@ -14180,6 +16528,7 @@
             </a:endParaRPr>
           </a:p>
           <a:p>
+            <a:pPr algn="just"/>
             <a:r>
               <a:rPr lang="ru-RU" sz="2000" dirty="0">
                 <a:latin typeface="Times New Roman" panose="02020603050405020304" pitchFamily="18" charset="0"/>
@@ -14315,12 +16664,14 @@
             </a:r>
           </a:p>
           <a:p>
+            <a:pPr algn="just"/>
             <a:endParaRPr lang="ru-RU" sz="2000" dirty="0">
               <a:latin typeface="Times New Roman" panose="02020603050405020304" pitchFamily="18" charset="0"/>
               <a:cs typeface="Times New Roman" panose="02020603050405020304" pitchFamily="18" charset="0"/>
             </a:endParaRPr>
           </a:p>
           <a:p>
+            <a:pPr algn="just"/>
             <a:r>
               <a:rPr lang="uk-UA" sz="2000" dirty="0">
                 <a:latin typeface="Times New Roman" panose="02020603050405020304" pitchFamily="18" charset="0"/>
@@ -14358,6 +16709,7 @@
             </a:r>
           </a:p>
           <a:p>
+            <a:pPr algn="just"/>
             <a:r>
               <a:rPr lang="ru-RU" sz="2000" dirty="0">
                 <a:latin typeface="Times New Roman" panose="02020603050405020304" pitchFamily="18" charset="0"/>
@@ -14437,6 +16789,7 @@
             </a:r>
           </a:p>
           <a:p>
+            <a:pPr algn="just"/>
             <a:r>
               <a:rPr lang="ru-RU" sz="2000" dirty="0">
                 <a:latin typeface="Times New Roman" panose="02020603050405020304" pitchFamily="18" charset="0"/>
@@ -14471,6 +16824,7 @@
             </a:endParaRPr>
           </a:p>
           <a:p>
+            <a:pPr algn="just"/>
             <a:r>
               <a:rPr lang="ru-RU" sz="2000" dirty="0">
                 <a:latin typeface="Times New Roman" panose="02020603050405020304" pitchFamily="18" charset="0"/>
@@ -14519,12 +16873,14 @@
             </a:endParaRPr>
           </a:p>
           <a:p>
+            <a:pPr algn="just"/>
             <a:endParaRPr lang="ru-RU" sz="2000" dirty="0">
               <a:latin typeface="Times New Roman" panose="02020603050405020304" pitchFamily="18" charset="0"/>
               <a:cs typeface="Times New Roman" panose="02020603050405020304" pitchFamily="18" charset="0"/>
             </a:endParaRPr>
           </a:p>
           <a:p>
+            <a:pPr algn="just"/>
             <a:r>
               <a:rPr lang="ru-RU" dirty="0"/>
               <a:t>	</a:t>
@@ -14627,6 +16983,1775 @@
 </file>
 
 <file path=ppt/slides/slide7.xml><?xml version="1.0" encoding="utf-8"?>
+<p:sld xmlns:a="http://schemas.openxmlformats.org/drawingml/2006/main" xmlns:r="http://schemas.openxmlformats.org/officeDocument/2006/relationships" xmlns:p="http://schemas.openxmlformats.org/presentationml/2006/main">
+  <p:cSld>
+    <p:spTree>
+      <p:nvGrpSpPr>
+        <p:cNvPr id="1" name="">
+          <a:extLst>
+            <a:ext uri="{FF2B5EF4-FFF2-40B4-BE49-F238E27FC236}">
+              <a16:creationId xmlns:a16="http://schemas.microsoft.com/office/drawing/2014/main" id="{45297E59-0493-6E52-7F7F-D823D6E7FC7F}"/>
+            </a:ext>
+          </a:extLst>
+        </p:cNvPr>
+        <p:cNvGrpSpPr/>
+        <p:nvPr/>
+      </p:nvGrpSpPr>
+      <p:grpSpPr>
+        <a:xfrm>
+          <a:off x="0" y="0"/>
+          <a:ext cx="0" cy="0"/>
+          <a:chOff x="0" y="0"/>
+          <a:chExt cx="0" cy="0"/>
+        </a:xfrm>
+      </p:grpSpPr>
+      <p:sp>
+        <p:nvSpPr>
+          <p:cNvPr id="4" name="TextBox 3">
+            <a:extLst>
+              <a:ext uri="{FF2B5EF4-FFF2-40B4-BE49-F238E27FC236}">
+                <a16:creationId xmlns:a16="http://schemas.microsoft.com/office/drawing/2014/main" id="{123FE8FC-8F34-749A-60E0-2021FEE9AF52}"/>
+              </a:ext>
+            </a:extLst>
+          </p:cNvPr>
+          <p:cNvSpPr txBox="1"/>
+          <p:nvPr/>
+        </p:nvSpPr>
+        <p:spPr>
+          <a:xfrm>
+            <a:off x="3571110" y="0"/>
+            <a:ext cx="5049780" cy="523220"/>
+          </a:xfrm>
+          <a:prstGeom prst="rect">
+            <a:avLst/>
+          </a:prstGeom>
+          <a:noFill/>
+        </p:spPr>
+        <p:txBody>
+          <a:bodyPr wrap="none" rtlCol="0">
+            <a:spAutoFit/>
+          </a:bodyPr>
+          <a:lstStyle/>
+          <a:p>
+            <a:r>
+              <a:rPr lang="ru-RU" sz="2800" dirty="0" err="1">
+                <a:latin typeface="Times New Roman" panose="02020603050405020304" pitchFamily="18" charset="0"/>
+                <a:cs typeface="Times New Roman" panose="02020603050405020304" pitchFamily="18" charset="0"/>
+              </a:rPr>
+              <a:t>Алгоритми</a:t>
+            </a:r>
+            <a:r>
+              <a:rPr lang="ru-RU" sz="2800" dirty="0">
+                <a:latin typeface="Times New Roman" panose="02020603050405020304" pitchFamily="18" charset="0"/>
+                <a:cs typeface="Times New Roman" panose="02020603050405020304" pitchFamily="18" charset="0"/>
+              </a:rPr>
+              <a:t> та </a:t>
+            </a:r>
+            <a:r>
+              <a:rPr lang="ru-RU" sz="2800" dirty="0" err="1">
+                <a:latin typeface="Times New Roman" panose="02020603050405020304" pitchFamily="18" charset="0"/>
+                <a:cs typeface="Times New Roman" panose="02020603050405020304" pitchFamily="18" charset="0"/>
+              </a:rPr>
+              <a:t>методи</a:t>
+            </a:r>
+            <a:r>
+              <a:rPr lang="ru-RU" sz="2800" dirty="0">
+                <a:latin typeface="Times New Roman" panose="02020603050405020304" pitchFamily="18" charset="0"/>
+                <a:cs typeface="Times New Roman" panose="02020603050405020304" pitchFamily="18" charset="0"/>
+              </a:rPr>
+              <a:t> </a:t>
+            </a:r>
+            <a:r>
+              <a:rPr lang="ru-RU" sz="2800" dirty="0" err="1">
+                <a:latin typeface="Times New Roman" panose="02020603050405020304" pitchFamily="18" charset="0"/>
+                <a:cs typeface="Times New Roman" panose="02020603050405020304" pitchFamily="18" charset="0"/>
+              </a:rPr>
+              <a:t>реалізації</a:t>
+            </a:r>
+            <a:endParaRPr lang="ru-RU" sz="5400" dirty="0">
+              <a:latin typeface="Times New Roman" panose="02020603050405020304" pitchFamily="18" charset="0"/>
+              <a:cs typeface="Times New Roman" panose="02020603050405020304" pitchFamily="18" charset="0"/>
+            </a:endParaRPr>
+          </a:p>
+        </p:txBody>
+      </p:sp>
+      <p:sp>
+        <p:nvSpPr>
+          <p:cNvPr id="2" name="TextBox 1">
+            <a:extLst>
+              <a:ext uri="{FF2B5EF4-FFF2-40B4-BE49-F238E27FC236}">
+                <a16:creationId xmlns:a16="http://schemas.microsoft.com/office/drawing/2014/main" id="{29E68B47-87A7-F97F-9E37-6916470BA647}"/>
+              </a:ext>
+            </a:extLst>
+          </p:cNvPr>
+          <p:cNvSpPr txBox="1"/>
+          <p:nvPr/>
+        </p:nvSpPr>
+        <p:spPr>
+          <a:xfrm>
+            <a:off x="817418" y="523220"/>
+            <a:ext cx="10557164" cy="6555641"/>
+          </a:xfrm>
+          <a:prstGeom prst="rect">
+            <a:avLst/>
+          </a:prstGeom>
+          <a:noFill/>
+        </p:spPr>
+        <p:txBody>
+          <a:bodyPr wrap="square" rtlCol="0">
+            <a:spAutoFit/>
+          </a:bodyPr>
+          <a:lstStyle/>
+          <a:p>
+            <a:pPr algn="just"/>
+            <a:r>
+              <a:rPr lang="ru-RU" sz="2000" dirty="0">
+                <a:latin typeface="Times New Roman" panose="02020603050405020304" pitchFamily="18" charset="0"/>
+                <a:cs typeface="Times New Roman" panose="02020603050405020304" pitchFamily="18" charset="0"/>
+              </a:rPr>
+              <a:t>	</a:t>
+            </a:r>
+            <a:r>
+              <a:rPr lang="ru-RU" sz="2000" b="1" dirty="0">
+                <a:latin typeface="Times New Roman" panose="02020603050405020304" pitchFamily="18" charset="0"/>
+                <a:cs typeface="Times New Roman" panose="02020603050405020304" pitchFamily="18" charset="0"/>
+              </a:rPr>
+              <a:t>-</a:t>
+            </a:r>
+            <a:r>
+              <a:rPr lang="ru-RU" sz="2000" dirty="0">
+                <a:latin typeface="Times New Roman" panose="02020603050405020304" pitchFamily="18" charset="0"/>
+                <a:cs typeface="Times New Roman" panose="02020603050405020304" pitchFamily="18" charset="0"/>
+              </a:rPr>
+              <a:t> </a:t>
+            </a:r>
+            <a:r>
+              <a:rPr lang="ru-RU" sz="2000" b="1" dirty="0">
+                <a:latin typeface="Times New Roman" panose="02020603050405020304" pitchFamily="18" charset="0"/>
+                <a:cs typeface="Times New Roman" panose="02020603050405020304" pitchFamily="18" charset="0"/>
+              </a:rPr>
+              <a:t>Алгоритм </a:t>
+            </a:r>
+            <a:r>
+              <a:rPr lang="ru-RU" sz="2000" b="1" dirty="0" err="1">
+                <a:latin typeface="Times New Roman" panose="02020603050405020304" pitchFamily="18" charset="0"/>
+                <a:cs typeface="Times New Roman" panose="02020603050405020304" pitchFamily="18" charset="0"/>
+              </a:rPr>
+              <a:t>аналізу</a:t>
+            </a:r>
+            <a:r>
+              <a:rPr lang="ru-RU" sz="2000" b="1" dirty="0">
+                <a:latin typeface="Times New Roman" panose="02020603050405020304" pitchFamily="18" charset="0"/>
+                <a:cs typeface="Times New Roman" panose="02020603050405020304" pitchFamily="18" charset="0"/>
+              </a:rPr>
+              <a:t> типу </a:t>
+            </a:r>
+            <a:r>
+              <a:rPr lang="ru-RU" sz="2000" b="1" dirty="0" err="1">
+                <a:latin typeface="Times New Roman" panose="02020603050405020304" pitchFamily="18" charset="0"/>
+                <a:cs typeface="Times New Roman" panose="02020603050405020304" pitchFamily="18" charset="0"/>
+              </a:rPr>
+              <a:t>шкіри</a:t>
+            </a:r>
+            <a:r>
+              <a:rPr lang="ru-RU" sz="2000" b="1" dirty="0">
+                <a:latin typeface="Times New Roman" panose="02020603050405020304" pitchFamily="18" charset="0"/>
+                <a:cs typeface="Times New Roman" panose="02020603050405020304" pitchFamily="18" charset="0"/>
+              </a:rPr>
+              <a:t>. </a:t>
+            </a:r>
+          </a:p>
+          <a:p>
+            <a:pPr algn="just"/>
+            <a:r>
+              <a:rPr lang="ru-RU" sz="2000" dirty="0">
+                <a:latin typeface="Times New Roman" panose="02020603050405020304" pitchFamily="18" charset="0"/>
+                <a:cs typeface="Times New Roman" panose="02020603050405020304" pitchFamily="18" charset="0"/>
+              </a:rPr>
+              <a:t>	</a:t>
+            </a:r>
+            <a:r>
+              <a:rPr lang="ru-RU" sz="2000" dirty="0" err="1">
+                <a:latin typeface="Times New Roman" panose="02020603050405020304" pitchFamily="18" charset="0"/>
+                <a:cs typeface="Times New Roman" panose="02020603050405020304" pitchFamily="18" charset="0"/>
+              </a:rPr>
+              <a:t>Вхідними</a:t>
+            </a:r>
+            <a:r>
+              <a:rPr lang="ru-RU" sz="2000" dirty="0">
+                <a:latin typeface="Times New Roman" panose="02020603050405020304" pitchFamily="18" charset="0"/>
+                <a:cs typeface="Times New Roman" panose="02020603050405020304" pitchFamily="18" charset="0"/>
+              </a:rPr>
+              <a:t> </a:t>
+            </a:r>
+            <a:r>
+              <a:rPr lang="ru-RU" sz="2000" dirty="0" err="1">
+                <a:latin typeface="Times New Roman" panose="02020603050405020304" pitchFamily="18" charset="0"/>
+                <a:cs typeface="Times New Roman" panose="02020603050405020304" pitchFamily="18" charset="0"/>
+              </a:rPr>
+              <a:t>даними</a:t>
+            </a:r>
+            <a:r>
+              <a:rPr lang="ru-RU" sz="2000" dirty="0">
+                <a:latin typeface="Times New Roman" panose="02020603050405020304" pitchFamily="18" charset="0"/>
+                <a:cs typeface="Times New Roman" panose="02020603050405020304" pitchFamily="18" charset="0"/>
+              </a:rPr>
+              <a:t> є </a:t>
+            </a:r>
+            <a:r>
+              <a:rPr lang="ru-RU" sz="2000" dirty="0" err="1">
+                <a:latin typeface="Times New Roman" panose="02020603050405020304" pitchFamily="18" charset="0"/>
+                <a:cs typeface="Times New Roman" panose="02020603050405020304" pitchFamily="18" charset="0"/>
+              </a:rPr>
+              <a:t>завантажене</a:t>
+            </a:r>
+            <a:r>
+              <a:rPr lang="ru-RU" sz="2000" dirty="0">
+                <a:latin typeface="Times New Roman" panose="02020603050405020304" pitchFamily="18" charset="0"/>
+                <a:cs typeface="Times New Roman" panose="02020603050405020304" pitchFamily="18" charset="0"/>
+              </a:rPr>
+              <a:t> </a:t>
+            </a:r>
+            <a:r>
+              <a:rPr lang="ru-RU" sz="2000" dirty="0" err="1">
+                <a:latin typeface="Times New Roman" panose="02020603050405020304" pitchFamily="18" charset="0"/>
+                <a:cs typeface="Times New Roman" panose="02020603050405020304" pitchFamily="18" charset="0"/>
+              </a:rPr>
+              <a:t>користувачем</a:t>
+            </a:r>
+            <a:r>
+              <a:rPr lang="ru-RU" sz="2000" dirty="0">
+                <a:latin typeface="Times New Roman" panose="02020603050405020304" pitchFamily="18" charset="0"/>
+                <a:cs typeface="Times New Roman" panose="02020603050405020304" pitchFamily="18" charset="0"/>
+              </a:rPr>
+              <a:t> </a:t>
+            </a:r>
+            <a:r>
+              <a:rPr lang="ru-RU" sz="2000" dirty="0" err="1">
+                <a:latin typeface="Times New Roman" panose="02020603050405020304" pitchFamily="18" charset="0"/>
+                <a:cs typeface="Times New Roman" panose="02020603050405020304" pitchFamily="18" charset="0"/>
+              </a:rPr>
+              <a:t>зображення</a:t>
+            </a:r>
+            <a:r>
+              <a:rPr lang="ru-RU" sz="2000" dirty="0">
+                <a:latin typeface="Times New Roman" panose="02020603050405020304" pitchFamily="18" charset="0"/>
+                <a:cs typeface="Times New Roman" panose="02020603050405020304" pitchFamily="18" charset="0"/>
+              </a:rPr>
+              <a:t>. </a:t>
+            </a:r>
+            <a:r>
+              <a:rPr lang="ru-RU" sz="2000" dirty="0" err="1">
+                <a:latin typeface="Times New Roman" panose="02020603050405020304" pitchFamily="18" charset="0"/>
+                <a:cs typeface="Times New Roman" panose="02020603050405020304" pitchFamily="18" charset="0"/>
+              </a:rPr>
+              <a:t>Першим</a:t>
+            </a:r>
+            <a:r>
+              <a:rPr lang="ru-RU" sz="2000" dirty="0">
+                <a:latin typeface="Times New Roman" panose="02020603050405020304" pitchFamily="18" charset="0"/>
+                <a:cs typeface="Times New Roman" panose="02020603050405020304" pitchFamily="18" charset="0"/>
+              </a:rPr>
+              <a:t> кроком ми </a:t>
+            </a:r>
+            <a:r>
+              <a:rPr lang="ru-RU" sz="2000" dirty="0" err="1">
+                <a:latin typeface="Times New Roman" panose="02020603050405020304" pitchFamily="18" charset="0"/>
+                <a:cs typeface="Times New Roman" panose="02020603050405020304" pitchFamily="18" charset="0"/>
+              </a:rPr>
+              <a:t>конвертуємо</a:t>
+            </a:r>
+            <a:r>
+              <a:rPr lang="ru-RU" sz="2000" dirty="0">
+                <a:latin typeface="Times New Roman" panose="02020603050405020304" pitchFamily="18" charset="0"/>
+                <a:cs typeface="Times New Roman" panose="02020603050405020304" pitchFamily="18" charset="0"/>
+              </a:rPr>
+              <a:t> </a:t>
+            </a:r>
+            <a:r>
+              <a:rPr lang="ru-RU" sz="2000" dirty="0" err="1">
+                <a:latin typeface="Times New Roman" panose="02020603050405020304" pitchFamily="18" charset="0"/>
+                <a:cs typeface="Times New Roman" panose="02020603050405020304" pitchFamily="18" charset="0"/>
+              </a:rPr>
+              <a:t>отримані</a:t>
+            </a:r>
+            <a:r>
+              <a:rPr lang="ru-RU" sz="2000" dirty="0">
+                <a:latin typeface="Times New Roman" panose="02020603050405020304" pitchFamily="18" charset="0"/>
+                <a:cs typeface="Times New Roman" panose="02020603050405020304" pitchFamily="18" charset="0"/>
+              </a:rPr>
+              <a:t> </a:t>
+            </a:r>
+            <a:r>
+              <a:rPr lang="ru-RU" sz="2000" dirty="0" err="1">
+                <a:latin typeface="Times New Roman" panose="02020603050405020304" pitchFamily="18" charset="0"/>
+                <a:cs typeface="Times New Roman" panose="02020603050405020304" pitchFamily="18" charset="0"/>
+              </a:rPr>
+              <a:t>байти</a:t>
+            </a:r>
+            <a:r>
+              <a:rPr lang="ru-RU" sz="2000" dirty="0">
+                <a:latin typeface="Times New Roman" panose="02020603050405020304" pitchFamily="18" charset="0"/>
+                <a:cs typeface="Times New Roman" panose="02020603050405020304" pitchFamily="18" charset="0"/>
+              </a:rPr>
+              <a:t> у формат, </a:t>
+            </a:r>
+            <a:r>
+              <a:rPr lang="ru-RU" sz="2000" dirty="0" err="1">
+                <a:latin typeface="Times New Roman" panose="02020603050405020304" pitchFamily="18" charset="0"/>
+                <a:cs typeface="Times New Roman" panose="02020603050405020304" pitchFamily="18" charset="0"/>
+              </a:rPr>
+              <a:t>зрозумілий</a:t>
+            </a:r>
+            <a:r>
+              <a:rPr lang="ru-RU" sz="2000" dirty="0">
+                <a:latin typeface="Times New Roman" panose="02020603050405020304" pitchFamily="18" charset="0"/>
+                <a:cs typeface="Times New Roman" panose="02020603050405020304" pitchFamily="18" charset="0"/>
+              </a:rPr>
+              <a:t> </a:t>
+            </a:r>
+            <a:r>
+              <a:rPr lang="ru-RU" sz="2000" dirty="0" err="1">
+                <a:latin typeface="Times New Roman" panose="02020603050405020304" pitchFamily="18" charset="0"/>
+                <a:cs typeface="Times New Roman" panose="02020603050405020304" pitchFamily="18" charset="0"/>
+              </a:rPr>
+              <a:t>OpenCV</a:t>
+            </a:r>
+            <a:r>
+              <a:rPr lang="ru-RU" sz="2000" dirty="0">
+                <a:latin typeface="Times New Roman" panose="02020603050405020304" pitchFamily="18" charset="0"/>
+                <a:cs typeface="Times New Roman" panose="02020603050405020304" pitchFamily="18" charset="0"/>
+              </a:rPr>
+              <a:t>. </a:t>
+            </a:r>
+            <a:r>
+              <a:rPr lang="ru-RU" sz="2000" dirty="0" err="1">
+                <a:latin typeface="Times New Roman" panose="02020603050405020304" pitchFamily="18" charset="0"/>
+                <a:cs typeface="Times New Roman" panose="02020603050405020304" pitchFamily="18" charset="0"/>
+              </a:rPr>
+              <a:t>Далі</a:t>
+            </a:r>
+            <a:r>
+              <a:rPr lang="ru-RU" sz="2000" dirty="0">
+                <a:latin typeface="Times New Roman" panose="02020603050405020304" pitchFamily="18" charset="0"/>
+                <a:cs typeface="Times New Roman" panose="02020603050405020304" pitchFamily="18" charset="0"/>
+              </a:rPr>
+              <a:t> </a:t>
+            </a:r>
+            <a:r>
+              <a:rPr lang="ru-RU" sz="2000" dirty="0" err="1">
+                <a:latin typeface="Times New Roman" panose="02020603050405020304" pitchFamily="18" charset="0"/>
+                <a:cs typeface="Times New Roman" panose="02020603050405020304" pitchFamily="18" charset="0"/>
+              </a:rPr>
+              <a:t>визначаємо</a:t>
+            </a:r>
+            <a:r>
+              <a:rPr lang="ru-RU" sz="2000" dirty="0">
+                <a:latin typeface="Times New Roman" panose="02020603050405020304" pitchFamily="18" charset="0"/>
+                <a:cs typeface="Times New Roman" panose="02020603050405020304" pitchFamily="18" charset="0"/>
+              </a:rPr>
+              <a:t> </a:t>
+            </a:r>
+            <a:r>
+              <a:rPr lang="ru-RU" sz="2000" dirty="0" err="1">
+                <a:latin typeface="Times New Roman" panose="02020603050405020304" pitchFamily="18" charset="0"/>
+                <a:cs typeface="Times New Roman" panose="02020603050405020304" pitchFamily="18" charset="0"/>
+              </a:rPr>
+              <a:t>розміри</a:t>
+            </a:r>
+            <a:r>
+              <a:rPr lang="ru-RU" sz="2000" dirty="0">
+                <a:latin typeface="Times New Roman" panose="02020603050405020304" pitchFamily="18" charset="0"/>
+                <a:cs typeface="Times New Roman" panose="02020603050405020304" pitchFamily="18" charset="0"/>
+              </a:rPr>
+              <a:t> </a:t>
+            </a:r>
+            <a:r>
+              <a:rPr lang="ru-RU" sz="2000" dirty="0" err="1">
+                <a:latin typeface="Times New Roman" panose="02020603050405020304" pitchFamily="18" charset="0"/>
+                <a:cs typeface="Times New Roman" panose="02020603050405020304" pitchFamily="18" charset="0"/>
+              </a:rPr>
+              <a:t>зображення</a:t>
+            </a:r>
+            <a:r>
+              <a:rPr lang="ru-RU" sz="2000" dirty="0">
+                <a:latin typeface="Times New Roman" panose="02020603050405020304" pitchFamily="18" charset="0"/>
+                <a:cs typeface="Times New Roman" panose="02020603050405020304" pitchFamily="18" charset="0"/>
+              </a:rPr>
+              <a:t> та </a:t>
+            </a:r>
+            <a:r>
+              <a:rPr lang="ru-RU" sz="2000" dirty="0" err="1">
+                <a:latin typeface="Times New Roman" panose="02020603050405020304" pitchFamily="18" charset="0"/>
+                <a:cs typeface="Times New Roman" panose="02020603050405020304" pitchFamily="18" charset="0"/>
+              </a:rPr>
+              <a:t>виділяємо</a:t>
+            </a:r>
+            <a:r>
+              <a:rPr lang="ru-RU" sz="2000" dirty="0">
+                <a:latin typeface="Times New Roman" panose="02020603050405020304" pitchFamily="18" charset="0"/>
+                <a:cs typeface="Times New Roman" panose="02020603050405020304" pitchFamily="18" charset="0"/>
+              </a:rPr>
+              <a:t> область </a:t>
+            </a:r>
+            <a:r>
+              <a:rPr lang="ru-RU" sz="2000" dirty="0" err="1">
+                <a:latin typeface="Times New Roman" panose="02020603050405020304" pitchFamily="18" charset="0"/>
+                <a:cs typeface="Times New Roman" panose="02020603050405020304" pitchFamily="18" charset="0"/>
+              </a:rPr>
+              <a:t>інтересу</a:t>
+            </a:r>
+            <a:r>
+              <a:rPr lang="ru-RU" sz="2000" dirty="0">
+                <a:latin typeface="Times New Roman" panose="02020603050405020304" pitchFamily="18" charset="0"/>
+                <a:cs typeface="Times New Roman" panose="02020603050405020304" pitchFamily="18" charset="0"/>
+              </a:rPr>
+              <a:t> – ROI. </a:t>
+            </a:r>
+            <a:r>
+              <a:rPr lang="ru-RU" sz="2000" dirty="0" err="1">
+                <a:latin typeface="Times New Roman" panose="02020603050405020304" pitchFamily="18" charset="0"/>
+                <a:cs typeface="Times New Roman" panose="02020603050405020304" pitchFamily="18" charset="0"/>
+              </a:rPr>
+              <a:t>Це</a:t>
+            </a:r>
+            <a:r>
+              <a:rPr lang="ru-RU" sz="2000" dirty="0">
+                <a:latin typeface="Times New Roman" panose="02020603050405020304" pitchFamily="18" charset="0"/>
+                <a:cs typeface="Times New Roman" panose="02020603050405020304" pitchFamily="18" charset="0"/>
+              </a:rPr>
+              <a:t> центральна </a:t>
+            </a:r>
+            <a:r>
+              <a:rPr lang="ru-RU" sz="2000" dirty="0" err="1">
+                <a:latin typeface="Times New Roman" panose="02020603050405020304" pitchFamily="18" charset="0"/>
+                <a:cs typeface="Times New Roman" panose="02020603050405020304" pitchFamily="18" charset="0"/>
+              </a:rPr>
+              <a:t>частина</a:t>
+            </a:r>
+            <a:r>
+              <a:rPr lang="ru-RU" sz="2000" dirty="0">
+                <a:latin typeface="Times New Roman" panose="02020603050405020304" pitchFamily="18" charset="0"/>
+                <a:cs typeface="Times New Roman" panose="02020603050405020304" pitchFamily="18" charset="0"/>
+              </a:rPr>
+              <a:t> </a:t>
+            </a:r>
+            <a:r>
+              <a:rPr lang="ru-RU" sz="2000" dirty="0" err="1">
+                <a:latin typeface="Times New Roman" panose="02020603050405020304" pitchFamily="18" charset="0"/>
+                <a:cs typeface="Times New Roman" panose="02020603050405020304" pitchFamily="18" charset="0"/>
+              </a:rPr>
+              <a:t>зображення</a:t>
+            </a:r>
+            <a:r>
+              <a:rPr lang="ru-RU" sz="2000" dirty="0">
+                <a:latin typeface="Times New Roman" panose="02020603050405020304" pitchFamily="18" charset="0"/>
+                <a:cs typeface="Times New Roman" panose="02020603050405020304" pitchFamily="18" charset="0"/>
+              </a:rPr>
+              <a:t> </a:t>
+            </a:r>
+            <a:r>
+              <a:rPr lang="ru-RU" sz="2000" dirty="0" err="1">
+                <a:latin typeface="Times New Roman" panose="02020603050405020304" pitchFamily="18" charset="0"/>
+                <a:cs typeface="Times New Roman" panose="02020603050405020304" pitchFamily="18" charset="0"/>
+              </a:rPr>
+              <a:t>розміром</a:t>
+            </a:r>
+            <a:r>
+              <a:rPr lang="ru-RU" sz="2000" dirty="0">
+                <a:latin typeface="Times New Roman" panose="02020603050405020304" pitchFamily="18" charset="0"/>
+                <a:cs typeface="Times New Roman" panose="02020603050405020304" pitchFamily="18" charset="0"/>
+              </a:rPr>
+              <a:t> </a:t>
+            </a:r>
+            <a:r>
+              <a:rPr lang="ru-RU" sz="2000" dirty="0" err="1">
+                <a:latin typeface="Times New Roman" panose="02020603050405020304" pitchFamily="18" charset="0"/>
+                <a:cs typeface="Times New Roman" panose="02020603050405020304" pitchFamily="18" charset="0"/>
+              </a:rPr>
+              <a:t>приблизно</a:t>
+            </a:r>
+            <a:r>
+              <a:rPr lang="ru-RU" sz="2000" dirty="0">
+                <a:latin typeface="Times New Roman" panose="02020603050405020304" pitchFamily="18" charset="0"/>
+                <a:cs typeface="Times New Roman" panose="02020603050405020304" pitchFamily="18" charset="0"/>
+              </a:rPr>
+              <a:t> одна третина </a:t>
+            </a:r>
+            <a:r>
+              <a:rPr lang="ru-RU" sz="2000" dirty="0" err="1">
+                <a:latin typeface="Times New Roman" panose="02020603050405020304" pitchFamily="18" charset="0"/>
+                <a:cs typeface="Times New Roman" panose="02020603050405020304" pitchFamily="18" charset="0"/>
+              </a:rPr>
+              <a:t>від</a:t>
+            </a:r>
+            <a:r>
+              <a:rPr lang="ru-RU" sz="2000" dirty="0">
+                <a:latin typeface="Times New Roman" panose="02020603050405020304" pitchFamily="18" charset="0"/>
+                <a:cs typeface="Times New Roman" panose="02020603050405020304" pitchFamily="18" charset="0"/>
+              </a:rPr>
+              <a:t> </a:t>
+            </a:r>
+            <a:r>
+              <a:rPr lang="ru-RU" sz="2000" dirty="0" err="1">
+                <a:latin typeface="Times New Roman" panose="02020603050405020304" pitchFamily="18" charset="0"/>
+                <a:cs typeface="Times New Roman" panose="02020603050405020304" pitchFamily="18" charset="0"/>
+              </a:rPr>
+              <a:t>висоти</a:t>
+            </a:r>
+            <a:r>
+              <a:rPr lang="ru-RU" sz="2000" dirty="0">
+                <a:latin typeface="Times New Roman" panose="02020603050405020304" pitchFamily="18" charset="0"/>
+                <a:cs typeface="Times New Roman" panose="02020603050405020304" pitchFamily="18" charset="0"/>
+              </a:rPr>
+              <a:t> та </a:t>
+            </a:r>
+            <a:r>
+              <a:rPr lang="ru-RU" sz="2000" dirty="0" err="1">
+                <a:latin typeface="Times New Roman" panose="02020603050405020304" pitchFamily="18" charset="0"/>
+                <a:cs typeface="Times New Roman" panose="02020603050405020304" pitchFamily="18" charset="0"/>
+              </a:rPr>
+              <a:t>ширини</a:t>
+            </a:r>
+            <a:r>
+              <a:rPr lang="ru-RU" sz="2000" dirty="0">
+                <a:latin typeface="Times New Roman" panose="02020603050405020304" pitchFamily="18" charset="0"/>
+                <a:cs typeface="Times New Roman" panose="02020603050405020304" pitchFamily="18" charset="0"/>
+              </a:rPr>
+              <a:t>, де з </a:t>
+            </a:r>
+            <a:r>
+              <a:rPr lang="ru-RU" sz="2000" dirty="0" err="1">
+                <a:latin typeface="Times New Roman" panose="02020603050405020304" pitchFamily="18" charset="0"/>
+                <a:cs typeface="Times New Roman" panose="02020603050405020304" pitchFamily="18" charset="0"/>
+              </a:rPr>
+              <a:t>високою</a:t>
+            </a:r>
+            <a:r>
+              <a:rPr lang="ru-RU" sz="2000" dirty="0">
+                <a:latin typeface="Times New Roman" panose="02020603050405020304" pitchFamily="18" charset="0"/>
+                <a:cs typeface="Times New Roman" panose="02020603050405020304" pitchFamily="18" charset="0"/>
+              </a:rPr>
+              <a:t> </a:t>
+            </a:r>
+            <a:r>
+              <a:rPr lang="ru-RU" sz="2000" dirty="0" err="1">
+                <a:latin typeface="Times New Roman" panose="02020603050405020304" pitchFamily="18" charset="0"/>
+                <a:cs typeface="Times New Roman" panose="02020603050405020304" pitchFamily="18" charset="0"/>
+              </a:rPr>
+              <a:t>ймовірністю</a:t>
+            </a:r>
+            <a:r>
+              <a:rPr lang="ru-RU" sz="2000" dirty="0">
+                <a:latin typeface="Times New Roman" panose="02020603050405020304" pitchFamily="18" charset="0"/>
+                <a:cs typeface="Times New Roman" panose="02020603050405020304" pitchFamily="18" charset="0"/>
+              </a:rPr>
+              <a:t> </a:t>
+            </a:r>
+            <a:r>
+              <a:rPr lang="ru-RU" sz="2000" dirty="0" err="1">
+                <a:latin typeface="Times New Roman" panose="02020603050405020304" pitchFamily="18" charset="0"/>
+                <a:cs typeface="Times New Roman" panose="02020603050405020304" pitchFamily="18" charset="0"/>
+              </a:rPr>
+              <a:t>знаходиться</a:t>
+            </a:r>
+            <a:r>
+              <a:rPr lang="ru-RU" sz="2000" dirty="0">
+                <a:latin typeface="Times New Roman" panose="02020603050405020304" pitchFamily="18" charset="0"/>
+                <a:cs typeface="Times New Roman" panose="02020603050405020304" pitchFamily="18" charset="0"/>
+              </a:rPr>
+              <a:t> </a:t>
+            </a:r>
+            <a:r>
+              <a:rPr lang="ru-RU" sz="2000" dirty="0" err="1">
+                <a:latin typeface="Times New Roman" panose="02020603050405020304" pitchFamily="18" charset="0"/>
+                <a:cs typeface="Times New Roman" panose="02020603050405020304" pitchFamily="18" charset="0"/>
+              </a:rPr>
+              <a:t>обличчя</a:t>
+            </a:r>
+            <a:r>
+              <a:rPr lang="ru-RU" sz="2000" dirty="0">
+                <a:latin typeface="Times New Roman" panose="02020603050405020304" pitchFamily="18" charset="0"/>
+                <a:cs typeface="Times New Roman" panose="02020603050405020304" pitchFamily="18" charset="0"/>
+              </a:rPr>
+              <a:t>.</a:t>
+            </a:r>
+          </a:p>
+          <a:p>
+            <a:pPr algn="just"/>
+            <a:r>
+              <a:rPr lang="ru-RU" sz="2000" dirty="0">
+                <a:latin typeface="Times New Roman" panose="02020603050405020304" pitchFamily="18" charset="0"/>
+                <a:cs typeface="Times New Roman" panose="02020603050405020304" pitchFamily="18" charset="0"/>
+              </a:rPr>
+              <a:t>	</a:t>
+            </a:r>
+            <a:r>
+              <a:rPr lang="ru-RU" sz="2000" dirty="0" err="1">
+                <a:latin typeface="Times New Roman" panose="02020603050405020304" pitchFamily="18" charset="0"/>
+                <a:cs typeface="Times New Roman" panose="02020603050405020304" pitchFamily="18" charset="0"/>
+              </a:rPr>
+              <a:t>Після</a:t>
+            </a:r>
+            <a:r>
+              <a:rPr lang="ru-RU" sz="2000" dirty="0">
+                <a:latin typeface="Times New Roman" panose="02020603050405020304" pitchFamily="18" charset="0"/>
+                <a:cs typeface="Times New Roman" panose="02020603050405020304" pitchFamily="18" charset="0"/>
+              </a:rPr>
+              <a:t> </a:t>
+            </a:r>
+            <a:r>
+              <a:rPr lang="ru-RU" sz="2000" dirty="0" err="1">
+                <a:latin typeface="Times New Roman" panose="02020603050405020304" pitchFamily="18" charset="0"/>
+                <a:cs typeface="Times New Roman" panose="02020603050405020304" pitchFamily="18" charset="0"/>
+              </a:rPr>
+              <a:t>виділення</a:t>
+            </a:r>
+            <a:r>
+              <a:rPr lang="ru-RU" sz="2000" dirty="0">
+                <a:latin typeface="Times New Roman" panose="02020603050405020304" pitchFamily="18" charset="0"/>
+                <a:cs typeface="Times New Roman" panose="02020603050405020304" pitchFamily="18" charset="0"/>
+              </a:rPr>
+              <a:t> ROI ми </a:t>
+            </a:r>
+            <a:r>
+              <a:rPr lang="ru-RU" sz="2000" dirty="0" err="1">
+                <a:latin typeface="Times New Roman" panose="02020603050405020304" pitchFamily="18" charset="0"/>
+                <a:cs typeface="Times New Roman" panose="02020603050405020304" pitchFamily="18" charset="0"/>
+              </a:rPr>
+              <a:t>обчислюємо</a:t>
+            </a:r>
+            <a:r>
+              <a:rPr lang="ru-RU" sz="2000" dirty="0">
+                <a:latin typeface="Times New Roman" panose="02020603050405020304" pitchFamily="18" charset="0"/>
+                <a:cs typeface="Times New Roman" panose="02020603050405020304" pitchFamily="18" charset="0"/>
+              </a:rPr>
+              <a:t> </a:t>
+            </a:r>
+            <a:r>
+              <a:rPr lang="ru-RU" sz="2000" dirty="0" err="1">
+                <a:latin typeface="Times New Roman" panose="02020603050405020304" pitchFamily="18" charset="0"/>
+                <a:cs typeface="Times New Roman" panose="02020603050405020304" pitchFamily="18" charset="0"/>
+              </a:rPr>
+              <a:t>середнє</a:t>
+            </a:r>
+            <a:r>
+              <a:rPr lang="ru-RU" sz="2000" dirty="0">
+                <a:latin typeface="Times New Roman" panose="02020603050405020304" pitchFamily="18" charset="0"/>
+                <a:cs typeface="Times New Roman" panose="02020603050405020304" pitchFamily="18" charset="0"/>
+              </a:rPr>
+              <a:t> </a:t>
+            </a:r>
+            <a:r>
+              <a:rPr lang="ru-RU" sz="2000" dirty="0" err="1">
+                <a:latin typeface="Times New Roman" panose="02020603050405020304" pitchFamily="18" charset="0"/>
+                <a:cs typeface="Times New Roman" panose="02020603050405020304" pitchFamily="18" charset="0"/>
+              </a:rPr>
+              <a:t>значення</a:t>
+            </a:r>
+            <a:r>
+              <a:rPr lang="ru-RU" sz="2000" dirty="0">
+                <a:latin typeface="Times New Roman" panose="02020603050405020304" pitchFamily="18" charset="0"/>
+                <a:cs typeface="Times New Roman" panose="02020603050405020304" pitchFamily="18" charset="0"/>
+              </a:rPr>
+              <a:t> </a:t>
+            </a:r>
+            <a:r>
+              <a:rPr lang="ru-RU" sz="2000" dirty="0" err="1">
+                <a:latin typeface="Times New Roman" panose="02020603050405020304" pitchFamily="18" charset="0"/>
+                <a:cs typeface="Times New Roman" panose="02020603050405020304" pitchFamily="18" charset="0"/>
+              </a:rPr>
+              <a:t>яскравості</a:t>
+            </a:r>
+            <a:r>
+              <a:rPr lang="ru-RU" sz="2000" dirty="0">
+                <a:latin typeface="Times New Roman" panose="02020603050405020304" pitchFamily="18" charset="0"/>
+                <a:cs typeface="Times New Roman" panose="02020603050405020304" pitchFamily="18" charset="0"/>
+              </a:rPr>
+              <a:t> </a:t>
+            </a:r>
+            <a:r>
+              <a:rPr lang="ru-RU" sz="2000" dirty="0" err="1">
+                <a:latin typeface="Times New Roman" panose="02020603050405020304" pitchFamily="18" charset="0"/>
+                <a:cs typeface="Times New Roman" panose="02020603050405020304" pitchFamily="18" charset="0"/>
+              </a:rPr>
+              <a:t>пікселів</a:t>
+            </a:r>
+            <a:r>
+              <a:rPr lang="ru-RU" sz="2000" dirty="0">
+                <a:latin typeface="Times New Roman" panose="02020603050405020304" pitchFamily="18" charset="0"/>
+                <a:cs typeface="Times New Roman" panose="02020603050405020304" pitchFamily="18" charset="0"/>
+              </a:rPr>
+              <a:t> в </a:t>
+            </a:r>
+            <a:r>
+              <a:rPr lang="ru-RU" sz="2000" dirty="0" err="1">
+                <a:latin typeface="Times New Roman" panose="02020603050405020304" pitchFamily="18" charset="0"/>
+                <a:cs typeface="Times New Roman" panose="02020603050405020304" pitchFamily="18" charset="0"/>
+              </a:rPr>
+              <a:t>цій</a:t>
+            </a:r>
+            <a:r>
+              <a:rPr lang="ru-RU" sz="2000" dirty="0">
+                <a:latin typeface="Times New Roman" panose="02020603050405020304" pitchFamily="18" charset="0"/>
+                <a:cs typeface="Times New Roman" panose="02020603050405020304" pitchFamily="18" charset="0"/>
+              </a:rPr>
+              <a:t> </a:t>
+            </a:r>
+            <a:r>
+              <a:rPr lang="ru-RU" sz="2000" dirty="0" err="1">
+                <a:latin typeface="Times New Roman" panose="02020603050405020304" pitchFamily="18" charset="0"/>
+                <a:cs typeface="Times New Roman" panose="02020603050405020304" pitchFamily="18" charset="0"/>
+              </a:rPr>
+              <a:t>області</a:t>
+            </a:r>
+            <a:r>
+              <a:rPr lang="ru-RU" sz="2000" dirty="0">
+                <a:latin typeface="Times New Roman" panose="02020603050405020304" pitchFamily="18" charset="0"/>
+                <a:cs typeface="Times New Roman" panose="02020603050405020304" pitchFamily="18" charset="0"/>
+              </a:rPr>
+              <a:t>. На </a:t>
+            </a:r>
+            <a:r>
+              <a:rPr lang="ru-RU" sz="2000" dirty="0" err="1">
+                <a:latin typeface="Times New Roman" panose="02020603050405020304" pitchFamily="18" charset="0"/>
+                <a:cs typeface="Times New Roman" panose="02020603050405020304" pitchFamily="18" charset="0"/>
+              </a:rPr>
+              <a:t>основі</a:t>
+            </a:r>
+            <a:r>
+              <a:rPr lang="ru-RU" sz="2000" dirty="0">
+                <a:latin typeface="Times New Roman" panose="02020603050405020304" pitchFamily="18" charset="0"/>
+                <a:cs typeface="Times New Roman" panose="02020603050405020304" pitchFamily="18" charset="0"/>
+              </a:rPr>
+              <a:t> </a:t>
+            </a:r>
+            <a:r>
+              <a:rPr lang="ru-RU" sz="2000" dirty="0" err="1">
+                <a:latin typeface="Times New Roman" panose="02020603050405020304" pitchFamily="18" charset="0"/>
+                <a:cs typeface="Times New Roman" panose="02020603050405020304" pitchFamily="18" charset="0"/>
+              </a:rPr>
+              <a:t>цього</a:t>
+            </a:r>
+            <a:r>
+              <a:rPr lang="ru-RU" sz="2000" dirty="0">
+                <a:latin typeface="Times New Roman" panose="02020603050405020304" pitchFamily="18" charset="0"/>
+                <a:cs typeface="Times New Roman" panose="02020603050405020304" pitchFamily="18" charset="0"/>
+              </a:rPr>
+              <a:t> </a:t>
+            </a:r>
+            <a:r>
+              <a:rPr lang="ru-RU" sz="2000" dirty="0" err="1">
+                <a:latin typeface="Times New Roman" panose="02020603050405020304" pitchFamily="18" charset="0"/>
+                <a:cs typeface="Times New Roman" panose="02020603050405020304" pitchFamily="18" charset="0"/>
+              </a:rPr>
+              <a:t>значення</a:t>
+            </a:r>
+            <a:r>
+              <a:rPr lang="ru-RU" sz="2000" dirty="0">
+                <a:latin typeface="Times New Roman" panose="02020603050405020304" pitchFamily="18" charset="0"/>
+                <a:cs typeface="Times New Roman" panose="02020603050405020304" pitchFamily="18" charset="0"/>
+              </a:rPr>
+              <a:t> </a:t>
+            </a:r>
+            <a:r>
+              <a:rPr lang="ru-RU" sz="2000" dirty="0" err="1">
+                <a:latin typeface="Times New Roman" panose="02020603050405020304" pitchFamily="18" charset="0"/>
+                <a:cs typeface="Times New Roman" panose="02020603050405020304" pitchFamily="18" charset="0"/>
+              </a:rPr>
+              <a:t>визначаємо</a:t>
+            </a:r>
+            <a:r>
+              <a:rPr lang="ru-RU" sz="2000" dirty="0">
+                <a:latin typeface="Times New Roman" panose="02020603050405020304" pitchFamily="18" charset="0"/>
+                <a:cs typeface="Times New Roman" panose="02020603050405020304" pitchFamily="18" charset="0"/>
+              </a:rPr>
+              <a:t> тип </a:t>
+            </a:r>
+            <a:r>
+              <a:rPr lang="ru-RU" sz="2000" dirty="0" err="1">
+                <a:latin typeface="Times New Roman" panose="02020603050405020304" pitchFamily="18" charset="0"/>
+                <a:cs typeface="Times New Roman" panose="02020603050405020304" pitchFamily="18" charset="0"/>
+              </a:rPr>
+              <a:t>шкіри</a:t>
+            </a:r>
+            <a:r>
+              <a:rPr lang="ru-RU" sz="2000" dirty="0">
+                <a:latin typeface="Times New Roman" panose="02020603050405020304" pitchFamily="18" charset="0"/>
+                <a:cs typeface="Times New Roman" panose="02020603050405020304" pitchFamily="18" charset="0"/>
+              </a:rPr>
+              <a:t> за </a:t>
+            </a:r>
+            <a:r>
+              <a:rPr lang="ru-RU" sz="2000" dirty="0" err="1">
+                <a:latin typeface="Times New Roman" panose="02020603050405020304" pitchFamily="18" charset="0"/>
+                <a:cs typeface="Times New Roman" panose="02020603050405020304" pitchFamily="18" charset="0"/>
+              </a:rPr>
+              <a:t>пороговими</a:t>
+            </a:r>
+            <a:r>
+              <a:rPr lang="ru-RU" sz="2000" dirty="0">
+                <a:latin typeface="Times New Roman" panose="02020603050405020304" pitchFamily="18" charset="0"/>
+                <a:cs typeface="Times New Roman" panose="02020603050405020304" pitchFamily="18" charset="0"/>
+              </a:rPr>
+              <a:t> </a:t>
+            </a:r>
+            <a:r>
+              <a:rPr lang="ru-RU" sz="2000" dirty="0" err="1">
+                <a:latin typeface="Times New Roman" panose="02020603050405020304" pitchFamily="18" charset="0"/>
+                <a:cs typeface="Times New Roman" panose="02020603050405020304" pitchFamily="18" charset="0"/>
+              </a:rPr>
+              <a:t>значеннями</a:t>
+            </a:r>
+            <a:r>
+              <a:rPr lang="ru-RU" sz="2000" dirty="0">
+                <a:latin typeface="Times New Roman" panose="02020603050405020304" pitchFamily="18" charset="0"/>
+                <a:cs typeface="Times New Roman" panose="02020603050405020304" pitchFamily="18" charset="0"/>
+              </a:rPr>
+              <a:t>: </a:t>
+            </a:r>
+            <a:r>
+              <a:rPr lang="ru-RU" sz="2000" dirty="0" err="1">
+                <a:latin typeface="Times New Roman" panose="02020603050405020304" pitchFamily="18" charset="0"/>
+                <a:cs typeface="Times New Roman" panose="02020603050405020304" pitchFamily="18" charset="0"/>
+              </a:rPr>
+              <a:t>якщо</a:t>
+            </a:r>
+            <a:r>
+              <a:rPr lang="ru-RU" sz="2000" dirty="0">
+                <a:latin typeface="Times New Roman" panose="02020603050405020304" pitchFamily="18" charset="0"/>
+                <a:cs typeface="Times New Roman" panose="02020603050405020304" pitchFamily="18" charset="0"/>
+              </a:rPr>
+              <a:t> </a:t>
+            </a:r>
+            <a:r>
+              <a:rPr lang="ru-RU" sz="2000" dirty="0" err="1">
+                <a:latin typeface="Times New Roman" panose="02020603050405020304" pitchFamily="18" charset="0"/>
+                <a:cs typeface="Times New Roman" panose="02020603050405020304" pitchFamily="18" charset="0"/>
+              </a:rPr>
+              <a:t>яскравість</a:t>
+            </a:r>
+            <a:r>
+              <a:rPr lang="ru-RU" sz="2000" dirty="0">
+                <a:latin typeface="Times New Roman" panose="02020603050405020304" pitchFamily="18" charset="0"/>
+                <a:cs typeface="Times New Roman" panose="02020603050405020304" pitchFamily="18" charset="0"/>
+              </a:rPr>
+              <a:t> </a:t>
+            </a:r>
+            <a:r>
+              <a:rPr lang="ru-RU" sz="2000" dirty="0" err="1">
+                <a:latin typeface="Times New Roman" panose="02020603050405020304" pitchFamily="18" charset="0"/>
+                <a:cs typeface="Times New Roman" panose="02020603050405020304" pitchFamily="18" charset="0"/>
+              </a:rPr>
+              <a:t>вище</a:t>
+            </a:r>
+            <a:r>
+              <a:rPr lang="ru-RU" sz="2000" dirty="0">
+                <a:latin typeface="Times New Roman" panose="02020603050405020304" pitchFamily="18" charset="0"/>
+                <a:cs typeface="Times New Roman" panose="02020603050405020304" pitchFamily="18" charset="0"/>
+              </a:rPr>
+              <a:t> 180 – </a:t>
+            </a:r>
+            <a:r>
+              <a:rPr lang="ru-RU" sz="2000" dirty="0" err="1">
+                <a:latin typeface="Times New Roman" panose="02020603050405020304" pitchFamily="18" charset="0"/>
+                <a:cs typeface="Times New Roman" panose="02020603050405020304" pitchFamily="18" charset="0"/>
+              </a:rPr>
+              <a:t>шкіра</a:t>
+            </a:r>
+            <a:r>
+              <a:rPr lang="ru-RU" sz="2000" dirty="0">
+                <a:latin typeface="Times New Roman" panose="02020603050405020304" pitchFamily="18" charset="0"/>
+                <a:cs typeface="Times New Roman" panose="02020603050405020304" pitchFamily="18" charset="0"/>
+              </a:rPr>
+              <a:t> суха, </a:t>
+            </a:r>
+            <a:r>
+              <a:rPr lang="ru-RU" sz="2000" dirty="0" err="1">
+                <a:latin typeface="Times New Roman" panose="02020603050405020304" pitchFamily="18" charset="0"/>
+                <a:cs typeface="Times New Roman" panose="02020603050405020304" pitchFamily="18" charset="0"/>
+              </a:rPr>
+              <a:t>вище</a:t>
+            </a:r>
+            <a:r>
+              <a:rPr lang="ru-RU" sz="2000" dirty="0">
+                <a:latin typeface="Times New Roman" panose="02020603050405020304" pitchFamily="18" charset="0"/>
+                <a:cs typeface="Times New Roman" panose="02020603050405020304" pitchFamily="18" charset="0"/>
+              </a:rPr>
+              <a:t> 120 – нормальна, </a:t>
+            </a:r>
+            <a:r>
+              <a:rPr lang="ru-RU" sz="2000" dirty="0" err="1">
+                <a:latin typeface="Times New Roman" panose="02020603050405020304" pitchFamily="18" charset="0"/>
+                <a:cs typeface="Times New Roman" panose="02020603050405020304" pitchFamily="18" charset="0"/>
+              </a:rPr>
+              <a:t>нижче</a:t>
+            </a:r>
+            <a:r>
+              <a:rPr lang="ru-RU" sz="2000" dirty="0">
+                <a:latin typeface="Times New Roman" panose="02020603050405020304" pitchFamily="18" charset="0"/>
+                <a:cs typeface="Times New Roman" panose="02020603050405020304" pitchFamily="18" charset="0"/>
+              </a:rPr>
+              <a:t> – жирна.</a:t>
+            </a:r>
+          </a:p>
+          <a:p>
+            <a:pPr algn="just"/>
+            <a:endParaRPr lang="ru-RU" sz="2000" dirty="0">
+              <a:latin typeface="Times New Roman" panose="02020603050405020304" pitchFamily="18" charset="0"/>
+              <a:cs typeface="Times New Roman" panose="02020603050405020304" pitchFamily="18" charset="0"/>
+            </a:endParaRPr>
+          </a:p>
+          <a:p>
+            <a:pPr algn="just"/>
+            <a:r>
+              <a:rPr lang="ru-RU" sz="2000" dirty="0">
+                <a:latin typeface="Times New Roman" panose="02020603050405020304" pitchFamily="18" charset="0"/>
+                <a:cs typeface="Times New Roman" panose="02020603050405020304" pitchFamily="18" charset="0"/>
+              </a:rPr>
+              <a:t>	</a:t>
+            </a:r>
+            <a:r>
+              <a:rPr lang="ru-RU" sz="2000" b="1" dirty="0">
+                <a:latin typeface="Times New Roman" panose="02020603050405020304" pitchFamily="18" charset="0"/>
+                <a:cs typeface="Times New Roman" panose="02020603050405020304" pitchFamily="18" charset="0"/>
+              </a:rPr>
+              <a:t>- </a:t>
+            </a:r>
+            <a:r>
+              <a:rPr lang="ru-RU" sz="2000" b="1" dirty="0" err="1">
+                <a:latin typeface="Times New Roman" panose="02020603050405020304" pitchFamily="18" charset="0"/>
+                <a:cs typeface="Times New Roman" panose="02020603050405020304" pitchFamily="18" charset="0"/>
+              </a:rPr>
+              <a:t>Виявлення</a:t>
+            </a:r>
+            <a:r>
+              <a:rPr lang="ru-RU" sz="2000" b="1" dirty="0">
+                <a:latin typeface="Times New Roman" panose="02020603050405020304" pitchFamily="18" charset="0"/>
+                <a:cs typeface="Times New Roman" panose="02020603050405020304" pitchFamily="18" charset="0"/>
+              </a:rPr>
+              <a:t> проблем </a:t>
+            </a:r>
+            <a:r>
+              <a:rPr lang="ru-RU" sz="2000" b="1" dirty="0" err="1">
+                <a:latin typeface="Times New Roman" panose="02020603050405020304" pitchFamily="18" charset="0"/>
+                <a:cs typeface="Times New Roman" panose="02020603050405020304" pitchFamily="18" charset="0"/>
+              </a:rPr>
+              <a:t>шкіри</a:t>
+            </a:r>
+            <a:r>
+              <a:rPr lang="ru-RU" sz="2000" b="1" dirty="0">
+                <a:latin typeface="Times New Roman" panose="02020603050405020304" pitchFamily="18" charset="0"/>
+                <a:cs typeface="Times New Roman" panose="02020603050405020304" pitchFamily="18" charset="0"/>
+              </a:rPr>
+              <a:t>. </a:t>
+            </a:r>
+          </a:p>
+          <a:p>
+            <a:pPr algn="just"/>
+            <a:r>
+              <a:rPr lang="ru-RU" sz="2000" dirty="0">
+                <a:latin typeface="Times New Roman" panose="02020603050405020304" pitchFamily="18" charset="0"/>
+                <a:cs typeface="Times New Roman" panose="02020603050405020304" pitchFamily="18" charset="0"/>
+              </a:rPr>
+              <a:t>	Для </a:t>
+            </a:r>
+            <a:r>
+              <a:rPr lang="ru-RU" sz="2000" dirty="0" err="1">
+                <a:latin typeface="Times New Roman" panose="02020603050405020304" pitchFamily="18" charset="0"/>
+                <a:cs typeface="Times New Roman" panose="02020603050405020304" pitchFamily="18" charset="0"/>
+              </a:rPr>
+              <a:t>цього</a:t>
+            </a:r>
+            <a:r>
+              <a:rPr lang="ru-RU" sz="2000" dirty="0">
+                <a:latin typeface="Times New Roman" panose="02020603050405020304" pitchFamily="18" charset="0"/>
+                <a:cs typeface="Times New Roman" panose="02020603050405020304" pitchFamily="18" charset="0"/>
+              </a:rPr>
+              <a:t> ми </a:t>
+            </a:r>
+            <a:r>
+              <a:rPr lang="ru-RU" sz="2000" dirty="0" err="1">
+                <a:latin typeface="Times New Roman" panose="02020603050405020304" pitchFamily="18" charset="0"/>
+                <a:cs typeface="Times New Roman" panose="02020603050405020304" pitchFamily="18" charset="0"/>
+              </a:rPr>
+              <a:t>перетворюємо</a:t>
+            </a:r>
+            <a:r>
+              <a:rPr lang="ru-RU" sz="2000" dirty="0">
+                <a:latin typeface="Times New Roman" panose="02020603050405020304" pitchFamily="18" charset="0"/>
+                <a:cs typeface="Times New Roman" panose="02020603050405020304" pitchFamily="18" charset="0"/>
+              </a:rPr>
+              <a:t> ROI у </a:t>
+            </a:r>
+            <a:r>
+              <a:rPr lang="ru-RU" sz="2000" dirty="0" err="1">
+                <a:latin typeface="Times New Roman" panose="02020603050405020304" pitchFamily="18" charset="0"/>
+                <a:cs typeface="Times New Roman" panose="02020603050405020304" pitchFamily="18" charset="0"/>
+              </a:rPr>
+              <a:t>відтінки</a:t>
+            </a:r>
+            <a:r>
+              <a:rPr lang="ru-RU" sz="2000" dirty="0">
+                <a:latin typeface="Times New Roman" panose="02020603050405020304" pitchFamily="18" charset="0"/>
+                <a:cs typeface="Times New Roman" panose="02020603050405020304" pitchFamily="18" charset="0"/>
+              </a:rPr>
+              <a:t> </a:t>
+            </a:r>
+            <a:r>
+              <a:rPr lang="ru-RU" sz="2000" dirty="0" err="1">
+                <a:latin typeface="Times New Roman" panose="02020603050405020304" pitchFamily="18" charset="0"/>
+                <a:cs typeface="Times New Roman" panose="02020603050405020304" pitchFamily="18" charset="0"/>
+              </a:rPr>
+              <a:t>сірого</a:t>
+            </a:r>
+            <a:r>
+              <a:rPr lang="ru-RU" sz="2000" dirty="0">
+                <a:latin typeface="Times New Roman" panose="02020603050405020304" pitchFamily="18" charset="0"/>
+                <a:cs typeface="Times New Roman" panose="02020603050405020304" pitchFamily="18" charset="0"/>
+              </a:rPr>
+              <a:t>, </a:t>
+            </a:r>
+            <a:r>
+              <a:rPr lang="ru-RU" sz="2000" dirty="0" err="1">
+                <a:latin typeface="Times New Roman" panose="02020603050405020304" pitchFamily="18" charset="0"/>
+                <a:cs typeface="Times New Roman" panose="02020603050405020304" pitchFamily="18" charset="0"/>
+              </a:rPr>
+              <a:t>застосовуємо</a:t>
+            </a:r>
+            <a:r>
+              <a:rPr lang="ru-RU" sz="2000" dirty="0">
+                <a:latin typeface="Times New Roman" panose="02020603050405020304" pitchFamily="18" charset="0"/>
+                <a:cs typeface="Times New Roman" panose="02020603050405020304" pitchFamily="18" charset="0"/>
+              </a:rPr>
+              <a:t> оператор Лапласа для </a:t>
+            </a:r>
+            <a:r>
+              <a:rPr lang="ru-RU" sz="2000" dirty="0" err="1">
+                <a:latin typeface="Times New Roman" panose="02020603050405020304" pitchFamily="18" charset="0"/>
+                <a:cs typeface="Times New Roman" panose="02020603050405020304" pitchFamily="18" charset="0"/>
+              </a:rPr>
+              <a:t>виділення</a:t>
+            </a:r>
+            <a:r>
+              <a:rPr lang="ru-RU" sz="2000" dirty="0">
+                <a:latin typeface="Times New Roman" panose="02020603050405020304" pitchFamily="18" charset="0"/>
+                <a:cs typeface="Times New Roman" panose="02020603050405020304" pitchFamily="18" charset="0"/>
+              </a:rPr>
+              <a:t> </a:t>
+            </a:r>
+            <a:r>
+              <a:rPr lang="ru-RU" sz="2000" dirty="0" err="1">
+                <a:latin typeface="Times New Roman" panose="02020603050405020304" pitchFamily="18" charset="0"/>
+                <a:cs typeface="Times New Roman" panose="02020603050405020304" pitchFamily="18" charset="0"/>
+              </a:rPr>
+              <a:t>границь</a:t>
+            </a:r>
+            <a:r>
+              <a:rPr lang="ru-RU" sz="2000" dirty="0">
+                <a:latin typeface="Times New Roman" panose="02020603050405020304" pitchFamily="18" charset="0"/>
+                <a:cs typeface="Times New Roman" panose="02020603050405020304" pitchFamily="18" charset="0"/>
+              </a:rPr>
+              <a:t>, і </a:t>
+            </a:r>
+            <a:r>
+              <a:rPr lang="ru-RU" sz="2000" dirty="0" err="1">
+                <a:latin typeface="Times New Roman" panose="02020603050405020304" pitchFamily="18" charset="0"/>
+                <a:cs typeface="Times New Roman" panose="02020603050405020304" pitchFamily="18" charset="0"/>
+              </a:rPr>
+              <a:t>обчислюємо</a:t>
+            </a:r>
+            <a:r>
+              <a:rPr lang="ru-RU" sz="2000" dirty="0">
+                <a:latin typeface="Times New Roman" panose="02020603050405020304" pitchFamily="18" charset="0"/>
+                <a:cs typeface="Times New Roman" panose="02020603050405020304" pitchFamily="18" charset="0"/>
+              </a:rPr>
+              <a:t> </a:t>
+            </a:r>
+            <a:r>
+              <a:rPr lang="ru-RU" sz="2000" dirty="0" err="1">
+                <a:latin typeface="Times New Roman" panose="02020603050405020304" pitchFamily="18" charset="0"/>
+                <a:cs typeface="Times New Roman" panose="02020603050405020304" pitchFamily="18" charset="0"/>
+              </a:rPr>
+              <a:t>дисперсію</a:t>
+            </a:r>
+            <a:r>
+              <a:rPr lang="ru-RU" sz="2000" dirty="0">
+                <a:latin typeface="Times New Roman" panose="02020603050405020304" pitchFamily="18" charset="0"/>
+                <a:cs typeface="Times New Roman" panose="02020603050405020304" pitchFamily="18" charset="0"/>
+              </a:rPr>
+              <a:t> </a:t>
+            </a:r>
+            <a:r>
+              <a:rPr lang="ru-RU" sz="2000" dirty="0" err="1">
+                <a:latin typeface="Times New Roman" panose="02020603050405020304" pitchFamily="18" charset="0"/>
+                <a:cs typeface="Times New Roman" panose="02020603050405020304" pitchFamily="18" charset="0"/>
+              </a:rPr>
+              <a:t>отриманого</a:t>
+            </a:r>
+            <a:r>
+              <a:rPr lang="ru-RU" sz="2000" dirty="0">
+                <a:latin typeface="Times New Roman" panose="02020603050405020304" pitchFamily="18" charset="0"/>
+                <a:cs typeface="Times New Roman" panose="02020603050405020304" pitchFamily="18" charset="0"/>
+              </a:rPr>
+              <a:t> </a:t>
+            </a:r>
+            <a:r>
+              <a:rPr lang="ru-RU" sz="2000" dirty="0" err="1">
+                <a:latin typeface="Times New Roman" panose="02020603050405020304" pitchFamily="18" charset="0"/>
+                <a:cs typeface="Times New Roman" panose="02020603050405020304" pitchFamily="18" charset="0"/>
+              </a:rPr>
+              <a:t>зображення</a:t>
+            </a:r>
+            <a:r>
+              <a:rPr lang="ru-RU" sz="2000" dirty="0">
+                <a:latin typeface="Times New Roman" panose="02020603050405020304" pitchFamily="18" charset="0"/>
+                <a:cs typeface="Times New Roman" panose="02020603050405020304" pitchFamily="18" charset="0"/>
+              </a:rPr>
+              <a:t>. Мала </a:t>
+            </a:r>
+            <a:r>
+              <a:rPr lang="ru-RU" sz="2000" dirty="0" err="1">
+                <a:latin typeface="Times New Roman" panose="02020603050405020304" pitchFamily="18" charset="0"/>
+                <a:cs typeface="Times New Roman" panose="02020603050405020304" pitchFamily="18" charset="0"/>
+              </a:rPr>
+              <a:t>дисперсія</a:t>
+            </a:r>
+            <a:r>
+              <a:rPr lang="ru-RU" sz="2000" dirty="0">
+                <a:latin typeface="Times New Roman" panose="02020603050405020304" pitchFamily="18" charset="0"/>
+                <a:cs typeface="Times New Roman" panose="02020603050405020304" pitchFamily="18" charset="0"/>
+              </a:rPr>
+              <a:t> (</a:t>
+            </a:r>
+            <a:r>
+              <a:rPr lang="ru-RU" sz="2000" dirty="0" err="1">
+                <a:latin typeface="Times New Roman" panose="02020603050405020304" pitchFamily="18" charset="0"/>
+                <a:cs typeface="Times New Roman" panose="02020603050405020304" pitchFamily="18" charset="0"/>
+              </a:rPr>
+              <a:t>менше</a:t>
+            </a:r>
+            <a:r>
+              <a:rPr lang="ru-RU" sz="2000" dirty="0">
+                <a:latin typeface="Times New Roman" panose="02020603050405020304" pitchFamily="18" charset="0"/>
+                <a:cs typeface="Times New Roman" panose="02020603050405020304" pitchFamily="18" charset="0"/>
+              </a:rPr>
+              <a:t> 100) </a:t>
+            </a:r>
+            <a:r>
+              <a:rPr lang="ru-RU" sz="2000" dirty="0" err="1">
+                <a:latin typeface="Times New Roman" panose="02020603050405020304" pitchFamily="18" charset="0"/>
+                <a:cs typeface="Times New Roman" panose="02020603050405020304" pitchFamily="18" charset="0"/>
+              </a:rPr>
+              <a:t>свідчить</a:t>
+            </a:r>
+            <a:r>
+              <a:rPr lang="ru-RU" sz="2000" dirty="0">
+                <a:latin typeface="Times New Roman" panose="02020603050405020304" pitchFamily="18" charset="0"/>
+                <a:cs typeface="Times New Roman" panose="02020603050405020304" pitchFamily="18" charset="0"/>
+              </a:rPr>
+              <a:t> про </a:t>
+            </a:r>
+            <a:r>
+              <a:rPr lang="ru-RU" sz="2000" dirty="0" err="1">
+                <a:latin typeface="Times New Roman" panose="02020603050405020304" pitchFamily="18" charset="0"/>
+                <a:cs typeface="Times New Roman" panose="02020603050405020304" pitchFamily="18" charset="0"/>
+              </a:rPr>
+              <a:t>наявність</a:t>
+            </a:r>
+            <a:r>
+              <a:rPr lang="ru-RU" sz="2000" dirty="0">
+                <a:latin typeface="Times New Roman" panose="02020603050405020304" pitchFamily="18" charset="0"/>
+                <a:cs typeface="Times New Roman" panose="02020603050405020304" pitchFamily="18" charset="0"/>
+              </a:rPr>
+              <a:t> акне </a:t>
+            </a:r>
+            <a:r>
+              <a:rPr lang="ru-RU" sz="2000" dirty="0" err="1">
+                <a:latin typeface="Times New Roman" panose="02020603050405020304" pitchFamily="18" charset="0"/>
+                <a:cs typeface="Times New Roman" panose="02020603050405020304" pitchFamily="18" charset="0"/>
+              </a:rPr>
+              <a:t>або</a:t>
+            </a:r>
+            <a:r>
+              <a:rPr lang="ru-RU" sz="2000" dirty="0">
+                <a:latin typeface="Times New Roman" panose="02020603050405020304" pitchFamily="18" charset="0"/>
+                <a:cs typeface="Times New Roman" panose="02020603050405020304" pitchFamily="18" charset="0"/>
+              </a:rPr>
+              <a:t> </a:t>
+            </a:r>
+            <a:r>
+              <a:rPr lang="ru-RU" sz="2000" dirty="0" err="1">
+                <a:latin typeface="Times New Roman" panose="02020603050405020304" pitchFamily="18" charset="0"/>
+                <a:cs typeface="Times New Roman" panose="02020603050405020304" pitchFamily="18" charset="0"/>
+              </a:rPr>
+              <a:t>нерівностей</a:t>
+            </a:r>
+            <a:r>
+              <a:rPr lang="ru-RU" sz="2000" dirty="0">
+                <a:latin typeface="Times New Roman" panose="02020603050405020304" pitchFamily="18" charset="0"/>
+                <a:cs typeface="Times New Roman" panose="02020603050405020304" pitchFamily="18" charset="0"/>
+              </a:rPr>
+              <a:t>. Велика </a:t>
+            </a:r>
+            <a:r>
+              <a:rPr lang="ru-RU" sz="2000" dirty="0" err="1">
+                <a:latin typeface="Times New Roman" panose="02020603050405020304" pitchFamily="18" charset="0"/>
+                <a:cs typeface="Times New Roman" panose="02020603050405020304" pitchFamily="18" charset="0"/>
+              </a:rPr>
+              <a:t>дисперсія</a:t>
+            </a:r>
+            <a:r>
+              <a:rPr lang="ru-RU" sz="2000" dirty="0">
+                <a:latin typeface="Times New Roman" panose="02020603050405020304" pitchFamily="18" charset="0"/>
+                <a:cs typeface="Times New Roman" panose="02020603050405020304" pitchFamily="18" charset="0"/>
+              </a:rPr>
+              <a:t> (</a:t>
+            </a:r>
+            <a:r>
+              <a:rPr lang="ru-RU" sz="2000" dirty="0" err="1">
+                <a:latin typeface="Times New Roman" panose="02020603050405020304" pitchFamily="18" charset="0"/>
+                <a:cs typeface="Times New Roman" panose="02020603050405020304" pitchFamily="18" charset="0"/>
+              </a:rPr>
+              <a:t>більше</a:t>
+            </a:r>
+            <a:r>
+              <a:rPr lang="ru-RU" sz="2000" dirty="0">
+                <a:latin typeface="Times New Roman" panose="02020603050405020304" pitchFamily="18" charset="0"/>
+                <a:cs typeface="Times New Roman" panose="02020603050405020304" pitchFamily="18" charset="0"/>
+              </a:rPr>
+              <a:t> 500) – про </a:t>
+            </a:r>
+            <a:r>
+              <a:rPr lang="ru-RU" sz="2000" dirty="0" err="1">
+                <a:latin typeface="Times New Roman" panose="02020603050405020304" pitchFamily="18" charset="0"/>
+                <a:cs typeface="Times New Roman" panose="02020603050405020304" pitchFamily="18" charset="0"/>
+              </a:rPr>
+              <a:t>зморшки</a:t>
+            </a:r>
+            <a:r>
+              <a:rPr lang="ru-RU" sz="2000" dirty="0">
+                <a:latin typeface="Times New Roman" panose="02020603050405020304" pitchFamily="18" charset="0"/>
+                <a:cs typeface="Times New Roman" panose="02020603050405020304" pitchFamily="18" charset="0"/>
+              </a:rPr>
+              <a:t> </a:t>
+            </a:r>
+            <a:r>
+              <a:rPr lang="ru-RU" sz="2000" dirty="0" err="1">
+                <a:latin typeface="Times New Roman" panose="02020603050405020304" pitchFamily="18" charset="0"/>
+                <a:cs typeface="Times New Roman" panose="02020603050405020304" pitchFamily="18" charset="0"/>
+              </a:rPr>
+              <a:t>або</a:t>
+            </a:r>
+            <a:r>
+              <a:rPr lang="ru-RU" sz="2000" dirty="0">
+                <a:latin typeface="Times New Roman" panose="02020603050405020304" pitchFamily="18" charset="0"/>
+                <a:cs typeface="Times New Roman" panose="02020603050405020304" pitchFamily="18" charset="0"/>
+              </a:rPr>
+              <a:t> </a:t>
+            </a:r>
+            <a:r>
+              <a:rPr lang="ru-RU" sz="2000" dirty="0" err="1">
+                <a:latin typeface="Times New Roman" panose="02020603050405020304" pitchFamily="18" charset="0"/>
+                <a:cs typeface="Times New Roman" panose="02020603050405020304" pitchFamily="18" charset="0"/>
+              </a:rPr>
+              <a:t>сухість</a:t>
+            </a:r>
+            <a:r>
+              <a:rPr lang="ru-RU" sz="2000" dirty="0">
+                <a:latin typeface="Times New Roman" panose="02020603050405020304" pitchFamily="18" charset="0"/>
+                <a:cs typeface="Times New Roman" panose="02020603050405020304" pitchFamily="18" charset="0"/>
+              </a:rPr>
+              <a:t>. </a:t>
+            </a:r>
+            <a:r>
+              <a:rPr lang="ru-RU" sz="2000" dirty="0" err="1">
+                <a:latin typeface="Times New Roman" panose="02020603050405020304" pitchFamily="18" charset="0"/>
+                <a:cs typeface="Times New Roman" panose="02020603050405020304" pitchFamily="18" charset="0"/>
+              </a:rPr>
+              <a:t>Проміжні</a:t>
+            </a:r>
+            <a:r>
+              <a:rPr lang="ru-RU" sz="2000" dirty="0">
+                <a:latin typeface="Times New Roman" panose="02020603050405020304" pitchFamily="18" charset="0"/>
+                <a:cs typeface="Times New Roman" panose="02020603050405020304" pitchFamily="18" charset="0"/>
+              </a:rPr>
+              <a:t> </a:t>
+            </a:r>
+            <a:r>
+              <a:rPr lang="ru-RU" sz="2000" dirty="0" err="1">
+                <a:latin typeface="Times New Roman" panose="02020603050405020304" pitchFamily="18" charset="0"/>
+                <a:cs typeface="Times New Roman" panose="02020603050405020304" pitchFamily="18" charset="0"/>
+              </a:rPr>
+              <a:t>значення</a:t>
+            </a:r>
+            <a:r>
+              <a:rPr lang="ru-RU" sz="2000" dirty="0">
+                <a:latin typeface="Times New Roman" panose="02020603050405020304" pitchFamily="18" charset="0"/>
+                <a:cs typeface="Times New Roman" panose="02020603050405020304" pitchFamily="18" charset="0"/>
+              </a:rPr>
+              <a:t> </a:t>
+            </a:r>
+            <a:r>
+              <a:rPr lang="ru-RU" sz="2000" dirty="0" err="1">
+                <a:latin typeface="Times New Roman" panose="02020603050405020304" pitchFamily="18" charset="0"/>
+                <a:cs typeface="Times New Roman" panose="02020603050405020304" pitchFamily="18" charset="0"/>
+              </a:rPr>
+              <a:t>вказують</a:t>
+            </a:r>
+            <a:r>
+              <a:rPr lang="ru-RU" sz="2000" dirty="0">
+                <a:latin typeface="Times New Roman" panose="02020603050405020304" pitchFamily="18" charset="0"/>
+                <a:cs typeface="Times New Roman" panose="02020603050405020304" pitchFamily="18" charset="0"/>
+              </a:rPr>
+              <a:t> на хороший стан </a:t>
+            </a:r>
+            <a:r>
+              <a:rPr lang="ru-RU" sz="2000" dirty="0" err="1">
+                <a:latin typeface="Times New Roman" panose="02020603050405020304" pitchFamily="18" charset="0"/>
+                <a:cs typeface="Times New Roman" panose="02020603050405020304" pitchFamily="18" charset="0"/>
+              </a:rPr>
+              <a:t>шкіри</a:t>
+            </a:r>
+            <a:r>
+              <a:rPr lang="ru-RU" sz="2000" dirty="0">
+                <a:latin typeface="Times New Roman" panose="02020603050405020304" pitchFamily="18" charset="0"/>
+                <a:cs typeface="Times New Roman" panose="02020603050405020304" pitchFamily="18" charset="0"/>
+              </a:rPr>
+              <a:t>.</a:t>
+            </a:r>
+          </a:p>
+          <a:p>
+            <a:pPr algn="just"/>
+            <a:r>
+              <a:rPr lang="ru-RU" sz="2000" dirty="0">
+                <a:latin typeface="Times New Roman" panose="02020603050405020304" pitchFamily="18" charset="0"/>
+                <a:cs typeface="Times New Roman" panose="02020603050405020304" pitchFamily="18" charset="0"/>
+              </a:rPr>
+              <a:t>	</a:t>
+            </a:r>
+          </a:p>
+          <a:p>
+            <a:pPr algn="just"/>
+            <a:r>
+              <a:rPr lang="ru-RU" sz="2000" b="1" dirty="0">
+                <a:latin typeface="Times New Roman" panose="02020603050405020304" pitchFamily="18" charset="0"/>
+                <a:cs typeface="Times New Roman" panose="02020603050405020304" pitchFamily="18" charset="0"/>
+              </a:rPr>
+              <a:t>	- </a:t>
+            </a:r>
+            <a:r>
+              <a:rPr lang="ru-RU" sz="2000" b="1" dirty="0" err="1">
+                <a:latin typeface="Times New Roman" panose="02020603050405020304" pitchFamily="18" charset="0"/>
+                <a:cs typeface="Times New Roman" panose="02020603050405020304" pitchFamily="18" charset="0"/>
+              </a:rPr>
+              <a:t>Аналіз</a:t>
+            </a:r>
+            <a:r>
+              <a:rPr lang="ru-RU" sz="2000" b="1" dirty="0">
+                <a:latin typeface="Times New Roman" panose="02020603050405020304" pitchFamily="18" charset="0"/>
+                <a:cs typeface="Times New Roman" panose="02020603050405020304" pitchFamily="18" charset="0"/>
+              </a:rPr>
+              <a:t> </a:t>
+            </a:r>
+            <a:r>
+              <a:rPr lang="ru-RU" sz="2000" b="1" dirty="0" err="1">
+                <a:latin typeface="Times New Roman" panose="02020603050405020304" pitchFamily="18" charset="0"/>
+                <a:cs typeface="Times New Roman" panose="02020603050405020304" pitchFamily="18" charset="0"/>
+              </a:rPr>
+              <a:t>волосся</a:t>
+            </a:r>
+            <a:r>
+              <a:rPr lang="ru-RU" sz="2000" b="1" dirty="0">
+                <a:latin typeface="Times New Roman" panose="02020603050405020304" pitchFamily="18" charset="0"/>
+                <a:cs typeface="Times New Roman" panose="02020603050405020304" pitchFamily="18" charset="0"/>
+              </a:rPr>
+              <a:t>. </a:t>
+            </a:r>
+          </a:p>
+          <a:p>
+            <a:pPr algn="just"/>
+            <a:r>
+              <a:rPr lang="ru-RU" sz="2000" dirty="0">
+                <a:latin typeface="Times New Roman" panose="02020603050405020304" pitchFamily="18" charset="0"/>
+                <a:cs typeface="Times New Roman" panose="02020603050405020304" pitchFamily="18" charset="0"/>
+              </a:rPr>
+              <a:t>	Ми </a:t>
+            </a:r>
+            <a:r>
+              <a:rPr lang="ru-RU" sz="2000" dirty="0" err="1">
+                <a:latin typeface="Times New Roman" panose="02020603050405020304" pitchFamily="18" charset="0"/>
+                <a:cs typeface="Times New Roman" panose="02020603050405020304" pitchFamily="18" charset="0"/>
+              </a:rPr>
+              <a:t>виділяємо</a:t>
+            </a:r>
+            <a:r>
+              <a:rPr lang="ru-RU" sz="2000" dirty="0">
+                <a:latin typeface="Times New Roman" panose="02020603050405020304" pitchFamily="18" charset="0"/>
+                <a:cs typeface="Times New Roman" panose="02020603050405020304" pitchFamily="18" charset="0"/>
+              </a:rPr>
+              <a:t> </a:t>
+            </a:r>
+            <a:r>
+              <a:rPr lang="ru-RU" sz="2000" dirty="0" err="1">
+                <a:latin typeface="Times New Roman" panose="02020603050405020304" pitchFamily="18" charset="0"/>
+                <a:cs typeface="Times New Roman" panose="02020603050405020304" pitchFamily="18" charset="0"/>
+              </a:rPr>
+              <a:t>верхню</a:t>
+            </a:r>
+            <a:r>
+              <a:rPr lang="ru-RU" sz="2000" dirty="0">
+                <a:latin typeface="Times New Roman" panose="02020603050405020304" pitchFamily="18" charset="0"/>
+                <a:cs typeface="Times New Roman" panose="02020603050405020304" pitchFamily="18" charset="0"/>
+              </a:rPr>
+              <a:t> третину </a:t>
+            </a:r>
+            <a:r>
+              <a:rPr lang="ru-RU" sz="2000" dirty="0" err="1">
+                <a:latin typeface="Times New Roman" panose="02020603050405020304" pitchFamily="18" charset="0"/>
+                <a:cs typeface="Times New Roman" panose="02020603050405020304" pitchFamily="18" charset="0"/>
+              </a:rPr>
+              <a:t>зображення</a:t>
+            </a:r>
+            <a:r>
+              <a:rPr lang="ru-RU" sz="2000" dirty="0">
+                <a:latin typeface="Times New Roman" panose="02020603050405020304" pitchFamily="18" charset="0"/>
+                <a:cs typeface="Times New Roman" panose="02020603050405020304" pitchFamily="18" charset="0"/>
+              </a:rPr>
+              <a:t>, де </a:t>
+            </a:r>
+            <a:r>
+              <a:rPr lang="ru-RU" sz="2000" dirty="0" err="1">
+                <a:latin typeface="Times New Roman" panose="02020603050405020304" pitchFamily="18" charset="0"/>
+                <a:cs typeface="Times New Roman" panose="02020603050405020304" pitchFamily="18" charset="0"/>
+              </a:rPr>
+              <a:t>найчастіше</a:t>
+            </a:r>
+            <a:r>
+              <a:rPr lang="ru-RU" sz="2000" dirty="0">
+                <a:latin typeface="Times New Roman" panose="02020603050405020304" pitchFamily="18" charset="0"/>
+                <a:cs typeface="Times New Roman" panose="02020603050405020304" pitchFamily="18" charset="0"/>
+              </a:rPr>
+              <a:t> </a:t>
+            </a:r>
+            <a:r>
+              <a:rPr lang="ru-RU" sz="2000" dirty="0" err="1">
+                <a:latin typeface="Times New Roman" panose="02020603050405020304" pitchFamily="18" charset="0"/>
+                <a:cs typeface="Times New Roman" panose="02020603050405020304" pitchFamily="18" charset="0"/>
+              </a:rPr>
+              <a:t>знаходиться</a:t>
+            </a:r>
+            <a:r>
+              <a:rPr lang="ru-RU" sz="2000" dirty="0">
+                <a:latin typeface="Times New Roman" panose="02020603050405020304" pitchFamily="18" charset="0"/>
+                <a:cs typeface="Times New Roman" panose="02020603050405020304" pitchFamily="18" charset="0"/>
+              </a:rPr>
+              <a:t> </a:t>
+            </a:r>
+            <a:r>
+              <a:rPr lang="ru-RU" sz="2000" dirty="0" err="1">
+                <a:latin typeface="Times New Roman" panose="02020603050405020304" pitchFamily="18" charset="0"/>
+                <a:cs typeface="Times New Roman" panose="02020603050405020304" pitchFamily="18" charset="0"/>
+              </a:rPr>
+              <a:t>волосся</a:t>
+            </a:r>
+            <a:r>
+              <a:rPr lang="ru-RU" sz="2000" dirty="0">
+                <a:latin typeface="Times New Roman" panose="02020603050405020304" pitchFamily="18" charset="0"/>
+                <a:cs typeface="Times New Roman" panose="02020603050405020304" pitchFamily="18" charset="0"/>
+              </a:rPr>
+              <a:t>. </a:t>
+            </a:r>
+            <a:r>
+              <a:rPr lang="ru-RU" sz="2000" dirty="0" err="1">
+                <a:latin typeface="Times New Roman" panose="02020603050405020304" pitchFamily="18" charset="0"/>
+                <a:cs typeface="Times New Roman" panose="02020603050405020304" pitchFamily="18" charset="0"/>
+              </a:rPr>
+              <a:t>Аналізуємо</a:t>
+            </a:r>
+            <a:r>
+              <a:rPr lang="ru-RU" sz="2000" dirty="0">
+                <a:latin typeface="Times New Roman" panose="02020603050405020304" pitchFamily="18" charset="0"/>
+                <a:cs typeface="Times New Roman" panose="02020603050405020304" pitchFamily="18" charset="0"/>
+              </a:rPr>
+              <a:t> </a:t>
+            </a:r>
+            <a:r>
+              <a:rPr lang="ru-RU" sz="2000" dirty="0" err="1">
+                <a:latin typeface="Times New Roman" panose="02020603050405020304" pitchFamily="18" charset="0"/>
+                <a:cs typeface="Times New Roman" panose="02020603050405020304" pitchFamily="18" charset="0"/>
+              </a:rPr>
+              <a:t>середній</a:t>
+            </a:r>
+            <a:r>
+              <a:rPr lang="ru-RU" sz="2000" dirty="0">
+                <a:latin typeface="Times New Roman" panose="02020603050405020304" pitchFamily="18" charset="0"/>
+                <a:cs typeface="Times New Roman" panose="02020603050405020304" pitchFamily="18" charset="0"/>
+              </a:rPr>
+              <a:t> </a:t>
+            </a:r>
+            <a:r>
+              <a:rPr lang="ru-RU" sz="2000" dirty="0" err="1">
+                <a:latin typeface="Times New Roman" panose="02020603050405020304" pitchFamily="18" charset="0"/>
+                <a:cs typeface="Times New Roman" panose="02020603050405020304" pitchFamily="18" charset="0"/>
+              </a:rPr>
+              <a:t>колір</a:t>
+            </a:r>
+            <a:r>
+              <a:rPr lang="ru-RU" sz="2000" dirty="0">
+                <a:latin typeface="Times New Roman" panose="02020603050405020304" pitchFamily="18" charset="0"/>
+                <a:cs typeface="Times New Roman" panose="02020603050405020304" pitchFamily="18" charset="0"/>
+              </a:rPr>
+              <a:t> для </a:t>
+            </a:r>
+            <a:r>
+              <a:rPr lang="ru-RU" sz="2000" dirty="0" err="1">
+                <a:latin typeface="Times New Roman" panose="02020603050405020304" pitchFamily="18" charset="0"/>
+                <a:cs typeface="Times New Roman" panose="02020603050405020304" pitchFamily="18" charset="0"/>
+              </a:rPr>
+              <a:t>визначення</a:t>
+            </a:r>
+            <a:r>
+              <a:rPr lang="ru-RU" sz="2000" dirty="0">
+                <a:latin typeface="Times New Roman" panose="02020603050405020304" pitchFamily="18" charset="0"/>
+                <a:cs typeface="Times New Roman" panose="02020603050405020304" pitchFamily="18" charset="0"/>
+              </a:rPr>
+              <a:t> типу </a:t>
+            </a:r>
+            <a:r>
+              <a:rPr lang="ru-RU" sz="2000" dirty="0" err="1">
+                <a:latin typeface="Times New Roman" panose="02020603050405020304" pitchFamily="18" charset="0"/>
+                <a:cs typeface="Times New Roman" panose="02020603050405020304" pitchFamily="18" charset="0"/>
+              </a:rPr>
+              <a:t>волосся</a:t>
+            </a:r>
+            <a:r>
+              <a:rPr lang="ru-RU" sz="2000" dirty="0">
+                <a:latin typeface="Times New Roman" panose="02020603050405020304" pitchFamily="18" charset="0"/>
+                <a:cs typeface="Times New Roman" panose="02020603050405020304" pitchFamily="18" charset="0"/>
+              </a:rPr>
+              <a:t>: </a:t>
+            </a:r>
+            <a:r>
+              <a:rPr lang="ru-RU" sz="2000" dirty="0" err="1">
+                <a:latin typeface="Times New Roman" panose="02020603050405020304" pitchFamily="18" charset="0"/>
+                <a:cs typeface="Times New Roman" panose="02020603050405020304" pitchFamily="18" charset="0"/>
+              </a:rPr>
+              <a:t>світле</a:t>
+            </a:r>
+            <a:r>
+              <a:rPr lang="ru-RU" sz="2000" dirty="0">
+                <a:latin typeface="Times New Roman" panose="02020603050405020304" pitchFamily="18" charset="0"/>
+                <a:cs typeface="Times New Roman" panose="02020603050405020304" pitchFamily="18" charset="0"/>
+              </a:rPr>
+              <a:t> (</a:t>
+            </a:r>
+            <a:r>
+              <a:rPr lang="ru-RU" sz="2000" dirty="0" err="1">
+                <a:latin typeface="Times New Roman" panose="02020603050405020304" pitchFamily="18" charset="0"/>
+                <a:cs typeface="Times New Roman" panose="02020603050405020304" pitchFamily="18" charset="0"/>
+              </a:rPr>
+              <a:t>яскравість</a:t>
+            </a:r>
+            <a:r>
+              <a:rPr lang="ru-RU" sz="2000" dirty="0">
+                <a:latin typeface="Times New Roman" panose="02020603050405020304" pitchFamily="18" charset="0"/>
+                <a:cs typeface="Times New Roman" panose="02020603050405020304" pitchFamily="18" charset="0"/>
+              </a:rPr>
+              <a:t> &gt;150), русе (&gt;80), </a:t>
+            </a:r>
+            <a:r>
+              <a:rPr lang="ru-RU" sz="2000" dirty="0" err="1">
+                <a:latin typeface="Times New Roman" panose="02020603050405020304" pitchFamily="18" charset="0"/>
+                <a:cs typeface="Times New Roman" panose="02020603050405020304" pitchFamily="18" charset="0"/>
+              </a:rPr>
+              <a:t>темне</a:t>
+            </a:r>
+            <a:r>
+              <a:rPr lang="ru-RU" sz="2000" dirty="0">
+                <a:latin typeface="Times New Roman" panose="02020603050405020304" pitchFamily="18" charset="0"/>
+                <a:cs typeface="Times New Roman" panose="02020603050405020304" pitchFamily="18" charset="0"/>
+              </a:rPr>
+              <a:t> (≤80). Для </a:t>
+            </a:r>
+            <a:r>
+              <a:rPr lang="ru-RU" sz="2000" dirty="0" err="1">
+                <a:latin typeface="Times New Roman" panose="02020603050405020304" pitchFamily="18" charset="0"/>
+                <a:cs typeface="Times New Roman" panose="02020603050405020304" pitchFamily="18" charset="0"/>
+              </a:rPr>
+              <a:t>оцінки</a:t>
+            </a:r>
+            <a:r>
+              <a:rPr lang="ru-RU" sz="2000" dirty="0">
+                <a:latin typeface="Times New Roman" panose="02020603050405020304" pitchFamily="18" charset="0"/>
+                <a:cs typeface="Times New Roman" panose="02020603050405020304" pitchFamily="18" charset="0"/>
+              </a:rPr>
+              <a:t> стану </a:t>
+            </a:r>
+            <a:r>
+              <a:rPr lang="ru-RU" sz="2000" dirty="0" err="1">
+                <a:latin typeface="Times New Roman" panose="02020603050405020304" pitchFamily="18" charset="0"/>
+                <a:cs typeface="Times New Roman" panose="02020603050405020304" pitchFamily="18" charset="0"/>
+              </a:rPr>
+              <a:t>обчислюємо</a:t>
+            </a:r>
+            <a:r>
+              <a:rPr lang="ru-RU" sz="2000" dirty="0">
+                <a:latin typeface="Times New Roman" panose="02020603050405020304" pitchFamily="18" charset="0"/>
+                <a:cs typeface="Times New Roman" panose="02020603050405020304" pitchFamily="18" charset="0"/>
+              </a:rPr>
+              <a:t> </a:t>
+            </a:r>
+            <a:r>
+              <a:rPr lang="ru-RU" sz="2000" dirty="0" err="1">
+                <a:latin typeface="Times New Roman" panose="02020603050405020304" pitchFamily="18" charset="0"/>
+                <a:cs typeface="Times New Roman" panose="02020603050405020304" pitchFamily="18" charset="0"/>
+              </a:rPr>
+              <a:t>варіацію</a:t>
+            </a:r>
+            <a:r>
+              <a:rPr lang="ru-RU" sz="2000" dirty="0">
+                <a:latin typeface="Times New Roman" panose="02020603050405020304" pitchFamily="18" charset="0"/>
+                <a:cs typeface="Times New Roman" panose="02020603050405020304" pitchFamily="18" charset="0"/>
+              </a:rPr>
+              <a:t> </a:t>
+            </a:r>
+            <a:r>
+              <a:rPr lang="ru-RU" sz="2000" dirty="0" err="1">
+                <a:latin typeface="Times New Roman" panose="02020603050405020304" pitchFamily="18" charset="0"/>
+                <a:cs typeface="Times New Roman" panose="02020603050405020304" pitchFamily="18" charset="0"/>
+              </a:rPr>
+              <a:t>яскравості</a:t>
+            </a:r>
+            <a:r>
+              <a:rPr lang="ru-RU" sz="2000" dirty="0">
+                <a:latin typeface="Times New Roman" panose="02020603050405020304" pitchFamily="18" charset="0"/>
+                <a:cs typeface="Times New Roman" panose="02020603050405020304" pitchFamily="18" charset="0"/>
+              </a:rPr>
+              <a:t>: </a:t>
+            </a:r>
+            <a:r>
+              <a:rPr lang="ru-RU" sz="2000" dirty="0" err="1">
+                <a:latin typeface="Times New Roman" panose="02020603050405020304" pitchFamily="18" charset="0"/>
+                <a:cs typeface="Times New Roman" panose="02020603050405020304" pitchFamily="18" charset="0"/>
+              </a:rPr>
+              <a:t>якщо</a:t>
+            </a:r>
+            <a:r>
+              <a:rPr lang="ru-RU" sz="2000" dirty="0">
+                <a:latin typeface="Times New Roman" panose="02020603050405020304" pitchFamily="18" charset="0"/>
+                <a:cs typeface="Times New Roman" panose="02020603050405020304" pitchFamily="18" charset="0"/>
+              </a:rPr>
+              <a:t> </a:t>
+            </a:r>
+            <a:r>
+              <a:rPr lang="ru-RU" sz="2000" dirty="0" err="1">
+                <a:latin typeface="Times New Roman" panose="02020603050405020304" pitchFamily="18" charset="0"/>
+                <a:cs typeface="Times New Roman" panose="02020603050405020304" pitchFamily="18" charset="0"/>
+              </a:rPr>
+              <a:t>варіація</a:t>
+            </a:r>
+            <a:r>
+              <a:rPr lang="ru-RU" sz="2000" dirty="0">
+                <a:latin typeface="Times New Roman" panose="02020603050405020304" pitchFamily="18" charset="0"/>
+                <a:cs typeface="Times New Roman" panose="02020603050405020304" pitchFamily="18" charset="0"/>
+              </a:rPr>
+              <a:t> </a:t>
+            </a:r>
+            <a:r>
+              <a:rPr lang="ru-RU" sz="2000" dirty="0" err="1">
+                <a:latin typeface="Times New Roman" panose="02020603050405020304" pitchFamily="18" charset="0"/>
+                <a:cs typeface="Times New Roman" panose="02020603050405020304" pitchFamily="18" charset="0"/>
+              </a:rPr>
+              <a:t>менше</a:t>
+            </a:r>
+            <a:r>
+              <a:rPr lang="ru-RU" sz="2000" dirty="0">
+                <a:latin typeface="Times New Roman" panose="02020603050405020304" pitchFamily="18" charset="0"/>
+                <a:cs typeface="Times New Roman" panose="02020603050405020304" pitchFamily="18" charset="0"/>
+              </a:rPr>
+              <a:t> 1000 – </a:t>
+            </a:r>
+            <a:r>
+              <a:rPr lang="ru-RU" sz="2000" dirty="0" err="1">
+                <a:latin typeface="Times New Roman" panose="02020603050405020304" pitchFamily="18" charset="0"/>
+                <a:cs typeface="Times New Roman" panose="02020603050405020304" pitchFamily="18" charset="0"/>
+              </a:rPr>
+              <a:t>волосся</a:t>
+            </a:r>
+            <a:r>
+              <a:rPr lang="ru-RU" sz="2000" dirty="0">
+                <a:latin typeface="Times New Roman" panose="02020603050405020304" pitchFamily="18" charset="0"/>
+                <a:cs typeface="Times New Roman" panose="02020603050405020304" pitchFamily="18" charset="0"/>
+              </a:rPr>
+              <a:t> </a:t>
+            </a:r>
+            <a:r>
+              <a:rPr lang="ru-RU" sz="2000" dirty="0" err="1">
+                <a:latin typeface="Times New Roman" panose="02020603050405020304" pitchFamily="18" charset="0"/>
+                <a:cs typeface="Times New Roman" panose="02020603050405020304" pitchFamily="18" charset="0"/>
+              </a:rPr>
+              <a:t>пошкоджене</a:t>
+            </a:r>
+            <a:r>
+              <a:rPr lang="ru-RU" sz="2000" dirty="0">
+                <a:latin typeface="Times New Roman" panose="02020603050405020304" pitchFamily="18" charset="0"/>
+                <a:cs typeface="Times New Roman" panose="02020603050405020304" pitchFamily="18" charset="0"/>
+              </a:rPr>
+              <a:t>, </a:t>
+            </a:r>
+            <a:r>
+              <a:rPr lang="ru-RU" sz="2000" dirty="0" err="1">
+                <a:latin typeface="Times New Roman" panose="02020603050405020304" pitchFamily="18" charset="0"/>
+                <a:cs typeface="Times New Roman" panose="02020603050405020304" pitchFamily="18" charset="0"/>
+              </a:rPr>
+              <a:t>потребує</a:t>
+            </a:r>
+            <a:r>
+              <a:rPr lang="ru-RU" sz="2000" dirty="0">
+                <a:latin typeface="Times New Roman" panose="02020603050405020304" pitchFamily="18" charset="0"/>
+                <a:cs typeface="Times New Roman" panose="02020603050405020304" pitchFamily="18" charset="0"/>
+              </a:rPr>
+              <a:t> </a:t>
+            </a:r>
+            <a:r>
+              <a:rPr lang="ru-RU" sz="2000" dirty="0" err="1">
+                <a:latin typeface="Times New Roman" panose="02020603050405020304" pitchFamily="18" charset="0"/>
+                <a:cs typeface="Times New Roman" panose="02020603050405020304" pitchFamily="18" charset="0"/>
+              </a:rPr>
+              <a:t>відновлення</a:t>
+            </a:r>
+            <a:r>
+              <a:rPr lang="ru-RU" sz="2000" dirty="0">
+                <a:latin typeface="Times New Roman" panose="02020603050405020304" pitchFamily="18" charset="0"/>
+                <a:cs typeface="Times New Roman" panose="02020603050405020304" pitchFamily="18" charset="0"/>
+              </a:rPr>
+              <a:t>.</a:t>
+            </a:r>
+          </a:p>
+          <a:p>
+            <a:pPr algn="just"/>
+            <a:endParaRPr lang="ru-RU" sz="2000" dirty="0">
+              <a:latin typeface="Times New Roman" panose="02020603050405020304" pitchFamily="18" charset="0"/>
+              <a:cs typeface="Times New Roman" panose="02020603050405020304" pitchFamily="18" charset="0"/>
+            </a:endParaRPr>
+          </a:p>
+        </p:txBody>
+      </p:sp>
+    </p:spTree>
+    <p:extLst>
+      <p:ext uri="{BB962C8B-B14F-4D97-AF65-F5344CB8AC3E}">
+        <p14:creationId xmlns:p14="http://schemas.microsoft.com/office/powerpoint/2010/main" val="1890898557"/>
+      </p:ext>
+    </p:extLst>
+  </p:cSld>
+  <p:clrMapOvr>
+    <a:masterClrMapping/>
+  </p:clrMapOvr>
+</p:sld>
+</file>
+
+<file path=ppt/slides/slide8.xml><?xml version="1.0" encoding="utf-8"?>
 <p:sld xmlns:a="http://schemas.openxmlformats.org/drawingml/2006/main" xmlns:r="http://schemas.openxmlformats.org/officeDocument/2006/relationships" xmlns:p="http://schemas.openxmlformats.org/presentationml/2006/main">
   <p:cSld>
     <p:spTree>
@@ -14677,6 +18802,7 @@
           </a:bodyPr>
           <a:lstStyle/>
           <a:p>
+            <a:pPr algn="just"/>
             <a:r>
               <a:rPr lang="ru-RU" sz="2800" dirty="0" err="1">
                 <a:latin typeface="Times New Roman" panose="02020603050405020304" pitchFamily="18" charset="0"/>
@@ -14761,7 +18887,14 @@
           </a:bodyPr>
           <a:lstStyle/>
           <a:p>
-            <a:pPr algn="ctr"/>
+            <a:pPr algn="just"/>
+            <a:r>
+              <a:rPr lang="ru-RU" sz="2000" dirty="0">
+                <a:latin typeface="Times New Roman" panose="02020603050405020304" pitchFamily="18" charset="0"/>
+                <a:cs typeface="Times New Roman" panose="02020603050405020304" pitchFamily="18" charset="0"/>
+              </a:rPr>
+              <a:t>	</a:t>
+            </a:r>
             <a:r>
               <a:rPr lang="ru-RU" sz="2000" dirty="0" err="1">
                 <a:latin typeface="Times New Roman" panose="02020603050405020304" pitchFamily="18" charset="0"/>
@@ -14848,12 +18981,14 @@
             </a:r>
           </a:p>
           <a:p>
+            <a:pPr algn="just"/>
             <a:endParaRPr lang="ru-RU" sz="2000" dirty="0">
               <a:latin typeface="Times New Roman" panose="02020603050405020304" pitchFamily="18" charset="0"/>
               <a:cs typeface="Times New Roman" panose="02020603050405020304" pitchFamily="18" charset="0"/>
             </a:endParaRPr>
           </a:p>
           <a:p>
+            <a:pPr algn="just"/>
             <a:r>
               <a:rPr lang="ru-RU" sz="2000" dirty="0">
                 <a:latin typeface="Times New Roman" panose="02020603050405020304" pitchFamily="18" charset="0"/>
@@ -15073,12 +19208,14 @@
             </a:r>
           </a:p>
           <a:p>
+            <a:pPr algn="just"/>
             <a:endParaRPr lang="ru-RU" sz="2000" dirty="0">
               <a:latin typeface="Times New Roman" panose="02020603050405020304" pitchFamily="18" charset="0"/>
               <a:cs typeface="Times New Roman" panose="02020603050405020304" pitchFamily="18" charset="0"/>
             </a:endParaRPr>
           </a:p>
           <a:p>
+            <a:pPr algn="just"/>
             <a:r>
               <a:rPr lang="ru-RU" sz="2000" dirty="0">
                 <a:latin typeface="Times New Roman" panose="02020603050405020304" pitchFamily="18" charset="0"/>
@@ -15508,12 +19645,14 @@
             </a:r>
           </a:p>
           <a:p>
+            <a:pPr algn="just"/>
             <a:endParaRPr lang="ru-RU" sz="2000" dirty="0">
               <a:latin typeface="Times New Roman" panose="02020603050405020304" pitchFamily="18" charset="0"/>
               <a:cs typeface="Times New Roman" panose="02020603050405020304" pitchFamily="18" charset="0"/>
             </a:endParaRPr>
           </a:p>
           <a:p>
+            <a:pPr algn="just"/>
             <a:r>
               <a:rPr lang="ru-RU" sz="2000" dirty="0">
                 <a:latin typeface="Times New Roman" panose="02020603050405020304" pitchFamily="18" charset="0"/>
@@ -15733,12 +19872,14 @@
             </a:r>
           </a:p>
           <a:p>
+            <a:pPr algn="just"/>
             <a:endParaRPr lang="ru-RU" sz="2000" dirty="0">
               <a:latin typeface="Times New Roman" panose="02020603050405020304" pitchFamily="18" charset="0"/>
               <a:cs typeface="Times New Roman" panose="02020603050405020304" pitchFamily="18" charset="0"/>
             </a:endParaRPr>
           </a:p>
           <a:p>
+            <a:pPr algn="just"/>
             <a:r>
               <a:rPr lang="ru-RU" sz="2000" dirty="0">
                 <a:latin typeface="Times New Roman" panose="02020603050405020304" pitchFamily="18" charset="0"/>
@@ -15846,30 +19987,35 @@
             </a:r>
           </a:p>
           <a:p>
+            <a:pPr algn="just"/>
             <a:endParaRPr lang="ru-RU" sz="2000" dirty="0">
               <a:latin typeface="Times New Roman" panose="02020603050405020304" pitchFamily="18" charset="0"/>
               <a:cs typeface="Times New Roman" panose="02020603050405020304" pitchFamily="18" charset="0"/>
             </a:endParaRPr>
           </a:p>
           <a:p>
+            <a:pPr algn="just"/>
             <a:endParaRPr lang="ru-RU" sz="2000" dirty="0">
               <a:latin typeface="Times New Roman" panose="02020603050405020304" pitchFamily="18" charset="0"/>
               <a:cs typeface="Times New Roman" panose="02020603050405020304" pitchFamily="18" charset="0"/>
             </a:endParaRPr>
           </a:p>
           <a:p>
+            <a:pPr algn="just"/>
             <a:endParaRPr lang="ru-RU" sz="2000" dirty="0">
               <a:latin typeface="Times New Roman" panose="02020603050405020304" pitchFamily="18" charset="0"/>
               <a:cs typeface="Times New Roman" panose="02020603050405020304" pitchFamily="18" charset="0"/>
             </a:endParaRPr>
           </a:p>
           <a:p>
+            <a:pPr algn="just"/>
             <a:endParaRPr lang="ru-RU" sz="2000" dirty="0">
               <a:latin typeface="Times New Roman" panose="02020603050405020304" pitchFamily="18" charset="0"/>
               <a:cs typeface="Times New Roman" panose="02020603050405020304" pitchFamily="18" charset="0"/>
             </a:endParaRPr>
           </a:p>
           <a:p>
+            <a:pPr algn="just"/>
             <a:endParaRPr lang="ru-RU" sz="2000" dirty="0">
               <a:latin typeface="Times New Roman" panose="02020603050405020304" pitchFamily="18" charset="0"/>
               <a:cs typeface="Times New Roman" panose="02020603050405020304" pitchFamily="18" charset="0"/>
@@ -15890,7 +20036,7 @@
 </p:sld>
 </file>
 
-<file path=ppt/slides/slide8.xml><?xml version="1.0" encoding="utf-8"?>
+<file path=ppt/slides/slide9.xml><?xml version="1.0" encoding="utf-8"?>
 <p:sld xmlns:a="http://schemas.openxmlformats.org/drawingml/2006/main" xmlns:r="http://schemas.openxmlformats.org/officeDocument/2006/relationships" xmlns:p="http://schemas.openxmlformats.org/presentationml/2006/main">
   <p:cSld>
     <p:spTree>
@@ -15898,7 +20044,7 @@
         <p:cNvPr id="1" name="">
           <a:extLst>
             <a:ext uri="{FF2B5EF4-FFF2-40B4-BE49-F238E27FC236}">
-              <a16:creationId xmlns:a16="http://schemas.microsoft.com/office/drawing/2014/main" id="{B593B2C4-84DB-C667-3B9A-2D528814E53C}"/>
+              <a16:creationId xmlns:a16="http://schemas.microsoft.com/office/drawing/2014/main" id="{23CE00C9-F4E3-4DBB-9E60-BD93B881F6AB}"/>
             </a:ext>
           </a:extLst>
         </p:cNvPr>
@@ -15918,7 +20064,7 @@
           <p:cNvPr id="4" name="TextBox 3">
             <a:extLst>
               <a:ext uri="{FF2B5EF4-FFF2-40B4-BE49-F238E27FC236}">
-                <a16:creationId xmlns:a16="http://schemas.microsoft.com/office/drawing/2014/main" id="{DC5D4D88-9018-CE4D-3502-E95621537AC8}"/>
+                <a16:creationId xmlns:a16="http://schemas.microsoft.com/office/drawing/2014/main" id="{6AD999ED-A093-90F2-DB22-D30FD555F0F9}"/>
               </a:ext>
             </a:extLst>
           </p:cNvPr>
@@ -15927,8 +20073,8 @@
         </p:nvSpPr>
         <p:spPr>
           <a:xfrm>
-            <a:off x="4690006" y="160172"/>
-            <a:ext cx="2811988" cy="523220"/>
+            <a:off x="3819575" y="0"/>
+            <a:ext cx="4552849" cy="523220"/>
           </a:xfrm>
           <a:prstGeom prst="rect">
             <a:avLst/>
@@ -15942,2215 +20088,27 @@
           <a:lstStyle/>
           <a:p>
             <a:r>
+              <a:rPr lang="ru-RU" sz="2800" dirty="0">
+                <a:latin typeface="Times New Roman" panose="02020603050405020304" pitchFamily="18" charset="0"/>
+                <a:cs typeface="Times New Roman" panose="02020603050405020304" pitchFamily="18" charset="0"/>
+              </a:rPr>
+              <a:t>Структура БД (ER-</a:t>
+            </a:r>
+            <a:r>
               <a:rPr lang="ru-RU" sz="2800" dirty="0" err="1">
                 <a:latin typeface="Times New Roman" panose="02020603050405020304" pitchFamily="18" charset="0"/>
                 <a:cs typeface="Times New Roman" panose="02020603050405020304" pitchFamily="18" charset="0"/>
               </a:rPr>
-              <a:t>Процес</a:t>
+              <a:t>діаграма</a:t>
             </a:r>
             <a:r>
               <a:rPr lang="ru-RU" sz="2800" dirty="0">
                 <a:latin typeface="Times New Roman" panose="02020603050405020304" pitchFamily="18" charset="0"/>
                 <a:cs typeface="Times New Roman" panose="02020603050405020304" pitchFamily="18" charset="0"/>
               </a:rPr>
-              <a:t> </a:t>
-            </a:r>
-            <a:r>
-              <a:rPr lang="ru-RU" sz="2800" dirty="0" err="1">
-                <a:latin typeface="Times New Roman" panose="02020603050405020304" pitchFamily="18" charset="0"/>
-                <a:cs typeface="Times New Roman" panose="02020603050405020304" pitchFamily="18" charset="0"/>
-              </a:rPr>
-              <a:t>розробки</a:t>
-            </a:r>
-            <a:endParaRPr lang="ru-RU" sz="2800" dirty="0">
-              <a:latin typeface="Times New Roman" panose="02020603050405020304" pitchFamily="18" charset="0"/>
-              <a:cs typeface="Times New Roman" panose="02020603050405020304" pitchFamily="18" charset="0"/>
-            </a:endParaRPr>
-          </a:p>
-        </p:txBody>
-      </p:sp>
-      <p:sp>
-        <p:nvSpPr>
-          <p:cNvPr id="6" name="TextBox 5">
-            <a:extLst>
-              <a:ext uri="{FF2B5EF4-FFF2-40B4-BE49-F238E27FC236}">
-                <a16:creationId xmlns:a16="http://schemas.microsoft.com/office/drawing/2014/main" id="{9B9BE9FD-B0D9-FA87-CD99-869C34B2419E}"/>
-              </a:ext>
-            </a:extLst>
-          </p:cNvPr>
-          <p:cNvSpPr txBox="1"/>
-          <p:nvPr/>
-        </p:nvSpPr>
-        <p:spPr>
-          <a:xfrm>
-            <a:off x="952993" y="795646"/>
-            <a:ext cx="10286011" cy="3293209"/>
-          </a:xfrm>
-          <a:prstGeom prst="rect">
-            <a:avLst/>
-          </a:prstGeom>
-          <a:noFill/>
-        </p:spPr>
-        <p:txBody>
-          <a:bodyPr wrap="square" rtlCol="0">
-            <a:spAutoFit/>
-          </a:bodyPr>
-          <a:lstStyle/>
-          <a:p>
-            <a:pPr algn="ctr"/>
-            <a:r>
-              <a:rPr lang="ru-RU" sz="2400" dirty="0">
-                <a:latin typeface="Times New Roman" panose="02020603050405020304" pitchFamily="18" charset="0"/>
-                <a:cs typeface="Times New Roman" panose="02020603050405020304" pitchFamily="18" charset="0"/>
-              </a:rPr>
-              <a:t>ЕТАПИ РОЗРОБКИ:</a:t>
-            </a:r>
-          </a:p>
-          <a:p>
-            <a:r>
-              <a:rPr lang="ru-RU" sz="2400" dirty="0">
-                <a:latin typeface="Times New Roman" panose="02020603050405020304" pitchFamily="18" charset="0"/>
-                <a:cs typeface="Times New Roman" panose="02020603050405020304" pitchFamily="18" charset="0"/>
-              </a:rPr>
-              <a:t>	</a:t>
-            </a:r>
-            <a:r>
-              <a:rPr lang="ru-RU" sz="2000" dirty="0" err="1">
-                <a:latin typeface="Times New Roman" panose="02020603050405020304" pitchFamily="18" charset="0"/>
-                <a:cs typeface="Times New Roman" panose="02020603050405020304" pitchFamily="18" charset="0"/>
-              </a:rPr>
-              <a:t>Етап</a:t>
-            </a:r>
-            <a:r>
-              <a:rPr lang="ru-RU" sz="2000" dirty="0">
-                <a:latin typeface="Times New Roman" panose="02020603050405020304" pitchFamily="18" charset="0"/>
-                <a:cs typeface="Times New Roman" panose="02020603050405020304" pitchFamily="18" charset="0"/>
-              </a:rPr>
-              <a:t> 1 - </a:t>
-            </a:r>
-            <a:r>
-              <a:rPr lang="ru-RU" sz="2000" dirty="0" err="1">
-                <a:latin typeface="Times New Roman" panose="02020603050405020304" pitchFamily="18" charset="0"/>
-                <a:cs typeface="Times New Roman" panose="02020603050405020304" pitchFamily="18" charset="0"/>
-              </a:rPr>
-              <a:t>Аналіз</a:t>
-            </a:r>
-            <a:r>
-              <a:rPr lang="ru-RU" sz="2000" dirty="0">
-                <a:latin typeface="Times New Roman" panose="02020603050405020304" pitchFamily="18" charset="0"/>
-                <a:cs typeface="Times New Roman" panose="02020603050405020304" pitchFamily="18" charset="0"/>
-              </a:rPr>
-              <a:t> </a:t>
-            </a:r>
-            <a:r>
-              <a:rPr lang="ru-RU" sz="2000" dirty="0" err="1">
-                <a:latin typeface="Times New Roman" panose="02020603050405020304" pitchFamily="18" charset="0"/>
-                <a:cs typeface="Times New Roman" panose="02020603050405020304" pitchFamily="18" charset="0"/>
-              </a:rPr>
-              <a:t>вимог</a:t>
-            </a:r>
-            <a:r>
-              <a:rPr lang="ru-RU" sz="2000" dirty="0">
-                <a:latin typeface="Times New Roman" panose="02020603050405020304" pitchFamily="18" charset="0"/>
-                <a:cs typeface="Times New Roman" panose="02020603050405020304" pitchFamily="18" charset="0"/>
-              </a:rPr>
-              <a:t>, </a:t>
-            </a:r>
-            <a:r>
-              <a:rPr lang="ru-RU" sz="2000" dirty="0" err="1">
-                <a:latin typeface="Times New Roman" panose="02020603050405020304" pitchFamily="18" charset="0"/>
-                <a:cs typeface="Times New Roman" panose="02020603050405020304" pitchFamily="18" charset="0"/>
-              </a:rPr>
-              <a:t>вивчення</a:t>
-            </a:r>
-            <a:r>
-              <a:rPr lang="ru-RU" sz="2000" dirty="0">
-                <a:latin typeface="Times New Roman" panose="02020603050405020304" pitchFamily="18" charset="0"/>
-                <a:cs typeface="Times New Roman" panose="02020603050405020304" pitchFamily="18" charset="0"/>
-              </a:rPr>
-              <a:t> потреб </a:t>
-            </a:r>
-            <a:r>
-              <a:rPr lang="ru-RU" sz="2000" dirty="0" err="1">
-                <a:latin typeface="Times New Roman" panose="02020603050405020304" pitchFamily="18" charset="0"/>
-                <a:cs typeface="Times New Roman" panose="02020603050405020304" pitchFamily="18" charset="0"/>
-              </a:rPr>
-              <a:t>цільової</a:t>
-            </a:r>
-            <a:r>
-              <a:rPr lang="ru-RU" sz="2000" dirty="0">
-                <a:latin typeface="Times New Roman" panose="02020603050405020304" pitchFamily="18" charset="0"/>
-                <a:cs typeface="Times New Roman" panose="02020603050405020304" pitchFamily="18" charset="0"/>
-              </a:rPr>
-              <a:t> </a:t>
-            </a:r>
-            <a:r>
-              <a:rPr lang="ru-RU" sz="2000" dirty="0" err="1">
-                <a:latin typeface="Times New Roman" panose="02020603050405020304" pitchFamily="18" charset="0"/>
-                <a:cs typeface="Times New Roman" panose="02020603050405020304" pitchFamily="18" charset="0"/>
-              </a:rPr>
-              <a:t>аудиторії</a:t>
-            </a:r>
-            <a:r>
-              <a:rPr lang="ru-RU" sz="2000" dirty="0">
-                <a:latin typeface="Times New Roman" panose="02020603050405020304" pitchFamily="18" charset="0"/>
-                <a:cs typeface="Times New Roman" panose="02020603050405020304" pitchFamily="18" charset="0"/>
-              </a:rPr>
-              <a:t>, </a:t>
-            </a:r>
-            <a:r>
-              <a:rPr lang="ru-RU" sz="2000" dirty="0" err="1">
-                <a:latin typeface="Times New Roman" panose="02020603050405020304" pitchFamily="18" charset="0"/>
-                <a:cs typeface="Times New Roman" panose="02020603050405020304" pitchFamily="18" charset="0"/>
-              </a:rPr>
-              <a:t>аналіз</a:t>
-            </a:r>
-            <a:r>
-              <a:rPr lang="ru-RU" sz="2000" dirty="0">
-                <a:latin typeface="Times New Roman" panose="02020603050405020304" pitchFamily="18" charset="0"/>
-                <a:cs typeface="Times New Roman" panose="02020603050405020304" pitchFamily="18" charset="0"/>
-              </a:rPr>
-              <a:t> </a:t>
-            </a:r>
-            <a:r>
-              <a:rPr lang="ru-RU" sz="2000" dirty="0" err="1">
-                <a:latin typeface="Times New Roman" panose="02020603050405020304" pitchFamily="18" charset="0"/>
-                <a:cs typeface="Times New Roman" panose="02020603050405020304" pitchFamily="18" charset="0"/>
-              </a:rPr>
-              <a:t>ічнуючих</a:t>
-            </a:r>
-            <a:r>
-              <a:rPr lang="ru-RU" sz="2000" dirty="0">
-                <a:latin typeface="Times New Roman" panose="02020603050405020304" pitchFamily="18" charset="0"/>
-                <a:cs typeface="Times New Roman" panose="02020603050405020304" pitchFamily="18" charset="0"/>
-              </a:rPr>
-              <a:t> </a:t>
-            </a:r>
-            <a:r>
-              <a:rPr lang="ru-RU" sz="2000" dirty="0" err="1">
-                <a:latin typeface="Times New Roman" panose="02020603050405020304" pitchFamily="18" charset="0"/>
-                <a:cs typeface="Times New Roman" panose="02020603050405020304" pitchFamily="18" charset="0"/>
-              </a:rPr>
-              <a:t>аналогів</a:t>
-            </a:r>
-            <a:r>
-              <a:rPr lang="ru-RU" sz="2000" dirty="0">
-                <a:latin typeface="Times New Roman" panose="02020603050405020304" pitchFamily="18" charset="0"/>
-                <a:cs typeface="Times New Roman" panose="02020603050405020304" pitchFamily="18" charset="0"/>
-              </a:rPr>
-              <a:t> та </a:t>
-            </a:r>
-            <a:r>
-              <a:rPr lang="ru-RU" sz="2000" dirty="0" err="1">
-                <a:latin typeface="Times New Roman" panose="02020603050405020304" pitchFamily="18" charset="0"/>
-                <a:cs typeface="Times New Roman" panose="02020603050405020304" pitchFamily="18" charset="0"/>
-              </a:rPr>
-              <a:t>формування</a:t>
-            </a:r>
-            <a:r>
-              <a:rPr lang="ru-RU" sz="2000" dirty="0">
-                <a:latin typeface="Times New Roman" panose="02020603050405020304" pitchFamily="18" charset="0"/>
-                <a:cs typeface="Times New Roman" panose="02020603050405020304" pitchFamily="18" charset="0"/>
-              </a:rPr>
-              <a:t> </a:t>
-            </a:r>
-            <a:r>
-              <a:rPr lang="ru-RU" sz="2000" dirty="0" err="1">
-                <a:latin typeface="Times New Roman" panose="02020603050405020304" pitchFamily="18" charset="0"/>
-                <a:cs typeface="Times New Roman" panose="02020603050405020304" pitchFamily="18" charset="0"/>
-              </a:rPr>
-              <a:t>функціональні</a:t>
-            </a:r>
-            <a:r>
-              <a:rPr lang="ru-RU" sz="2000" dirty="0">
-                <a:latin typeface="Times New Roman" panose="02020603050405020304" pitchFamily="18" charset="0"/>
-                <a:cs typeface="Times New Roman" panose="02020603050405020304" pitchFamily="18" charset="0"/>
-              </a:rPr>
-              <a:t> та </a:t>
-            </a:r>
-            <a:r>
-              <a:rPr lang="ru-RU" sz="2000" dirty="0" err="1">
-                <a:latin typeface="Times New Roman" panose="02020603050405020304" pitchFamily="18" charset="0"/>
-                <a:cs typeface="Times New Roman" panose="02020603050405020304" pitchFamily="18" charset="0"/>
-              </a:rPr>
-              <a:t>нефункціональні</a:t>
-            </a:r>
-            <a:r>
-              <a:rPr lang="ru-RU" sz="2000" dirty="0">
-                <a:latin typeface="Times New Roman" panose="02020603050405020304" pitchFamily="18" charset="0"/>
-                <a:cs typeface="Times New Roman" panose="02020603050405020304" pitchFamily="18" charset="0"/>
-              </a:rPr>
-              <a:t> </a:t>
-            </a:r>
-            <a:r>
-              <a:rPr lang="ru-RU" sz="2000" dirty="0" err="1">
-                <a:latin typeface="Times New Roman" panose="02020603050405020304" pitchFamily="18" charset="0"/>
-                <a:cs typeface="Times New Roman" panose="02020603050405020304" pitchFamily="18" charset="0"/>
-              </a:rPr>
-              <a:t>вимоги</a:t>
-            </a:r>
-            <a:endParaRPr lang="ru-RU" sz="2000" dirty="0">
-              <a:latin typeface="Times New Roman" panose="02020603050405020304" pitchFamily="18" charset="0"/>
-              <a:cs typeface="Times New Roman" panose="02020603050405020304" pitchFamily="18" charset="0"/>
-            </a:endParaRPr>
-          </a:p>
-          <a:p>
-            <a:r>
-              <a:rPr lang="ru-RU" sz="2000" dirty="0">
-                <a:latin typeface="Times New Roman" panose="02020603050405020304" pitchFamily="18" charset="0"/>
-                <a:cs typeface="Times New Roman" panose="02020603050405020304" pitchFamily="18" charset="0"/>
-              </a:rPr>
-              <a:t>	</a:t>
-            </a:r>
-            <a:r>
-              <a:rPr lang="ru-RU" sz="2000" dirty="0" err="1">
-                <a:latin typeface="Times New Roman" panose="02020603050405020304" pitchFamily="18" charset="0"/>
-                <a:cs typeface="Times New Roman" panose="02020603050405020304" pitchFamily="18" charset="0"/>
-              </a:rPr>
-              <a:t>Етап</a:t>
-            </a:r>
-            <a:r>
-              <a:rPr lang="ru-RU" sz="2000" dirty="0">
-                <a:latin typeface="Times New Roman" panose="02020603050405020304" pitchFamily="18" charset="0"/>
-                <a:cs typeface="Times New Roman" panose="02020603050405020304" pitchFamily="18" charset="0"/>
-              </a:rPr>
-              <a:t> 2 – </a:t>
-            </a:r>
-            <a:r>
-              <a:rPr lang="ru-RU" sz="2000" dirty="0" err="1">
-                <a:latin typeface="Times New Roman" panose="02020603050405020304" pitchFamily="18" charset="0"/>
-                <a:cs typeface="Times New Roman" panose="02020603050405020304" pitchFamily="18" charset="0"/>
-              </a:rPr>
-              <a:t>Проетування</a:t>
-            </a:r>
-            <a:r>
-              <a:rPr lang="ru-RU" sz="2000" dirty="0">
-                <a:latin typeface="Times New Roman" panose="02020603050405020304" pitchFamily="18" charset="0"/>
-                <a:cs typeface="Times New Roman" panose="02020603050405020304" pitchFamily="18" charset="0"/>
-              </a:rPr>
-              <a:t>, створено UML-</a:t>
-            </a:r>
-            <a:r>
-              <a:rPr lang="ru-RU" sz="2000" dirty="0" err="1">
-                <a:latin typeface="Times New Roman" panose="02020603050405020304" pitchFamily="18" charset="0"/>
-                <a:cs typeface="Times New Roman" panose="02020603050405020304" pitchFamily="18" charset="0"/>
-              </a:rPr>
-              <a:t>діаграми</a:t>
-            </a:r>
-            <a:r>
-              <a:rPr lang="ru-RU" sz="2000" dirty="0">
-                <a:latin typeface="Times New Roman" panose="02020603050405020304" pitchFamily="18" charset="0"/>
-                <a:cs typeface="Times New Roman" panose="02020603050405020304" pitchFamily="18" charset="0"/>
-              </a:rPr>
-              <a:t>, </a:t>
-            </a:r>
-            <a:r>
-              <a:rPr lang="ru-RU" sz="2000" dirty="0" err="1">
-                <a:latin typeface="Times New Roman" panose="02020603050405020304" pitchFamily="18" charset="0"/>
-                <a:cs typeface="Times New Roman" panose="02020603050405020304" pitchFamily="18" charset="0"/>
-              </a:rPr>
-              <a:t>спроєктовано</a:t>
-            </a:r>
-            <a:r>
-              <a:rPr lang="ru-RU" sz="2000" dirty="0">
-                <a:latin typeface="Times New Roman" panose="02020603050405020304" pitchFamily="18" charset="0"/>
-                <a:cs typeface="Times New Roman" panose="02020603050405020304" pitchFamily="18" charset="0"/>
-              </a:rPr>
-              <a:t> структуру </a:t>
-            </a:r>
-            <a:r>
-              <a:rPr lang="ru-RU" sz="2000" dirty="0" err="1">
-                <a:latin typeface="Times New Roman" panose="02020603050405020304" pitchFamily="18" charset="0"/>
-                <a:cs typeface="Times New Roman" panose="02020603050405020304" pitchFamily="18" charset="0"/>
-              </a:rPr>
-              <a:t>бази</a:t>
-            </a:r>
-            <a:r>
-              <a:rPr lang="ru-RU" sz="2000" dirty="0">
-                <a:latin typeface="Times New Roman" panose="02020603050405020304" pitchFamily="18" charset="0"/>
-                <a:cs typeface="Times New Roman" panose="02020603050405020304" pitchFamily="18" charset="0"/>
-              </a:rPr>
-              <a:t> </a:t>
-            </a:r>
-            <a:r>
-              <a:rPr lang="ru-RU" sz="2000" dirty="0" err="1">
-                <a:latin typeface="Times New Roman" panose="02020603050405020304" pitchFamily="18" charset="0"/>
-                <a:cs typeface="Times New Roman" panose="02020603050405020304" pitchFamily="18" charset="0"/>
-              </a:rPr>
-              <a:t>даних</a:t>
-            </a:r>
-            <a:r>
-              <a:rPr lang="ru-RU" sz="2000" dirty="0">
-                <a:latin typeface="Times New Roman" panose="02020603050405020304" pitchFamily="18" charset="0"/>
-                <a:cs typeface="Times New Roman" panose="02020603050405020304" pitchFamily="18" charset="0"/>
-              </a:rPr>
-              <a:t> (ER-</a:t>
-            </a:r>
-            <a:r>
-              <a:rPr lang="ru-RU" sz="2000" dirty="0" err="1">
-                <a:latin typeface="Times New Roman" panose="02020603050405020304" pitchFamily="18" charset="0"/>
-                <a:cs typeface="Times New Roman" panose="02020603050405020304" pitchFamily="18" charset="0"/>
-              </a:rPr>
-              <a:t>діаграма</a:t>
-            </a:r>
-            <a:r>
-              <a:rPr lang="ru-RU" sz="2000" dirty="0">
-                <a:latin typeface="Times New Roman" panose="02020603050405020304" pitchFamily="18" charset="0"/>
-                <a:cs typeface="Times New Roman" panose="02020603050405020304" pitchFamily="18" charset="0"/>
-              </a:rPr>
-              <a:t>), </a:t>
-            </a:r>
-            <a:r>
-              <a:rPr lang="ru-RU" sz="2000" dirty="0" err="1">
-                <a:latin typeface="Times New Roman" panose="02020603050405020304" pitchFamily="18" charset="0"/>
-                <a:cs typeface="Times New Roman" panose="02020603050405020304" pitchFamily="18" charset="0"/>
-              </a:rPr>
-              <a:t>розроблено</a:t>
-            </a:r>
-            <a:r>
-              <a:rPr lang="ru-RU" sz="2000" dirty="0">
-                <a:latin typeface="Times New Roman" panose="02020603050405020304" pitchFamily="18" charset="0"/>
-                <a:cs typeface="Times New Roman" panose="02020603050405020304" pitchFamily="18" charset="0"/>
-              </a:rPr>
-              <a:t> API -</a:t>
-            </a:r>
-            <a:r>
-              <a:rPr lang="ru-RU" sz="2000" dirty="0" err="1">
-                <a:latin typeface="Times New Roman" panose="02020603050405020304" pitchFamily="18" charset="0"/>
-                <a:cs typeface="Times New Roman" panose="02020603050405020304" pitchFamily="18" charset="0"/>
-              </a:rPr>
-              <a:t>ендпоінти</a:t>
-            </a:r>
-            <a:r>
-              <a:rPr lang="ru-RU" sz="2000" dirty="0">
-                <a:latin typeface="Times New Roman" panose="02020603050405020304" pitchFamily="18" charset="0"/>
-                <a:cs typeface="Times New Roman" panose="02020603050405020304" pitchFamily="18" charset="0"/>
-              </a:rPr>
-              <a:t> та </a:t>
-            </a:r>
-            <a:r>
-              <a:rPr lang="ru-RU" sz="2000" dirty="0" err="1">
-                <a:latin typeface="Times New Roman" panose="02020603050405020304" pitchFamily="18" charset="0"/>
-                <a:cs typeface="Times New Roman" panose="02020603050405020304" pitchFamily="18" charset="0"/>
-              </a:rPr>
-              <a:t>макети</a:t>
-            </a:r>
-            <a:r>
-              <a:rPr lang="ru-RU" sz="2000" dirty="0">
-                <a:latin typeface="Times New Roman" panose="02020603050405020304" pitchFamily="18" charset="0"/>
-                <a:cs typeface="Times New Roman" panose="02020603050405020304" pitchFamily="18" charset="0"/>
-              </a:rPr>
-              <a:t> UI/UX дизайну </a:t>
-            </a:r>
-          </a:p>
-          <a:p>
-            <a:r>
-              <a:rPr lang="ru-RU" sz="2000" dirty="0">
-                <a:latin typeface="Times New Roman" panose="02020603050405020304" pitchFamily="18" charset="0"/>
-                <a:cs typeface="Times New Roman" panose="02020603050405020304" pitchFamily="18" charset="0"/>
-              </a:rPr>
-              <a:t>	</a:t>
-            </a:r>
-            <a:r>
-              <a:rPr lang="ru-RU" sz="2000" dirty="0" err="1">
-                <a:latin typeface="Times New Roman" panose="02020603050405020304" pitchFamily="18" charset="0"/>
-                <a:cs typeface="Times New Roman" panose="02020603050405020304" pitchFamily="18" charset="0"/>
-              </a:rPr>
-              <a:t>Етап</a:t>
-            </a:r>
-            <a:r>
-              <a:rPr lang="ru-RU" sz="2000" dirty="0">
-                <a:latin typeface="Times New Roman" panose="02020603050405020304" pitchFamily="18" charset="0"/>
-                <a:cs typeface="Times New Roman" panose="02020603050405020304" pitchFamily="18" charset="0"/>
-              </a:rPr>
-              <a:t> 3 - </a:t>
-            </a:r>
-            <a:r>
-              <a:rPr lang="ru-RU" sz="2000" dirty="0" err="1">
-                <a:latin typeface="Times New Roman" panose="02020603050405020304" pitchFamily="18" charset="0"/>
-                <a:cs typeface="Times New Roman" panose="02020603050405020304" pitchFamily="18" charset="0"/>
-              </a:rPr>
-              <a:t>Програмна</a:t>
-            </a:r>
-            <a:r>
-              <a:rPr lang="ru-RU" sz="2000" dirty="0">
-                <a:latin typeface="Times New Roman" panose="02020603050405020304" pitchFamily="18" charset="0"/>
-                <a:cs typeface="Times New Roman" panose="02020603050405020304" pitchFamily="18" charset="0"/>
-              </a:rPr>
-              <a:t> </a:t>
-            </a:r>
-            <a:r>
-              <a:rPr lang="ru-RU" sz="2000" dirty="0" err="1">
-                <a:latin typeface="Times New Roman" panose="02020603050405020304" pitchFamily="18" charset="0"/>
-                <a:cs typeface="Times New Roman" panose="02020603050405020304" pitchFamily="18" charset="0"/>
-              </a:rPr>
-              <a:t>реалізація</a:t>
-            </a:r>
-            <a:r>
-              <a:rPr lang="ru-RU" sz="2000" dirty="0">
-                <a:latin typeface="Times New Roman" panose="02020603050405020304" pitchFamily="18" charset="0"/>
-                <a:cs typeface="Times New Roman" panose="02020603050405020304" pitchFamily="18" charset="0"/>
-              </a:rPr>
-              <a:t>, </a:t>
-            </a:r>
-            <a:r>
-              <a:rPr lang="ru-RU" sz="2000" dirty="0" err="1">
-                <a:latin typeface="Times New Roman" panose="02020603050405020304" pitchFamily="18" charset="0"/>
-                <a:cs typeface="Times New Roman" panose="02020603050405020304" pitchFamily="18" charset="0"/>
-              </a:rPr>
-              <a:t>ключові</a:t>
-            </a:r>
-            <a:r>
-              <a:rPr lang="ru-RU" sz="2000" dirty="0">
-                <a:latin typeface="Times New Roman" panose="02020603050405020304" pitchFamily="18" charset="0"/>
-                <a:cs typeface="Times New Roman" panose="02020603050405020304" pitchFamily="18" charset="0"/>
-              </a:rPr>
-              <a:t> </a:t>
-            </a:r>
-            <a:r>
-              <a:rPr lang="ru-RU" sz="2000" dirty="0" err="1">
-                <a:latin typeface="Times New Roman" panose="02020603050405020304" pitchFamily="18" charset="0"/>
-                <a:cs typeface="Times New Roman" panose="02020603050405020304" pitchFamily="18" charset="0"/>
-              </a:rPr>
-              <a:t>файли</a:t>
-            </a:r>
-            <a:r>
-              <a:rPr lang="ru-RU" sz="2000" dirty="0">
-                <a:latin typeface="Times New Roman" panose="02020603050405020304" pitchFamily="18" charset="0"/>
-                <a:cs typeface="Times New Roman" panose="02020603050405020304" pitchFamily="18" charset="0"/>
-              </a:rPr>
-              <a:t> </a:t>
-            </a:r>
-            <a:r>
-              <a:rPr lang="ru-RU" sz="2000" dirty="0" err="1">
-                <a:latin typeface="Times New Roman" panose="02020603050405020304" pitchFamily="18" charset="0"/>
-                <a:cs typeface="Times New Roman" panose="02020603050405020304" pitchFamily="18" charset="0"/>
-              </a:rPr>
-              <a:t>проєкту</a:t>
-            </a:r>
-            <a:r>
-              <a:rPr lang="ru-RU" sz="2000" dirty="0">
-                <a:latin typeface="Times New Roman" panose="02020603050405020304" pitchFamily="18" charset="0"/>
-                <a:cs typeface="Times New Roman" panose="02020603050405020304" pitchFamily="18" charset="0"/>
-              </a:rPr>
-              <a:t>: main.py – точка входу </a:t>
-            </a:r>
-            <a:r>
-              <a:rPr lang="ru-RU" sz="2000" dirty="0" err="1">
-                <a:latin typeface="Times New Roman" panose="02020603050405020304" pitchFamily="18" charset="0"/>
-                <a:cs typeface="Times New Roman" panose="02020603050405020304" pitchFamily="18" charset="0"/>
-              </a:rPr>
-              <a:t>FastAPI</a:t>
-            </a:r>
-            <a:r>
-              <a:rPr lang="ru-RU" sz="2000" dirty="0">
-                <a:latin typeface="Times New Roman" panose="02020603050405020304" pitchFamily="18" charset="0"/>
-                <a:cs typeface="Times New Roman" panose="02020603050405020304" pitchFamily="18" charset="0"/>
-              </a:rPr>
-              <a:t>, auth.py – </a:t>
-            </a:r>
-            <a:r>
-              <a:rPr lang="ru-RU" sz="2000" dirty="0" err="1">
-                <a:latin typeface="Times New Roman" panose="02020603050405020304" pitchFamily="18" charset="0"/>
-                <a:cs typeface="Times New Roman" panose="02020603050405020304" pitchFamily="18" charset="0"/>
-              </a:rPr>
-              <a:t>реєстрація</a:t>
-            </a:r>
-            <a:r>
-              <a:rPr lang="ru-RU" sz="2000" dirty="0">
-                <a:latin typeface="Times New Roman" panose="02020603050405020304" pitchFamily="18" charset="0"/>
-                <a:cs typeface="Times New Roman" panose="02020603050405020304" pitchFamily="18" charset="0"/>
-              </a:rPr>
-              <a:t> та </a:t>
-            </a:r>
-            <a:r>
-              <a:rPr lang="ru-RU" sz="2000" dirty="0" err="1">
-                <a:latin typeface="Times New Roman" panose="02020603050405020304" pitchFamily="18" charset="0"/>
-                <a:cs typeface="Times New Roman" panose="02020603050405020304" pitchFamily="18" charset="0"/>
-              </a:rPr>
-              <a:t>вхід</a:t>
-            </a:r>
-            <a:r>
-              <a:rPr lang="ru-RU" sz="2000" dirty="0">
-                <a:latin typeface="Times New Roman" panose="02020603050405020304" pitchFamily="18" charset="0"/>
-                <a:cs typeface="Times New Roman" panose="02020603050405020304" pitchFamily="18" charset="0"/>
-              </a:rPr>
-              <a:t>, analysis.py – AI -</a:t>
-            </a:r>
-            <a:r>
-              <a:rPr lang="ru-RU" sz="2000" dirty="0" err="1">
-                <a:latin typeface="Times New Roman" panose="02020603050405020304" pitchFamily="18" charset="0"/>
-                <a:cs typeface="Times New Roman" panose="02020603050405020304" pitchFamily="18" charset="0"/>
-              </a:rPr>
-              <a:t>аналіз</a:t>
-            </a:r>
-            <a:r>
-              <a:rPr lang="ru-RU" sz="2000" dirty="0">
-                <a:latin typeface="Times New Roman" panose="02020603050405020304" pitchFamily="18" charset="0"/>
-                <a:cs typeface="Times New Roman" panose="02020603050405020304" pitchFamily="18" charset="0"/>
-              </a:rPr>
-              <a:t> фото, ai_analyzer.py – </a:t>
-            </a:r>
-            <a:r>
-              <a:rPr lang="ru-RU" sz="2000" dirty="0" err="1">
-                <a:latin typeface="Times New Roman" panose="02020603050405020304" pitchFamily="18" charset="0"/>
-                <a:cs typeface="Times New Roman" panose="02020603050405020304" pitchFamily="18" charset="0"/>
-              </a:rPr>
-              <a:t>логіка</a:t>
-            </a:r>
-            <a:r>
-              <a:rPr lang="ru-RU" sz="2000" dirty="0">
-                <a:latin typeface="Times New Roman" panose="02020603050405020304" pitchFamily="18" charset="0"/>
-                <a:cs typeface="Times New Roman" panose="02020603050405020304" pitchFamily="18" charset="0"/>
-              </a:rPr>
-              <a:t> </a:t>
-            </a:r>
-            <a:r>
-              <a:rPr lang="ru-RU" sz="2000" dirty="0" err="1">
-                <a:latin typeface="Times New Roman" panose="02020603050405020304" pitchFamily="18" charset="0"/>
-                <a:cs typeface="Times New Roman" panose="02020603050405020304" pitchFamily="18" charset="0"/>
-              </a:rPr>
-              <a:t>OpenCV</a:t>
-            </a:r>
-            <a:r>
-              <a:rPr lang="ru-RU" sz="2000" dirty="0">
-                <a:latin typeface="Times New Roman" panose="02020603050405020304" pitchFamily="18" charset="0"/>
-                <a:cs typeface="Times New Roman" panose="02020603050405020304" pitchFamily="18" charset="0"/>
-              </a:rPr>
-              <a:t>, tracker.py – </a:t>
-            </a:r>
-            <a:r>
-              <a:rPr lang="ru-RU" sz="2000" dirty="0" err="1">
-                <a:latin typeface="Times New Roman" panose="02020603050405020304" pitchFamily="18" charset="0"/>
-                <a:cs typeface="Times New Roman" panose="02020603050405020304" pitchFamily="18" charset="0"/>
-              </a:rPr>
-              <a:t>плани</a:t>
-            </a:r>
-            <a:r>
-              <a:rPr lang="ru-RU" sz="2000" dirty="0">
-                <a:latin typeface="Times New Roman" panose="02020603050405020304" pitchFamily="18" charset="0"/>
-                <a:cs typeface="Times New Roman" panose="02020603050405020304" pitchFamily="18" charset="0"/>
-              </a:rPr>
-              <a:t> догляду та </a:t>
-            </a:r>
-            <a:r>
-              <a:rPr lang="ru-RU" sz="2000" dirty="0" err="1">
-                <a:latin typeface="Times New Roman" panose="02020603050405020304" pitchFamily="18" charset="0"/>
-                <a:cs typeface="Times New Roman" panose="02020603050405020304" pitchFamily="18" charset="0"/>
-              </a:rPr>
-              <a:t>прогрес</a:t>
-            </a:r>
-            <a:r>
-              <a:rPr lang="ru-RU" sz="2000" dirty="0">
-                <a:latin typeface="Times New Roman" panose="02020603050405020304" pitchFamily="18" charset="0"/>
-                <a:cs typeface="Times New Roman" panose="02020603050405020304" pitchFamily="18" charset="0"/>
-              </a:rPr>
-              <a:t>, models.py – </a:t>
-            </a:r>
-            <a:r>
-              <a:rPr lang="ru-RU" sz="2000" dirty="0" err="1">
-                <a:latin typeface="Times New Roman" panose="02020603050405020304" pitchFamily="18" charset="0"/>
-                <a:cs typeface="Times New Roman" panose="02020603050405020304" pitchFamily="18" charset="0"/>
-              </a:rPr>
-              <a:t>моделі</a:t>
-            </a:r>
-            <a:r>
-              <a:rPr lang="ru-RU" sz="2000" dirty="0">
-                <a:latin typeface="Times New Roman" panose="02020603050405020304" pitchFamily="18" charset="0"/>
-                <a:cs typeface="Times New Roman" panose="02020603050405020304" pitchFamily="18" charset="0"/>
-              </a:rPr>
-              <a:t> </a:t>
-            </a:r>
-            <a:r>
-              <a:rPr lang="ru-RU" sz="2000" dirty="0" err="1">
-                <a:latin typeface="Times New Roman" panose="02020603050405020304" pitchFamily="18" charset="0"/>
-                <a:cs typeface="Times New Roman" panose="02020603050405020304" pitchFamily="18" charset="0"/>
-              </a:rPr>
-              <a:t>SQLAlchemy</a:t>
-            </a:r>
-            <a:r>
-              <a:rPr lang="ru-RU" sz="2000" dirty="0">
-                <a:latin typeface="Times New Roman" panose="02020603050405020304" pitchFamily="18" charset="0"/>
-                <a:cs typeface="Times New Roman" panose="02020603050405020304" pitchFamily="18" charset="0"/>
-              </a:rPr>
-              <a:t> для </a:t>
-            </a:r>
-            <a:r>
-              <a:rPr lang="ru-RU" sz="2000" dirty="0" err="1">
-                <a:latin typeface="Times New Roman" panose="02020603050405020304" pitchFamily="18" charset="0"/>
-                <a:cs typeface="Times New Roman" panose="02020603050405020304" pitchFamily="18" charset="0"/>
-              </a:rPr>
-              <a:t>бази</a:t>
-            </a:r>
-            <a:r>
-              <a:rPr lang="ru-RU" sz="2000" dirty="0">
-                <a:latin typeface="Times New Roman" panose="02020603050405020304" pitchFamily="18" charset="0"/>
-                <a:cs typeface="Times New Roman" panose="02020603050405020304" pitchFamily="18" charset="0"/>
-              </a:rPr>
-              <a:t> </a:t>
-            </a:r>
-            <a:r>
-              <a:rPr lang="ru-RU" sz="2000" dirty="0" err="1">
-                <a:latin typeface="Times New Roman" panose="02020603050405020304" pitchFamily="18" charset="0"/>
-                <a:cs typeface="Times New Roman" panose="02020603050405020304" pitchFamily="18" charset="0"/>
-              </a:rPr>
-              <a:t>даних</a:t>
-            </a:r>
-            <a:r>
-              <a:rPr lang="ru-RU" sz="2000" dirty="0">
-                <a:latin typeface="Times New Roman" panose="02020603050405020304" pitchFamily="18" charset="0"/>
-                <a:cs typeface="Times New Roman" panose="02020603050405020304" pitchFamily="18" charset="0"/>
-              </a:rPr>
-              <a:t>.</a:t>
-            </a:r>
-          </a:p>
-          <a:p>
-            <a:r>
-              <a:rPr lang="ru-RU" sz="2000" dirty="0">
-                <a:latin typeface="Times New Roman" panose="02020603050405020304" pitchFamily="18" charset="0"/>
-                <a:cs typeface="Times New Roman" panose="02020603050405020304" pitchFamily="18" charset="0"/>
-              </a:rPr>
-              <a:t>	</a:t>
-            </a:r>
-            <a:r>
-              <a:rPr lang="ru-RU" sz="2000" dirty="0" err="1">
-                <a:latin typeface="Times New Roman" panose="02020603050405020304" pitchFamily="18" charset="0"/>
-                <a:cs typeface="Times New Roman" panose="02020603050405020304" pitchFamily="18" charset="0"/>
-              </a:rPr>
-              <a:t>Етап</a:t>
-            </a:r>
-            <a:r>
-              <a:rPr lang="ru-RU" sz="2000" dirty="0">
-                <a:latin typeface="Times New Roman" panose="02020603050405020304" pitchFamily="18" charset="0"/>
-                <a:cs typeface="Times New Roman" panose="02020603050405020304" pitchFamily="18" charset="0"/>
-              </a:rPr>
-              <a:t> 4 – </a:t>
-            </a:r>
-            <a:r>
-              <a:rPr lang="ru-RU" sz="2000" dirty="0" err="1">
-                <a:latin typeface="Times New Roman" panose="02020603050405020304" pitchFamily="18" charset="0"/>
-                <a:cs typeface="Times New Roman" panose="02020603050405020304" pitchFamily="18" charset="0"/>
-              </a:rPr>
-              <a:t>Тестування</a:t>
-            </a:r>
-            <a:r>
-              <a:rPr lang="ru-RU" sz="2000" dirty="0">
-                <a:latin typeface="Times New Roman" panose="02020603050405020304" pitchFamily="18" charset="0"/>
-                <a:cs typeface="Times New Roman" panose="02020603050405020304" pitchFamily="18" charset="0"/>
-              </a:rPr>
-              <a:t>, проведено </a:t>
-            </a:r>
-            <a:r>
-              <a:rPr lang="ru-RU" sz="2000" dirty="0" err="1">
-                <a:latin typeface="Times New Roman" panose="02020603050405020304" pitchFamily="18" charset="0"/>
-                <a:cs typeface="Times New Roman" panose="02020603050405020304" pitchFamily="18" charset="0"/>
-              </a:rPr>
-              <a:t>функціональне</a:t>
-            </a:r>
-            <a:r>
-              <a:rPr lang="ru-RU" sz="2000" dirty="0">
-                <a:latin typeface="Times New Roman" panose="02020603050405020304" pitchFamily="18" charset="0"/>
-                <a:cs typeface="Times New Roman" panose="02020603050405020304" pitchFamily="18" charset="0"/>
-              </a:rPr>
-              <a:t>, </a:t>
-            </a:r>
-            <a:r>
-              <a:rPr lang="ru-RU" sz="2000" dirty="0" err="1">
-                <a:latin typeface="Times New Roman" panose="02020603050405020304" pitchFamily="18" charset="0"/>
-                <a:cs typeface="Times New Roman" panose="02020603050405020304" pitchFamily="18" charset="0"/>
-              </a:rPr>
-              <a:t>інтеграційне</a:t>
-            </a:r>
-            <a:r>
-              <a:rPr lang="ru-RU" sz="2000" dirty="0">
-                <a:latin typeface="Times New Roman" panose="02020603050405020304" pitchFamily="18" charset="0"/>
-                <a:cs typeface="Times New Roman" panose="02020603050405020304" pitchFamily="18" charset="0"/>
-              </a:rPr>
-              <a:t> та UI-</a:t>
-            </a:r>
-            <a:r>
-              <a:rPr lang="ru-RU" sz="2000" dirty="0" err="1">
-                <a:latin typeface="Times New Roman" panose="02020603050405020304" pitchFamily="18" charset="0"/>
-                <a:cs typeface="Times New Roman" panose="02020603050405020304" pitchFamily="18" charset="0"/>
-              </a:rPr>
-              <a:t>тестування</a:t>
-            </a:r>
-            <a:r>
-              <a:rPr lang="ru-RU" sz="2000" dirty="0">
-                <a:latin typeface="Times New Roman" panose="02020603050405020304" pitchFamily="18" charset="0"/>
-                <a:cs typeface="Times New Roman" panose="02020603050405020304" pitchFamily="18" charset="0"/>
-              </a:rPr>
-              <a:t>, </a:t>
-            </a:r>
-            <a:r>
-              <a:rPr lang="ru-RU" sz="2000" dirty="0" err="1">
-                <a:latin typeface="Times New Roman" panose="02020603050405020304" pitchFamily="18" charset="0"/>
-                <a:cs typeface="Times New Roman" panose="02020603050405020304" pitchFamily="18" charset="0"/>
-              </a:rPr>
-              <a:t>виявлено</a:t>
-            </a:r>
-            <a:r>
-              <a:rPr lang="ru-RU" sz="2000" dirty="0">
-                <a:latin typeface="Times New Roman" panose="02020603050405020304" pitchFamily="18" charset="0"/>
-                <a:cs typeface="Times New Roman" panose="02020603050405020304" pitchFamily="18" charset="0"/>
-              </a:rPr>
-              <a:t> та </a:t>
-            </a:r>
-            <a:r>
-              <a:rPr lang="ru-RU" sz="2000" dirty="0" err="1">
-                <a:latin typeface="Times New Roman" panose="02020603050405020304" pitchFamily="18" charset="0"/>
-                <a:cs typeface="Times New Roman" panose="02020603050405020304" pitchFamily="18" charset="0"/>
-              </a:rPr>
-              <a:t>усунено</a:t>
-            </a:r>
-            <a:r>
-              <a:rPr lang="ru-RU" sz="2000" dirty="0">
-                <a:latin typeface="Times New Roman" panose="02020603050405020304" pitchFamily="18" charset="0"/>
-                <a:cs typeface="Times New Roman" panose="02020603050405020304" pitchFamily="18" charset="0"/>
-              </a:rPr>
-              <a:t> </a:t>
-            </a:r>
-            <a:r>
-              <a:rPr lang="ru-RU" sz="2000" dirty="0" err="1">
-                <a:latin typeface="Times New Roman" panose="02020603050405020304" pitchFamily="18" charset="0"/>
-                <a:cs typeface="Times New Roman" panose="02020603050405020304" pitchFamily="18" charset="0"/>
-              </a:rPr>
-              <a:t>критичні</a:t>
-            </a:r>
-            <a:r>
-              <a:rPr lang="ru-RU" sz="2000" dirty="0">
-                <a:latin typeface="Times New Roman" panose="02020603050405020304" pitchFamily="18" charset="0"/>
-                <a:cs typeface="Times New Roman" panose="02020603050405020304" pitchFamily="18" charset="0"/>
-              </a:rPr>
-              <a:t> </a:t>
-            </a:r>
-            <a:r>
-              <a:rPr lang="ru-RU" sz="2000" dirty="0" err="1">
-                <a:latin typeface="Times New Roman" panose="02020603050405020304" pitchFamily="18" charset="0"/>
-                <a:cs typeface="Times New Roman" panose="02020603050405020304" pitchFamily="18" charset="0"/>
-              </a:rPr>
-              <a:t>помилки</a:t>
-            </a:r>
-            <a:endParaRPr lang="ru-RU" sz="2000" dirty="0">
-              <a:latin typeface="Times New Roman" panose="02020603050405020304" pitchFamily="18" charset="0"/>
-              <a:cs typeface="Times New Roman" panose="02020603050405020304" pitchFamily="18" charset="0"/>
-            </a:endParaRPr>
-          </a:p>
-        </p:txBody>
-      </p:sp>
-      <p:sp>
-        <p:nvSpPr>
-          <p:cNvPr id="3" name="TextBox 2">
-            <a:extLst>
-              <a:ext uri="{FF2B5EF4-FFF2-40B4-BE49-F238E27FC236}">
-                <a16:creationId xmlns:a16="http://schemas.microsoft.com/office/drawing/2014/main" id="{A38BE315-F4E4-03F7-CF70-0EFC6729F15B}"/>
-              </a:ext>
-            </a:extLst>
-          </p:cNvPr>
-          <p:cNvSpPr txBox="1"/>
-          <p:nvPr/>
-        </p:nvSpPr>
-        <p:spPr>
-          <a:xfrm>
-            <a:off x="1233052" y="4431138"/>
-            <a:ext cx="9725891" cy="1631216"/>
-          </a:xfrm>
-          <a:prstGeom prst="rect">
-            <a:avLst/>
-          </a:prstGeom>
-          <a:noFill/>
-        </p:spPr>
-        <p:txBody>
-          <a:bodyPr wrap="square" rtlCol="0">
-            <a:spAutoFit/>
-          </a:bodyPr>
-          <a:lstStyle/>
-          <a:p>
-            <a:r>
-              <a:rPr lang="ru-RU" sz="2000" dirty="0" err="1">
-                <a:latin typeface="Times New Roman" panose="02020603050405020304" pitchFamily="18" charset="0"/>
-                <a:cs typeface="Times New Roman" panose="02020603050405020304" pitchFamily="18" charset="0"/>
-              </a:rPr>
-              <a:t>Інтсрументи</a:t>
-            </a:r>
-            <a:r>
-              <a:rPr lang="ru-RU" sz="2000" dirty="0">
-                <a:latin typeface="Times New Roman" panose="02020603050405020304" pitchFamily="18" charset="0"/>
-                <a:cs typeface="Times New Roman" panose="02020603050405020304" pitchFamily="18" charset="0"/>
-              </a:rPr>
-              <a:t>:</a:t>
-            </a:r>
-          </a:p>
-          <a:p>
-            <a:r>
-              <a:rPr lang="ru-RU" sz="2000" dirty="0">
-                <a:latin typeface="Times New Roman" panose="02020603050405020304" pitchFamily="18" charset="0"/>
-                <a:cs typeface="Times New Roman" panose="02020603050405020304" pitchFamily="18" charset="0"/>
-              </a:rPr>
-              <a:t>💻 </a:t>
-            </a:r>
-            <a:r>
-              <a:rPr lang="ru-RU" sz="2000" dirty="0" err="1">
-                <a:latin typeface="Times New Roman" panose="02020603050405020304" pitchFamily="18" charset="0"/>
-                <a:cs typeface="Times New Roman" panose="02020603050405020304" pitchFamily="18" charset="0"/>
-              </a:rPr>
-              <a:t>PyCharm</a:t>
-            </a:r>
-            <a:r>
-              <a:rPr lang="ru-RU" sz="2000" dirty="0">
-                <a:latin typeface="Times New Roman" panose="02020603050405020304" pitchFamily="18" charset="0"/>
-                <a:cs typeface="Times New Roman" panose="02020603050405020304" pitchFamily="18" charset="0"/>
-              </a:rPr>
-              <a:t> → </a:t>
-            </a:r>
-            <a:r>
-              <a:rPr lang="ru-RU" sz="2000" dirty="0" err="1">
-                <a:latin typeface="Times New Roman" panose="02020603050405020304" pitchFamily="18" charset="0"/>
-                <a:cs typeface="Times New Roman" panose="02020603050405020304" pitchFamily="18" charset="0"/>
-              </a:rPr>
-              <a:t>Інтегроване</a:t>
-            </a:r>
-            <a:r>
-              <a:rPr lang="ru-RU" sz="2000" dirty="0">
-                <a:latin typeface="Times New Roman" panose="02020603050405020304" pitchFamily="18" charset="0"/>
-                <a:cs typeface="Times New Roman" panose="02020603050405020304" pitchFamily="18" charset="0"/>
-              </a:rPr>
-              <a:t> </a:t>
-            </a:r>
-            <a:r>
-              <a:rPr lang="ru-RU" sz="2000" dirty="0" err="1">
-                <a:latin typeface="Times New Roman" panose="02020603050405020304" pitchFamily="18" charset="0"/>
-                <a:cs typeface="Times New Roman" panose="02020603050405020304" pitchFamily="18" charset="0"/>
-              </a:rPr>
-              <a:t>середовище</a:t>
-            </a:r>
-            <a:r>
-              <a:rPr lang="ru-RU" sz="2000" dirty="0">
-                <a:latin typeface="Times New Roman" panose="02020603050405020304" pitchFamily="18" charset="0"/>
-                <a:cs typeface="Times New Roman" panose="02020603050405020304" pitchFamily="18" charset="0"/>
-              </a:rPr>
-              <a:t> </a:t>
-            </a:r>
-            <a:r>
-              <a:rPr lang="ru-RU" sz="2000" dirty="0" err="1">
-                <a:latin typeface="Times New Roman" panose="02020603050405020304" pitchFamily="18" charset="0"/>
-                <a:cs typeface="Times New Roman" panose="02020603050405020304" pitchFamily="18" charset="0"/>
-              </a:rPr>
-              <a:t>розробки</a:t>
-            </a:r>
-            <a:endParaRPr lang="ru-RU" sz="2000" dirty="0">
-              <a:latin typeface="Times New Roman" panose="02020603050405020304" pitchFamily="18" charset="0"/>
-              <a:cs typeface="Times New Roman" panose="02020603050405020304" pitchFamily="18" charset="0"/>
-            </a:endParaRPr>
-          </a:p>
-          <a:p>
-            <a:r>
-              <a:rPr lang="ru-RU" sz="2000" dirty="0">
-                <a:latin typeface="Times New Roman" panose="02020603050405020304" pitchFamily="18" charset="0"/>
-                <a:cs typeface="Times New Roman" panose="02020603050405020304" pitchFamily="18" charset="0"/>
-              </a:rPr>
-              <a:t>🐙 </a:t>
-            </a:r>
-            <a:r>
-              <a:rPr lang="ru-RU" sz="2000" dirty="0" err="1">
-                <a:latin typeface="Times New Roman" panose="02020603050405020304" pitchFamily="18" charset="0"/>
-                <a:cs typeface="Times New Roman" panose="02020603050405020304" pitchFamily="18" charset="0"/>
-              </a:rPr>
-              <a:t>Git</a:t>
-            </a:r>
-            <a:r>
-              <a:rPr lang="ru-RU" sz="2000" dirty="0">
-                <a:latin typeface="Times New Roman" panose="02020603050405020304" pitchFamily="18" charset="0"/>
-                <a:cs typeface="Times New Roman" panose="02020603050405020304" pitchFamily="18" charset="0"/>
-              </a:rPr>
-              <a:t> → Контроль </a:t>
-            </a:r>
-            <a:r>
-              <a:rPr lang="ru-RU" sz="2000" dirty="0" err="1">
-                <a:latin typeface="Times New Roman" panose="02020603050405020304" pitchFamily="18" charset="0"/>
-                <a:cs typeface="Times New Roman" panose="02020603050405020304" pitchFamily="18" charset="0"/>
-              </a:rPr>
-              <a:t>версій</a:t>
-            </a:r>
-            <a:endParaRPr lang="ru-RU" sz="2000" dirty="0">
-              <a:latin typeface="Times New Roman" panose="02020603050405020304" pitchFamily="18" charset="0"/>
-              <a:cs typeface="Times New Roman" panose="02020603050405020304" pitchFamily="18" charset="0"/>
-            </a:endParaRPr>
-          </a:p>
-          <a:p>
-            <a:r>
-              <a:rPr lang="ru-RU" sz="2000" dirty="0">
-                <a:latin typeface="Times New Roman" panose="02020603050405020304" pitchFamily="18" charset="0"/>
-                <a:cs typeface="Times New Roman" panose="02020603050405020304" pitchFamily="18" charset="0"/>
-              </a:rPr>
-              <a:t>🗄️ DB </a:t>
-            </a:r>
-            <a:r>
-              <a:rPr lang="ru-RU" sz="2000" dirty="0" err="1">
-                <a:latin typeface="Times New Roman" panose="02020603050405020304" pitchFamily="18" charset="0"/>
-                <a:cs typeface="Times New Roman" panose="02020603050405020304" pitchFamily="18" charset="0"/>
-              </a:rPr>
-              <a:t>Browser</a:t>
-            </a:r>
-            <a:r>
-              <a:rPr lang="ru-RU" sz="2000" dirty="0">
-                <a:latin typeface="Times New Roman" panose="02020603050405020304" pitchFamily="18" charset="0"/>
-                <a:cs typeface="Times New Roman" panose="02020603050405020304" pitchFamily="18" charset="0"/>
-              </a:rPr>
-              <a:t> → </a:t>
-            </a:r>
-            <a:r>
-              <a:rPr lang="ru-RU" sz="2000" dirty="0" err="1">
-                <a:latin typeface="Times New Roman" panose="02020603050405020304" pitchFamily="18" charset="0"/>
-                <a:cs typeface="Times New Roman" panose="02020603050405020304" pitchFamily="18" charset="0"/>
-              </a:rPr>
-              <a:t>Візуальний</a:t>
-            </a:r>
-            <a:r>
-              <a:rPr lang="ru-RU" sz="2000" dirty="0">
-                <a:latin typeface="Times New Roman" panose="02020603050405020304" pitchFamily="18" charset="0"/>
-                <a:cs typeface="Times New Roman" panose="02020603050405020304" pitchFamily="18" charset="0"/>
-              </a:rPr>
-              <a:t> перегляд </a:t>
-            </a:r>
-            <a:r>
-              <a:rPr lang="ru-RU" sz="2000" dirty="0" err="1">
-                <a:latin typeface="Times New Roman" panose="02020603050405020304" pitchFamily="18" charset="0"/>
-                <a:cs typeface="Times New Roman" panose="02020603050405020304" pitchFamily="18" charset="0"/>
-              </a:rPr>
-              <a:t>SQLite</a:t>
-            </a:r>
-            <a:endParaRPr lang="ru-RU" sz="2000" dirty="0">
-              <a:latin typeface="Times New Roman" panose="02020603050405020304" pitchFamily="18" charset="0"/>
-              <a:cs typeface="Times New Roman" panose="02020603050405020304" pitchFamily="18" charset="0"/>
-            </a:endParaRPr>
-          </a:p>
-          <a:p>
-            <a:r>
-              <a:rPr lang="ru-RU" sz="2000" dirty="0">
-                <a:latin typeface="Times New Roman" panose="02020603050405020304" pitchFamily="18" charset="0"/>
-                <a:cs typeface="Times New Roman" panose="02020603050405020304" pitchFamily="18" charset="0"/>
-              </a:rPr>
-              <a:t>🌐 </a:t>
-            </a:r>
-            <a:r>
-              <a:rPr lang="ru-RU" sz="2000" dirty="0" err="1">
-                <a:latin typeface="Times New Roman" panose="02020603050405020304" pitchFamily="18" charset="0"/>
-                <a:cs typeface="Times New Roman" panose="02020603050405020304" pitchFamily="18" charset="0"/>
-              </a:rPr>
-              <a:t>Chrome</a:t>
-            </a:r>
-            <a:r>
-              <a:rPr lang="ru-RU" sz="2000" dirty="0">
-                <a:latin typeface="Times New Roman" panose="02020603050405020304" pitchFamily="18" charset="0"/>
-                <a:cs typeface="Times New Roman" panose="02020603050405020304" pitchFamily="18" charset="0"/>
-              </a:rPr>
-              <a:t> </a:t>
-            </a:r>
-            <a:r>
-              <a:rPr lang="ru-RU" sz="2000" dirty="0" err="1">
-                <a:latin typeface="Times New Roman" panose="02020603050405020304" pitchFamily="18" charset="0"/>
-                <a:cs typeface="Times New Roman" panose="02020603050405020304" pitchFamily="18" charset="0"/>
-              </a:rPr>
-              <a:t>DevTools</a:t>
-            </a:r>
-            <a:r>
-              <a:rPr lang="ru-RU" sz="2000" dirty="0">
-                <a:latin typeface="Times New Roman" panose="02020603050405020304" pitchFamily="18" charset="0"/>
-                <a:cs typeface="Times New Roman" panose="02020603050405020304" pitchFamily="18" charset="0"/>
-              </a:rPr>
-              <a:t> → </a:t>
-            </a:r>
-            <a:r>
-              <a:rPr lang="ru-RU" sz="2000" dirty="0" err="1">
-                <a:latin typeface="Times New Roman" panose="02020603050405020304" pitchFamily="18" charset="0"/>
-                <a:cs typeface="Times New Roman" panose="02020603050405020304" pitchFamily="18" charset="0"/>
-              </a:rPr>
-              <a:t>Налагодження</a:t>
-            </a:r>
-            <a:r>
-              <a:rPr lang="ru-RU" sz="2000" dirty="0">
-                <a:latin typeface="Times New Roman" panose="02020603050405020304" pitchFamily="18" charset="0"/>
-                <a:cs typeface="Times New Roman" panose="02020603050405020304" pitchFamily="18" charset="0"/>
-              </a:rPr>
-              <a:t> веб -</a:t>
-            </a:r>
-            <a:r>
-              <a:rPr lang="ru-RU" sz="2000" dirty="0" err="1">
-                <a:latin typeface="Times New Roman" panose="02020603050405020304" pitchFamily="18" charset="0"/>
-                <a:cs typeface="Times New Roman" panose="02020603050405020304" pitchFamily="18" charset="0"/>
-              </a:rPr>
-              <a:t>інтерфейсу</a:t>
-            </a:r>
-            <a:endParaRPr lang="ru-RU" sz="2000" dirty="0">
-              <a:latin typeface="Times New Roman" panose="02020603050405020304" pitchFamily="18" charset="0"/>
-              <a:cs typeface="Times New Roman" panose="02020603050405020304" pitchFamily="18" charset="0"/>
-            </a:endParaRPr>
-          </a:p>
-        </p:txBody>
-      </p:sp>
-    </p:spTree>
-    <p:extLst>
-      <p:ext uri="{BB962C8B-B14F-4D97-AF65-F5344CB8AC3E}">
-        <p14:creationId xmlns:p14="http://schemas.microsoft.com/office/powerpoint/2010/main" val="917507758"/>
-      </p:ext>
-    </p:extLst>
-  </p:cSld>
-  <p:clrMapOvr>
-    <a:masterClrMapping/>
-  </p:clrMapOvr>
-</p:sld>
-</file>
-
-<file path=ppt/slides/slide9.xml><?xml version="1.0" encoding="utf-8"?>
-<p:sld xmlns:a="http://schemas.openxmlformats.org/drawingml/2006/main" xmlns:r="http://schemas.openxmlformats.org/officeDocument/2006/relationships" xmlns:p="http://schemas.openxmlformats.org/presentationml/2006/main">
-  <p:cSld>
-    <p:spTree>
-      <p:nvGrpSpPr>
-        <p:cNvPr id="1" name="">
-          <a:extLst>
-            <a:ext uri="{FF2B5EF4-FFF2-40B4-BE49-F238E27FC236}">
-              <a16:creationId xmlns:a16="http://schemas.microsoft.com/office/drawing/2014/main" id="{820A5157-E155-E1E0-90FF-28E971A00365}"/>
-            </a:ext>
-          </a:extLst>
-        </p:cNvPr>
-        <p:cNvGrpSpPr/>
-        <p:nvPr/>
-      </p:nvGrpSpPr>
-      <p:grpSpPr>
-        <a:xfrm>
-          <a:off x="0" y="0"/>
-          <a:ext cx="0" cy="0"/>
-          <a:chOff x="0" y="0"/>
-          <a:chExt cx="0" cy="0"/>
-        </a:xfrm>
-      </p:grpSpPr>
-      <p:sp>
-        <p:nvSpPr>
-          <p:cNvPr id="4" name="TextBox 3">
-            <a:extLst>
-              <a:ext uri="{FF2B5EF4-FFF2-40B4-BE49-F238E27FC236}">
-                <a16:creationId xmlns:a16="http://schemas.microsoft.com/office/drawing/2014/main" id="{9DE3A7E0-C4A8-FFBE-0AF9-9C812B2BDB34}"/>
-              </a:ext>
-            </a:extLst>
-          </p:cNvPr>
-          <p:cNvSpPr txBox="1"/>
-          <p:nvPr/>
-        </p:nvSpPr>
-        <p:spPr>
-          <a:xfrm>
-            <a:off x="4774965" y="350177"/>
-            <a:ext cx="2642070" cy="523220"/>
-          </a:xfrm>
-          <a:prstGeom prst="rect">
-            <a:avLst/>
-          </a:prstGeom>
-          <a:noFill/>
-        </p:spPr>
-        <p:txBody>
-          <a:bodyPr wrap="none" rtlCol="0">
-            <a:spAutoFit/>
-          </a:bodyPr>
-          <a:lstStyle/>
-          <a:p>
-            <a:r>
-              <a:rPr lang="ru-RU" sz="2800" dirty="0">
-                <a:latin typeface="Times New Roman" panose="02020603050405020304" pitchFamily="18" charset="0"/>
-                <a:cs typeface="Times New Roman" panose="02020603050405020304" pitchFamily="18" charset="0"/>
-              </a:rPr>
-              <a:t>Дизайн </a:t>
-            </a:r>
-            <a:r>
-              <a:rPr lang="ru-RU" sz="2800" dirty="0" err="1">
-                <a:latin typeface="Times New Roman" panose="02020603050405020304" pitchFamily="18" charset="0"/>
-                <a:cs typeface="Times New Roman" panose="02020603050405020304" pitchFamily="18" charset="0"/>
-              </a:rPr>
-              <a:t>системи</a:t>
-            </a:r>
-            <a:endParaRPr lang="ru-RU" sz="2800" dirty="0">
-              <a:latin typeface="Times New Roman" panose="02020603050405020304" pitchFamily="18" charset="0"/>
-              <a:cs typeface="Times New Roman" panose="02020603050405020304" pitchFamily="18" charset="0"/>
-            </a:endParaRPr>
-          </a:p>
-        </p:txBody>
-      </p:sp>
-      <p:sp>
-        <p:nvSpPr>
-          <p:cNvPr id="6" name="TextBox 5">
-            <a:extLst>
-              <a:ext uri="{FF2B5EF4-FFF2-40B4-BE49-F238E27FC236}">
-                <a16:creationId xmlns:a16="http://schemas.microsoft.com/office/drawing/2014/main" id="{952F756D-65E0-6D98-7710-0563B7834C97}"/>
-              </a:ext>
-            </a:extLst>
-          </p:cNvPr>
-          <p:cNvSpPr txBox="1"/>
-          <p:nvPr/>
-        </p:nvSpPr>
-        <p:spPr>
-          <a:xfrm>
-            <a:off x="1081450" y="917912"/>
-            <a:ext cx="10029099" cy="5632311"/>
-          </a:xfrm>
-          <a:prstGeom prst="rect">
-            <a:avLst/>
-          </a:prstGeom>
-          <a:noFill/>
-        </p:spPr>
-        <p:txBody>
-          <a:bodyPr wrap="square" rtlCol="0">
-            <a:spAutoFit/>
-          </a:bodyPr>
-          <a:lstStyle/>
-          <a:p>
-            <a:pPr marL="342900" indent="-342900">
-              <a:buFont typeface="Arial" panose="020B0604020202020204" pitchFamily="34" charset="0"/>
-              <a:buChar char="•"/>
-            </a:pPr>
-            <a:r>
-              <a:rPr lang="ru-RU" sz="2000" dirty="0" err="1">
-                <a:latin typeface="Times New Roman" panose="02020603050405020304" pitchFamily="18" charset="0"/>
-                <a:cs typeface="Times New Roman" panose="02020603050405020304" pitchFamily="18" charset="0"/>
-              </a:rPr>
-              <a:t>Користувацький</a:t>
-            </a:r>
-            <a:r>
-              <a:rPr lang="ru-RU" sz="2000" dirty="0">
-                <a:latin typeface="Times New Roman" panose="02020603050405020304" pitchFamily="18" charset="0"/>
-                <a:cs typeface="Times New Roman" panose="02020603050405020304" pitchFamily="18" charset="0"/>
-              </a:rPr>
-              <a:t> </a:t>
-            </a:r>
-            <a:r>
-              <a:rPr lang="ru-RU" sz="2000" dirty="0" err="1">
-                <a:latin typeface="Times New Roman" panose="02020603050405020304" pitchFamily="18" charset="0"/>
-                <a:cs typeface="Times New Roman" panose="02020603050405020304" pitchFamily="18" charset="0"/>
-              </a:rPr>
-              <a:t>досвід</a:t>
-            </a:r>
-            <a:r>
-              <a:rPr lang="ru-RU" sz="2000" dirty="0">
-                <a:latin typeface="Times New Roman" panose="02020603050405020304" pitchFamily="18" charset="0"/>
-                <a:cs typeface="Times New Roman" panose="02020603050405020304" pitchFamily="18" charset="0"/>
-              </a:rPr>
-              <a:t> (</a:t>
-            </a:r>
-            <a:r>
-              <a:rPr lang="en-US" sz="2000" dirty="0">
-                <a:latin typeface="Times New Roman" panose="02020603050405020304" pitchFamily="18" charset="0"/>
-                <a:cs typeface="Times New Roman" panose="02020603050405020304" pitchFamily="18" charset="0"/>
-              </a:rPr>
-              <a:t>UX</a:t>
-            </a:r>
-            <a:r>
-              <a:rPr lang="ru-RU" sz="2000" dirty="0">
-                <a:latin typeface="Times New Roman" panose="02020603050405020304" pitchFamily="18" charset="0"/>
-                <a:cs typeface="Times New Roman" panose="02020603050405020304" pitchFamily="18" charset="0"/>
-              </a:rPr>
-              <a:t>): </a:t>
-            </a:r>
-            <a:r>
-              <a:rPr lang="ru-RU" sz="2000" dirty="0" err="1">
-                <a:latin typeface="Times New Roman" panose="02020603050405020304" pitchFamily="18" charset="0"/>
-                <a:cs typeface="Times New Roman" panose="02020603050405020304" pitchFamily="18" charset="0"/>
-              </a:rPr>
-              <a:t>зручна</a:t>
-            </a:r>
-            <a:r>
-              <a:rPr lang="ru-RU" sz="2000" dirty="0">
-                <a:latin typeface="Times New Roman" panose="02020603050405020304" pitchFamily="18" charset="0"/>
-                <a:cs typeface="Times New Roman" panose="02020603050405020304" pitchFamily="18" charset="0"/>
-              </a:rPr>
-              <a:t> </a:t>
-            </a:r>
-            <a:r>
-              <a:rPr lang="ru-RU" sz="2000" dirty="0" err="1">
-                <a:latin typeface="Times New Roman" panose="02020603050405020304" pitchFamily="18" charset="0"/>
-                <a:cs typeface="Times New Roman" panose="02020603050405020304" pitchFamily="18" charset="0"/>
-              </a:rPr>
-              <a:t>навігація</a:t>
-            </a:r>
-            <a:r>
-              <a:rPr lang="ru-RU" sz="2000" dirty="0">
-                <a:latin typeface="Times New Roman" panose="02020603050405020304" pitchFamily="18" charset="0"/>
-                <a:cs typeface="Times New Roman" panose="02020603050405020304" pitchFamily="18" charset="0"/>
-              </a:rPr>
-              <a:t>, </a:t>
-            </a:r>
-            <a:r>
-              <a:rPr lang="ru-RU" sz="2000" dirty="0" err="1">
-                <a:latin typeface="Times New Roman" panose="02020603050405020304" pitchFamily="18" charset="0"/>
-                <a:cs typeface="Times New Roman" panose="02020603050405020304" pitchFamily="18" charset="0"/>
-              </a:rPr>
-              <a:t>швидкі</a:t>
-            </a:r>
-            <a:r>
-              <a:rPr lang="ru-RU" sz="2000" dirty="0">
-                <a:latin typeface="Times New Roman" panose="02020603050405020304" pitchFamily="18" charset="0"/>
-                <a:cs typeface="Times New Roman" panose="02020603050405020304" pitchFamily="18" charset="0"/>
-              </a:rPr>
-              <a:t> переходи, </a:t>
-            </a:r>
-            <a:r>
-              <a:rPr lang="ru-RU" sz="2000" dirty="0" err="1">
-                <a:latin typeface="Times New Roman" panose="02020603050405020304" pitchFamily="18" charset="0"/>
-                <a:cs typeface="Times New Roman" panose="02020603050405020304" pitchFamily="18" charset="0"/>
-              </a:rPr>
-              <a:t>інтуїтивний</a:t>
-            </a:r>
-            <a:r>
-              <a:rPr lang="ru-RU" sz="2000" dirty="0">
-                <a:latin typeface="Times New Roman" panose="02020603050405020304" pitchFamily="18" charset="0"/>
-                <a:cs typeface="Times New Roman" panose="02020603050405020304" pitchFamily="18" charset="0"/>
-              </a:rPr>
-              <a:t> дизайн</a:t>
-            </a:r>
-          </a:p>
-          <a:p>
-            <a:pPr marL="342900" indent="-342900">
-              <a:buFont typeface="Arial" panose="020B0604020202020204" pitchFamily="34" charset="0"/>
-              <a:buChar char="•"/>
-            </a:pPr>
-            <a:r>
-              <a:rPr lang="ru-RU" sz="2000" dirty="0" err="1">
-                <a:latin typeface="Times New Roman" panose="02020603050405020304" pitchFamily="18" charset="0"/>
-                <a:cs typeface="Times New Roman" panose="02020603050405020304" pitchFamily="18" charset="0"/>
-              </a:rPr>
-              <a:t>Візуальний</a:t>
-            </a:r>
-            <a:r>
-              <a:rPr lang="ru-RU" sz="2000" dirty="0">
-                <a:latin typeface="Times New Roman" panose="02020603050405020304" pitchFamily="18" charset="0"/>
-                <a:cs typeface="Times New Roman" panose="02020603050405020304" pitchFamily="18" charset="0"/>
-              </a:rPr>
-              <a:t> стиль (</a:t>
-            </a:r>
-            <a:r>
-              <a:rPr lang="en-US" sz="2000" dirty="0">
-                <a:latin typeface="Times New Roman" panose="02020603050405020304" pitchFamily="18" charset="0"/>
-                <a:cs typeface="Times New Roman" panose="02020603050405020304" pitchFamily="18" charset="0"/>
-              </a:rPr>
-              <a:t>UI</a:t>
-            </a:r>
-            <a:r>
-              <a:rPr lang="ru-RU" sz="2000" dirty="0">
-                <a:latin typeface="Times New Roman" panose="02020603050405020304" pitchFamily="18" charset="0"/>
-                <a:cs typeface="Times New Roman" panose="02020603050405020304" pitchFamily="18" charset="0"/>
-              </a:rPr>
-              <a:t>): </a:t>
-            </a:r>
-            <a:r>
-              <a:rPr lang="ru-RU" sz="2000" dirty="0" err="1">
-                <a:latin typeface="Times New Roman" panose="02020603050405020304" pitchFamily="18" charset="0"/>
-                <a:cs typeface="Times New Roman" panose="02020603050405020304" pitchFamily="18" charset="0"/>
-              </a:rPr>
-              <a:t>естетичний</a:t>
-            </a:r>
-            <a:r>
-              <a:rPr lang="ru-RU" sz="2000" dirty="0">
-                <a:latin typeface="Times New Roman" panose="02020603050405020304" pitchFamily="18" charset="0"/>
-                <a:cs typeface="Times New Roman" panose="02020603050405020304" pitchFamily="18" charset="0"/>
-              </a:rPr>
-              <a:t>, </a:t>
-            </a:r>
-            <a:r>
-              <a:rPr lang="ru-RU" sz="2000" dirty="0" err="1">
-                <a:latin typeface="Times New Roman" panose="02020603050405020304" pitchFamily="18" charset="0"/>
-                <a:cs typeface="Times New Roman" panose="02020603050405020304" pitchFamily="18" charset="0"/>
-              </a:rPr>
-              <a:t>мінімалістичний</a:t>
-            </a:r>
-            <a:r>
-              <a:rPr lang="ru-RU" sz="2000" dirty="0">
-                <a:latin typeface="Times New Roman" panose="02020603050405020304" pitchFamily="18" charset="0"/>
-                <a:cs typeface="Times New Roman" panose="02020603050405020304" pitchFamily="18" charset="0"/>
-              </a:rPr>
-              <a:t> </a:t>
-            </a:r>
-            <a:r>
-              <a:rPr lang="ru-RU" sz="2000" dirty="0" err="1">
-                <a:latin typeface="Times New Roman" panose="02020603050405020304" pitchFamily="18" charset="0"/>
-                <a:cs typeface="Times New Roman" panose="02020603050405020304" pitchFamily="18" charset="0"/>
-              </a:rPr>
-              <a:t>сучаснийт</a:t>
-            </a:r>
-            <a:r>
-              <a:rPr lang="ru-RU" sz="2000" dirty="0">
-                <a:latin typeface="Times New Roman" panose="02020603050405020304" pitchFamily="18" charset="0"/>
-                <a:cs typeface="Times New Roman" panose="02020603050405020304" pitchFamily="18" charset="0"/>
-              </a:rPr>
-              <a:t>, </a:t>
-            </a:r>
-            <a:r>
-              <a:rPr lang="ru-RU" sz="2000" dirty="0" err="1">
-                <a:latin typeface="Times New Roman" panose="02020603050405020304" pitchFamily="18" charset="0"/>
-                <a:cs typeface="Times New Roman" panose="02020603050405020304" pitchFamily="18" charset="0"/>
-              </a:rPr>
-              <a:t>кольорова</a:t>
-            </a:r>
-            <a:r>
-              <a:rPr lang="ru-RU" sz="2000" dirty="0">
-                <a:latin typeface="Times New Roman" panose="02020603050405020304" pitchFamily="18" charset="0"/>
-                <a:cs typeface="Times New Roman" panose="02020603050405020304" pitchFamily="18" charset="0"/>
-              </a:rPr>
-              <a:t> схема </a:t>
-            </a:r>
-            <a:r>
-              <a:rPr lang="ru-RU" sz="2000" dirty="0" err="1">
-                <a:latin typeface="Times New Roman" panose="02020603050405020304" pitchFamily="18" charset="0"/>
-                <a:cs typeface="Times New Roman" panose="02020603050405020304" pitchFamily="18" charset="0"/>
-              </a:rPr>
-              <a:t>побудована</a:t>
-            </a:r>
-            <a:r>
-              <a:rPr lang="ru-RU" sz="2000" dirty="0">
-                <a:latin typeface="Times New Roman" panose="02020603050405020304" pitchFamily="18" charset="0"/>
-                <a:cs typeface="Times New Roman" panose="02020603050405020304" pitchFamily="18" charset="0"/>
-              </a:rPr>
-              <a:t> на </a:t>
-            </a:r>
-            <a:r>
-              <a:rPr lang="ru-RU" sz="2000" dirty="0" err="1">
-                <a:latin typeface="Times New Roman" panose="02020603050405020304" pitchFamily="18" charset="0"/>
-                <a:cs typeface="Times New Roman" panose="02020603050405020304" pitchFamily="18" charset="0"/>
-              </a:rPr>
-              <a:t>фіолетово-синьому</a:t>
-            </a:r>
-            <a:r>
-              <a:rPr lang="ru-RU" sz="2000" dirty="0">
-                <a:latin typeface="Times New Roman" panose="02020603050405020304" pitchFamily="18" charset="0"/>
-                <a:cs typeface="Times New Roman" panose="02020603050405020304" pitchFamily="18" charset="0"/>
-              </a:rPr>
-              <a:t> </a:t>
-            </a:r>
-            <a:r>
-              <a:rPr lang="ru-RU" sz="2000" dirty="0" err="1">
-                <a:latin typeface="Times New Roman" panose="02020603050405020304" pitchFamily="18" charset="0"/>
-                <a:cs typeface="Times New Roman" panose="02020603050405020304" pitchFamily="18" charset="0"/>
-              </a:rPr>
-              <a:t>градієнті</a:t>
-            </a:r>
-            <a:r>
-              <a:rPr lang="ru-RU" sz="2000" dirty="0">
-                <a:latin typeface="Times New Roman" panose="02020603050405020304" pitchFamily="18" charset="0"/>
-                <a:cs typeface="Times New Roman" panose="02020603050405020304" pitchFamily="18" charset="0"/>
-              </a:rPr>
-              <a:t> – </a:t>
-            </a:r>
-            <a:r>
-              <a:rPr lang="ru-RU" sz="2000" dirty="0" err="1">
-                <a:latin typeface="Times New Roman" panose="02020603050405020304" pitchFamily="18" charset="0"/>
-                <a:cs typeface="Times New Roman" panose="02020603050405020304" pitchFamily="18" charset="0"/>
-              </a:rPr>
-              <a:t>від</a:t>
-            </a:r>
-            <a:r>
-              <a:rPr lang="ru-RU" sz="2000" dirty="0">
-                <a:latin typeface="Times New Roman" panose="02020603050405020304" pitchFamily="18" charset="0"/>
-                <a:cs typeface="Times New Roman" panose="02020603050405020304" pitchFamily="18" charset="0"/>
-              </a:rPr>
-              <a:t> </a:t>
-            </a:r>
-            <a:r>
-              <a:rPr lang="ru-RU" sz="2000" dirty="0" err="1">
-                <a:latin typeface="Times New Roman" panose="02020603050405020304" pitchFamily="18" charset="0"/>
-                <a:cs typeface="Times New Roman" panose="02020603050405020304" pitchFamily="18" charset="0"/>
-              </a:rPr>
-              <a:t>кольору</a:t>
-            </a:r>
-            <a:r>
-              <a:rPr lang="ru-RU" sz="2000" dirty="0">
-                <a:latin typeface="Times New Roman" panose="02020603050405020304" pitchFamily="18" charset="0"/>
-                <a:cs typeface="Times New Roman" panose="02020603050405020304" pitchFamily="18" charset="0"/>
-              </a:rPr>
-              <a:t> #667eea до #764ba2. </a:t>
-            </a:r>
-            <a:r>
-              <a:rPr lang="ru-RU" sz="2000" dirty="0" err="1">
-                <a:latin typeface="Times New Roman" panose="02020603050405020304" pitchFamily="18" charset="0"/>
-                <a:cs typeface="Times New Roman" panose="02020603050405020304" pitchFamily="18" charset="0"/>
-              </a:rPr>
-              <a:t>Ці</a:t>
-            </a:r>
-            <a:r>
-              <a:rPr lang="ru-RU" sz="2000" dirty="0">
-                <a:latin typeface="Times New Roman" panose="02020603050405020304" pitchFamily="18" charset="0"/>
-                <a:cs typeface="Times New Roman" panose="02020603050405020304" pitchFamily="18" charset="0"/>
-              </a:rPr>
-              <a:t> </a:t>
-            </a:r>
-            <a:r>
-              <a:rPr lang="ru-RU" sz="2000" dirty="0" err="1">
-                <a:latin typeface="Times New Roman" panose="02020603050405020304" pitchFamily="18" charset="0"/>
-                <a:cs typeface="Times New Roman" panose="02020603050405020304" pitchFamily="18" charset="0"/>
-              </a:rPr>
-              <a:t>кольори</a:t>
-            </a:r>
-            <a:r>
-              <a:rPr lang="ru-RU" sz="2000" dirty="0">
-                <a:latin typeface="Times New Roman" panose="02020603050405020304" pitchFamily="18" charset="0"/>
-                <a:cs typeface="Times New Roman" panose="02020603050405020304" pitchFamily="18" charset="0"/>
-              </a:rPr>
-              <a:t> </a:t>
-            </a:r>
-            <a:r>
-              <a:rPr lang="ru-RU" sz="2000" dirty="0" err="1">
-                <a:latin typeface="Times New Roman" panose="02020603050405020304" pitchFamily="18" charset="0"/>
-                <a:cs typeface="Times New Roman" panose="02020603050405020304" pitchFamily="18" charset="0"/>
-              </a:rPr>
-              <a:t>асоціюються</a:t>
-            </a:r>
-            <a:r>
-              <a:rPr lang="ru-RU" sz="2000" dirty="0">
-                <a:latin typeface="Times New Roman" panose="02020603050405020304" pitchFamily="18" charset="0"/>
-                <a:cs typeface="Times New Roman" panose="02020603050405020304" pitchFamily="18" charset="0"/>
-              </a:rPr>
-              <a:t> з </a:t>
-            </a:r>
-            <a:r>
-              <a:rPr lang="ru-RU" sz="2000" dirty="0" err="1">
-                <a:latin typeface="Times New Roman" panose="02020603050405020304" pitchFamily="18" charset="0"/>
-                <a:cs typeface="Times New Roman" panose="02020603050405020304" pitchFamily="18" charset="0"/>
-              </a:rPr>
-              <a:t>технологічністю</a:t>
-            </a:r>
-            <a:r>
-              <a:rPr lang="ru-RU" sz="2000" dirty="0">
-                <a:latin typeface="Times New Roman" panose="02020603050405020304" pitchFamily="18" charset="0"/>
-                <a:cs typeface="Times New Roman" panose="02020603050405020304" pitchFamily="18" charset="0"/>
-              </a:rPr>
-              <a:t>, </a:t>
-            </a:r>
-            <a:r>
-              <a:rPr lang="ru-RU" sz="2000" dirty="0" err="1">
-                <a:latin typeface="Times New Roman" panose="02020603050405020304" pitchFamily="18" charset="0"/>
-                <a:cs typeface="Times New Roman" panose="02020603050405020304" pitchFamily="18" charset="0"/>
-              </a:rPr>
-              <a:t>спокоєм</a:t>
-            </a:r>
-            <a:r>
-              <a:rPr lang="ru-RU" sz="2000" dirty="0">
-                <a:latin typeface="Times New Roman" panose="02020603050405020304" pitchFamily="18" charset="0"/>
-                <a:cs typeface="Times New Roman" panose="02020603050405020304" pitchFamily="18" charset="0"/>
-              </a:rPr>
-              <a:t> та </a:t>
-            </a:r>
-            <a:r>
-              <a:rPr lang="ru-RU" sz="2000" dirty="0" err="1">
-                <a:latin typeface="Times New Roman" panose="02020603050405020304" pitchFamily="18" charset="0"/>
-                <a:cs typeface="Times New Roman" panose="02020603050405020304" pitchFamily="18" charset="0"/>
-              </a:rPr>
-              <a:t>елегантністю</a:t>
-            </a:r>
-            <a:r>
-              <a:rPr lang="ru-RU" sz="2000" dirty="0">
-                <a:latin typeface="Times New Roman" panose="02020603050405020304" pitchFamily="18" charset="0"/>
-                <a:cs typeface="Times New Roman" panose="02020603050405020304" pitchFamily="18" charset="0"/>
-              </a:rPr>
-              <a:t>, а </a:t>
-            </a:r>
-            <a:r>
-              <a:rPr lang="ru-RU" sz="2000" dirty="0" err="1">
-                <a:latin typeface="Times New Roman" panose="02020603050405020304" pitchFamily="18" charset="0"/>
-                <a:cs typeface="Times New Roman" panose="02020603050405020304" pitchFamily="18" charset="0"/>
-              </a:rPr>
-              <a:t>білий</a:t>
-            </a:r>
-            <a:r>
-              <a:rPr lang="ru-RU" sz="2000" dirty="0">
-                <a:latin typeface="Times New Roman" panose="02020603050405020304" pitchFamily="18" charset="0"/>
-                <a:cs typeface="Times New Roman" panose="02020603050405020304" pitchFamily="18" charset="0"/>
-              </a:rPr>
-              <a:t> фон </a:t>
-            </a:r>
-            <a:r>
-              <a:rPr lang="ru-RU" sz="2000" dirty="0" err="1">
-                <a:latin typeface="Times New Roman" panose="02020603050405020304" pitchFamily="18" charset="0"/>
-                <a:cs typeface="Times New Roman" panose="02020603050405020304" pitchFamily="18" charset="0"/>
-              </a:rPr>
-              <a:t>карток</a:t>
-            </a:r>
-            <a:r>
-              <a:rPr lang="ru-RU" sz="2000" dirty="0">
-                <a:latin typeface="Times New Roman" panose="02020603050405020304" pitchFamily="18" charset="0"/>
-                <a:cs typeface="Times New Roman" panose="02020603050405020304" pitchFamily="18" charset="0"/>
-              </a:rPr>
-              <a:t> </a:t>
-            </a:r>
-            <a:r>
-              <a:rPr lang="ru-RU" sz="2000" dirty="0" err="1">
-                <a:latin typeface="Times New Roman" panose="02020603050405020304" pitchFamily="18" charset="0"/>
-                <a:cs typeface="Times New Roman" panose="02020603050405020304" pitchFamily="18" charset="0"/>
-              </a:rPr>
-              <a:t>забезпечує</a:t>
-            </a:r>
-            <a:r>
-              <a:rPr lang="ru-RU" sz="2000" dirty="0">
-                <a:latin typeface="Times New Roman" panose="02020603050405020304" pitchFamily="18" charset="0"/>
-                <a:cs typeface="Times New Roman" panose="02020603050405020304" pitchFamily="18" charset="0"/>
-              </a:rPr>
-              <a:t> </a:t>
-            </a:r>
-            <a:r>
-              <a:rPr lang="ru-RU" sz="2000" dirty="0" err="1">
-                <a:latin typeface="Times New Roman" panose="02020603050405020304" pitchFamily="18" charset="0"/>
-                <a:cs typeface="Times New Roman" panose="02020603050405020304" pitchFamily="18" charset="0"/>
-              </a:rPr>
-              <a:t>контрастність</a:t>
-            </a:r>
-            <a:r>
-              <a:rPr lang="ru-RU" sz="2000" dirty="0">
-                <a:latin typeface="Times New Roman" panose="02020603050405020304" pitchFamily="18" charset="0"/>
-                <a:cs typeface="Times New Roman" panose="02020603050405020304" pitchFamily="18" charset="0"/>
-              </a:rPr>
-              <a:t> та </a:t>
-            </a:r>
-            <a:r>
-              <a:rPr lang="ru-RU" sz="2000" dirty="0" err="1">
-                <a:latin typeface="Times New Roman" panose="02020603050405020304" pitchFamily="18" charset="0"/>
-                <a:cs typeface="Times New Roman" panose="02020603050405020304" pitchFamily="18" charset="0"/>
-              </a:rPr>
-              <a:t>читабельність</a:t>
-            </a:r>
-            <a:r>
-              <a:rPr lang="ru-RU" sz="2000" dirty="0">
-                <a:latin typeface="Times New Roman" panose="02020603050405020304" pitchFamily="18" charset="0"/>
-                <a:cs typeface="Times New Roman" panose="02020603050405020304" pitchFamily="18" charset="0"/>
-              </a:rPr>
-              <a:t> тексту</a:t>
-            </a:r>
-          </a:p>
-          <a:p>
-            <a:pPr marL="342900" indent="-342900">
-              <a:buFont typeface="Arial" panose="020B0604020202020204" pitchFamily="34" charset="0"/>
-              <a:buChar char="•"/>
-            </a:pPr>
-            <a:r>
-              <a:rPr lang="ru-RU" sz="2000" dirty="0" err="1">
-                <a:latin typeface="Times New Roman" panose="02020603050405020304" pitchFamily="18" charset="0"/>
-                <a:cs typeface="Times New Roman" panose="02020603050405020304" pitchFamily="18" charset="0"/>
-              </a:rPr>
-              <a:t>Адаптивність</a:t>
-            </a:r>
-            <a:r>
-              <a:rPr lang="ru-RU" sz="2000" dirty="0">
-                <a:latin typeface="Times New Roman" panose="02020603050405020304" pitchFamily="18" charset="0"/>
-                <a:cs typeface="Times New Roman" panose="02020603050405020304" pitchFamily="18" charset="0"/>
-              </a:rPr>
-              <a:t>: </a:t>
-            </a:r>
-            <a:r>
-              <a:rPr lang="ru-RU" sz="2000" dirty="0" err="1">
-                <a:latin typeface="Times New Roman" panose="02020603050405020304" pitchFamily="18" charset="0"/>
-                <a:cs typeface="Times New Roman" panose="02020603050405020304" pitchFamily="18" charset="0"/>
-              </a:rPr>
-              <a:t>всі</a:t>
-            </a:r>
-            <a:r>
-              <a:rPr lang="ru-RU" sz="2000" dirty="0">
-                <a:latin typeface="Times New Roman" panose="02020603050405020304" pitchFamily="18" charset="0"/>
-                <a:cs typeface="Times New Roman" panose="02020603050405020304" pitchFamily="18" charset="0"/>
-              </a:rPr>
-              <a:t> </a:t>
-            </a:r>
-            <a:r>
-              <a:rPr lang="ru-RU" sz="2000" dirty="0" err="1">
-                <a:latin typeface="Times New Roman" panose="02020603050405020304" pitchFamily="18" charset="0"/>
-                <a:cs typeface="Times New Roman" panose="02020603050405020304" pitchFamily="18" charset="0"/>
-              </a:rPr>
-              <a:t>елементи</a:t>
-            </a:r>
-            <a:r>
-              <a:rPr lang="ru-RU" sz="2000" dirty="0">
-                <a:latin typeface="Times New Roman" panose="02020603050405020304" pitchFamily="18" charset="0"/>
-                <a:cs typeface="Times New Roman" panose="02020603050405020304" pitchFamily="18" charset="0"/>
-              </a:rPr>
-              <a:t> </a:t>
-            </a:r>
-            <a:r>
-              <a:rPr lang="ru-RU" sz="2000" dirty="0" err="1">
-                <a:latin typeface="Times New Roman" panose="02020603050405020304" pitchFamily="18" charset="0"/>
-                <a:cs typeface="Times New Roman" panose="02020603050405020304" pitchFamily="18" charset="0"/>
-              </a:rPr>
-              <a:t>коректно</a:t>
-            </a:r>
-            <a:r>
-              <a:rPr lang="ru-RU" sz="2000" dirty="0">
-                <a:latin typeface="Times New Roman" panose="02020603050405020304" pitchFamily="18" charset="0"/>
-                <a:cs typeface="Times New Roman" panose="02020603050405020304" pitchFamily="18" charset="0"/>
-              </a:rPr>
-              <a:t> </a:t>
-            </a:r>
-            <a:r>
-              <a:rPr lang="ru-RU" sz="2000" dirty="0" err="1">
-                <a:latin typeface="Times New Roman" panose="02020603050405020304" pitchFamily="18" charset="0"/>
-                <a:cs typeface="Times New Roman" panose="02020603050405020304" pitchFamily="18" charset="0"/>
-              </a:rPr>
-              <a:t>масштабуються</a:t>
-            </a:r>
-            <a:r>
-              <a:rPr lang="ru-RU" sz="2000" dirty="0">
-                <a:latin typeface="Times New Roman" panose="02020603050405020304" pitchFamily="18" charset="0"/>
-                <a:cs typeface="Times New Roman" panose="02020603050405020304" pitchFamily="18" charset="0"/>
-              </a:rPr>
-              <a:t> при </a:t>
-            </a:r>
-            <a:r>
-              <a:rPr lang="ru-RU" sz="2000" dirty="0" err="1">
-                <a:latin typeface="Times New Roman" panose="02020603050405020304" pitchFamily="18" charset="0"/>
-                <a:cs typeface="Times New Roman" panose="02020603050405020304" pitchFamily="18" charset="0"/>
-              </a:rPr>
-              <a:t>зміні</a:t>
-            </a:r>
-            <a:r>
-              <a:rPr lang="ru-RU" sz="2000" dirty="0">
-                <a:latin typeface="Times New Roman" panose="02020603050405020304" pitchFamily="18" charset="0"/>
-                <a:cs typeface="Times New Roman" panose="02020603050405020304" pitchFamily="18" charset="0"/>
-              </a:rPr>
-              <a:t> </a:t>
-            </a:r>
-            <a:r>
-              <a:rPr lang="ru-RU" sz="2000" dirty="0" err="1">
-                <a:latin typeface="Times New Roman" panose="02020603050405020304" pitchFamily="18" charset="0"/>
-                <a:cs typeface="Times New Roman" panose="02020603050405020304" pitchFamily="18" charset="0"/>
-              </a:rPr>
-              <a:t>розміру</a:t>
-            </a:r>
-            <a:r>
-              <a:rPr lang="ru-RU" sz="2000" dirty="0">
-                <a:latin typeface="Times New Roman" panose="02020603050405020304" pitchFamily="18" charset="0"/>
-                <a:cs typeface="Times New Roman" panose="02020603050405020304" pitchFamily="18" charset="0"/>
-              </a:rPr>
-              <a:t> </a:t>
-            </a:r>
-            <a:r>
-              <a:rPr lang="ru-RU" sz="2000" dirty="0" err="1">
-                <a:latin typeface="Times New Roman" panose="02020603050405020304" pitchFamily="18" charset="0"/>
-                <a:cs typeface="Times New Roman" panose="02020603050405020304" pitchFamily="18" charset="0"/>
-              </a:rPr>
-              <a:t>вікна</a:t>
-            </a:r>
-            <a:r>
-              <a:rPr lang="ru-RU" sz="2000" dirty="0">
-                <a:latin typeface="Times New Roman" panose="02020603050405020304" pitchFamily="18" charset="0"/>
-                <a:cs typeface="Times New Roman" panose="02020603050405020304" pitchFamily="18" charset="0"/>
-              </a:rPr>
-              <a:t> </a:t>
-            </a:r>
-            <a:r>
-              <a:rPr lang="ru-RU" sz="2000" dirty="0" err="1">
-                <a:latin typeface="Times New Roman" panose="02020603050405020304" pitchFamily="18" charset="0"/>
-                <a:cs typeface="Times New Roman" panose="02020603050405020304" pitchFamily="18" charset="0"/>
-              </a:rPr>
-              <a:t>або</a:t>
-            </a:r>
-            <a:r>
-              <a:rPr lang="ru-RU" sz="2000" dirty="0">
-                <a:latin typeface="Times New Roman" panose="02020603050405020304" pitchFamily="18" charset="0"/>
-                <a:cs typeface="Times New Roman" panose="02020603050405020304" pitchFamily="18" charset="0"/>
-              </a:rPr>
-              <a:t> при </a:t>
-            </a:r>
-            <a:r>
-              <a:rPr lang="ru-RU" sz="2000" dirty="0" err="1">
-                <a:latin typeface="Times New Roman" panose="02020603050405020304" pitchFamily="18" charset="0"/>
-                <a:cs typeface="Times New Roman" panose="02020603050405020304" pitchFamily="18" charset="0"/>
-              </a:rPr>
-              <a:t>перегляді</a:t>
-            </a:r>
-            <a:r>
-              <a:rPr lang="ru-RU" sz="2000" dirty="0">
-                <a:latin typeface="Times New Roman" panose="02020603050405020304" pitchFamily="18" charset="0"/>
-                <a:cs typeface="Times New Roman" panose="02020603050405020304" pitchFamily="18" charset="0"/>
-              </a:rPr>
-              <a:t> з </a:t>
-            </a:r>
-            <a:r>
-              <a:rPr lang="ru-RU" sz="2000" dirty="0" err="1">
-                <a:latin typeface="Times New Roman" panose="02020603050405020304" pitchFamily="18" charset="0"/>
-                <a:cs typeface="Times New Roman" panose="02020603050405020304" pitchFamily="18" charset="0"/>
-              </a:rPr>
-              <a:t>мобільного</a:t>
-            </a:r>
-            <a:r>
-              <a:rPr lang="ru-RU" sz="2000" dirty="0">
-                <a:latin typeface="Times New Roman" panose="02020603050405020304" pitchFamily="18" charset="0"/>
-                <a:cs typeface="Times New Roman" panose="02020603050405020304" pitchFamily="18" charset="0"/>
-              </a:rPr>
-              <a:t> пристрою. Для </a:t>
-            </a:r>
-            <a:r>
-              <a:rPr lang="ru-RU" sz="2000" dirty="0" err="1">
-                <a:latin typeface="Times New Roman" panose="02020603050405020304" pitchFamily="18" charset="0"/>
-                <a:cs typeface="Times New Roman" panose="02020603050405020304" pitchFamily="18" charset="0"/>
-              </a:rPr>
-              <a:t>цього</a:t>
-            </a:r>
-            <a:r>
-              <a:rPr lang="ru-RU" sz="2000" dirty="0">
-                <a:latin typeface="Times New Roman" panose="02020603050405020304" pitchFamily="18" charset="0"/>
-                <a:cs typeface="Times New Roman" panose="02020603050405020304" pitchFamily="18" charset="0"/>
-              </a:rPr>
-              <a:t> </a:t>
-            </a:r>
-            <a:r>
-              <a:rPr lang="ru-RU" sz="2000" dirty="0" err="1">
-                <a:latin typeface="Times New Roman" panose="02020603050405020304" pitchFamily="18" charset="0"/>
-                <a:cs typeface="Times New Roman" panose="02020603050405020304" pitchFamily="18" charset="0"/>
-              </a:rPr>
-              <a:t>використовуються</a:t>
-            </a:r>
-            <a:r>
-              <a:rPr lang="ru-RU" sz="2000" dirty="0">
-                <a:latin typeface="Times New Roman" panose="02020603050405020304" pitchFamily="18" charset="0"/>
-                <a:cs typeface="Times New Roman" panose="02020603050405020304" pitchFamily="18" charset="0"/>
-              </a:rPr>
-              <a:t> </a:t>
-            </a:r>
-            <a:r>
-              <a:rPr lang="ru-RU" sz="2000" dirty="0" err="1">
-                <a:latin typeface="Times New Roman" panose="02020603050405020304" pitchFamily="18" charset="0"/>
-                <a:cs typeface="Times New Roman" panose="02020603050405020304" pitchFamily="18" charset="0"/>
-              </a:rPr>
-              <a:t>медіа-запити</a:t>
-            </a:r>
-            <a:r>
-              <a:rPr lang="ru-RU" sz="2000" dirty="0">
-                <a:latin typeface="Times New Roman" panose="02020603050405020304" pitchFamily="18" charset="0"/>
-                <a:cs typeface="Times New Roman" panose="02020603050405020304" pitchFamily="18" charset="0"/>
-              </a:rPr>
-              <a:t> у CSS</a:t>
-            </a:r>
-          </a:p>
-          <a:p>
-            <a:pPr marL="342900" indent="-342900">
-              <a:buFont typeface="Arial" panose="020B0604020202020204" pitchFamily="34" charset="0"/>
-              <a:buChar char="•"/>
-            </a:pPr>
-            <a:r>
-              <a:rPr lang="ru-RU" sz="2000" dirty="0" err="1">
-                <a:latin typeface="Times New Roman" panose="02020603050405020304" pitchFamily="18" charset="0"/>
-                <a:cs typeface="Times New Roman" panose="02020603050405020304" pitchFamily="18" charset="0"/>
-              </a:rPr>
-              <a:t>Швидкодія</a:t>
-            </a:r>
-            <a:r>
-              <a:rPr lang="ru-RU" sz="2000" dirty="0">
-                <a:latin typeface="Times New Roman" panose="02020603050405020304" pitchFamily="18" charset="0"/>
-                <a:cs typeface="Times New Roman" panose="02020603050405020304" pitchFamily="18" charset="0"/>
-              </a:rPr>
-              <a:t>: </a:t>
-            </a:r>
-            <a:r>
-              <a:rPr lang="ru-RU" sz="2000" dirty="0" err="1">
-                <a:latin typeface="Times New Roman" panose="02020603050405020304" pitchFamily="18" charset="0"/>
-                <a:cs typeface="Times New Roman" panose="02020603050405020304" pitchFamily="18" charset="0"/>
-              </a:rPr>
-              <a:t>кешування</a:t>
-            </a:r>
-            <a:r>
-              <a:rPr lang="ru-RU" sz="2000" dirty="0">
-                <a:latin typeface="Times New Roman" panose="02020603050405020304" pitchFamily="18" charset="0"/>
-                <a:cs typeface="Times New Roman" panose="02020603050405020304" pitchFamily="18" charset="0"/>
-              </a:rPr>
-              <a:t>, </a:t>
-            </a:r>
-            <a:r>
-              <a:rPr lang="ru-RU" sz="2000" dirty="0" err="1">
-                <a:latin typeface="Times New Roman" panose="02020603050405020304" pitchFamily="18" charset="0"/>
-                <a:cs typeface="Times New Roman" panose="02020603050405020304" pitchFamily="18" charset="0"/>
-              </a:rPr>
-              <a:t>оптимізація</a:t>
-            </a:r>
-            <a:r>
-              <a:rPr lang="ru-RU" sz="2000" dirty="0">
-                <a:latin typeface="Times New Roman" panose="02020603050405020304" pitchFamily="18" charset="0"/>
-                <a:cs typeface="Times New Roman" panose="02020603050405020304" pitchFamily="18" charset="0"/>
-              </a:rPr>
-              <a:t> </a:t>
-            </a:r>
-            <a:r>
-              <a:rPr lang="ru-RU" sz="2000" dirty="0" err="1">
-                <a:latin typeface="Times New Roman" panose="02020603050405020304" pitchFamily="18" charset="0"/>
-                <a:cs typeface="Times New Roman" panose="02020603050405020304" pitchFamily="18" charset="0"/>
-              </a:rPr>
-              <a:t>завантаження</a:t>
-            </a:r>
-            <a:endParaRPr lang="ru-RU" sz="2000" dirty="0">
-              <a:latin typeface="Times New Roman" panose="02020603050405020304" pitchFamily="18" charset="0"/>
-              <a:cs typeface="Times New Roman" panose="02020603050405020304" pitchFamily="18" charset="0"/>
-            </a:endParaRPr>
-          </a:p>
-          <a:p>
-            <a:pPr marL="342900" indent="-342900">
-              <a:buFont typeface="Arial" panose="020B0604020202020204" pitchFamily="34" charset="0"/>
-              <a:buChar char="•"/>
-            </a:pPr>
-            <a:r>
-              <a:rPr lang="ru-RU" sz="2000" dirty="0" err="1">
-                <a:latin typeface="Times New Roman" panose="02020603050405020304" pitchFamily="18" charset="0"/>
-                <a:cs typeface="Times New Roman" panose="02020603050405020304" pitchFamily="18" charset="0"/>
-              </a:rPr>
-              <a:t>Типогрфіка</a:t>
-            </a:r>
-            <a:r>
-              <a:rPr lang="ru-RU" sz="2000" dirty="0">
-                <a:latin typeface="Times New Roman" panose="02020603050405020304" pitchFamily="18" charset="0"/>
-                <a:cs typeface="Times New Roman" panose="02020603050405020304" pitchFamily="18" charset="0"/>
-              </a:rPr>
-              <a:t>: </a:t>
-            </a:r>
-            <a:r>
-              <a:rPr lang="ru-RU" sz="2000" dirty="0" err="1">
-                <a:latin typeface="Times New Roman" panose="02020603050405020304" pitchFamily="18" charset="0"/>
-                <a:cs typeface="Times New Roman" panose="02020603050405020304" pitchFamily="18" charset="0"/>
-              </a:rPr>
-              <a:t>основним</a:t>
-            </a:r>
-            <a:r>
-              <a:rPr lang="ru-RU" sz="2000" dirty="0">
-                <a:latin typeface="Times New Roman" panose="02020603050405020304" pitchFamily="18" charset="0"/>
-                <a:cs typeface="Times New Roman" panose="02020603050405020304" pitchFamily="18" charset="0"/>
-              </a:rPr>
-              <a:t> шрифтом </a:t>
-            </a:r>
-            <a:r>
-              <a:rPr lang="ru-RU" sz="2000" dirty="0" err="1">
-                <a:latin typeface="Times New Roman" panose="02020603050405020304" pitchFamily="18" charset="0"/>
-                <a:cs typeface="Times New Roman" panose="02020603050405020304" pitchFamily="18" charset="0"/>
-              </a:rPr>
-              <a:t>обрано</a:t>
-            </a:r>
-            <a:r>
-              <a:rPr lang="ru-RU" sz="2000" dirty="0">
-                <a:latin typeface="Times New Roman" panose="02020603050405020304" pitchFamily="18" charset="0"/>
-                <a:cs typeface="Times New Roman" panose="02020603050405020304" pitchFamily="18" charset="0"/>
-              </a:rPr>
-              <a:t> «</a:t>
-            </a:r>
-            <a:r>
-              <a:rPr lang="ru-RU" sz="2000" dirty="0" err="1">
-                <a:latin typeface="Times New Roman" panose="02020603050405020304" pitchFamily="18" charset="0"/>
-                <a:cs typeface="Times New Roman" panose="02020603050405020304" pitchFamily="18" charset="0"/>
-              </a:rPr>
-              <a:t>Segoe</a:t>
-            </a:r>
-            <a:r>
-              <a:rPr lang="ru-RU" sz="2000" dirty="0">
-                <a:latin typeface="Times New Roman" panose="02020603050405020304" pitchFamily="18" charset="0"/>
-                <a:cs typeface="Times New Roman" panose="02020603050405020304" pitchFamily="18" charset="0"/>
-              </a:rPr>
-              <a:t> UI» – </a:t>
-            </a:r>
-            <a:r>
-              <a:rPr lang="ru-RU" sz="2000" dirty="0" err="1">
-                <a:latin typeface="Times New Roman" panose="02020603050405020304" pitchFamily="18" charset="0"/>
-                <a:cs typeface="Times New Roman" panose="02020603050405020304" pitchFamily="18" charset="0"/>
-              </a:rPr>
-              <a:t>це</a:t>
-            </a:r>
-            <a:r>
-              <a:rPr lang="ru-RU" sz="2000" dirty="0">
-                <a:latin typeface="Times New Roman" panose="02020603050405020304" pitchFamily="18" charset="0"/>
-                <a:cs typeface="Times New Roman" panose="02020603050405020304" pitchFamily="18" charset="0"/>
-              </a:rPr>
-              <a:t> </a:t>
-            </a:r>
-            <a:r>
-              <a:rPr lang="ru-RU" sz="2000" dirty="0" err="1">
-                <a:latin typeface="Times New Roman" panose="02020603050405020304" pitchFamily="18" charset="0"/>
-                <a:cs typeface="Times New Roman" panose="02020603050405020304" pitchFamily="18" charset="0"/>
-              </a:rPr>
-              <a:t>системний</a:t>
-            </a:r>
-            <a:r>
-              <a:rPr lang="ru-RU" sz="2000" dirty="0">
-                <a:latin typeface="Times New Roman" panose="02020603050405020304" pitchFamily="18" charset="0"/>
-                <a:cs typeface="Times New Roman" panose="02020603050405020304" pitchFamily="18" charset="0"/>
-              </a:rPr>
-              <a:t> шрифт, </a:t>
-            </a:r>
-            <a:r>
-              <a:rPr lang="ru-RU" sz="2000" dirty="0" err="1">
-                <a:latin typeface="Times New Roman" panose="02020603050405020304" pitchFamily="18" charset="0"/>
-                <a:cs typeface="Times New Roman" panose="02020603050405020304" pitchFamily="18" charset="0"/>
-              </a:rPr>
-              <a:t>який</a:t>
-            </a:r>
-            <a:r>
-              <a:rPr lang="ru-RU" sz="2000" dirty="0">
-                <a:latin typeface="Times New Roman" panose="02020603050405020304" pitchFamily="18" charset="0"/>
-                <a:cs typeface="Times New Roman" panose="02020603050405020304" pitchFamily="18" charset="0"/>
-              </a:rPr>
-              <a:t> </a:t>
-            </a:r>
-            <a:r>
-              <a:rPr lang="ru-RU" sz="2000" dirty="0" err="1">
-                <a:latin typeface="Times New Roman" panose="02020603050405020304" pitchFamily="18" charset="0"/>
-                <a:cs typeface="Times New Roman" panose="02020603050405020304" pitchFamily="18" charset="0"/>
-              </a:rPr>
-              <a:t>гарантовано</a:t>
-            </a:r>
-            <a:r>
-              <a:rPr lang="ru-RU" sz="2000" dirty="0">
-                <a:latin typeface="Times New Roman" panose="02020603050405020304" pitchFamily="18" charset="0"/>
-                <a:cs typeface="Times New Roman" panose="02020603050405020304" pitchFamily="18" charset="0"/>
-              </a:rPr>
-              <a:t> є на </a:t>
-            </a:r>
-            <a:r>
-              <a:rPr lang="ru-RU" sz="2000" dirty="0" err="1">
-                <a:latin typeface="Times New Roman" panose="02020603050405020304" pitchFamily="18" charset="0"/>
-                <a:cs typeface="Times New Roman" panose="02020603050405020304" pitchFamily="18" charset="0"/>
-              </a:rPr>
-              <a:t>всіх</a:t>
-            </a:r>
-            <a:r>
-              <a:rPr lang="ru-RU" sz="2000" dirty="0">
-                <a:latin typeface="Times New Roman" panose="02020603050405020304" pitchFamily="18" charset="0"/>
-                <a:cs typeface="Times New Roman" panose="02020603050405020304" pitchFamily="18" charset="0"/>
-              </a:rPr>
-              <a:t> пристроях, </a:t>
-            </a:r>
-            <a:r>
-              <a:rPr lang="ru-RU" sz="2000" dirty="0" err="1">
-                <a:latin typeface="Times New Roman" panose="02020603050405020304" pitchFamily="18" charset="0"/>
-                <a:cs typeface="Times New Roman" panose="02020603050405020304" pitchFamily="18" charset="0"/>
-              </a:rPr>
-              <a:t>що</a:t>
-            </a:r>
-            <a:r>
-              <a:rPr lang="ru-RU" sz="2000" dirty="0">
-                <a:latin typeface="Times New Roman" panose="02020603050405020304" pitchFamily="18" charset="0"/>
-                <a:cs typeface="Times New Roman" panose="02020603050405020304" pitchFamily="18" charset="0"/>
-              </a:rPr>
-              <a:t> </a:t>
-            </a:r>
-            <a:r>
-              <a:rPr lang="ru-RU" sz="2000" dirty="0" err="1">
-                <a:latin typeface="Times New Roman" panose="02020603050405020304" pitchFamily="18" charset="0"/>
-                <a:cs typeface="Times New Roman" panose="02020603050405020304" pitchFamily="18" charset="0"/>
-              </a:rPr>
-              <a:t>забезпечує</a:t>
-            </a:r>
-            <a:r>
-              <a:rPr lang="ru-RU" sz="2000" dirty="0">
-                <a:latin typeface="Times New Roman" panose="02020603050405020304" pitchFamily="18" charset="0"/>
-                <a:cs typeface="Times New Roman" panose="02020603050405020304" pitchFamily="18" charset="0"/>
-              </a:rPr>
-              <a:t> </a:t>
-            </a:r>
-            <a:r>
-              <a:rPr lang="ru-RU" sz="2000" dirty="0" err="1">
-                <a:latin typeface="Times New Roman" panose="02020603050405020304" pitchFamily="18" charset="0"/>
-                <a:cs typeface="Times New Roman" panose="02020603050405020304" pitchFamily="18" charset="0"/>
-              </a:rPr>
-              <a:t>швидке</a:t>
-            </a:r>
-            <a:r>
-              <a:rPr lang="ru-RU" sz="2000" dirty="0">
-                <a:latin typeface="Times New Roman" panose="02020603050405020304" pitchFamily="18" charset="0"/>
-                <a:cs typeface="Times New Roman" panose="02020603050405020304" pitchFamily="18" charset="0"/>
-              </a:rPr>
-              <a:t> </a:t>
-            </a:r>
-            <a:r>
-              <a:rPr lang="ru-RU" sz="2000" dirty="0" err="1">
-                <a:latin typeface="Times New Roman" panose="02020603050405020304" pitchFamily="18" charset="0"/>
-                <a:cs typeface="Times New Roman" panose="02020603050405020304" pitchFamily="18" charset="0"/>
-              </a:rPr>
-              <a:t>завантаження</a:t>
-            </a:r>
-            <a:r>
-              <a:rPr lang="ru-RU" sz="2000" dirty="0">
-                <a:latin typeface="Times New Roman" panose="02020603050405020304" pitchFamily="18" charset="0"/>
-                <a:cs typeface="Times New Roman" panose="02020603050405020304" pitchFamily="18" charset="0"/>
-              </a:rPr>
-              <a:t> та </a:t>
-            </a:r>
-            <a:r>
-              <a:rPr lang="ru-RU" sz="2000" dirty="0" err="1">
-                <a:latin typeface="Times New Roman" panose="02020603050405020304" pitchFamily="18" charset="0"/>
-                <a:cs typeface="Times New Roman" panose="02020603050405020304" pitchFamily="18" charset="0"/>
-              </a:rPr>
-              <a:t>коректне</a:t>
-            </a:r>
-            <a:r>
-              <a:rPr lang="ru-RU" sz="2000" dirty="0">
-                <a:latin typeface="Times New Roman" panose="02020603050405020304" pitchFamily="18" charset="0"/>
-                <a:cs typeface="Times New Roman" panose="02020603050405020304" pitchFamily="18" charset="0"/>
-              </a:rPr>
-              <a:t> </a:t>
-            </a:r>
-            <a:r>
-              <a:rPr lang="ru-RU" sz="2000" dirty="0" err="1">
-                <a:latin typeface="Times New Roman" panose="02020603050405020304" pitchFamily="18" charset="0"/>
-                <a:cs typeface="Times New Roman" panose="02020603050405020304" pitchFamily="18" charset="0"/>
-              </a:rPr>
-              <a:t>відображення</a:t>
-            </a:r>
-            <a:r>
-              <a:rPr lang="ru-RU" sz="2000" dirty="0">
-                <a:latin typeface="Times New Roman" panose="02020603050405020304" pitchFamily="18" charset="0"/>
-                <a:cs typeface="Times New Roman" panose="02020603050405020304" pitchFamily="18" charset="0"/>
-              </a:rPr>
-              <a:t>, </a:t>
-            </a:r>
-            <a:r>
-              <a:rPr lang="ru-RU" sz="2000" dirty="0" err="1">
-                <a:latin typeface="Times New Roman" panose="02020603050405020304" pitchFamily="18" charset="0"/>
-                <a:cs typeface="Times New Roman" panose="02020603050405020304" pitchFamily="18" charset="0"/>
-              </a:rPr>
-              <a:t>розміри</a:t>
-            </a:r>
-            <a:r>
-              <a:rPr lang="ru-RU" sz="2000" dirty="0">
-                <a:latin typeface="Times New Roman" panose="02020603050405020304" pitchFamily="18" charset="0"/>
-                <a:cs typeface="Times New Roman" panose="02020603050405020304" pitchFamily="18" charset="0"/>
-              </a:rPr>
-              <a:t>: текст 14px, заголовки 24 - 32px</a:t>
-            </a:r>
-          </a:p>
-          <a:p>
-            <a:r>
-              <a:rPr lang="ru-RU" sz="2000" dirty="0" err="1">
-                <a:latin typeface="Times New Roman" panose="02020603050405020304" pitchFamily="18" charset="0"/>
-                <a:cs typeface="Times New Roman" panose="02020603050405020304" pitchFamily="18" charset="0"/>
-              </a:rPr>
-              <a:t>Основні</a:t>
-            </a:r>
-            <a:r>
-              <a:rPr lang="ru-RU" sz="2000" dirty="0">
-                <a:latin typeface="Times New Roman" panose="02020603050405020304" pitchFamily="18" charset="0"/>
-                <a:cs typeface="Times New Roman" panose="02020603050405020304" pitchFamily="18" charset="0"/>
-              </a:rPr>
-              <a:t> </a:t>
-            </a:r>
-            <a:r>
-              <a:rPr lang="ru-RU" sz="2000" dirty="0" err="1">
-                <a:latin typeface="Times New Roman" panose="02020603050405020304" pitchFamily="18" charset="0"/>
-                <a:cs typeface="Times New Roman" panose="02020603050405020304" pitchFamily="18" charset="0"/>
-              </a:rPr>
-              <a:t>елементи</a:t>
-            </a:r>
-            <a:r>
-              <a:rPr lang="ru-RU" sz="2000" dirty="0">
-                <a:latin typeface="Times New Roman" panose="02020603050405020304" pitchFamily="18" charset="0"/>
-                <a:cs typeface="Times New Roman" panose="02020603050405020304" pitchFamily="18" charset="0"/>
-              </a:rPr>
-              <a:t> </a:t>
-            </a:r>
-            <a:r>
-              <a:rPr lang="ru-RU" sz="2000" dirty="0" err="1">
-                <a:latin typeface="Times New Roman" panose="02020603050405020304" pitchFamily="18" charset="0"/>
-                <a:cs typeface="Times New Roman" panose="02020603050405020304" pitchFamily="18" charset="0"/>
-              </a:rPr>
-              <a:t>інтерфейсу</a:t>
-            </a:r>
-            <a:r>
-              <a:rPr lang="ru-RU" sz="2000" dirty="0">
-                <a:latin typeface="Times New Roman" panose="02020603050405020304" pitchFamily="18" charset="0"/>
-                <a:cs typeface="Times New Roman" panose="02020603050405020304" pitchFamily="18" charset="0"/>
-              </a:rPr>
-              <a:t>:</a:t>
-            </a:r>
-          </a:p>
-          <a:p>
-            <a:pPr marL="342900" indent="-342900">
-              <a:buFont typeface="Arial" panose="020B0604020202020204" pitchFamily="34" charset="0"/>
-              <a:buChar char="•"/>
-            </a:pPr>
-            <a:r>
-              <a:rPr lang="ru-RU" sz="2000" dirty="0">
-                <a:latin typeface="Times New Roman" panose="02020603050405020304" pitchFamily="18" charset="0"/>
-                <a:cs typeface="Times New Roman" panose="02020603050405020304" pitchFamily="18" charset="0"/>
-              </a:rPr>
-              <a:t>Лого</a:t>
-            </a:r>
-          </a:p>
-          <a:p>
-            <a:pPr marL="342900" indent="-342900">
-              <a:buFont typeface="Arial" panose="020B0604020202020204" pitchFamily="34" charset="0"/>
-              <a:buChar char="•"/>
-            </a:pPr>
-            <a:r>
-              <a:rPr lang="ru-RU" sz="2000" dirty="0">
-                <a:latin typeface="Times New Roman" panose="02020603050405020304" pitchFamily="18" charset="0"/>
-                <a:cs typeface="Times New Roman" panose="02020603050405020304" pitchFamily="18" charset="0"/>
-              </a:rPr>
-              <a:t>Головна</a:t>
-            </a:r>
-          </a:p>
-          <a:p>
-            <a:pPr marL="342900" indent="-342900">
-              <a:buFont typeface="Arial" panose="020B0604020202020204" pitchFamily="34" charset="0"/>
-              <a:buChar char="•"/>
-            </a:pPr>
-            <a:r>
-              <a:rPr lang="ru-RU" sz="2000" dirty="0" err="1">
-                <a:latin typeface="Times New Roman" panose="02020603050405020304" pitchFamily="18" charset="0"/>
-                <a:cs typeface="Times New Roman" panose="02020603050405020304" pitchFamily="18" charset="0"/>
-              </a:rPr>
-              <a:t>Кабінет</a:t>
-            </a:r>
-            <a:endParaRPr lang="ru-RU" sz="2000" dirty="0">
-              <a:latin typeface="Times New Roman" panose="02020603050405020304" pitchFamily="18" charset="0"/>
-              <a:cs typeface="Times New Roman" panose="02020603050405020304" pitchFamily="18" charset="0"/>
-            </a:endParaRPr>
-          </a:p>
-          <a:p>
-            <a:pPr marL="342900" indent="-342900">
-              <a:buFont typeface="Arial" panose="020B0604020202020204" pitchFamily="34" charset="0"/>
-              <a:buChar char="•"/>
-            </a:pPr>
-            <a:r>
-              <a:rPr lang="ru-RU" sz="2000" dirty="0">
-                <a:latin typeface="Times New Roman" panose="02020603050405020304" pitchFamily="18" charset="0"/>
-                <a:cs typeface="Times New Roman" panose="02020603050405020304" pitchFamily="18" charset="0"/>
-              </a:rPr>
-              <a:t>АІ -</a:t>
-            </a:r>
-            <a:r>
-              <a:rPr lang="ru-RU" sz="2000" dirty="0" err="1">
-                <a:latin typeface="Times New Roman" panose="02020603050405020304" pitchFamily="18" charset="0"/>
-                <a:cs typeface="Times New Roman" panose="02020603050405020304" pitchFamily="18" charset="0"/>
-              </a:rPr>
-              <a:t>аналіз</a:t>
-            </a:r>
-            <a:endParaRPr lang="ru-RU" sz="2000" dirty="0">
-              <a:latin typeface="Times New Roman" panose="02020603050405020304" pitchFamily="18" charset="0"/>
-              <a:cs typeface="Times New Roman" panose="02020603050405020304" pitchFamily="18" charset="0"/>
-            </a:endParaRPr>
-          </a:p>
-          <a:p>
-            <a:pPr marL="342900" indent="-342900">
-              <a:buFont typeface="Arial" panose="020B0604020202020204" pitchFamily="34" charset="0"/>
-              <a:buChar char="•"/>
-            </a:pPr>
-            <a:r>
-              <a:rPr lang="ru-RU" sz="2000" dirty="0" err="1">
-                <a:latin typeface="Times New Roman" panose="02020603050405020304" pitchFamily="18" charset="0"/>
-                <a:cs typeface="Times New Roman" panose="02020603050405020304" pitchFamily="18" charset="0"/>
-              </a:rPr>
-              <a:t>Плани</a:t>
-            </a:r>
-            <a:endParaRPr lang="ru-RU" sz="2000" dirty="0">
-              <a:latin typeface="Times New Roman" panose="02020603050405020304" pitchFamily="18" charset="0"/>
-              <a:cs typeface="Times New Roman" panose="02020603050405020304" pitchFamily="18" charset="0"/>
-            </a:endParaRPr>
-          </a:p>
-          <a:p>
-            <a:pPr marL="342900" indent="-342900">
-              <a:buFont typeface="Arial" panose="020B0604020202020204" pitchFamily="34" charset="0"/>
-              <a:buChar char="•"/>
-            </a:pPr>
-            <a:r>
-              <a:rPr lang="ru-RU" sz="2000" dirty="0" err="1">
-                <a:latin typeface="Times New Roman" panose="02020603050405020304" pitchFamily="18" charset="0"/>
-                <a:cs typeface="Times New Roman" panose="02020603050405020304" pitchFamily="18" charset="0"/>
-              </a:rPr>
-              <a:t>Прогрес</a:t>
-            </a:r>
-            <a:endParaRPr lang="ru-RU" sz="2000" dirty="0">
+              <a:t>)</a:t>
+            </a:r>
+            <a:endParaRPr lang="ru-RU" sz="4000" dirty="0">
               <a:latin typeface="Times New Roman" panose="02020603050405020304" pitchFamily="18" charset="0"/>
               <a:cs typeface="Times New Roman" panose="02020603050405020304" pitchFamily="18" charset="0"/>
             </a:endParaRPr>
@@ -18159,10 +20117,10 @@
       </p:sp>
       <p:pic>
         <p:nvPicPr>
-          <p:cNvPr id="3" name="Рисунок 2">
+          <p:cNvPr id="2" name="Рисунок 1">
             <a:extLst>
               <a:ext uri="{FF2B5EF4-FFF2-40B4-BE49-F238E27FC236}">
-                <a16:creationId xmlns:a16="http://schemas.microsoft.com/office/drawing/2014/main" id="{13FB9F27-E3F3-9857-4A9B-EF7372BB5C1F}"/>
+                <a16:creationId xmlns:a16="http://schemas.microsoft.com/office/drawing/2014/main" id="{DC717A1A-10E7-38A6-1963-06A1D9950193}"/>
               </a:ext>
             </a:extLst>
           </p:cNvPr>
@@ -18179,18 +20137,674 @@
         </p:blipFill>
         <p:spPr>
           <a:xfrm>
-            <a:off x="7185320" y="4514455"/>
-            <a:ext cx="3925229" cy="1993368"/>
+            <a:off x="201880" y="656568"/>
+            <a:ext cx="7742712" cy="5544863"/>
           </a:xfrm>
           <a:prstGeom prst="rect">
             <a:avLst/>
           </a:prstGeom>
         </p:spPr>
       </p:pic>
+      <p:sp>
+        <p:nvSpPr>
+          <p:cNvPr id="3" name="TextBox 2">
+            <a:extLst>
+              <a:ext uri="{FF2B5EF4-FFF2-40B4-BE49-F238E27FC236}">
+                <a16:creationId xmlns:a16="http://schemas.microsoft.com/office/drawing/2014/main" id="{0930A304-8030-C7A0-DAE3-10D41D1DE8D7}"/>
+              </a:ext>
+            </a:extLst>
+          </p:cNvPr>
+          <p:cNvSpPr txBox="1"/>
+          <p:nvPr/>
+        </p:nvSpPr>
+        <p:spPr>
+          <a:xfrm>
+            <a:off x="7944592" y="656568"/>
+            <a:ext cx="4045528" cy="5078313"/>
+          </a:xfrm>
+          <a:prstGeom prst="rect">
+            <a:avLst/>
+          </a:prstGeom>
+          <a:noFill/>
+        </p:spPr>
+        <p:txBody>
+          <a:bodyPr wrap="square" rtlCol="0">
+            <a:spAutoFit/>
+          </a:bodyPr>
+          <a:lstStyle/>
+          <a:p>
+            <a:r>
+              <a:rPr lang="ru-RU" dirty="0">
+                <a:latin typeface="Times New Roman" panose="02020603050405020304" pitchFamily="18" charset="0"/>
+                <a:cs typeface="Times New Roman" panose="02020603050405020304" pitchFamily="18" charset="0"/>
+              </a:rPr>
+              <a:t>	База </a:t>
+            </a:r>
+            <a:r>
+              <a:rPr lang="ru-RU" dirty="0" err="1">
+                <a:latin typeface="Times New Roman" panose="02020603050405020304" pitchFamily="18" charset="0"/>
+                <a:cs typeface="Times New Roman" panose="02020603050405020304" pitchFamily="18" charset="0"/>
+              </a:rPr>
+              <a:t>даних</a:t>
+            </a:r>
+            <a:r>
+              <a:rPr lang="ru-RU" dirty="0">
+                <a:latin typeface="Times New Roman" panose="02020603050405020304" pitchFamily="18" charset="0"/>
+                <a:cs typeface="Times New Roman" panose="02020603050405020304" pitchFamily="18" charset="0"/>
+              </a:rPr>
+              <a:t> </a:t>
+            </a:r>
+            <a:r>
+              <a:rPr lang="ru-RU" dirty="0" err="1">
+                <a:latin typeface="Times New Roman" panose="02020603050405020304" pitchFamily="18" charset="0"/>
+                <a:cs typeface="Times New Roman" panose="02020603050405020304" pitchFamily="18" charset="0"/>
+              </a:rPr>
+              <a:t>реалізована</a:t>
+            </a:r>
+            <a:r>
+              <a:rPr lang="ru-RU" dirty="0">
+                <a:latin typeface="Times New Roman" panose="02020603050405020304" pitchFamily="18" charset="0"/>
+                <a:cs typeface="Times New Roman" panose="02020603050405020304" pitchFamily="18" charset="0"/>
+              </a:rPr>
+              <a:t> на </a:t>
+            </a:r>
+            <a:r>
+              <a:rPr lang="ru-RU" dirty="0" err="1">
+                <a:latin typeface="Times New Roman" panose="02020603050405020304" pitchFamily="18" charset="0"/>
+                <a:cs typeface="Times New Roman" panose="02020603050405020304" pitchFamily="18" charset="0"/>
+              </a:rPr>
+              <a:t>SQLite</a:t>
+            </a:r>
+            <a:r>
+              <a:rPr lang="ru-RU" dirty="0">
+                <a:latin typeface="Times New Roman" panose="02020603050405020304" pitchFamily="18" charset="0"/>
+                <a:cs typeface="Times New Roman" panose="02020603050405020304" pitchFamily="18" charset="0"/>
+              </a:rPr>
+              <a:t> через </a:t>
+            </a:r>
+            <a:r>
+              <a:rPr lang="ru-RU" dirty="0" err="1">
+                <a:latin typeface="Times New Roman" panose="02020603050405020304" pitchFamily="18" charset="0"/>
+                <a:cs typeface="Times New Roman" panose="02020603050405020304" pitchFamily="18" charset="0"/>
+              </a:rPr>
+              <a:t>SQLAlchemy</a:t>
+            </a:r>
+            <a:r>
+              <a:rPr lang="ru-RU" dirty="0">
+                <a:latin typeface="Times New Roman" panose="02020603050405020304" pitchFamily="18" charset="0"/>
+                <a:cs typeface="Times New Roman" panose="02020603050405020304" pitchFamily="18" charset="0"/>
+              </a:rPr>
+              <a:t> ORM та </a:t>
+            </a:r>
+            <a:r>
+              <a:rPr lang="ru-RU" dirty="0" err="1">
+                <a:latin typeface="Times New Roman" panose="02020603050405020304" pitchFamily="18" charset="0"/>
+                <a:cs typeface="Times New Roman" panose="02020603050405020304" pitchFamily="18" charset="0"/>
+              </a:rPr>
+              <a:t>включає</a:t>
+            </a:r>
+            <a:r>
+              <a:rPr lang="ru-RU" dirty="0">
+                <a:latin typeface="Times New Roman" panose="02020603050405020304" pitchFamily="18" charset="0"/>
+                <a:cs typeface="Times New Roman" panose="02020603050405020304" pitchFamily="18" charset="0"/>
+              </a:rPr>
+              <a:t> </a:t>
+            </a:r>
+            <a:r>
+              <a:rPr lang="ru-RU" dirty="0" err="1">
+                <a:latin typeface="Times New Roman" panose="02020603050405020304" pitchFamily="18" charset="0"/>
+                <a:cs typeface="Times New Roman" panose="02020603050405020304" pitchFamily="18" charset="0"/>
+              </a:rPr>
+              <a:t>сім</a:t>
+            </a:r>
+            <a:r>
+              <a:rPr lang="ru-RU" dirty="0">
+                <a:latin typeface="Times New Roman" panose="02020603050405020304" pitchFamily="18" charset="0"/>
+                <a:cs typeface="Times New Roman" panose="02020603050405020304" pitchFamily="18" charset="0"/>
+              </a:rPr>
+              <a:t> </a:t>
+            </a:r>
+            <a:r>
+              <a:rPr lang="ru-RU" dirty="0" err="1">
+                <a:latin typeface="Times New Roman" panose="02020603050405020304" pitchFamily="18" charset="0"/>
+                <a:cs typeface="Times New Roman" panose="02020603050405020304" pitchFamily="18" charset="0"/>
+              </a:rPr>
+              <a:t>основних</a:t>
+            </a:r>
+            <a:r>
+              <a:rPr lang="ru-RU" dirty="0">
+                <a:latin typeface="Times New Roman" panose="02020603050405020304" pitchFamily="18" charset="0"/>
+                <a:cs typeface="Times New Roman" panose="02020603050405020304" pitchFamily="18" charset="0"/>
+              </a:rPr>
+              <a:t> </a:t>
+            </a:r>
+            <a:r>
+              <a:rPr lang="ru-RU" dirty="0" err="1">
+                <a:latin typeface="Times New Roman" panose="02020603050405020304" pitchFamily="18" charset="0"/>
+                <a:cs typeface="Times New Roman" panose="02020603050405020304" pitchFamily="18" charset="0"/>
+              </a:rPr>
+              <a:t>таблиць</a:t>
+            </a:r>
+            <a:r>
+              <a:rPr lang="ru-RU" dirty="0">
+                <a:latin typeface="Times New Roman" panose="02020603050405020304" pitchFamily="18" charset="0"/>
+                <a:cs typeface="Times New Roman" panose="02020603050405020304" pitchFamily="18" charset="0"/>
+              </a:rPr>
+              <a:t>.</a:t>
+            </a:r>
+          </a:p>
+          <a:p>
+            <a:r>
+              <a:rPr lang="ru-RU" dirty="0" err="1">
+                <a:latin typeface="Times New Roman" panose="02020603050405020304" pitchFamily="18" charset="0"/>
+                <a:cs typeface="Times New Roman" panose="02020603050405020304" pitchFamily="18" charset="0"/>
+              </a:rPr>
+              <a:t>Таблиці</a:t>
+            </a:r>
+            <a:r>
+              <a:rPr lang="ru-RU" dirty="0">
+                <a:latin typeface="Times New Roman" panose="02020603050405020304" pitchFamily="18" charset="0"/>
+                <a:cs typeface="Times New Roman" panose="02020603050405020304" pitchFamily="18" charset="0"/>
+              </a:rPr>
+              <a:t>:</a:t>
+            </a:r>
+          </a:p>
+          <a:p>
+            <a:r>
+              <a:rPr lang="ru-RU" dirty="0">
+                <a:latin typeface="Times New Roman" panose="02020603050405020304" pitchFamily="18" charset="0"/>
+                <a:cs typeface="Times New Roman" panose="02020603050405020304" pitchFamily="18" charset="0"/>
+              </a:rPr>
+              <a:t>	</a:t>
+            </a:r>
+            <a:r>
+              <a:rPr lang="ru-RU" dirty="0" err="1">
+                <a:latin typeface="Times New Roman" panose="02020603050405020304" pitchFamily="18" charset="0"/>
+                <a:cs typeface="Times New Roman" panose="02020603050405020304" pitchFamily="18" charset="0"/>
+              </a:rPr>
+              <a:t>users</a:t>
+            </a:r>
+            <a:r>
+              <a:rPr lang="ru-RU" dirty="0">
+                <a:latin typeface="Times New Roman" panose="02020603050405020304" pitchFamily="18" charset="0"/>
+                <a:cs typeface="Times New Roman" panose="02020603050405020304" pitchFamily="18" charset="0"/>
+              </a:rPr>
+              <a:t> – </a:t>
+            </a:r>
+            <a:r>
+              <a:rPr lang="ru-RU" dirty="0" err="1">
+                <a:latin typeface="Times New Roman" panose="02020603050405020304" pitchFamily="18" charset="0"/>
+                <a:cs typeface="Times New Roman" panose="02020603050405020304" pitchFamily="18" charset="0"/>
+              </a:rPr>
+              <a:t>зберігає</a:t>
+            </a:r>
+            <a:r>
+              <a:rPr lang="ru-RU" dirty="0">
+                <a:latin typeface="Times New Roman" panose="02020603050405020304" pitchFamily="18" charset="0"/>
+                <a:cs typeface="Times New Roman" panose="02020603050405020304" pitchFamily="18" charset="0"/>
+              </a:rPr>
+              <a:t> </a:t>
+            </a:r>
+            <a:r>
+              <a:rPr lang="ru-RU" dirty="0" err="1">
+                <a:latin typeface="Times New Roman" panose="02020603050405020304" pitchFamily="18" charset="0"/>
+                <a:cs typeface="Times New Roman" panose="02020603050405020304" pitchFamily="18" charset="0"/>
+              </a:rPr>
+              <a:t>інформацію</a:t>
+            </a:r>
+            <a:r>
+              <a:rPr lang="ru-RU" dirty="0">
+                <a:latin typeface="Times New Roman" panose="02020603050405020304" pitchFamily="18" charset="0"/>
+                <a:cs typeface="Times New Roman" panose="02020603050405020304" pitchFamily="18" charset="0"/>
+              </a:rPr>
+              <a:t> про </a:t>
+            </a:r>
+            <a:r>
+              <a:rPr lang="ru-RU" dirty="0" err="1">
+                <a:latin typeface="Times New Roman" panose="02020603050405020304" pitchFamily="18" charset="0"/>
+                <a:cs typeface="Times New Roman" panose="02020603050405020304" pitchFamily="18" charset="0"/>
+              </a:rPr>
+              <a:t>користувачів</a:t>
+            </a:r>
+            <a:r>
+              <a:rPr lang="ru-RU" dirty="0">
+                <a:latin typeface="Times New Roman" panose="02020603050405020304" pitchFamily="18" charset="0"/>
+                <a:cs typeface="Times New Roman" panose="02020603050405020304" pitchFamily="18" charset="0"/>
+              </a:rPr>
+              <a:t> </a:t>
+            </a:r>
+            <a:r>
+              <a:rPr lang="ru-RU" dirty="0" err="1">
+                <a:latin typeface="Times New Roman" panose="02020603050405020304" pitchFamily="18" charset="0"/>
+                <a:cs typeface="Times New Roman" panose="02020603050405020304" pitchFamily="18" charset="0"/>
+              </a:rPr>
+              <a:t>системи</a:t>
+            </a:r>
+            <a:r>
+              <a:rPr lang="ru-RU" dirty="0">
+                <a:latin typeface="Times New Roman" panose="02020603050405020304" pitchFamily="18" charset="0"/>
+                <a:cs typeface="Times New Roman" panose="02020603050405020304" pitchFamily="18" charset="0"/>
+              </a:rPr>
+              <a:t>;</a:t>
+            </a:r>
+          </a:p>
+          <a:p>
+            <a:r>
+              <a:rPr lang="ru-RU" dirty="0">
+                <a:latin typeface="Times New Roman" panose="02020603050405020304" pitchFamily="18" charset="0"/>
+                <a:cs typeface="Times New Roman" panose="02020603050405020304" pitchFamily="18" charset="0"/>
+              </a:rPr>
+              <a:t>	</a:t>
+            </a:r>
+            <a:r>
+              <a:rPr lang="ru-RU" dirty="0" err="1">
+                <a:latin typeface="Times New Roman" panose="02020603050405020304" pitchFamily="18" charset="0"/>
+                <a:cs typeface="Times New Roman" panose="02020603050405020304" pitchFamily="18" charset="0"/>
+              </a:rPr>
+              <a:t>photos</a:t>
+            </a:r>
+            <a:r>
+              <a:rPr lang="ru-RU" dirty="0">
+                <a:latin typeface="Times New Roman" panose="02020603050405020304" pitchFamily="18" charset="0"/>
+                <a:cs typeface="Times New Roman" panose="02020603050405020304" pitchFamily="18" charset="0"/>
+              </a:rPr>
+              <a:t> – </a:t>
+            </a:r>
+            <a:r>
+              <a:rPr lang="ru-RU" dirty="0" err="1">
+                <a:latin typeface="Times New Roman" panose="02020603050405020304" pitchFamily="18" charset="0"/>
+                <a:cs typeface="Times New Roman" panose="02020603050405020304" pitchFamily="18" charset="0"/>
+              </a:rPr>
+              <a:t>зберігає</a:t>
+            </a:r>
+            <a:r>
+              <a:rPr lang="ru-RU" dirty="0">
+                <a:latin typeface="Times New Roman" panose="02020603050405020304" pitchFamily="18" charset="0"/>
+                <a:cs typeface="Times New Roman" panose="02020603050405020304" pitchFamily="18" charset="0"/>
+              </a:rPr>
+              <a:t> </a:t>
+            </a:r>
+            <a:r>
+              <a:rPr lang="ru-RU" dirty="0" err="1">
+                <a:latin typeface="Times New Roman" panose="02020603050405020304" pitchFamily="18" charset="0"/>
+                <a:cs typeface="Times New Roman" panose="02020603050405020304" pitchFamily="18" charset="0"/>
+              </a:rPr>
+              <a:t>інформацію</a:t>
+            </a:r>
+            <a:r>
+              <a:rPr lang="ru-RU" dirty="0">
+                <a:latin typeface="Times New Roman" panose="02020603050405020304" pitchFamily="18" charset="0"/>
+                <a:cs typeface="Times New Roman" panose="02020603050405020304" pitchFamily="18" charset="0"/>
+              </a:rPr>
+              <a:t> про </a:t>
+            </a:r>
+            <a:r>
+              <a:rPr lang="ru-RU" dirty="0" err="1">
+                <a:latin typeface="Times New Roman" panose="02020603050405020304" pitchFamily="18" charset="0"/>
+                <a:cs typeface="Times New Roman" panose="02020603050405020304" pitchFamily="18" charset="0"/>
+              </a:rPr>
+              <a:t>завантажені</a:t>
+            </a:r>
+            <a:r>
+              <a:rPr lang="ru-RU" dirty="0">
+                <a:latin typeface="Times New Roman" panose="02020603050405020304" pitchFamily="18" charset="0"/>
+                <a:cs typeface="Times New Roman" panose="02020603050405020304" pitchFamily="18" charset="0"/>
+              </a:rPr>
+              <a:t> </a:t>
+            </a:r>
+            <a:r>
+              <a:rPr lang="ru-RU" dirty="0" err="1">
+                <a:latin typeface="Times New Roman" panose="02020603050405020304" pitchFamily="18" charset="0"/>
+                <a:cs typeface="Times New Roman" panose="02020603050405020304" pitchFamily="18" charset="0"/>
+              </a:rPr>
+              <a:t>фотографії</a:t>
+            </a:r>
+            <a:r>
+              <a:rPr lang="ru-RU" dirty="0">
+                <a:latin typeface="Times New Roman" panose="02020603050405020304" pitchFamily="18" charset="0"/>
+                <a:cs typeface="Times New Roman" panose="02020603050405020304" pitchFamily="18" charset="0"/>
+              </a:rPr>
+              <a:t>;</a:t>
+            </a:r>
+          </a:p>
+          <a:p>
+            <a:r>
+              <a:rPr lang="ru-RU" dirty="0">
+                <a:latin typeface="Times New Roman" panose="02020603050405020304" pitchFamily="18" charset="0"/>
+                <a:cs typeface="Times New Roman" panose="02020603050405020304" pitchFamily="18" charset="0"/>
+              </a:rPr>
+              <a:t>	</a:t>
+            </a:r>
+            <a:r>
+              <a:rPr lang="ru-RU" dirty="0" err="1">
+                <a:latin typeface="Times New Roman" panose="02020603050405020304" pitchFamily="18" charset="0"/>
+                <a:cs typeface="Times New Roman" panose="02020603050405020304" pitchFamily="18" charset="0"/>
+              </a:rPr>
+              <a:t>skin_analysis</a:t>
+            </a:r>
+            <a:r>
+              <a:rPr lang="ru-RU" dirty="0">
+                <a:latin typeface="Times New Roman" panose="02020603050405020304" pitchFamily="18" charset="0"/>
+                <a:cs typeface="Times New Roman" panose="02020603050405020304" pitchFamily="18" charset="0"/>
+              </a:rPr>
+              <a:t> – </a:t>
+            </a:r>
+            <a:r>
+              <a:rPr lang="ru-RU" dirty="0" err="1">
+                <a:latin typeface="Times New Roman" panose="02020603050405020304" pitchFamily="18" charset="0"/>
+                <a:cs typeface="Times New Roman" panose="02020603050405020304" pitchFamily="18" charset="0"/>
+              </a:rPr>
+              <a:t>зберігає</a:t>
+            </a:r>
+            <a:r>
+              <a:rPr lang="ru-RU" dirty="0">
+                <a:latin typeface="Times New Roman" panose="02020603050405020304" pitchFamily="18" charset="0"/>
+                <a:cs typeface="Times New Roman" panose="02020603050405020304" pitchFamily="18" charset="0"/>
+              </a:rPr>
+              <a:t> </a:t>
+            </a:r>
+            <a:r>
+              <a:rPr lang="ru-RU" dirty="0" err="1">
+                <a:latin typeface="Times New Roman" panose="02020603050405020304" pitchFamily="18" charset="0"/>
+                <a:cs typeface="Times New Roman" panose="02020603050405020304" pitchFamily="18" charset="0"/>
+              </a:rPr>
+              <a:t>результати</a:t>
+            </a:r>
+            <a:r>
+              <a:rPr lang="ru-RU" dirty="0">
+                <a:latin typeface="Times New Roman" panose="02020603050405020304" pitchFamily="18" charset="0"/>
+                <a:cs typeface="Times New Roman" panose="02020603050405020304" pitchFamily="18" charset="0"/>
+              </a:rPr>
+              <a:t> AI-</a:t>
+            </a:r>
+            <a:r>
+              <a:rPr lang="ru-RU" dirty="0" err="1">
+                <a:latin typeface="Times New Roman" panose="02020603050405020304" pitchFamily="18" charset="0"/>
+                <a:cs typeface="Times New Roman" panose="02020603050405020304" pitchFamily="18" charset="0"/>
+              </a:rPr>
+              <a:t>аналізу</a:t>
+            </a:r>
+            <a:r>
+              <a:rPr lang="ru-RU" dirty="0">
+                <a:latin typeface="Times New Roman" panose="02020603050405020304" pitchFamily="18" charset="0"/>
+                <a:cs typeface="Times New Roman" panose="02020603050405020304" pitchFamily="18" charset="0"/>
+              </a:rPr>
+              <a:t>;</a:t>
+            </a:r>
+          </a:p>
+          <a:p>
+            <a:r>
+              <a:rPr lang="ru-RU" dirty="0">
+                <a:latin typeface="Times New Roman" panose="02020603050405020304" pitchFamily="18" charset="0"/>
+                <a:cs typeface="Times New Roman" panose="02020603050405020304" pitchFamily="18" charset="0"/>
+              </a:rPr>
+              <a:t>	</a:t>
+            </a:r>
+            <a:r>
+              <a:rPr lang="ru-RU" dirty="0" err="1">
+                <a:latin typeface="Times New Roman" panose="02020603050405020304" pitchFamily="18" charset="0"/>
+                <a:cs typeface="Times New Roman" panose="02020603050405020304" pitchFamily="18" charset="0"/>
+              </a:rPr>
+              <a:t>routines</a:t>
+            </a:r>
+            <a:r>
+              <a:rPr lang="ru-RU" dirty="0">
+                <a:latin typeface="Times New Roman" panose="02020603050405020304" pitchFamily="18" charset="0"/>
+                <a:cs typeface="Times New Roman" panose="02020603050405020304" pitchFamily="18" charset="0"/>
+              </a:rPr>
+              <a:t> – </a:t>
+            </a:r>
+            <a:r>
+              <a:rPr lang="ru-RU" dirty="0" err="1">
+                <a:latin typeface="Times New Roman" panose="02020603050405020304" pitchFamily="18" charset="0"/>
+                <a:cs typeface="Times New Roman" panose="02020603050405020304" pitchFamily="18" charset="0"/>
+              </a:rPr>
+              <a:t>зберігає</a:t>
+            </a:r>
+            <a:r>
+              <a:rPr lang="ru-RU" dirty="0">
+                <a:latin typeface="Times New Roman" panose="02020603050405020304" pitchFamily="18" charset="0"/>
+                <a:cs typeface="Times New Roman" panose="02020603050405020304" pitchFamily="18" charset="0"/>
+              </a:rPr>
+              <a:t> </a:t>
+            </a:r>
+            <a:r>
+              <a:rPr lang="ru-RU" dirty="0" err="1">
+                <a:latin typeface="Times New Roman" panose="02020603050405020304" pitchFamily="18" charset="0"/>
+                <a:cs typeface="Times New Roman" panose="02020603050405020304" pitchFamily="18" charset="0"/>
+              </a:rPr>
+              <a:t>плани</a:t>
+            </a:r>
+            <a:r>
+              <a:rPr lang="ru-RU" dirty="0">
+                <a:latin typeface="Times New Roman" panose="02020603050405020304" pitchFamily="18" charset="0"/>
+                <a:cs typeface="Times New Roman" panose="02020603050405020304" pitchFamily="18" charset="0"/>
+              </a:rPr>
+              <a:t> догляду</a:t>
+            </a:r>
+          </a:p>
+          <a:p>
+            <a:r>
+              <a:rPr lang="ru-RU" dirty="0" err="1">
+                <a:latin typeface="Times New Roman" panose="02020603050405020304" pitchFamily="18" charset="0"/>
+                <a:cs typeface="Times New Roman" panose="02020603050405020304" pitchFamily="18" charset="0"/>
+              </a:rPr>
+              <a:t>procedures</a:t>
+            </a:r>
+            <a:r>
+              <a:rPr lang="ru-RU" dirty="0">
+                <a:latin typeface="Times New Roman" panose="02020603050405020304" pitchFamily="18" charset="0"/>
+                <a:cs typeface="Times New Roman" panose="02020603050405020304" pitchFamily="18" charset="0"/>
+              </a:rPr>
+              <a:t> – </a:t>
+            </a:r>
+            <a:r>
+              <a:rPr lang="ru-RU" dirty="0" err="1">
+                <a:latin typeface="Times New Roman" panose="02020603050405020304" pitchFamily="18" charset="0"/>
+                <a:cs typeface="Times New Roman" panose="02020603050405020304" pitchFamily="18" charset="0"/>
+              </a:rPr>
+              <a:t>це</a:t>
+            </a:r>
+            <a:r>
+              <a:rPr lang="ru-RU" dirty="0">
+                <a:latin typeface="Times New Roman" panose="02020603050405020304" pitchFamily="18" charset="0"/>
+                <a:cs typeface="Times New Roman" panose="02020603050405020304" pitchFamily="18" charset="0"/>
+              </a:rPr>
+              <a:t> </a:t>
+            </a:r>
+            <a:r>
+              <a:rPr lang="ru-RU" dirty="0" err="1">
+                <a:latin typeface="Times New Roman" panose="02020603050405020304" pitchFamily="18" charset="0"/>
+                <a:cs typeface="Times New Roman" panose="02020603050405020304" pitchFamily="18" charset="0"/>
+              </a:rPr>
+              <a:t>довідник</a:t>
+            </a:r>
+            <a:r>
+              <a:rPr lang="ru-RU" dirty="0">
+                <a:latin typeface="Times New Roman" panose="02020603050405020304" pitchFamily="18" charset="0"/>
+                <a:cs typeface="Times New Roman" panose="02020603050405020304" pitchFamily="18" charset="0"/>
+              </a:rPr>
+              <a:t> </a:t>
+            </a:r>
+            <a:r>
+              <a:rPr lang="ru-RU" dirty="0" err="1">
+                <a:latin typeface="Times New Roman" panose="02020603050405020304" pitchFamily="18" charset="0"/>
+                <a:cs typeface="Times New Roman" panose="02020603050405020304" pitchFamily="18" charset="0"/>
+              </a:rPr>
+              <a:t>косметичних</a:t>
+            </a:r>
+            <a:r>
+              <a:rPr lang="ru-RU" dirty="0">
+                <a:latin typeface="Times New Roman" panose="02020603050405020304" pitchFamily="18" charset="0"/>
+                <a:cs typeface="Times New Roman" panose="02020603050405020304" pitchFamily="18" charset="0"/>
+              </a:rPr>
+              <a:t> процедур;</a:t>
+            </a:r>
+          </a:p>
+          <a:p>
+            <a:r>
+              <a:rPr lang="ru-RU" dirty="0">
+                <a:latin typeface="Times New Roman" panose="02020603050405020304" pitchFamily="18" charset="0"/>
+                <a:cs typeface="Times New Roman" panose="02020603050405020304" pitchFamily="18" charset="0"/>
+              </a:rPr>
+              <a:t>	</a:t>
+            </a:r>
+            <a:r>
+              <a:rPr lang="ru-RU" dirty="0" err="1">
+                <a:latin typeface="Times New Roman" panose="02020603050405020304" pitchFamily="18" charset="0"/>
+                <a:cs typeface="Times New Roman" panose="02020603050405020304" pitchFamily="18" charset="0"/>
+              </a:rPr>
+              <a:t>routine_procedures</a:t>
+            </a:r>
+            <a:r>
+              <a:rPr lang="ru-RU" dirty="0">
+                <a:latin typeface="Times New Roman" panose="02020603050405020304" pitchFamily="18" charset="0"/>
+                <a:cs typeface="Times New Roman" panose="02020603050405020304" pitchFamily="18" charset="0"/>
+              </a:rPr>
+              <a:t> – </a:t>
+            </a:r>
+            <a:r>
+              <a:rPr lang="ru-RU" dirty="0" err="1">
+                <a:latin typeface="Times New Roman" panose="02020603050405020304" pitchFamily="18" charset="0"/>
+                <a:cs typeface="Times New Roman" panose="02020603050405020304" pitchFamily="18" charset="0"/>
+              </a:rPr>
+              <a:t>це</a:t>
+            </a:r>
+            <a:r>
+              <a:rPr lang="ru-RU" dirty="0">
+                <a:latin typeface="Times New Roman" panose="02020603050405020304" pitchFamily="18" charset="0"/>
+                <a:cs typeface="Times New Roman" panose="02020603050405020304" pitchFamily="18" charset="0"/>
+              </a:rPr>
+              <a:t> </a:t>
+            </a:r>
+            <a:r>
+              <a:rPr lang="ru-RU" dirty="0" err="1">
+                <a:latin typeface="Times New Roman" panose="02020603050405020304" pitchFamily="18" charset="0"/>
+                <a:cs typeface="Times New Roman" panose="02020603050405020304" pitchFamily="18" charset="0"/>
+              </a:rPr>
+              <a:t>зв'язувальна</a:t>
+            </a:r>
+            <a:r>
+              <a:rPr lang="ru-RU" dirty="0">
+                <a:latin typeface="Times New Roman" panose="02020603050405020304" pitchFamily="18" charset="0"/>
+                <a:cs typeface="Times New Roman" panose="02020603050405020304" pitchFamily="18" charset="0"/>
+              </a:rPr>
+              <a:t> </a:t>
+            </a:r>
+            <a:r>
+              <a:rPr lang="ru-RU" dirty="0" err="1">
+                <a:latin typeface="Times New Roman" panose="02020603050405020304" pitchFamily="18" charset="0"/>
+                <a:cs typeface="Times New Roman" panose="02020603050405020304" pitchFamily="18" charset="0"/>
+              </a:rPr>
+              <a:t>таблиця</a:t>
+            </a:r>
+            <a:r>
+              <a:rPr lang="ru-RU" dirty="0">
+                <a:latin typeface="Times New Roman" panose="02020603050405020304" pitchFamily="18" charset="0"/>
+                <a:cs typeface="Times New Roman" panose="02020603050405020304" pitchFamily="18" charset="0"/>
+              </a:rPr>
+              <a:t> </a:t>
+            </a:r>
+            <a:r>
+              <a:rPr lang="ru-RU" dirty="0" err="1">
+                <a:latin typeface="Times New Roman" panose="02020603050405020304" pitchFamily="18" charset="0"/>
+                <a:cs typeface="Times New Roman" panose="02020603050405020304" pitchFamily="18" charset="0"/>
+              </a:rPr>
+              <a:t>між</a:t>
+            </a:r>
+            <a:r>
+              <a:rPr lang="ru-RU" dirty="0">
+                <a:latin typeface="Times New Roman" panose="02020603050405020304" pitchFamily="18" charset="0"/>
+                <a:cs typeface="Times New Roman" panose="02020603050405020304" pitchFamily="18" charset="0"/>
+              </a:rPr>
+              <a:t> планами догляду та процедурами;</a:t>
+            </a:r>
+          </a:p>
+          <a:p>
+            <a:r>
+              <a:rPr lang="ru-RU" dirty="0">
+                <a:latin typeface="Times New Roman" panose="02020603050405020304" pitchFamily="18" charset="0"/>
+                <a:cs typeface="Times New Roman" panose="02020603050405020304" pitchFamily="18" charset="0"/>
+              </a:rPr>
+              <a:t>	</a:t>
+            </a:r>
+            <a:r>
+              <a:rPr lang="ru-RU" dirty="0" err="1">
+                <a:latin typeface="Times New Roman" panose="02020603050405020304" pitchFamily="18" charset="0"/>
+                <a:cs typeface="Times New Roman" panose="02020603050405020304" pitchFamily="18" charset="0"/>
+              </a:rPr>
+              <a:t>progress_photos</a:t>
+            </a:r>
+            <a:r>
+              <a:rPr lang="ru-RU" dirty="0">
+                <a:latin typeface="Times New Roman" panose="02020603050405020304" pitchFamily="18" charset="0"/>
+                <a:cs typeface="Times New Roman" panose="02020603050405020304" pitchFamily="18" charset="0"/>
+              </a:rPr>
+              <a:t> – </a:t>
+            </a:r>
+            <a:r>
+              <a:rPr lang="ru-RU" dirty="0" err="1">
+                <a:latin typeface="Times New Roman" panose="02020603050405020304" pitchFamily="18" charset="0"/>
+                <a:cs typeface="Times New Roman" panose="02020603050405020304" pitchFamily="18" charset="0"/>
+              </a:rPr>
+              <a:t>зберігає</a:t>
+            </a:r>
+            <a:r>
+              <a:rPr lang="ru-RU" dirty="0">
+                <a:latin typeface="Times New Roman" panose="02020603050405020304" pitchFamily="18" charset="0"/>
+                <a:cs typeface="Times New Roman" panose="02020603050405020304" pitchFamily="18" charset="0"/>
+              </a:rPr>
+              <a:t> </a:t>
+            </a:r>
+            <a:r>
+              <a:rPr lang="ru-RU" dirty="0" err="1">
+                <a:latin typeface="Times New Roman" panose="02020603050405020304" pitchFamily="18" charset="0"/>
+                <a:cs typeface="Times New Roman" panose="02020603050405020304" pitchFamily="18" charset="0"/>
+              </a:rPr>
+              <a:t>фотографії</a:t>
+            </a:r>
+            <a:r>
+              <a:rPr lang="ru-RU" dirty="0">
+                <a:latin typeface="Times New Roman" panose="02020603050405020304" pitchFamily="18" charset="0"/>
+                <a:cs typeface="Times New Roman" panose="02020603050405020304" pitchFamily="18" charset="0"/>
+              </a:rPr>
+              <a:t> </a:t>
+            </a:r>
+            <a:r>
+              <a:rPr lang="ru-RU" dirty="0" err="1">
+                <a:latin typeface="Times New Roman" panose="02020603050405020304" pitchFamily="18" charset="0"/>
+                <a:cs typeface="Times New Roman" panose="02020603050405020304" pitchFamily="18" charset="0"/>
+              </a:rPr>
+              <a:t>прогресу</a:t>
+            </a:r>
+            <a:r>
+              <a:rPr lang="ru-RU" dirty="0">
+                <a:latin typeface="Times New Roman" panose="02020603050405020304" pitchFamily="18" charset="0"/>
+                <a:cs typeface="Times New Roman" panose="02020603050405020304" pitchFamily="18" charset="0"/>
+              </a:rPr>
+              <a:t> «до» та «</a:t>
+            </a:r>
+            <a:r>
+              <a:rPr lang="ru-RU" dirty="0" err="1">
+                <a:latin typeface="Times New Roman" panose="02020603050405020304" pitchFamily="18" charset="0"/>
+                <a:cs typeface="Times New Roman" panose="02020603050405020304" pitchFamily="18" charset="0"/>
+              </a:rPr>
+              <a:t>після</a:t>
+            </a:r>
+            <a:r>
+              <a:rPr lang="ru-RU" dirty="0">
+                <a:latin typeface="Times New Roman" panose="02020603050405020304" pitchFamily="18" charset="0"/>
+                <a:cs typeface="Times New Roman" panose="02020603050405020304" pitchFamily="18" charset="0"/>
+              </a:rPr>
+              <a:t>»</a:t>
+            </a:r>
+          </a:p>
+        </p:txBody>
+      </p:sp>
     </p:spTree>
     <p:extLst>
       <p:ext uri="{BB962C8B-B14F-4D97-AF65-F5344CB8AC3E}">
-        <p14:creationId xmlns:p14="http://schemas.microsoft.com/office/powerpoint/2010/main" val="3391578935"/>
+        <p14:creationId xmlns:p14="http://schemas.microsoft.com/office/powerpoint/2010/main" val="3319089125"/>
       </p:ext>
     </p:extLst>
   </p:cSld>

--- a/2026_Б_ПІ_ПЗПІ-23-7_Шейко_А_О.pptx
+++ b/2026_Б_ПІ_ПЗПІ-23-7_Шейко_А_О.pptx
@@ -317,7 +317,7 @@
             <a:fld id="{B61BEF0D-F0BB-DE4B-95CE-6DB70DBA9567}" type="datetimeFigureOut">
               <a:rPr lang="en-US" dirty="0"/>
               <a:pPr/>
-              <a:t>6/8/2026</a:t>
+              <a:t>6/10/2026</a:t>
             </a:fld>
             <a:endParaRPr lang="en-US" dirty="0"/>
           </a:p>
@@ -652,7 +652,7 @@
             <a:fld id="{B61BEF0D-F0BB-DE4B-95CE-6DB70DBA9567}" type="datetimeFigureOut">
               <a:rPr lang="en-US" dirty="0"/>
               <a:pPr/>
-              <a:t>6/8/2026</a:t>
+              <a:t>6/10/2026</a:t>
             </a:fld>
             <a:endParaRPr lang="en-US" dirty="0"/>
           </a:p>
@@ -1050,7 +1050,7 @@
             <a:fld id="{B61BEF0D-F0BB-DE4B-95CE-6DB70DBA9567}" type="datetimeFigureOut">
               <a:rPr lang="en-US" dirty="0"/>
               <a:pPr/>
-              <a:t>6/8/2026</a:t>
+              <a:t>6/10/2026</a:t>
             </a:fld>
             <a:endParaRPr lang="en-US" dirty="0"/>
           </a:p>
@@ -1383,7 +1383,7 @@
             <a:fld id="{B61BEF0D-F0BB-DE4B-95CE-6DB70DBA9567}" type="datetimeFigureOut">
               <a:rPr lang="en-US" dirty="0"/>
               <a:pPr/>
-              <a:t>6/8/2026</a:t>
+              <a:t>6/10/2026</a:t>
             </a:fld>
             <a:endParaRPr lang="en-US" dirty="0"/>
           </a:p>
@@ -1700,7 +1700,7 @@
             <a:fld id="{B61BEF0D-F0BB-DE4B-95CE-6DB70DBA9567}" type="datetimeFigureOut">
               <a:rPr lang="en-US" dirty="0"/>
               <a:pPr/>
-              <a:t>6/8/2026</a:t>
+              <a:t>6/10/2026</a:t>
             </a:fld>
             <a:endParaRPr lang="en-US" dirty="0"/>
           </a:p>
@@ -2093,7 +2093,7 @@
             <a:fld id="{B61BEF0D-F0BB-DE4B-95CE-6DB70DBA9567}" type="datetimeFigureOut">
               <a:rPr lang="en-US" dirty="0"/>
               <a:pPr/>
-              <a:t>6/8/2026</a:t>
+              <a:t>6/10/2026</a:t>
             </a:fld>
             <a:endParaRPr lang="en-US" dirty="0"/>
           </a:p>
@@ -2347,7 +2347,7 @@
             <a:fld id="{B61BEF0D-F0BB-DE4B-95CE-6DB70DBA9567}" type="datetimeFigureOut">
               <a:rPr lang="en-US" dirty="0"/>
               <a:pPr/>
-              <a:t>6/8/2026</a:t>
+              <a:t>6/10/2026</a:t>
             </a:fld>
             <a:endParaRPr lang="en-US" dirty="0"/>
           </a:p>
@@ -2606,7 +2606,7 @@
             <a:fld id="{B61BEF0D-F0BB-DE4B-95CE-6DB70DBA9567}" type="datetimeFigureOut">
               <a:rPr lang="en-US" dirty="0"/>
               <a:pPr/>
-              <a:t>6/8/2026</a:t>
+              <a:t>6/10/2026</a:t>
             </a:fld>
             <a:endParaRPr lang="en-US" dirty="0"/>
           </a:p>
@@ -2865,7 +2865,7 @@
             <a:fld id="{B61BEF0D-F0BB-DE4B-95CE-6DB70DBA9567}" type="datetimeFigureOut">
               <a:rPr lang="en-US" dirty="0"/>
               <a:pPr/>
-              <a:t>6/8/2026</a:t>
+              <a:t>6/10/2026</a:t>
             </a:fld>
             <a:endParaRPr lang="en-US" dirty="0"/>
           </a:p>
@@ -3191,7 +3191,7 @@
             <a:fld id="{B61BEF0D-F0BB-DE4B-95CE-6DB70DBA9567}" type="datetimeFigureOut">
               <a:rPr lang="en-US" dirty="0"/>
               <a:pPr/>
-              <a:t>6/8/2026</a:t>
+              <a:t>6/10/2026</a:t>
             </a:fld>
             <a:endParaRPr lang="en-US" dirty="0"/>
           </a:p>
@@ -3511,7 +3511,7 @@
             <a:fld id="{B61BEF0D-F0BB-DE4B-95CE-6DB70DBA9567}" type="datetimeFigureOut">
               <a:rPr lang="en-US" dirty="0"/>
               <a:pPr/>
-              <a:t>6/8/2026</a:t>
+              <a:t>6/10/2026</a:t>
             </a:fld>
             <a:endParaRPr lang="en-US" dirty="0"/>
           </a:p>
@@ -3965,7 +3965,7 @@
             <a:fld id="{B61BEF0D-F0BB-DE4B-95CE-6DB70DBA9567}" type="datetimeFigureOut">
               <a:rPr lang="en-US" dirty="0"/>
               <a:pPr/>
-              <a:t>6/8/2026</a:t>
+              <a:t>6/10/2026</a:t>
             </a:fld>
             <a:endParaRPr lang="en-US" dirty="0"/>
           </a:p>
@@ -4167,7 +4167,7 @@
             <a:fld id="{B61BEF0D-F0BB-DE4B-95CE-6DB70DBA9567}" type="datetimeFigureOut">
               <a:rPr lang="en-US" dirty="0"/>
               <a:pPr/>
-              <a:t>6/8/2026</a:t>
+              <a:t>6/10/2026</a:t>
             </a:fld>
             <a:endParaRPr lang="en-US" dirty="0"/>
           </a:p>
@@ -4341,7 +4341,7 @@
             <a:fld id="{B61BEF0D-F0BB-DE4B-95CE-6DB70DBA9567}" type="datetimeFigureOut">
               <a:rPr lang="en-US" dirty="0"/>
               <a:pPr/>
-              <a:t>6/8/2026</a:t>
+              <a:t>6/10/2026</a:t>
             </a:fld>
             <a:endParaRPr lang="en-US" dirty="0"/>
           </a:p>
@@ -4671,7 +4671,7 @@
             <a:fld id="{B61BEF0D-F0BB-DE4B-95CE-6DB70DBA9567}" type="datetimeFigureOut">
               <a:rPr lang="en-US" dirty="0"/>
               <a:pPr/>
-              <a:t>6/8/2026</a:t>
+              <a:t>6/10/2026</a:t>
             </a:fld>
             <a:endParaRPr lang="en-US" dirty="0"/>
           </a:p>
@@ -5013,7 +5013,7 @@
             <a:fld id="{B61BEF0D-F0BB-DE4B-95CE-6DB70DBA9567}" type="datetimeFigureOut">
               <a:rPr lang="en-US" dirty="0"/>
               <a:pPr/>
-              <a:t>6/8/2026</a:t>
+              <a:t>6/10/2026</a:t>
             </a:fld>
             <a:endParaRPr lang="en-US" dirty="0"/>
           </a:p>
@@ -7127,7 +7127,7 @@
             <a:fld id="{B61BEF0D-F0BB-DE4B-95CE-6DB70DBA9567}" type="datetimeFigureOut">
               <a:rPr lang="en-US" dirty="0"/>
               <a:pPr/>
-              <a:t>6/8/2026</a:t>
+              <a:t>6/10/2026</a:t>
             </a:fld>
             <a:endParaRPr lang="en-US" dirty="0"/>
           </a:p>
@@ -7656,7 +7656,7 @@
         <p:spPr>
           <a:xfrm>
             <a:off x="3916139" y="1193325"/>
-            <a:ext cx="4372837" cy="1138773"/>
+            <a:ext cx="4372837" cy="1446550"/>
           </a:xfrm>
           <a:prstGeom prst="rect">
             <a:avLst/>
@@ -7693,29 +7693,13 @@
             </a:r>
           </a:p>
           <a:p>
+            <a:pPr algn="ctr"/>
             <a:r>
               <a:rPr lang="uk-UA" sz="2000" dirty="0">
                 <a:latin typeface="Times New Roman" panose="02020603050405020304" pitchFamily="18" charset="0"/>
                 <a:cs typeface="Times New Roman" panose="02020603050405020304" pitchFamily="18" charset="0"/>
               </a:rPr>
-              <a:t>Програмна система для автоматизації </a:t>
-            </a:r>
-          </a:p>
-          <a:p>
-            <a:pPr algn="ctr"/>
-            <a:r>
-              <a:rPr lang="uk-UA" sz="2000" dirty="0">
-                <a:latin typeface="Times New Roman" panose="02020603050405020304" pitchFamily="18" charset="0"/>
-                <a:cs typeface="Times New Roman" panose="02020603050405020304" pitchFamily="18" charset="0"/>
-              </a:rPr>
-              <a:t>роботи салонів краси</a:t>
-            </a:r>
-            <a:r>
-              <a:rPr lang="ru-RU" sz="2000" dirty="0">
-                <a:latin typeface="Times New Roman" panose="02020603050405020304" pitchFamily="18" charset="0"/>
-                <a:cs typeface="Times New Roman" panose="02020603050405020304" pitchFamily="18" charset="0"/>
-              </a:rPr>
-              <a:t> </a:t>
+              <a:t>Програмна система для автоматизації роботи салонів краси. Модуль AI -аналізу зовнішності</a:t>
             </a:r>
           </a:p>
         </p:txBody>
@@ -7735,7 +7719,7 @@
         <p:spPr>
           <a:xfrm>
             <a:off x="3368988" y="4525903"/>
-            <a:ext cx="5467138" cy="1323439"/>
+            <a:ext cx="5469767" cy="1015663"/>
           </a:xfrm>
           <a:prstGeom prst="rect">
             <a:avLst/>
@@ -7796,47 +7780,6 @@
                 <a:cs typeface="Times New Roman" panose="02020603050405020304" pitchFamily="18" charset="0"/>
               </a:rPr>
               <a:t>Олександрович</a:t>
-            </a:r>
-            <a:endParaRPr lang="ru-RU" sz="2000" dirty="0">
-              <a:latin typeface="Times New Roman" panose="02020603050405020304" pitchFamily="18" charset="0"/>
-              <a:cs typeface="Times New Roman" panose="02020603050405020304" pitchFamily="18" charset="0"/>
-            </a:endParaRPr>
-          </a:p>
-          <a:p>
-            <a:r>
-              <a:rPr lang="ru-RU" sz="2000" dirty="0" err="1">
-                <a:latin typeface="Times New Roman" panose="02020603050405020304" pitchFamily="18" charset="0"/>
-                <a:cs typeface="Times New Roman" panose="02020603050405020304" pitchFamily="18" charset="0"/>
-              </a:rPr>
-              <a:t>Ст.гр</a:t>
-            </a:r>
-            <a:r>
-              <a:rPr lang="ru-RU" sz="2000" dirty="0">
-                <a:latin typeface="Times New Roman" panose="02020603050405020304" pitchFamily="18" charset="0"/>
-                <a:cs typeface="Times New Roman" panose="02020603050405020304" pitchFamily="18" charset="0"/>
-              </a:rPr>
-              <a:t> ПЗПІ-23-7 Якубович </a:t>
-            </a:r>
-            <a:r>
-              <a:rPr lang="ru-RU" sz="2000" dirty="0" err="1">
-                <a:latin typeface="Times New Roman" panose="02020603050405020304" pitchFamily="18" charset="0"/>
-                <a:cs typeface="Times New Roman" panose="02020603050405020304" pitchFamily="18" charset="0"/>
-              </a:rPr>
-              <a:t>Кирило</a:t>
-            </a:r>
-            <a:r>
-              <a:rPr lang="ru-RU" sz="2000" dirty="0">
-                <a:latin typeface="Times New Roman" panose="02020603050405020304" pitchFamily="18" charset="0"/>
-                <a:cs typeface="Times New Roman" panose="02020603050405020304" pitchFamily="18" charset="0"/>
-              </a:rPr>
-              <a:t> </a:t>
-            </a:r>
-            <a:r>
-              <a:rPr lang="ru-RU" sz="2000" dirty="0" err="1">
-                <a:latin typeface="Times New Roman" panose="02020603050405020304" pitchFamily="18" charset="0"/>
-                <a:cs typeface="Times New Roman" panose="02020603050405020304" pitchFamily="18" charset="0"/>
-              </a:rPr>
-              <a:t>Олексійович</a:t>
             </a:r>
             <a:endParaRPr lang="ru-RU" sz="2000" dirty="0">
               <a:latin typeface="Times New Roman" panose="02020603050405020304" pitchFamily="18" charset="0"/>
@@ -11284,7 +11227,7 @@
         </p:nvSpPr>
         <p:spPr>
           <a:xfrm>
-            <a:off x="1093094" y="617479"/>
+            <a:off x="1349488" y="617479"/>
             <a:ext cx="2386941" cy="400110"/>
           </a:xfrm>
           <a:prstGeom prst="rect">
@@ -11326,7 +11269,7 @@
         </p:nvSpPr>
         <p:spPr>
           <a:xfrm>
-            <a:off x="8441665" y="705643"/>
+            <a:off x="8010068" y="1429848"/>
             <a:ext cx="3362698" cy="400110"/>
           </a:xfrm>
           <a:prstGeom prst="rect">
@@ -11368,7 +11311,7 @@
         </p:nvSpPr>
         <p:spPr>
           <a:xfrm>
-            <a:off x="669360" y="3167815"/>
+            <a:off x="991759" y="3553002"/>
             <a:ext cx="3408221" cy="400110"/>
           </a:xfrm>
           <a:prstGeom prst="rect">
@@ -11388,48 +11331,6 @@
                 <a:cs typeface="Times New Roman" panose="02020603050405020304" pitchFamily="18" charset="0"/>
               </a:rPr>
               <a:t>Сторінка «Мій кабінет»</a:t>
-            </a:r>
-            <a:endParaRPr lang="ru-RU" sz="2000" dirty="0">
-              <a:latin typeface="Times New Roman" panose="02020603050405020304" pitchFamily="18" charset="0"/>
-              <a:cs typeface="Times New Roman" panose="02020603050405020304" pitchFamily="18" charset="0"/>
-            </a:endParaRPr>
-          </a:p>
-        </p:txBody>
-      </p:sp>
-      <p:sp>
-        <p:nvSpPr>
-          <p:cNvPr id="11" name="TextBox 10">
-            <a:extLst>
-              <a:ext uri="{FF2B5EF4-FFF2-40B4-BE49-F238E27FC236}">
-                <a16:creationId xmlns:a16="http://schemas.microsoft.com/office/drawing/2014/main" id="{F4D33054-0325-26D2-D0B2-A904C69B5F1E}"/>
-              </a:ext>
-            </a:extLst>
-          </p:cNvPr>
-          <p:cNvSpPr txBox="1"/>
-          <p:nvPr/>
-        </p:nvSpPr>
-        <p:spPr>
-          <a:xfrm>
-            <a:off x="8617309" y="3600018"/>
-            <a:ext cx="2386941" cy="400110"/>
-          </a:xfrm>
-          <a:prstGeom prst="rect">
-            <a:avLst/>
-          </a:prstGeom>
-          <a:noFill/>
-        </p:spPr>
-        <p:txBody>
-          <a:bodyPr wrap="square" rtlCol="0">
-            <a:spAutoFit/>
-          </a:bodyPr>
-          <a:lstStyle/>
-          <a:p>
-            <a:r>
-              <a:rPr lang="uk-UA" sz="2000" dirty="0">
-                <a:latin typeface="Times New Roman" panose="02020603050405020304" pitchFamily="18" charset="0"/>
-                <a:cs typeface="Times New Roman" panose="02020603050405020304" pitchFamily="18" charset="0"/>
-              </a:rPr>
-              <a:t>Плани догляду</a:t>
             </a:r>
             <a:endParaRPr lang="ru-RU" sz="2000" dirty="0">
               <a:latin typeface="Times New Roman" panose="02020603050405020304" pitchFamily="18" charset="0"/>
@@ -11460,8 +11361,8 @@
         </p:blipFill>
         <p:spPr>
           <a:xfrm>
-            <a:off x="204392" y="1017589"/>
-            <a:ext cx="4051481" cy="2087355"/>
+            <a:off x="383740" y="1094068"/>
+            <a:ext cx="4624258" cy="2382454"/>
           </a:xfrm>
           <a:prstGeom prst="rect">
             <a:avLst/>
@@ -11490,7 +11391,7 @@
         </p:blipFill>
         <p:spPr>
           <a:xfrm>
-            <a:off x="91435" y="3600018"/>
+            <a:off x="6619919" y="1882843"/>
             <a:ext cx="5126951" cy="3187358"/>
           </a:xfrm>
           <a:prstGeom prst="rect">
@@ -11520,38 +11421,8 @@
         </p:blipFill>
         <p:spPr>
           <a:xfrm>
-            <a:off x="8617309" y="1128271"/>
+            <a:off x="1371103" y="4106071"/>
             <a:ext cx="2108932" cy="2488893"/>
-          </a:xfrm>
-          <a:prstGeom prst="rect">
-            <a:avLst/>
-          </a:prstGeom>
-        </p:spPr>
-      </p:pic>
-      <p:pic>
-        <p:nvPicPr>
-          <p:cNvPr id="19" name="Рисунок 18">
-            <a:extLst>
-              <a:ext uri="{FF2B5EF4-FFF2-40B4-BE49-F238E27FC236}">
-                <a16:creationId xmlns:a16="http://schemas.microsoft.com/office/drawing/2014/main" id="{87E49A9F-ADB3-D86F-2DB1-57DB6ED35918}"/>
-              </a:ext>
-            </a:extLst>
-          </p:cNvPr>
-          <p:cNvPicPr>
-            <a:picLocks noChangeAspect="1"/>
-          </p:cNvPicPr>
-          <p:nvPr/>
-        </p:nvPicPr>
-        <p:blipFill>
-          <a:blip r:embed="rId5"/>
-          <a:stretch>
-            <a:fillRect/>
-          </a:stretch>
-        </p:blipFill>
-        <p:spPr>
-          <a:xfrm>
-            <a:off x="7753724" y="3948418"/>
-            <a:ext cx="3610535" cy="2758491"/>
           </a:xfrm>
           <a:prstGeom prst="rect">
             <a:avLst/>
@@ -11572,7 +11443,7 @@
         </p:nvSpPr>
         <p:spPr>
           <a:xfrm>
-            <a:off x="5416017" y="986811"/>
+            <a:off x="3873433" y="3893001"/>
             <a:ext cx="2631496" cy="400110"/>
           </a:xfrm>
           <a:prstGeom prst="rect">
@@ -11615,15 +11486,15 @@
           <p:nvPr/>
         </p:nvPicPr>
         <p:blipFill>
-          <a:blip r:embed="rId6"/>
+          <a:blip r:embed="rId5"/>
           <a:stretch>
             <a:fillRect/>
           </a:stretch>
         </p:blipFill>
         <p:spPr>
           <a:xfrm>
-            <a:off x="5389540" y="1386921"/>
-            <a:ext cx="2269130" cy="2330286"/>
+            <a:off x="3873433" y="4378668"/>
+            <a:ext cx="2269130" cy="1807769"/>
           </a:xfrm>
           <a:prstGeom prst="rect">
             <a:avLst/>
@@ -13232,7 +13103,7 @@
         <p:spPr>
           <a:xfrm>
             <a:off x="1235710" y="2481492"/>
-            <a:ext cx="9720579" cy="4093428"/>
+            <a:ext cx="9720579" cy="3170099"/>
           </a:xfrm>
           <a:prstGeom prst="rect">
             <a:avLst/>
@@ -13418,200 +13289,6 @@
                 <a:cs typeface="Times New Roman" panose="02020603050405020304" pitchFamily="18" charset="0"/>
               </a:rPr>
               <a:t> догляду;</a:t>
-            </a:r>
-          </a:p>
-          <a:p>
-            <a:pPr marL="285750" indent="-285750" algn="just" latinLnBrk="1">
-              <a:buFont typeface="Arial" panose="020B0604020202020204" pitchFamily="34" charset="0"/>
-              <a:buChar char="•"/>
-            </a:pPr>
-            <a:r>
-              <a:rPr lang="ru-RU" sz="2000" dirty="0" err="1">
-                <a:latin typeface="Times New Roman" panose="02020603050405020304" pitchFamily="18" charset="0"/>
-                <a:cs typeface="Times New Roman" panose="02020603050405020304" pitchFamily="18" charset="0"/>
-              </a:rPr>
-              <a:t>Створення</a:t>
-            </a:r>
-            <a:r>
-              <a:rPr lang="ru-RU" sz="2000" dirty="0">
-                <a:latin typeface="Times New Roman" panose="02020603050405020304" pitchFamily="18" charset="0"/>
-                <a:cs typeface="Times New Roman" panose="02020603050405020304" pitchFamily="18" charset="0"/>
-              </a:rPr>
-              <a:t> </a:t>
-            </a:r>
-            <a:r>
-              <a:rPr lang="ru-RU" sz="2000" dirty="0" err="1">
-                <a:latin typeface="Times New Roman" panose="02020603050405020304" pitchFamily="18" charset="0"/>
-                <a:cs typeface="Times New Roman" panose="02020603050405020304" pitchFamily="18" charset="0"/>
-              </a:rPr>
-              <a:t>індивідуальних</a:t>
-            </a:r>
-            <a:r>
-              <a:rPr lang="ru-RU" sz="2000" dirty="0">
-                <a:latin typeface="Times New Roman" panose="02020603050405020304" pitchFamily="18" charset="0"/>
-                <a:cs typeface="Times New Roman" panose="02020603050405020304" pitchFamily="18" charset="0"/>
-              </a:rPr>
-              <a:t> </a:t>
-            </a:r>
-            <a:r>
-              <a:rPr lang="ru-RU" sz="2000" dirty="0" err="1">
-                <a:latin typeface="Times New Roman" panose="02020603050405020304" pitchFamily="18" charset="0"/>
-                <a:cs typeface="Times New Roman" panose="02020603050405020304" pitchFamily="18" charset="0"/>
-              </a:rPr>
-              <a:t>планів</a:t>
-            </a:r>
-            <a:r>
-              <a:rPr lang="ru-RU" sz="2000" dirty="0">
-                <a:latin typeface="Times New Roman" panose="02020603050405020304" pitchFamily="18" charset="0"/>
-                <a:cs typeface="Times New Roman" panose="02020603050405020304" pitchFamily="18" charset="0"/>
-              </a:rPr>
-              <a:t> процедур;</a:t>
-            </a:r>
-          </a:p>
-          <a:p>
-            <a:pPr marL="285750" indent="-285750" algn="just" latinLnBrk="1">
-              <a:buFont typeface="Arial" panose="020B0604020202020204" pitchFamily="34" charset="0"/>
-              <a:buChar char="•"/>
-            </a:pPr>
-            <a:r>
-              <a:rPr lang="ru-RU" sz="2000" dirty="0" err="1">
-                <a:latin typeface="Times New Roman" panose="02020603050405020304" pitchFamily="18" charset="0"/>
-                <a:cs typeface="Times New Roman" panose="02020603050405020304" pitchFamily="18" charset="0"/>
-              </a:rPr>
-              <a:t>Відстеження</a:t>
-            </a:r>
-            <a:r>
-              <a:rPr lang="ru-RU" sz="2000" dirty="0">
-                <a:latin typeface="Times New Roman" panose="02020603050405020304" pitchFamily="18" charset="0"/>
-                <a:cs typeface="Times New Roman" panose="02020603050405020304" pitchFamily="18" charset="0"/>
-              </a:rPr>
-              <a:t> </a:t>
-            </a:r>
-            <a:r>
-              <a:rPr lang="ru-RU" sz="2000" dirty="0" err="1">
-                <a:latin typeface="Times New Roman" panose="02020603050405020304" pitchFamily="18" charset="0"/>
-                <a:cs typeface="Times New Roman" panose="02020603050405020304" pitchFamily="18" charset="0"/>
-              </a:rPr>
-              <a:t>динаміки</a:t>
-            </a:r>
-            <a:r>
-              <a:rPr lang="ru-RU" sz="2000" dirty="0">
-                <a:latin typeface="Times New Roman" panose="02020603050405020304" pitchFamily="18" charset="0"/>
-                <a:cs typeface="Times New Roman" panose="02020603050405020304" pitchFamily="18" charset="0"/>
-              </a:rPr>
-              <a:t> </a:t>
-            </a:r>
-            <a:r>
-              <a:rPr lang="ru-RU" sz="2000" dirty="0" err="1">
-                <a:latin typeface="Times New Roman" panose="02020603050405020304" pitchFamily="18" charset="0"/>
-                <a:cs typeface="Times New Roman" panose="02020603050405020304" pitchFamily="18" charset="0"/>
-              </a:rPr>
-              <a:t>змін</a:t>
-            </a:r>
-            <a:r>
-              <a:rPr lang="ru-RU" sz="2000" dirty="0">
-                <a:latin typeface="Times New Roman" panose="02020603050405020304" pitchFamily="18" charset="0"/>
-                <a:cs typeface="Times New Roman" panose="02020603050405020304" pitchFamily="18" charset="0"/>
-              </a:rPr>
-              <a:t> (фото «до/</a:t>
-            </a:r>
-            <a:r>
-              <a:rPr lang="ru-RU" sz="2000" dirty="0" err="1">
-                <a:latin typeface="Times New Roman" panose="02020603050405020304" pitchFamily="18" charset="0"/>
-                <a:cs typeface="Times New Roman" panose="02020603050405020304" pitchFamily="18" charset="0"/>
-              </a:rPr>
-              <a:t>після</a:t>
-            </a:r>
-            <a:r>
-              <a:rPr lang="ru-RU" sz="2000" dirty="0">
-                <a:latin typeface="Times New Roman" panose="02020603050405020304" pitchFamily="18" charset="0"/>
-                <a:cs typeface="Times New Roman" panose="02020603050405020304" pitchFamily="18" charset="0"/>
-              </a:rPr>
-              <a:t>»),  </a:t>
-            </a:r>
-            <a:r>
-              <a:rPr lang="ru-RU" sz="2000" dirty="0" err="1">
-                <a:latin typeface="Times New Roman" panose="02020603050405020304" pitchFamily="18" charset="0"/>
-                <a:cs typeface="Times New Roman" panose="02020603050405020304" pitchFamily="18" charset="0"/>
-              </a:rPr>
-              <a:t>що</a:t>
-            </a:r>
-            <a:r>
-              <a:rPr lang="ru-RU" sz="2000" dirty="0">
-                <a:latin typeface="Times New Roman" panose="02020603050405020304" pitchFamily="18" charset="0"/>
-                <a:cs typeface="Times New Roman" panose="02020603050405020304" pitchFamily="18" charset="0"/>
-              </a:rPr>
-              <a:t> </a:t>
-            </a:r>
-            <a:r>
-              <a:rPr lang="ru-RU" sz="2000" dirty="0" err="1">
-                <a:latin typeface="Times New Roman" panose="02020603050405020304" pitchFamily="18" charset="0"/>
-                <a:cs typeface="Times New Roman" panose="02020603050405020304" pitchFamily="18" charset="0"/>
-              </a:rPr>
-              <a:t>дозволяє</a:t>
-            </a:r>
-            <a:r>
-              <a:rPr lang="ru-RU" sz="2000" dirty="0">
-                <a:latin typeface="Times New Roman" panose="02020603050405020304" pitchFamily="18" charset="0"/>
-                <a:cs typeface="Times New Roman" panose="02020603050405020304" pitchFamily="18" charset="0"/>
-              </a:rPr>
-              <a:t> </a:t>
-            </a:r>
-            <a:r>
-              <a:rPr lang="ru-RU" sz="2000" dirty="0" err="1">
-                <a:latin typeface="Times New Roman" panose="02020603050405020304" pitchFamily="18" charset="0"/>
-                <a:cs typeface="Times New Roman" panose="02020603050405020304" pitchFamily="18" charset="0"/>
-              </a:rPr>
-              <a:t>об'єктивно</a:t>
-            </a:r>
-            <a:r>
-              <a:rPr lang="ru-RU" sz="2000" dirty="0">
-                <a:latin typeface="Times New Roman" panose="02020603050405020304" pitchFamily="18" charset="0"/>
-                <a:cs typeface="Times New Roman" panose="02020603050405020304" pitchFamily="18" charset="0"/>
-              </a:rPr>
-              <a:t> </a:t>
-            </a:r>
-            <a:r>
-              <a:rPr lang="ru-RU" sz="2000" dirty="0" err="1">
-                <a:latin typeface="Times New Roman" panose="02020603050405020304" pitchFamily="18" charset="0"/>
-                <a:cs typeface="Times New Roman" panose="02020603050405020304" pitchFamily="18" charset="0"/>
-              </a:rPr>
-              <a:t>оцінити</a:t>
-            </a:r>
-            <a:r>
-              <a:rPr lang="ru-RU" sz="2000" dirty="0">
-                <a:latin typeface="Times New Roman" panose="02020603050405020304" pitchFamily="18" charset="0"/>
-                <a:cs typeface="Times New Roman" panose="02020603050405020304" pitchFamily="18" charset="0"/>
-              </a:rPr>
-              <a:t> </a:t>
-            </a:r>
-            <a:r>
-              <a:rPr lang="ru-RU" sz="2000" dirty="0" err="1">
-                <a:latin typeface="Times New Roman" panose="02020603050405020304" pitchFamily="18" charset="0"/>
-                <a:cs typeface="Times New Roman" panose="02020603050405020304" pitchFamily="18" charset="0"/>
-              </a:rPr>
-              <a:t>ефективність</a:t>
-            </a:r>
-            <a:r>
-              <a:rPr lang="ru-RU" sz="2000" dirty="0">
-                <a:latin typeface="Times New Roman" panose="02020603050405020304" pitchFamily="18" charset="0"/>
-                <a:cs typeface="Times New Roman" panose="02020603050405020304" pitchFamily="18" charset="0"/>
-              </a:rPr>
-              <a:t> </a:t>
-            </a:r>
-            <a:r>
-              <a:rPr lang="ru-RU" sz="2000" dirty="0" err="1">
-                <a:latin typeface="Times New Roman" panose="02020603050405020304" pitchFamily="18" charset="0"/>
-                <a:cs typeface="Times New Roman" panose="02020603050405020304" pitchFamily="18" charset="0"/>
-              </a:rPr>
-              <a:t>рекомендованих</a:t>
-            </a:r>
-            <a:r>
-              <a:rPr lang="ru-RU" sz="2000" dirty="0">
-                <a:latin typeface="Times New Roman" panose="02020603050405020304" pitchFamily="18" charset="0"/>
-                <a:cs typeface="Times New Roman" panose="02020603050405020304" pitchFamily="18" charset="0"/>
-              </a:rPr>
-              <a:t> процедур</a:t>
             </a:r>
           </a:p>
           <a:p>
@@ -14196,14 +13873,14 @@
                 <a:latin typeface="Times New Roman" panose="02020603050405020304" pitchFamily="18" charset="0"/>
                 <a:cs typeface="Times New Roman" panose="02020603050405020304" pitchFamily="18" charset="0"/>
               </a:rPr>
-              <a:t>	73%</a:t>
-            </a:r>
-            <a:r>
-              <a:rPr lang="ru-RU" sz="2000" dirty="0">
-                <a:latin typeface="Times New Roman" panose="02020603050405020304" pitchFamily="18" charset="0"/>
-                <a:cs typeface="Times New Roman" panose="02020603050405020304" pitchFamily="18" charset="0"/>
-              </a:rPr>
-              <a:t> </a:t>
+              <a:t>	</a:t>
+            </a:r>
+            <a:r>
+              <a:rPr lang="ru-RU" sz="2000" dirty="0">
+                <a:latin typeface="Times New Roman" panose="02020603050405020304" pitchFamily="18" charset="0"/>
+                <a:cs typeface="Times New Roman" panose="02020603050405020304" pitchFamily="18" charset="0"/>
+              </a:rPr>
+              <a:t>73% </a:t>
             </a:r>
             <a:r>
               <a:rPr lang="ru-RU" sz="2000" dirty="0" err="1">
@@ -14266,14 +13943,14 @@
                 <a:latin typeface="Times New Roman" panose="02020603050405020304" pitchFamily="18" charset="0"/>
                 <a:cs typeface="Times New Roman" panose="02020603050405020304" pitchFamily="18" charset="0"/>
               </a:rPr>
-              <a:t>	81%</a:t>
-            </a:r>
-            <a:r>
-              <a:rPr lang="ru-RU" sz="2000" dirty="0">
-                <a:latin typeface="Times New Roman" panose="02020603050405020304" pitchFamily="18" charset="0"/>
-                <a:cs typeface="Times New Roman" panose="02020603050405020304" pitchFamily="18" charset="0"/>
-              </a:rPr>
-              <a:t> </a:t>
+              <a:t>	</a:t>
+            </a:r>
+            <a:r>
+              <a:rPr lang="ru-RU" sz="2000" dirty="0">
+                <a:latin typeface="Times New Roman" panose="02020603050405020304" pitchFamily="18" charset="0"/>
+                <a:cs typeface="Times New Roman" panose="02020603050405020304" pitchFamily="18" charset="0"/>
+              </a:rPr>
+              <a:t>81% </a:t>
             </a:r>
             <a:r>
               <a:rPr lang="ru-RU" sz="2000" dirty="0" err="1">
@@ -14367,21 +14044,7 @@
                 <a:latin typeface="Times New Roman" panose="02020603050405020304" pitchFamily="18" charset="0"/>
                 <a:cs typeface="Times New Roman" panose="02020603050405020304" pitchFamily="18" charset="0"/>
               </a:rPr>
-              <a:t> </a:t>
-            </a:r>
-            <a:r>
-              <a:rPr lang="ru-RU" sz="2000" b="1" dirty="0">
-                <a:latin typeface="Times New Roman" panose="02020603050405020304" pitchFamily="18" charset="0"/>
-                <a:cs typeface="Times New Roman" panose="02020603050405020304" pitchFamily="18" charset="0"/>
-              </a:rPr>
-              <a:t>12-15%</a:t>
-            </a:r>
-            <a:r>
-              <a:rPr lang="ru-RU" sz="2000" dirty="0">
-                <a:latin typeface="Times New Roman" panose="02020603050405020304" pitchFamily="18" charset="0"/>
-                <a:cs typeface="Times New Roman" panose="02020603050405020304" pitchFamily="18" charset="0"/>
-              </a:rPr>
-              <a:t> </a:t>
+              <a:t> 12-15% </a:t>
             </a:r>
             <a:r>
               <a:rPr lang="ru-RU" sz="2000" dirty="0" err="1">
